--- a/PPTs/Ch5_ARM_Load_Store_Exercises.pptx
+++ b/PPTs/Ch5_ARM_Load_Store_Exercises.pptx
@@ -5,10 +5,10 @@
     <p:sldMasterId id="2147483686" r:id="rId1"/>
   </p:sldMasterIdLst>
   <p:notesMasterIdLst>
-    <p:notesMasterId r:id="rId14"/>
+    <p:notesMasterId r:id="rId15"/>
   </p:notesMasterIdLst>
   <p:handoutMasterIdLst>
-    <p:handoutMasterId r:id="rId15"/>
+    <p:handoutMasterId r:id="rId16"/>
   </p:handoutMasterIdLst>
   <p:sldIdLst>
     <p:sldId id="385" r:id="rId2"/>
@@ -16,13 +16,14 @@
     <p:sldId id="363" r:id="rId4"/>
     <p:sldId id="358" r:id="rId5"/>
     <p:sldId id="417" r:id="rId6"/>
-    <p:sldId id="774" r:id="rId7"/>
-    <p:sldId id="345" r:id="rId8"/>
-    <p:sldId id="369" r:id="rId9"/>
-    <p:sldId id="367" r:id="rId10"/>
-    <p:sldId id="365" r:id="rId11"/>
-    <p:sldId id="801" r:id="rId12"/>
-    <p:sldId id="804" r:id="rId13"/>
+    <p:sldId id="810" r:id="rId7"/>
+    <p:sldId id="774" r:id="rId8"/>
+    <p:sldId id="345" r:id="rId9"/>
+    <p:sldId id="369" r:id="rId10"/>
+    <p:sldId id="367" r:id="rId11"/>
+    <p:sldId id="365" r:id="rId12"/>
+    <p:sldId id="801" r:id="rId13"/>
+    <p:sldId id="804" r:id="rId14"/>
   </p:sldIdLst>
   <p:sldSz cx="9144000" cy="6858000" type="screen4x3"/>
   <p:notesSz cx="9601200" cy="7315200"/>
@@ -207,7 +208,7 @@
 <file path=ppt/revisionInfo.xml><?xml version="1.0" encoding="utf-8"?>
 <p1510:revInfo xmlns:a="http://schemas.openxmlformats.org/drawingml/2006/main" xmlns:r="http://schemas.openxmlformats.org/officeDocument/2006/relationships" xmlns:p1510="http://schemas.microsoft.com/office/powerpoint/2015/10/main">
   <p1510:revLst>
-    <p1510:client id="{93E05C3B-B728-42D2-90B4-B4A194916ABF}" v="2" dt="2025-09-25T21:59:20.332"/>
+    <p1510:client id="{93E05C3B-B728-42D2-90B4-B4A194916ABF}" v="3" dt="2025-10-08T02:00:48.824"/>
   </p1510:revLst>
 </p1510:revInfo>
 </file>
@@ -217,7 +218,7 @@
   <pc:docChgLst>
     <pc:chgData name="Zonghua Gu" userId="9a7e1853e1951ef5" providerId="LiveId" clId="{CF1FAA12-072C-4ED5-BA76-0FFFAEFDB88A}"/>
     <pc:docChg chg="undo custSel addSld delSld modSld sldOrd">
-      <pc:chgData name="Zonghua Gu" userId="9a7e1853e1951ef5" providerId="LiveId" clId="{CF1FAA12-072C-4ED5-BA76-0FFFAEFDB88A}" dt="2025-09-25T21:59:22.977" v="626" actId="47"/>
+      <pc:chgData name="Zonghua Gu" userId="9a7e1853e1951ef5" providerId="LiveId" clId="{CF1FAA12-072C-4ED5-BA76-0FFFAEFDB88A}" dt="2025-10-08T02:00:59.295" v="631" actId="14100"/>
       <pc:docMkLst>
         <pc:docMk/>
       </pc:docMkLst>
@@ -1189,6 +1190,21 @@
           <pc:sldMk cId="2882502133" sldId="804"/>
         </pc:sldMkLst>
       </pc:sldChg>
+      <pc:sldChg chg="modSp add mod">
+        <pc:chgData name="Zonghua Gu" userId="9a7e1853e1951ef5" providerId="LiveId" clId="{CF1FAA12-072C-4ED5-BA76-0FFFAEFDB88A}" dt="2025-10-08T02:00:59.295" v="631" actId="14100"/>
+        <pc:sldMkLst>
+          <pc:docMk/>
+          <pc:sldMk cId="2952063245" sldId="810"/>
+        </pc:sldMkLst>
+        <pc:spChg chg="mod">
+          <ac:chgData name="Zonghua Gu" userId="9a7e1853e1951ef5" providerId="LiveId" clId="{CF1FAA12-072C-4ED5-BA76-0FFFAEFDB88A}" dt="2025-10-08T02:00:59.295" v="631" actId="14100"/>
+          <ac:spMkLst>
+            <pc:docMk/>
+            <pc:sldMk cId="2952063245" sldId="810"/>
+            <ac:spMk id="4" creationId="{2E30BEB6-14A6-7DA1-64FA-D0E05B682530}"/>
+          </ac:spMkLst>
+        </pc:spChg>
+      </pc:sldChg>
     </pc:docChg>
   </pc:docChgLst>
 </pc:chgInfo>
@@ -2093,7 +2109,7 @@
             <a:fld id="{EF97FDFF-7B9F-7D4D-BFC0-AAD1F3D3D3CB}" type="slidenum">
               <a:rPr lang="en-US" smtClean="0"/>
               <a:pPr/>
-              <a:t>6</a:t>
+              <a:t>7</a:t>
             </a:fld>
             <a:endParaRPr lang="en-US" dirty="0"/>
           </a:p>
@@ -2756,7 +2772,7 @@
             <a:fld id="{BA00D299-558C-468E-A8B3-0F5C3BFA45F9}" type="datetime1">
               <a:rPr lang="en-US" smtClean="0"/>
               <a:pPr/>
-              <a:t>9/25/2025</a:t>
+              <a:t>10/7/2025</a:t>
             </a:fld>
             <a:endParaRPr lang="en-US"/>
           </a:p>
@@ -3120,7 +3136,7 @@
             <a:fld id="{8B22D175-8905-42BE-8088-EB39001CF9E2}" type="datetime1">
               <a:rPr lang="en-US" smtClean="0"/>
               <a:pPr/>
-              <a:t>9/25/2025</a:t>
+              <a:t>10/7/2025</a:t>
             </a:fld>
             <a:endParaRPr lang="en-US"/>
           </a:p>
@@ -3299,7 +3315,7 @@
             <a:fld id="{E62AA8DD-1B66-47DA-8A31-5DCDA0DEF224}" type="datetime1">
               <a:rPr lang="en-US" smtClean="0"/>
               <a:pPr/>
-              <a:t>9/25/2025</a:t>
+              <a:t>10/7/2025</a:t>
             </a:fld>
             <a:endParaRPr lang="en-US"/>
           </a:p>
@@ -3538,7 +3554,7 @@
             <a:fld id="{D3A8BFB9-75E0-4A72-9D54-3C687B559A4D}" type="datetime1">
               <a:rPr lang="en-US" smtClean="0"/>
               <a:pPr/>
-              <a:t>9/25/2025</a:t>
+              <a:t>10/7/2025</a:t>
             </a:fld>
             <a:endParaRPr lang="en-US"/>
           </a:p>
@@ -3811,7 +3827,7 @@
             <a:fld id="{E470CD76-7AB7-4744-8178-DC5367B833CD}" type="datetime1">
               <a:rPr lang="en-US" smtClean="0"/>
               <a:pPr/>
-              <a:t>9/25/2025</a:t>
+              <a:t>10/7/2025</a:t>
             </a:fld>
             <a:endParaRPr lang="en-US"/>
           </a:p>
@@ -4035,7 +4051,7 @@
             <a:fld id="{A5E3FC63-82A8-4ACC-B2CB-6D46E8B59216}" type="datetime1">
               <a:rPr lang="en-US" smtClean="0"/>
               <a:pPr/>
-              <a:t>9/25/2025</a:t>
+              <a:t>10/7/2025</a:t>
             </a:fld>
             <a:endParaRPr lang="en-US"/>
           </a:p>
@@ -4391,7 +4407,7 @@
             <a:fld id="{D3A9B8A6-94F4-4AF6-98DE-0FFC617E1C31}" type="datetime1">
               <a:rPr lang="en-US" smtClean="0"/>
               <a:pPr/>
-              <a:t>9/25/2025</a:t>
+              <a:t>10/7/2025</a:t>
             </a:fld>
             <a:endParaRPr lang="en-US"/>
           </a:p>
@@ -4627,7 +4643,7 @@
             <a:fld id="{573CF4FC-8D0E-4C14-A02E-A429C4519FEF}" type="datetime1">
               <a:rPr lang="en-US" smtClean="0"/>
               <a:pPr/>
-              <a:t>9/25/2025</a:t>
+              <a:t>10/7/2025</a:t>
             </a:fld>
             <a:endParaRPr lang="en-US"/>
           </a:p>
@@ -4772,7 +4788,7 @@
             <a:fld id="{06BDC487-A287-485A-B215-4EC98DD3E443}" type="datetime1">
               <a:rPr lang="en-US" smtClean="0"/>
               <a:pPr/>
-              <a:t>9/25/2025</a:t>
+              <a:t>10/7/2025</a:t>
             </a:fld>
             <a:endParaRPr lang="en-US"/>
           </a:p>
@@ -5053,7 +5069,7 @@
             <a:fld id="{46049AC6-4AC4-4D5F-9A1B-0E1C0FF133F9}" type="datetime1">
               <a:rPr lang="en-US" smtClean="0"/>
               <a:pPr/>
-              <a:t>9/25/2025</a:t>
+              <a:t>10/7/2025</a:t>
             </a:fld>
             <a:endParaRPr lang="en-US"/>
           </a:p>
@@ -5464,7 +5480,7 @@
             <a:fld id="{83AF4EF9-9AC8-4842-AFC3-C27337CCABE8}" type="datetime1">
               <a:rPr lang="en-US" smtClean="0"/>
               <a:pPr/>
-              <a:t>9/25/2025</a:t>
+              <a:t>10/7/2025</a:t>
             </a:fld>
             <a:endParaRPr lang="en-US"/>
           </a:p>
@@ -5805,7 +5821,7 @@
             <a:fld id="{8DF0DD18-6EB7-49F7-A70C-A012EDB48BDB}" type="datetime1">
               <a:rPr lang="en-US" smtClean="0"/>
               <a:pPr/>
-              <a:t>9/25/2025</a:t>
+              <a:t>10/7/2025</a:t>
             </a:fld>
             <a:endParaRPr lang="en-US"/>
           </a:p>
@@ -6849,6 +6865,545 @@
       </p:grpSpPr>
       <p:sp>
         <p:nvSpPr>
+          <p:cNvPr id="3" name="Slide Number Placeholder 2"/>
+          <p:cNvSpPr>
+            <a:spLocks noGrp="1"/>
+          </p:cNvSpPr>
+          <p:nvPr>
+            <p:ph type="sldNum" sz="quarter" idx="12"/>
+          </p:nvPr>
+        </p:nvSpPr>
+        <p:spPr/>
+        <p:txBody>
+          <a:bodyPr/>
+          <a:lstStyle/>
+          <a:p>
+            <a:fld id="{3CC63E4C-4642-794D-A2FD-70F6B81535F5}" type="slidenum">
+              <a:rPr lang="en-US" smtClean="0"/>
+              <a:pPr/>
+              <a:t>10</a:t>
+            </a:fld>
+            <a:endParaRPr lang="en-US" dirty="0"/>
+          </a:p>
+        </p:txBody>
+      </p:sp>
+      <p:sp>
+        <p:nvSpPr>
+          <p:cNvPr id="4" name="Rectangle 3"/>
+          <p:cNvSpPr txBox="1">
+            <a:spLocks noChangeArrowheads="1"/>
+          </p:cNvSpPr>
+          <p:nvPr/>
+        </p:nvSpPr>
+        <p:spPr>
+          <a:xfrm>
+            <a:off x="267393" y="1447800"/>
+            <a:ext cx="8182841" cy="3581400"/>
+          </a:xfrm>
+          <a:prstGeom prst="rect">
+            <a:avLst/>
+          </a:prstGeom>
+        </p:spPr>
+        <p:txBody>
+          <a:bodyPr/>
+          <a:lstStyle>
+            <a:lvl1pPr marL="342900" indent="-342900" algn="l" defTabSz="457200" rtl="0" eaLnBrk="1" latinLnBrk="0" hangingPunct="1">
+              <a:spcBef>
+                <a:spcPct val="20000"/>
+              </a:spcBef>
+              <a:buFont typeface="Arial"/>
+              <a:buChar char="•"/>
+              <a:defRPr sz="3200" kern="1200">
+                <a:solidFill>
+                  <a:schemeClr val="tx1"/>
+                </a:solidFill>
+                <a:latin typeface="+mn-lt"/>
+                <a:ea typeface="+mn-ea"/>
+                <a:cs typeface="+mn-cs"/>
+              </a:defRPr>
+            </a:lvl1pPr>
+            <a:lvl2pPr marL="742950" indent="-285750" algn="l" defTabSz="457200" rtl="0" eaLnBrk="1" latinLnBrk="0" hangingPunct="1">
+              <a:spcBef>
+                <a:spcPct val="20000"/>
+              </a:spcBef>
+              <a:buFont typeface="Arial"/>
+              <a:buChar char="–"/>
+              <a:defRPr sz="2800" kern="1200">
+                <a:solidFill>
+                  <a:schemeClr val="tx1"/>
+                </a:solidFill>
+                <a:latin typeface="+mn-lt"/>
+                <a:ea typeface="+mn-ea"/>
+                <a:cs typeface="+mn-cs"/>
+              </a:defRPr>
+            </a:lvl2pPr>
+            <a:lvl3pPr marL="1143000" indent="-228600" algn="l" defTabSz="457200" rtl="0" eaLnBrk="1" latinLnBrk="0" hangingPunct="1">
+              <a:spcBef>
+                <a:spcPct val="20000"/>
+              </a:spcBef>
+              <a:buFont typeface="Arial"/>
+              <a:buChar char="•"/>
+              <a:defRPr sz="2400" kern="1200">
+                <a:solidFill>
+                  <a:schemeClr val="tx1"/>
+                </a:solidFill>
+                <a:latin typeface="+mn-lt"/>
+                <a:ea typeface="+mn-ea"/>
+                <a:cs typeface="+mn-cs"/>
+              </a:defRPr>
+            </a:lvl3pPr>
+            <a:lvl4pPr marL="1600200" indent="-228600" algn="l" defTabSz="457200" rtl="0" eaLnBrk="1" latinLnBrk="0" hangingPunct="1">
+              <a:spcBef>
+                <a:spcPct val="20000"/>
+              </a:spcBef>
+              <a:buFont typeface="Arial"/>
+              <a:buChar char="–"/>
+              <a:defRPr sz="2000" kern="1200">
+                <a:solidFill>
+                  <a:schemeClr val="tx1"/>
+                </a:solidFill>
+                <a:latin typeface="+mn-lt"/>
+                <a:ea typeface="+mn-ea"/>
+                <a:cs typeface="+mn-cs"/>
+              </a:defRPr>
+            </a:lvl4pPr>
+            <a:lvl5pPr marL="2057400" indent="-228600" algn="l" defTabSz="457200" rtl="0" eaLnBrk="1" latinLnBrk="0" hangingPunct="1">
+              <a:spcBef>
+                <a:spcPct val="20000"/>
+              </a:spcBef>
+              <a:buFont typeface="Arial"/>
+              <a:buChar char="»"/>
+              <a:defRPr sz="2000" kern="1200">
+                <a:solidFill>
+                  <a:schemeClr val="tx1"/>
+                </a:solidFill>
+                <a:latin typeface="+mn-lt"/>
+                <a:ea typeface="+mn-ea"/>
+                <a:cs typeface="+mn-cs"/>
+              </a:defRPr>
+            </a:lvl5pPr>
+            <a:lvl6pPr marL="2514600" indent="-228600" algn="l" defTabSz="457200" rtl="0" eaLnBrk="1" latinLnBrk="0" hangingPunct="1">
+              <a:spcBef>
+                <a:spcPct val="20000"/>
+              </a:spcBef>
+              <a:buFont typeface="Arial"/>
+              <a:buChar char="•"/>
+              <a:defRPr sz="2000" kern="1200">
+                <a:solidFill>
+                  <a:schemeClr val="tx1"/>
+                </a:solidFill>
+                <a:latin typeface="+mn-lt"/>
+                <a:ea typeface="+mn-ea"/>
+                <a:cs typeface="+mn-cs"/>
+              </a:defRPr>
+            </a:lvl6pPr>
+            <a:lvl7pPr marL="2971800" indent="-228600" algn="l" defTabSz="457200" rtl="0" eaLnBrk="1" latinLnBrk="0" hangingPunct="1">
+              <a:spcBef>
+                <a:spcPct val="20000"/>
+              </a:spcBef>
+              <a:buFont typeface="Arial"/>
+              <a:buChar char="•"/>
+              <a:defRPr sz="2000" kern="1200">
+                <a:solidFill>
+                  <a:schemeClr val="tx1"/>
+                </a:solidFill>
+                <a:latin typeface="+mn-lt"/>
+                <a:ea typeface="+mn-ea"/>
+                <a:cs typeface="+mn-cs"/>
+              </a:defRPr>
+            </a:lvl7pPr>
+            <a:lvl8pPr marL="3429000" indent="-228600" algn="l" defTabSz="457200" rtl="0" eaLnBrk="1" latinLnBrk="0" hangingPunct="1">
+              <a:spcBef>
+                <a:spcPct val="20000"/>
+              </a:spcBef>
+              <a:buFont typeface="Arial"/>
+              <a:buChar char="•"/>
+              <a:defRPr sz="2000" kern="1200">
+                <a:solidFill>
+                  <a:schemeClr val="tx1"/>
+                </a:solidFill>
+                <a:latin typeface="+mn-lt"/>
+                <a:ea typeface="+mn-ea"/>
+                <a:cs typeface="+mn-cs"/>
+              </a:defRPr>
+            </a:lvl8pPr>
+            <a:lvl9pPr marL="3886200" indent="-228600" algn="l" defTabSz="457200" rtl="0" eaLnBrk="1" latinLnBrk="0" hangingPunct="1">
+              <a:spcBef>
+                <a:spcPct val="20000"/>
+              </a:spcBef>
+              <a:buFont typeface="Arial"/>
+              <a:buChar char="•"/>
+              <a:defRPr sz="2000" kern="1200">
+                <a:solidFill>
+                  <a:schemeClr val="tx1"/>
+                </a:solidFill>
+                <a:latin typeface="+mn-lt"/>
+                <a:ea typeface="+mn-ea"/>
+                <a:cs typeface="+mn-cs"/>
+              </a:defRPr>
+            </a:lvl9pPr>
+          </a:lstStyle>
+          <a:p>
+            <a:pPr marL="257175" indent="-257175" defTabSz="342900"/>
+            <a:r>
+              <a:rPr lang="en-US" sz="2400" b="0" dirty="0">
+                <a:solidFill>
+                  <a:prstClr val="black"/>
+                </a:solidFill>
+              </a:rPr>
+              <a:t>Q:  Assume a byte-addressable memory with a data bus that is 32 bits (4 bytes) wide. </a:t>
+            </a:r>
+          </a:p>
+          <a:p>
+            <a:pPr marL="657225" lvl="1" indent="-257175" defTabSz="342900"/>
+            <a:r>
+              <a:rPr lang="en-US" altLang="zh-CN" sz="2000" b="0" dirty="0">
+                <a:solidFill>
+                  <a:prstClr val="black"/>
+                </a:solidFill>
+              </a:rPr>
+              <a:t>It takes ____ memory cycle(s) to read a Byte from memory</a:t>
+            </a:r>
+          </a:p>
+          <a:p>
+            <a:pPr marL="657225" lvl="1" indent="-257175" defTabSz="342900"/>
+            <a:r>
+              <a:rPr lang="en-US" altLang="zh-CN" sz="2000" b="0" dirty="0">
+                <a:solidFill>
+                  <a:prstClr val="black"/>
+                </a:solidFill>
+              </a:rPr>
+              <a:t>It takes ____ memory cycle(s) to read a half-word from memory</a:t>
+            </a:r>
+          </a:p>
+          <a:p>
+            <a:pPr marL="657225" lvl="1" indent="-257175" defTabSz="342900"/>
+            <a:r>
+              <a:rPr lang="en-US" altLang="zh-CN" sz="2000" b="0" dirty="0">
+                <a:solidFill>
+                  <a:prstClr val="black"/>
+                </a:solidFill>
+              </a:rPr>
+              <a:t>It takes ____ memory cycle(s) to read a word from memory</a:t>
+            </a:r>
+          </a:p>
+          <a:p>
+            <a:pPr marL="657225" lvl="1" indent="-257175" defTabSz="342900"/>
+            <a:r>
+              <a:rPr lang="en-US" altLang="zh-CN" sz="2000" b="0" dirty="0">
+                <a:solidFill>
+                  <a:prstClr val="black"/>
+                </a:solidFill>
+              </a:rPr>
+              <a:t>It takes ____ memory cycle(s) to read a double word from memory</a:t>
+            </a:r>
+            <a:endParaRPr lang="en-US" sz="2400" b="0" dirty="0">
+              <a:solidFill>
+                <a:prstClr val="black"/>
+              </a:solidFill>
+              <a:latin typeface="Calibri"/>
+            </a:endParaRPr>
+          </a:p>
+        </p:txBody>
+      </p:sp>
+      <p:pic>
+        <p:nvPicPr>
+          <p:cNvPr id="5" name="Picture 4"/>
+          <p:cNvPicPr>
+            <a:picLocks noChangeAspect="1"/>
+          </p:cNvPicPr>
+          <p:nvPr/>
+        </p:nvPicPr>
+        <p:blipFill>
+          <a:blip r:embed="rId2"/>
+          <a:stretch>
+            <a:fillRect/>
+          </a:stretch>
+        </p:blipFill>
+        <p:spPr>
+          <a:xfrm>
+            <a:off x="5029200" y="-6804"/>
+            <a:ext cx="4067187" cy="1560642"/>
+          </a:xfrm>
+          <a:prstGeom prst="rect">
+            <a:avLst/>
+          </a:prstGeom>
+        </p:spPr>
+      </p:pic>
+      <p:sp>
+        <p:nvSpPr>
+          <p:cNvPr id="9" name="Title 1">
+            <a:extLst>
+              <a:ext uri="{FF2B5EF4-FFF2-40B4-BE49-F238E27FC236}">
+                <a16:creationId xmlns:a16="http://schemas.microsoft.com/office/drawing/2014/main" id="{78DA596E-85CA-C0C6-85A8-74A98C3DFFDB}"/>
+              </a:ext>
+            </a:extLst>
+          </p:cNvPr>
+          <p:cNvSpPr>
+            <a:spLocks noGrp="1"/>
+          </p:cNvSpPr>
+          <p:nvPr>
+            <p:ph type="title"/>
+          </p:nvPr>
+        </p:nvSpPr>
+        <p:spPr>
+          <a:xfrm>
+            <a:off x="0" y="22225"/>
+            <a:ext cx="8229600" cy="1143000"/>
+          </a:xfrm>
+        </p:spPr>
+        <p:txBody>
+          <a:bodyPr/>
+          <a:lstStyle/>
+          <a:p>
+            <a:r>
+              <a:rPr lang="en-US" dirty="0"/>
+              <a:t>Answer: Memory Cycles</a:t>
+            </a:r>
+          </a:p>
+        </p:txBody>
+      </p:sp>
+    </p:spTree>
+    <p:extLst>
+      <p:ext uri="{BB962C8B-B14F-4D97-AF65-F5344CB8AC3E}">
+        <p14:creationId xmlns:p14="http://schemas.microsoft.com/office/powerpoint/2010/main" val="1910717593"/>
+      </p:ext>
+    </p:extLst>
+  </p:cSld>
+  <p:clrMapOvr>
+    <a:masterClrMapping/>
+  </p:clrMapOvr>
+  <p:transition>
+    <p:pull dir="ru"/>
+  </p:transition>
+  <p:timing>
+    <p:tnLst>
+      <p:par>
+        <p:cTn id="1" dur="indefinite" restart="never" nodeType="tmRoot">
+          <p:childTnLst>
+            <p:seq concurrent="1" nextAc="seek">
+              <p:cTn id="2" dur="indefinite" nodeType="mainSeq">
+                <p:childTnLst>
+                  <p:par>
+                    <p:cTn id="3" fill="hold">
+                      <p:stCondLst>
+                        <p:cond delay="indefinite"/>
+                      </p:stCondLst>
+                      <p:childTnLst>
+                        <p:par>
+                          <p:cTn id="4" fill="hold">
+                            <p:stCondLst>
+                              <p:cond delay="0"/>
+                            </p:stCondLst>
+                            <p:childTnLst>
+                              <p:par>
+                                <p:cTn id="5" presetID="1" presetClass="entr" presetSubtype="0" fill="hold" grpId="0" nodeType="clickEffect">
+                                  <p:stCondLst>
+                                    <p:cond delay="0"/>
+                                  </p:stCondLst>
+                                  <p:childTnLst>
+                                    <p:set>
+                                      <p:cBhvr>
+                                        <p:cTn id="6" dur="1" fill="hold">
+                                          <p:stCondLst>
+                                            <p:cond delay="0"/>
+                                          </p:stCondLst>
+                                        </p:cTn>
+                                        <p:tgtEl>
+                                          <p:spTgt spid="4">
+                                            <p:txEl>
+                                              <p:pRg st="0" end="0"/>
+                                            </p:txEl>
+                                          </p:spTgt>
+                                        </p:tgtEl>
+                                        <p:attrNameLst>
+                                          <p:attrName>style.visibility</p:attrName>
+                                        </p:attrNameLst>
+                                      </p:cBhvr>
+                                      <p:to>
+                                        <p:strVal val="visible"/>
+                                      </p:to>
+                                    </p:set>
+                                  </p:childTnLst>
+                                </p:cTn>
+                              </p:par>
+                              <p:par>
+                                <p:cTn id="7" presetID="1" presetClass="entr" presetSubtype="0" fill="hold" grpId="0" nodeType="withEffect">
+                                  <p:stCondLst>
+                                    <p:cond delay="0"/>
+                                  </p:stCondLst>
+                                  <p:childTnLst>
+                                    <p:set>
+                                      <p:cBhvr>
+                                        <p:cTn id="8" dur="1" fill="hold">
+                                          <p:stCondLst>
+                                            <p:cond delay="0"/>
+                                          </p:stCondLst>
+                                        </p:cTn>
+                                        <p:tgtEl>
+                                          <p:spTgt spid="4">
+                                            <p:txEl>
+                                              <p:pRg st="1" end="1"/>
+                                            </p:txEl>
+                                          </p:spTgt>
+                                        </p:tgtEl>
+                                        <p:attrNameLst>
+                                          <p:attrName>style.visibility</p:attrName>
+                                        </p:attrNameLst>
+                                      </p:cBhvr>
+                                      <p:to>
+                                        <p:strVal val="visible"/>
+                                      </p:to>
+                                    </p:set>
+                                  </p:childTnLst>
+                                </p:cTn>
+                              </p:par>
+                              <p:par>
+                                <p:cTn id="9" presetID="1" presetClass="entr" presetSubtype="0" fill="hold" grpId="0" nodeType="withEffect">
+                                  <p:stCondLst>
+                                    <p:cond delay="0"/>
+                                  </p:stCondLst>
+                                  <p:childTnLst>
+                                    <p:set>
+                                      <p:cBhvr>
+                                        <p:cTn id="10" dur="1" fill="hold">
+                                          <p:stCondLst>
+                                            <p:cond delay="0"/>
+                                          </p:stCondLst>
+                                        </p:cTn>
+                                        <p:tgtEl>
+                                          <p:spTgt spid="4">
+                                            <p:txEl>
+                                              <p:pRg st="2" end="2"/>
+                                            </p:txEl>
+                                          </p:spTgt>
+                                        </p:tgtEl>
+                                        <p:attrNameLst>
+                                          <p:attrName>style.visibility</p:attrName>
+                                        </p:attrNameLst>
+                                      </p:cBhvr>
+                                      <p:to>
+                                        <p:strVal val="visible"/>
+                                      </p:to>
+                                    </p:set>
+                                  </p:childTnLst>
+                                </p:cTn>
+                              </p:par>
+                              <p:par>
+                                <p:cTn id="11" presetID="1" presetClass="entr" presetSubtype="0" fill="hold" grpId="0" nodeType="withEffect">
+                                  <p:stCondLst>
+                                    <p:cond delay="0"/>
+                                  </p:stCondLst>
+                                  <p:childTnLst>
+                                    <p:set>
+                                      <p:cBhvr>
+                                        <p:cTn id="12" dur="1" fill="hold">
+                                          <p:stCondLst>
+                                            <p:cond delay="0"/>
+                                          </p:stCondLst>
+                                        </p:cTn>
+                                        <p:tgtEl>
+                                          <p:spTgt spid="4">
+                                            <p:txEl>
+                                              <p:pRg st="3" end="3"/>
+                                            </p:txEl>
+                                          </p:spTgt>
+                                        </p:tgtEl>
+                                        <p:attrNameLst>
+                                          <p:attrName>style.visibility</p:attrName>
+                                        </p:attrNameLst>
+                                      </p:cBhvr>
+                                      <p:to>
+                                        <p:strVal val="visible"/>
+                                      </p:to>
+                                    </p:set>
+                                  </p:childTnLst>
+                                </p:cTn>
+                              </p:par>
+                              <p:par>
+                                <p:cTn id="13" presetID="1" presetClass="entr" presetSubtype="0" fill="hold" grpId="0" nodeType="withEffect">
+                                  <p:stCondLst>
+                                    <p:cond delay="0"/>
+                                  </p:stCondLst>
+                                  <p:childTnLst>
+                                    <p:set>
+                                      <p:cBhvr>
+                                        <p:cTn id="14" dur="1" fill="hold">
+                                          <p:stCondLst>
+                                            <p:cond delay="0"/>
+                                          </p:stCondLst>
+                                        </p:cTn>
+                                        <p:tgtEl>
+                                          <p:spTgt spid="4">
+                                            <p:txEl>
+                                              <p:pRg st="4" end="4"/>
+                                            </p:txEl>
+                                          </p:spTgt>
+                                        </p:tgtEl>
+                                        <p:attrNameLst>
+                                          <p:attrName>style.visibility</p:attrName>
+                                        </p:attrNameLst>
+                                      </p:cBhvr>
+                                      <p:to>
+                                        <p:strVal val="visible"/>
+                                      </p:to>
+                                    </p:set>
+                                  </p:childTnLst>
+                                </p:cTn>
+                              </p:par>
+                            </p:childTnLst>
+                          </p:cTn>
+                        </p:par>
+                      </p:childTnLst>
+                    </p:cTn>
+                  </p:par>
+                </p:childTnLst>
+              </p:cTn>
+              <p:prevCondLst>
+                <p:cond evt="onPrev" delay="0">
+                  <p:tgtEl>
+                    <p:sldTgt/>
+                  </p:tgtEl>
+                </p:cond>
+              </p:prevCondLst>
+              <p:nextCondLst>
+                <p:cond evt="onNext" delay="0">
+                  <p:tgtEl>
+                    <p:sldTgt/>
+                  </p:tgtEl>
+                </p:cond>
+              </p:nextCondLst>
+            </p:seq>
+          </p:childTnLst>
+        </p:cTn>
+      </p:par>
+    </p:tnLst>
+    <p:bldLst>
+      <p:bldP spid="4" grpId="0" build="p"/>
+    </p:bldLst>
+  </p:timing>
+</p:sld>
+</file>
+
+<file path=ppt/slides/slide11.xml><?xml version="1.0" encoding="utf-8"?>
+<p:sld xmlns:a="http://schemas.openxmlformats.org/drawingml/2006/main" xmlns:r="http://schemas.openxmlformats.org/officeDocument/2006/relationships" xmlns:p="http://schemas.openxmlformats.org/presentationml/2006/main">
+  <p:cSld>
+    <p:spTree>
+      <p:nvGrpSpPr>
+        <p:cNvPr id="1" name=""/>
+        <p:cNvGrpSpPr/>
+        <p:nvPr/>
+      </p:nvGrpSpPr>
+      <p:grpSpPr>
+        <a:xfrm>
+          <a:off x="0" y="0"/>
+          <a:ext cx="0" cy="0"/>
+          <a:chOff x="0" y="0"/>
+          <a:chExt cx="0" cy="0"/>
+        </a:xfrm>
+      </p:grpSpPr>
+      <p:sp>
+        <p:nvSpPr>
           <p:cNvPr id="2" name="Title 1"/>
           <p:cNvSpPr>
             <a:spLocks noGrp="1"/>
@@ -6887,7 +7442,7 @@
             <a:fld id="{3CC63E4C-4642-794D-A2FD-70F6B81535F5}" type="slidenum">
               <a:rPr lang="en-US" smtClean="0"/>
               <a:pPr/>
-              <a:t>10</a:t>
+              <a:t>11</a:t>
             </a:fld>
             <a:endParaRPr lang="en-US" dirty="0"/>
           </a:p>
@@ -7363,7 +7918,7 @@
 </p:sld>
 </file>
 
-<file path=ppt/slides/slide11.xml><?xml version="1.0" encoding="utf-8"?>
+<file path=ppt/slides/slide12.xml><?xml version="1.0" encoding="utf-8"?>
 <p:sld xmlns:a="http://schemas.openxmlformats.org/drawingml/2006/main" xmlns:r="http://schemas.openxmlformats.org/officeDocument/2006/relationships" xmlns:p="http://schemas.openxmlformats.org/presentationml/2006/main">
   <p:cSld>
     <p:spTree>
@@ -7438,7 +7993,7 @@
             <a:fld id="{AEE14D4A-FE32-40AF-B06D-E9622816B101}" type="slidenum">
               <a:rPr lang="en-US" smtClean="0"/>
               <a:pPr/>
-              <a:t>11</a:t>
+              <a:t>12</a:t>
             </a:fld>
             <a:endParaRPr lang="en-US"/>
           </a:p>
@@ -8185,7 +8740,7 @@
 </p:sld>
 </file>
 
-<file path=ppt/slides/slide12.xml><?xml version="1.0" encoding="utf-8"?>
+<file path=ppt/slides/slide13.xml><?xml version="1.0" encoding="utf-8"?>
 <p:sld xmlns:a="http://schemas.openxmlformats.org/drawingml/2006/main" xmlns:r="http://schemas.openxmlformats.org/officeDocument/2006/relationships" xmlns:p="http://schemas.openxmlformats.org/presentationml/2006/main">
   <p:cSld>
     <p:spTree>
@@ -8260,7 +8815,7 @@
             <a:fld id="{AEE14D4A-FE32-40AF-B06D-E9622816B101}" type="slidenum">
               <a:rPr lang="en-US" smtClean="0"/>
               <a:pPr/>
-              <a:t>12</a:t>
+              <a:t>13</a:t>
             </a:fld>
             <a:endParaRPr lang="en-US"/>
           </a:p>
@@ -16507,6 +17062,615 @@
   <p:cSld>
     <p:spTree>
       <p:nvGrpSpPr>
+        <p:cNvPr id="1" name="">
+          <a:extLst>
+            <a:ext uri="{FF2B5EF4-FFF2-40B4-BE49-F238E27FC236}">
+              <a16:creationId xmlns:a16="http://schemas.microsoft.com/office/drawing/2014/main" id="{6FDD13A2-283C-C569-EF1A-CBC7504FEDDE}"/>
+            </a:ext>
+          </a:extLst>
+        </p:cNvPr>
+        <p:cNvGrpSpPr/>
+        <p:nvPr/>
+      </p:nvGrpSpPr>
+      <p:grpSpPr>
+        <a:xfrm>
+          <a:off x="0" y="0"/>
+          <a:ext cx="0" cy="0"/>
+          <a:chOff x="0" y="0"/>
+          <a:chExt cx="0" cy="0"/>
+        </a:xfrm>
+      </p:grpSpPr>
+      <p:sp>
+        <p:nvSpPr>
+          <p:cNvPr id="2" name="Title 1">
+            <a:extLst>
+              <a:ext uri="{FF2B5EF4-FFF2-40B4-BE49-F238E27FC236}">
+                <a16:creationId xmlns:a16="http://schemas.microsoft.com/office/drawing/2014/main" id="{BED84595-D472-6F68-DE47-3C22C5AAF578}"/>
+              </a:ext>
+            </a:extLst>
+          </p:cNvPr>
+          <p:cNvSpPr>
+            <a:spLocks noGrp="1"/>
+          </p:cNvSpPr>
+          <p:nvPr>
+            <p:ph type="title"/>
+          </p:nvPr>
+        </p:nvSpPr>
+        <p:spPr/>
+        <p:txBody>
+          <a:bodyPr/>
+          <a:lstStyle/>
+          <a:p>
+            <a:r>
+              <a:rPr lang="en-US" dirty="0"/>
+              <a:t>Endianness</a:t>
+            </a:r>
+          </a:p>
+        </p:txBody>
+      </p:sp>
+      <p:sp>
+        <p:nvSpPr>
+          <p:cNvPr id="3" name="Slide Number Placeholder 2">
+            <a:extLst>
+              <a:ext uri="{FF2B5EF4-FFF2-40B4-BE49-F238E27FC236}">
+                <a16:creationId xmlns:a16="http://schemas.microsoft.com/office/drawing/2014/main" id="{13A5959D-8205-525D-CB04-4F53DED6B8D9}"/>
+              </a:ext>
+            </a:extLst>
+          </p:cNvPr>
+          <p:cNvSpPr>
+            <a:spLocks noGrp="1"/>
+          </p:cNvSpPr>
+          <p:nvPr>
+            <p:ph type="sldNum" sz="quarter" idx="12"/>
+          </p:nvPr>
+        </p:nvSpPr>
+        <p:spPr/>
+        <p:txBody>
+          <a:bodyPr/>
+          <a:lstStyle/>
+          <a:p>
+            <a:fld id="{AEE14D4A-FE32-40AF-B06D-E9622816B101}" type="slidenum">
+              <a:rPr lang="en-US" smtClean="0"/>
+              <a:pPr/>
+              <a:t>6</a:t>
+            </a:fld>
+            <a:endParaRPr lang="en-US"/>
+          </a:p>
+        </p:txBody>
+      </p:sp>
+      <p:sp>
+        <p:nvSpPr>
+          <p:cNvPr id="4" name="Content Placeholder 3">
+            <a:extLst>
+              <a:ext uri="{FF2B5EF4-FFF2-40B4-BE49-F238E27FC236}">
+                <a16:creationId xmlns:a16="http://schemas.microsoft.com/office/drawing/2014/main" id="{2E30BEB6-14A6-7DA1-64FA-D0E05B682530}"/>
+              </a:ext>
+            </a:extLst>
+          </p:cNvPr>
+          <p:cNvSpPr>
+            <a:spLocks noGrp="1"/>
+          </p:cNvSpPr>
+          <p:nvPr>
+            <p:ph sz="quarter" idx="1"/>
+          </p:nvPr>
+        </p:nvSpPr>
+        <p:spPr>
+          <a:xfrm>
+            <a:off x="457200" y="1250950"/>
+            <a:ext cx="4495800" cy="4997450"/>
+          </a:xfrm>
+        </p:spPr>
+        <p:txBody>
+          <a:bodyPr>
+            <a:normAutofit fontScale="70000" lnSpcReduction="20000"/>
+          </a:bodyPr>
+          <a:lstStyle/>
+          <a:p>
+            <a:r>
+              <a:rPr lang="en-US" dirty="0"/>
+              <a:t>Assume little endian for the following questions:   r0 = 0x20008000</a:t>
+            </a:r>
+          </a:p>
+          <a:p>
+            <a:pPr lvl="0"/>
+            <a:r>
+              <a:rPr lang="en-US" b="1" dirty="0"/>
+              <a:t>LDRH r1, [r0]</a:t>
+            </a:r>
+            <a:r>
+              <a:rPr lang="en-US" dirty="0"/>
+              <a:t>  </a:t>
+            </a:r>
+          </a:p>
+          <a:p>
+            <a:pPr lvl="1"/>
+            <a:r>
+              <a:rPr lang="en-US" dirty="0"/>
+              <a:t>r1 after load:</a:t>
+            </a:r>
+          </a:p>
+          <a:p>
+            <a:pPr lvl="0"/>
+            <a:r>
+              <a:rPr lang="en-US" b="1" dirty="0"/>
+              <a:t>LDSB r1, [r0]</a:t>
+            </a:r>
+            <a:r>
+              <a:rPr lang="en-US" dirty="0"/>
+              <a:t> </a:t>
+            </a:r>
+          </a:p>
+          <a:p>
+            <a:pPr lvl="1"/>
+            <a:r>
+              <a:rPr lang="en-US" dirty="0"/>
+              <a:t>r1 after load:</a:t>
+            </a:r>
+          </a:p>
+          <a:p>
+            <a:r>
+              <a:rPr lang="en-US" b="1" dirty="0"/>
+              <a:t>STR r1, [r0], #4  </a:t>
+            </a:r>
+            <a:endParaRPr lang="en-US" dirty="0"/>
+          </a:p>
+          <a:p>
+            <a:pPr lvl="1"/>
+            <a:r>
+              <a:rPr lang="en-US" dirty="0"/>
+              <a:t>Assume r1 = 0x76543210</a:t>
+            </a:r>
+          </a:p>
+          <a:p>
+            <a:pPr lvl="1"/>
+            <a:r>
+              <a:rPr lang="en-US" dirty="0"/>
+              <a:t>r0 after store:</a:t>
+            </a:r>
+          </a:p>
+          <a:p>
+            <a:pPr lvl="1"/>
+            <a:r>
+              <a:rPr lang="en-US" dirty="0"/>
+              <a:t>Memory content after store:</a:t>
+            </a:r>
+          </a:p>
+          <a:p>
+            <a:pPr lvl="0"/>
+            <a:r>
+              <a:rPr lang="en-US" b="1" dirty="0"/>
+              <a:t>STR r1, [r0, #4]</a:t>
+            </a:r>
+            <a:endParaRPr lang="en-US" dirty="0"/>
+          </a:p>
+          <a:p>
+            <a:pPr lvl="1"/>
+            <a:r>
+              <a:rPr lang="en-US" dirty="0"/>
+              <a:t>Assume r1 = 0x76543210</a:t>
+            </a:r>
+          </a:p>
+          <a:p>
+            <a:pPr lvl="1"/>
+            <a:r>
+              <a:rPr lang="en-US" dirty="0"/>
+              <a:t>r0 after load:</a:t>
+            </a:r>
+          </a:p>
+          <a:p>
+            <a:pPr lvl="1"/>
+            <a:r>
+              <a:rPr lang="en-US" dirty="0"/>
+              <a:t>Memory content after store:</a:t>
+            </a:r>
+          </a:p>
+          <a:p>
+            <a:pPr lvl="0"/>
+            <a:r>
+              <a:rPr lang="en-US" b="1" dirty="0"/>
+              <a:t>STR r1, [r0, #4]!</a:t>
+            </a:r>
+            <a:endParaRPr lang="en-US" dirty="0"/>
+          </a:p>
+          <a:p>
+            <a:pPr lvl="1"/>
+            <a:r>
+              <a:rPr lang="en-US" dirty="0"/>
+              <a:t>Assume r1 = 0x76543210</a:t>
+            </a:r>
+          </a:p>
+          <a:p>
+            <a:pPr lvl="1"/>
+            <a:r>
+              <a:rPr lang="en-US" dirty="0"/>
+              <a:t>r0 after load:</a:t>
+            </a:r>
+          </a:p>
+          <a:p>
+            <a:pPr lvl="1"/>
+            <a:r>
+              <a:rPr lang="en-US" dirty="0"/>
+              <a:t>Memory content after store:</a:t>
+            </a:r>
+          </a:p>
+          <a:p>
+            <a:endParaRPr lang="en-US" dirty="0"/>
+          </a:p>
+          <a:p>
+            <a:endParaRPr lang="en-US" dirty="0"/>
+          </a:p>
+        </p:txBody>
+      </p:sp>
+      <p:graphicFrame>
+        <p:nvGraphicFramePr>
+          <p:cNvPr id="9" name="Table 8">
+            <a:extLst>
+              <a:ext uri="{FF2B5EF4-FFF2-40B4-BE49-F238E27FC236}">
+                <a16:creationId xmlns:a16="http://schemas.microsoft.com/office/drawing/2014/main" id="{CDC85F25-15D6-DAB9-23EA-EF1BBDC222C1}"/>
+              </a:ext>
+            </a:extLst>
+          </p:cNvPr>
+          <p:cNvGraphicFramePr>
+            <a:graphicFrameLocks noGrp="1"/>
+          </p:cNvGraphicFramePr>
+          <p:nvPr/>
+        </p:nvGraphicFramePr>
+        <p:xfrm>
+          <a:off x="4953000" y="44450"/>
+          <a:ext cx="4102100" cy="1981200"/>
+        </p:xfrm>
+        <a:graphic>
+          <a:graphicData uri="http://schemas.openxmlformats.org/drawingml/2006/table">
+            <a:tbl>
+              <a:tblPr firstRow="1" bandRow="1">
+                <a:tableStyleId>{5C22544A-7EE6-4342-B048-85BDC9FD1C3A}</a:tableStyleId>
+              </a:tblPr>
+              <a:tblGrid>
+                <a:gridCol w="2241810">
+                  <a:extLst>
+                    <a:ext uri="{9D8B030D-6E8A-4147-A177-3AD203B41FA5}">
+                      <a16:colId xmlns:a16="http://schemas.microsoft.com/office/drawing/2014/main" val="20000"/>
+                    </a:ext>
+                  </a:extLst>
+                </a:gridCol>
+                <a:gridCol w="1860290">
+                  <a:extLst>
+                    <a:ext uri="{9D8B030D-6E8A-4147-A177-3AD203B41FA5}">
+                      <a16:colId xmlns:a16="http://schemas.microsoft.com/office/drawing/2014/main" val="20001"/>
+                    </a:ext>
+                  </a:extLst>
+                </a:gridCol>
+              </a:tblGrid>
+              <a:tr h="370840">
+                <a:tc>
+                  <a:txBody>
+                    <a:bodyPr/>
+                    <a:lstStyle/>
+                    <a:p>
+                      <a:pPr algn="ctr"/>
+                      <a:r>
+                        <a:rPr lang="en-US" sz="2000" dirty="0">
+                          <a:latin typeface="+mn-lt"/>
+                          <a:cs typeface="Consolas" panose="020B0609020204030204" pitchFamily="49" charset="0"/>
+                        </a:rPr>
+                        <a:t>Memory Address</a:t>
+                      </a:r>
+                    </a:p>
+                  </a:txBody>
+                  <a:tcPr/>
+                </a:tc>
+                <a:tc>
+                  <a:txBody>
+                    <a:bodyPr/>
+                    <a:lstStyle/>
+                    <a:p>
+                      <a:pPr marL="0" algn="ctr" rtl="0" eaLnBrk="1" latinLnBrk="0" hangingPunct="1"/>
+                      <a:r>
+                        <a:rPr kumimoji="0" lang="en-US" sz="2000" b="1" kern="1200" dirty="0">
+                          <a:solidFill>
+                            <a:schemeClr val="lt1"/>
+                          </a:solidFill>
+                          <a:latin typeface="+mn-lt"/>
+                          <a:ea typeface="+mn-ea"/>
+                          <a:cs typeface="Consolas" panose="020B0609020204030204" pitchFamily="49" charset="0"/>
+                        </a:rPr>
+                        <a:t>Memory Data</a:t>
+                      </a:r>
+                    </a:p>
+                  </a:txBody>
+                  <a:tcPr/>
+                </a:tc>
+                <a:extLst>
+                  <a:ext uri="{0D108BD9-81ED-4DB2-BD59-A6C34878D82A}">
+                    <a16:rowId xmlns:a16="http://schemas.microsoft.com/office/drawing/2014/main" val="10000"/>
+                  </a:ext>
+                </a:extLst>
+              </a:tr>
+              <a:tr h="370840">
+                <a:tc>
+                  <a:txBody>
+                    <a:bodyPr/>
+                    <a:lstStyle/>
+                    <a:p>
+                      <a:pPr algn="ctr"/>
+                      <a:r>
+                        <a:rPr lang="en-US" sz="2000" dirty="0" err="1">
+                          <a:latin typeface="Consolas" panose="020B0609020204030204" pitchFamily="49" charset="0"/>
+                          <a:cs typeface="Consolas" panose="020B0609020204030204" pitchFamily="49" charset="0"/>
+                        </a:rPr>
+                        <a:t>0x20008003</a:t>
+                      </a:r>
+                      <a:endParaRPr lang="en-US" sz="2000" dirty="0">
+                        <a:latin typeface="Consolas" panose="020B0609020204030204" pitchFamily="49" charset="0"/>
+                        <a:cs typeface="Consolas" panose="020B0609020204030204" pitchFamily="49" charset="0"/>
+                      </a:endParaRPr>
+                    </a:p>
+                  </a:txBody>
+                  <a:tcPr/>
+                </a:tc>
+                <a:tc>
+                  <a:txBody>
+                    <a:bodyPr/>
+                    <a:lstStyle/>
+                    <a:p>
+                      <a:pPr marL="0" marR="0" indent="0" algn="ctr" defTabSz="914400" rtl="0" eaLnBrk="1" fontAlgn="auto" latinLnBrk="0" hangingPunct="1">
+                        <a:lnSpc>
+                          <a:spcPct val="100000"/>
+                        </a:lnSpc>
+                        <a:spcBef>
+                          <a:spcPts val="0"/>
+                        </a:spcBef>
+                        <a:spcAft>
+                          <a:spcPts val="0"/>
+                        </a:spcAft>
+                        <a:buClrTx/>
+                        <a:buSzTx/>
+                        <a:buFontTx/>
+                        <a:buNone/>
+                        <a:tabLst/>
+                        <a:defRPr/>
+                      </a:pPr>
+                      <a:r>
+                        <a:rPr lang="en-US" sz="2000" dirty="0" err="1">
+                          <a:latin typeface="Consolas" panose="020B0609020204030204" pitchFamily="49" charset="0"/>
+                          <a:cs typeface="Consolas" panose="020B0609020204030204" pitchFamily="49" charset="0"/>
+                        </a:rPr>
+                        <a:t>0xA7</a:t>
+                      </a:r>
+                      <a:endParaRPr lang="en-US" sz="2000" dirty="0">
+                        <a:latin typeface="Consolas" panose="020B0609020204030204" pitchFamily="49" charset="0"/>
+                        <a:cs typeface="Consolas" panose="020B0609020204030204" pitchFamily="49" charset="0"/>
+                      </a:endParaRPr>
+                    </a:p>
+                  </a:txBody>
+                  <a:tcPr/>
+                </a:tc>
+                <a:extLst>
+                  <a:ext uri="{0D108BD9-81ED-4DB2-BD59-A6C34878D82A}">
+                    <a16:rowId xmlns:a16="http://schemas.microsoft.com/office/drawing/2014/main" val="10001"/>
+                  </a:ext>
+                </a:extLst>
+              </a:tr>
+              <a:tr h="370840">
+                <a:tc>
+                  <a:txBody>
+                    <a:bodyPr/>
+                    <a:lstStyle/>
+                    <a:p>
+                      <a:pPr algn="ctr"/>
+                      <a:r>
+                        <a:rPr lang="en-US" sz="2000" dirty="0" err="1">
+                          <a:latin typeface="Consolas" panose="020B0609020204030204" pitchFamily="49" charset="0"/>
+                          <a:cs typeface="Consolas" panose="020B0609020204030204" pitchFamily="49" charset="0"/>
+                        </a:rPr>
+                        <a:t>0x20008002</a:t>
+                      </a:r>
+                      <a:endParaRPr lang="en-US" sz="2000" dirty="0">
+                        <a:latin typeface="Consolas" panose="020B0609020204030204" pitchFamily="49" charset="0"/>
+                        <a:cs typeface="Consolas" panose="020B0609020204030204" pitchFamily="49" charset="0"/>
+                      </a:endParaRPr>
+                    </a:p>
+                  </a:txBody>
+                  <a:tcPr/>
+                </a:tc>
+                <a:tc>
+                  <a:txBody>
+                    <a:bodyPr/>
+                    <a:lstStyle/>
+                    <a:p>
+                      <a:pPr marL="0" marR="0" indent="0" algn="ctr" defTabSz="914400" rtl="0" eaLnBrk="1" fontAlgn="auto" latinLnBrk="0" hangingPunct="1">
+                        <a:lnSpc>
+                          <a:spcPct val="100000"/>
+                        </a:lnSpc>
+                        <a:spcBef>
+                          <a:spcPts val="0"/>
+                        </a:spcBef>
+                        <a:spcAft>
+                          <a:spcPts val="0"/>
+                        </a:spcAft>
+                        <a:buClrTx/>
+                        <a:buSzTx/>
+                        <a:buFontTx/>
+                        <a:buNone/>
+                        <a:tabLst/>
+                        <a:defRPr/>
+                      </a:pPr>
+                      <a:r>
+                        <a:rPr lang="en-US" sz="2000" dirty="0" err="1">
+                          <a:latin typeface="Consolas" panose="020B0609020204030204" pitchFamily="49" charset="0"/>
+                          <a:cs typeface="Consolas" panose="020B0609020204030204" pitchFamily="49" charset="0"/>
+                        </a:rPr>
+                        <a:t>0x90</a:t>
+                      </a:r>
+                      <a:endParaRPr lang="en-US" sz="2000" dirty="0">
+                        <a:latin typeface="Consolas" panose="020B0609020204030204" pitchFamily="49" charset="0"/>
+                        <a:cs typeface="Consolas" panose="020B0609020204030204" pitchFamily="49" charset="0"/>
+                      </a:endParaRPr>
+                    </a:p>
+                  </a:txBody>
+                  <a:tcPr/>
+                </a:tc>
+                <a:extLst>
+                  <a:ext uri="{0D108BD9-81ED-4DB2-BD59-A6C34878D82A}">
+                    <a16:rowId xmlns:a16="http://schemas.microsoft.com/office/drawing/2014/main" val="10002"/>
+                  </a:ext>
+                </a:extLst>
+              </a:tr>
+              <a:tr h="370840">
+                <a:tc>
+                  <a:txBody>
+                    <a:bodyPr/>
+                    <a:lstStyle/>
+                    <a:p>
+                      <a:pPr algn="ctr"/>
+                      <a:r>
+                        <a:rPr lang="en-US" sz="2000" dirty="0" err="1">
+                          <a:latin typeface="Consolas" panose="020B0609020204030204" pitchFamily="49" charset="0"/>
+                          <a:cs typeface="Consolas" panose="020B0609020204030204" pitchFamily="49" charset="0"/>
+                        </a:rPr>
+                        <a:t>0x20008001</a:t>
+                      </a:r>
+                      <a:endParaRPr lang="en-US" sz="2000" dirty="0">
+                        <a:latin typeface="Consolas" panose="020B0609020204030204" pitchFamily="49" charset="0"/>
+                        <a:cs typeface="Consolas" panose="020B0609020204030204" pitchFamily="49" charset="0"/>
+                      </a:endParaRPr>
+                    </a:p>
+                  </a:txBody>
+                  <a:tcPr/>
+                </a:tc>
+                <a:tc>
+                  <a:txBody>
+                    <a:bodyPr/>
+                    <a:lstStyle/>
+                    <a:p>
+                      <a:pPr marL="0" marR="0" indent="0" algn="ctr" defTabSz="914400" rtl="0" eaLnBrk="1" fontAlgn="auto" latinLnBrk="0" hangingPunct="1">
+                        <a:lnSpc>
+                          <a:spcPct val="100000"/>
+                        </a:lnSpc>
+                        <a:spcBef>
+                          <a:spcPts val="0"/>
+                        </a:spcBef>
+                        <a:spcAft>
+                          <a:spcPts val="0"/>
+                        </a:spcAft>
+                        <a:buClrTx/>
+                        <a:buSzTx/>
+                        <a:buFontTx/>
+                        <a:buNone/>
+                        <a:tabLst/>
+                        <a:defRPr/>
+                      </a:pPr>
+                      <a:r>
+                        <a:rPr lang="en-US" sz="2000" dirty="0" err="1">
+                          <a:latin typeface="Consolas" panose="020B0609020204030204" pitchFamily="49" charset="0"/>
+                          <a:cs typeface="Consolas" panose="020B0609020204030204" pitchFamily="49" charset="0"/>
+                        </a:rPr>
+                        <a:t>0x8C</a:t>
+                      </a:r>
+                      <a:endParaRPr lang="en-US" sz="2000" dirty="0">
+                        <a:latin typeface="Consolas" panose="020B0609020204030204" pitchFamily="49" charset="0"/>
+                        <a:cs typeface="Consolas" panose="020B0609020204030204" pitchFamily="49" charset="0"/>
+                      </a:endParaRPr>
+                    </a:p>
+                  </a:txBody>
+                  <a:tcPr/>
+                </a:tc>
+                <a:extLst>
+                  <a:ext uri="{0D108BD9-81ED-4DB2-BD59-A6C34878D82A}">
+                    <a16:rowId xmlns:a16="http://schemas.microsoft.com/office/drawing/2014/main" val="10003"/>
+                  </a:ext>
+                </a:extLst>
+              </a:tr>
+              <a:tr h="370840">
+                <a:tc>
+                  <a:txBody>
+                    <a:bodyPr/>
+                    <a:lstStyle/>
+                    <a:p>
+                      <a:pPr algn="ctr"/>
+                      <a:r>
+                        <a:rPr lang="en-US" sz="2000" dirty="0" err="1">
+                          <a:latin typeface="Consolas" panose="020B0609020204030204" pitchFamily="49" charset="0"/>
+                          <a:cs typeface="Consolas" panose="020B0609020204030204" pitchFamily="49" charset="0"/>
+                        </a:rPr>
+                        <a:t>0x20008000</a:t>
+                      </a:r>
+                      <a:endParaRPr lang="en-US" sz="2000" dirty="0">
+                        <a:latin typeface="Consolas" panose="020B0609020204030204" pitchFamily="49" charset="0"/>
+                        <a:cs typeface="Consolas" panose="020B0609020204030204" pitchFamily="49" charset="0"/>
+                      </a:endParaRPr>
+                    </a:p>
+                  </a:txBody>
+                  <a:tcPr/>
+                </a:tc>
+                <a:tc>
+                  <a:txBody>
+                    <a:bodyPr/>
+                    <a:lstStyle/>
+                    <a:p>
+                      <a:pPr marL="0" marR="0" indent="0" algn="ctr" defTabSz="914400" rtl="0" eaLnBrk="1" fontAlgn="auto" latinLnBrk="0" hangingPunct="1">
+                        <a:lnSpc>
+                          <a:spcPct val="100000"/>
+                        </a:lnSpc>
+                        <a:spcBef>
+                          <a:spcPts val="0"/>
+                        </a:spcBef>
+                        <a:spcAft>
+                          <a:spcPts val="0"/>
+                        </a:spcAft>
+                        <a:buClrTx/>
+                        <a:buSzTx/>
+                        <a:buFontTx/>
+                        <a:buNone/>
+                        <a:tabLst/>
+                        <a:defRPr/>
+                      </a:pPr>
+                      <a:r>
+                        <a:rPr lang="en-US" sz="2000" dirty="0" err="1">
+                          <a:latin typeface="Consolas" panose="020B0609020204030204" pitchFamily="49" charset="0"/>
+                          <a:cs typeface="Consolas" panose="020B0609020204030204" pitchFamily="49" charset="0"/>
+                        </a:rPr>
+                        <a:t>0xEE</a:t>
+                      </a:r>
+                      <a:endParaRPr lang="en-US" sz="2000" dirty="0">
+                        <a:latin typeface="Consolas" panose="020B0609020204030204" pitchFamily="49" charset="0"/>
+                        <a:cs typeface="Consolas" panose="020B0609020204030204" pitchFamily="49" charset="0"/>
+                      </a:endParaRPr>
+                    </a:p>
+                  </a:txBody>
+                  <a:tcPr/>
+                </a:tc>
+                <a:extLst>
+                  <a:ext uri="{0D108BD9-81ED-4DB2-BD59-A6C34878D82A}">
+                    <a16:rowId xmlns:a16="http://schemas.microsoft.com/office/drawing/2014/main" val="10004"/>
+                  </a:ext>
+                </a:extLst>
+              </a:tr>
+            </a:tbl>
+          </a:graphicData>
+        </a:graphic>
+      </p:graphicFrame>
+    </p:spTree>
+    <p:extLst>
+      <p:ext uri="{BB962C8B-B14F-4D97-AF65-F5344CB8AC3E}">
+        <p14:creationId xmlns:p14="http://schemas.microsoft.com/office/powerpoint/2010/main" val="2952063245"/>
+      </p:ext>
+    </p:extLst>
+  </p:cSld>
+  <p:clrMapOvr>
+    <a:masterClrMapping/>
+  </p:clrMapOvr>
+  <p:transition>
+    <p:pull dir="ru"/>
+  </p:transition>
+</p:sld>
+</file>
+
+<file path=ppt/slides/slide7.xml><?xml version="1.0" encoding="utf-8"?>
+<p:sld xmlns:a="http://schemas.openxmlformats.org/drawingml/2006/main" xmlns:r="http://schemas.openxmlformats.org/officeDocument/2006/relationships" xmlns:p="http://schemas.openxmlformats.org/presentationml/2006/main">
+  <p:cSld>
+    <p:spTree>
+      <p:nvGrpSpPr>
         <p:cNvPr id="1" name=""/>
         <p:cNvGrpSpPr/>
         <p:nvPr/>
@@ -16559,7 +17723,7 @@
             <a:fld id="{3CC63E4C-4642-794D-A2FD-70F6B81535F5}" type="slidenum">
               <a:rPr lang="en-US" smtClean="0"/>
               <a:pPr/>
-              <a:t>6</a:t>
+              <a:t>7</a:t>
             </a:fld>
             <a:endParaRPr lang="en-US" dirty="0"/>
           </a:p>
@@ -17149,7 +18313,7 @@
 </p:sld>
 </file>
 
-<file path=ppt/slides/slide7.xml><?xml version="1.0" encoding="utf-8"?>
+<file path=ppt/slides/slide8.xml><?xml version="1.0" encoding="utf-8"?>
 <p:sld xmlns:a="http://schemas.openxmlformats.org/drawingml/2006/main" xmlns:r="http://schemas.openxmlformats.org/officeDocument/2006/relationships" xmlns:p="http://schemas.openxmlformats.org/presentationml/2006/main">
   <p:cSld>
     <p:spTree>
@@ -17206,7 +18370,7 @@
             <a:fld id="{3CC63E4C-4642-794D-A2FD-70F6B81535F5}" type="slidenum">
               <a:rPr lang="en-US" smtClean="0"/>
               <a:pPr/>
-              <a:t>7</a:t>
+              <a:t>8</a:t>
             </a:fld>
             <a:endParaRPr lang="en-US" dirty="0"/>
           </a:p>
@@ -17463,7 +18627,7 @@
 </p:sld>
 </file>
 
-<file path=ppt/slides/slide8.xml><?xml version="1.0" encoding="utf-8"?>
+<file path=ppt/slides/slide9.xml><?xml version="1.0" encoding="utf-8"?>
 <p:sld xmlns:a="http://schemas.openxmlformats.org/drawingml/2006/main" xmlns:r="http://schemas.openxmlformats.org/officeDocument/2006/relationships" xmlns:p="http://schemas.openxmlformats.org/presentationml/2006/main">
   <p:cSld>
     <p:spTree>
@@ -17525,7 +18689,7 @@
             <a:fld id="{3CC63E4C-4642-794D-A2FD-70F6B81535F5}" type="slidenum">
               <a:rPr lang="en-US" smtClean="0"/>
               <a:pPr/>
-              <a:t>8</a:t>
+              <a:t>9</a:t>
             </a:fld>
             <a:endParaRPr lang="en-US" dirty="0"/>
           </a:p>
@@ -17787,545 +18951,6 @@
   <p:transition>
     <p:pull dir="ru"/>
   </p:transition>
-</p:sld>
-</file>
-
-<file path=ppt/slides/slide9.xml><?xml version="1.0" encoding="utf-8"?>
-<p:sld xmlns:a="http://schemas.openxmlformats.org/drawingml/2006/main" xmlns:r="http://schemas.openxmlformats.org/officeDocument/2006/relationships" xmlns:p="http://schemas.openxmlformats.org/presentationml/2006/main">
-  <p:cSld>
-    <p:spTree>
-      <p:nvGrpSpPr>
-        <p:cNvPr id="1" name=""/>
-        <p:cNvGrpSpPr/>
-        <p:nvPr/>
-      </p:nvGrpSpPr>
-      <p:grpSpPr>
-        <a:xfrm>
-          <a:off x="0" y="0"/>
-          <a:ext cx="0" cy="0"/>
-          <a:chOff x="0" y="0"/>
-          <a:chExt cx="0" cy="0"/>
-        </a:xfrm>
-      </p:grpSpPr>
-      <p:sp>
-        <p:nvSpPr>
-          <p:cNvPr id="3" name="Slide Number Placeholder 2"/>
-          <p:cNvSpPr>
-            <a:spLocks noGrp="1"/>
-          </p:cNvSpPr>
-          <p:nvPr>
-            <p:ph type="sldNum" sz="quarter" idx="12"/>
-          </p:nvPr>
-        </p:nvSpPr>
-        <p:spPr/>
-        <p:txBody>
-          <a:bodyPr/>
-          <a:lstStyle/>
-          <a:p>
-            <a:fld id="{3CC63E4C-4642-794D-A2FD-70F6B81535F5}" type="slidenum">
-              <a:rPr lang="en-US" smtClean="0"/>
-              <a:pPr/>
-              <a:t>9</a:t>
-            </a:fld>
-            <a:endParaRPr lang="en-US" dirty="0"/>
-          </a:p>
-        </p:txBody>
-      </p:sp>
-      <p:sp>
-        <p:nvSpPr>
-          <p:cNvPr id="4" name="Rectangle 3"/>
-          <p:cNvSpPr txBox="1">
-            <a:spLocks noChangeArrowheads="1"/>
-          </p:cNvSpPr>
-          <p:nvPr/>
-        </p:nvSpPr>
-        <p:spPr>
-          <a:xfrm>
-            <a:off x="267393" y="1447800"/>
-            <a:ext cx="8182841" cy="3581400"/>
-          </a:xfrm>
-          <a:prstGeom prst="rect">
-            <a:avLst/>
-          </a:prstGeom>
-        </p:spPr>
-        <p:txBody>
-          <a:bodyPr/>
-          <a:lstStyle>
-            <a:lvl1pPr marL="342900" indent="-342900" algn="l" defTabSz="457200" rtl="0" eaLnBrk="1" latinLnBrk="0" hangingPunct="1">
-              <a:spcBef>
-                <a:spcPct val="20000"/>
-              </a:spcBef>
-              <a:buFont typeface="Arial"/>
-              <a:buChar char="•"/>
-              <a:defRPr sz="3200" kern="1200">
-                <a:solidFill>
-                  <a:schemeClr val="tx1"/>
-                </a:solidFill>
-                <a:latin typeface="+mn-lt"/>
-                <a:ea typeface="+mn-ea"/>
-                <a:cs typeface="+mn-cs"/>
-              </a:defRPr>
-            </a:lvl1pPr>
-            <a:lvl2pPr marL="742950" indent="-285750" algn="l" defTabSz="457200" rtl="0" eaLnBrk="1" latinLnBrk="0" hangingPunct="1">
-              <a:spcBef>
-                <a:spcPct val="20000"/>
-              </a:spcBef>
-              <a:buFont typeface="Arial"/>
-              <a:buChar char="–"/>
-              <a:defRPr sz="2800" kern="1200">
-                <a:solidFill>
-                  <a:schemeClr val="tx1"/>
-                </a:solidFill>
-                <a:latin typeface="+mn-lt"/>
-                <a:ea typeface="+mn-ea"/>
-                <a:cs typeface="+mn-cs"/>
-              </a:defRPr>
-            </a:lvl2pPr>
-            <a:lvl3pPr marL="1143000" indent="-228600" algn="l" defTabSz="457200" rtl="0" eaLnBrk="1" latinLnBrk="0" hangingPunct="1">
-              <a:spcBef>
-                <a:spcPct val="20000"/>
-              </a:spcBef>
-              <a:buFont typeface="Arial"/>
-              <a:buChar char="•"/>
-              <a:defRPr sz="2400" kern="1200">
-                <a:solidFill>
-                  <a:schemeClr val="tx1"/>
-                </a:solidFill>
-                <a:latin typeface="+mn-lt"/>
-                <a:ea typeface="+mn-ea"/>
-                <a:cs typeface="+mn-cs"/>
-              </a:defRPr>
-            </a:lvl3pPr>
-            <a:lvl4pPr marL="1600200" indent="-228600" algn="l" defTabSz="457200" rtl="0" eaLnBrk="1" latinLnBrk="0" hangingPunct="1">
-              <a:spcBef>
-                <a:spcPct val="20000"/>
-              </a:spcBef>
-              <a:buFont typeface="Arial"/>
-              <a:buChar char="–"/>
-              <a:defRPr sz="2000" kern="1200">
-                <a:solidFill>
-                  <a:schemeClr val="tx1"/>
-                </a:solidFill>
-                <a:latin typeface="+mn-lt"/>
-                <a:ea typeface="+mn-ea"/>
-                <a:cs typeface="+mn-cs"/>
-              </a:defRPr>
-            </a:lvl4pPr>
-            <a:lvl5pPr marL="2057400" indent="-228600" algn="l" defTabSz="457200" rtl="0" eaLnBrk="1" latinLnBrk="0" hangingPunct="1">
-              <a:spcBef>
-                <a:spcPct val="20000"/>
-              </a:spcBef>
-              <a:buFont typeface="Arial"/>
-              <a:buChar char="»"/>
-              <a:defRPr sz="2000" kern="1200">
-                <a:solidFill>
-                  <a:schemeClr val="tx1"/>
-                </a:solidFill>
-                <a:latin typeface="+mn-lt"/>
-                <a:ea typeface="+mn-ea"/>
-                <a:cs typeface="+mn-cs"/>
-              </a:defRPr>
-            </a:lvl5pPr>
-            <a:lvl6pPr marL="2514600" indent="-228600" algn="l" defTabSz="457200" rtl="0" eaLnBrk="1" latinLnBrk="0" hangingPunct="1">
-              <a:spcBef>
-                <a:spcPct val="20000"/>
-              </a:spcBef>
-              <a:buFont typeface="Arial"/>
-              <a:buChar char="•"/>
-              <a:defRPr sz="2000" kern="1200">
-                <a:solidFill>
-                  <a:schemeClr val="tx1"/>
-                </a:solidFill>
-                <a:latin typeface="+mn-lt"/>
-                <a:ea typeface="+mn-ea"/>
-                <a:cs typeface="+mn-cs"/>
-              </a:defRPr>
-            </a:lvl6pPr>
-            <a:lvl7pPr marL="2971800" indent="-228600" algn="l" defTabSz="457200" rtl="0" eaLnBrk="1" latinLnBrk="0" hangingPunct="1">
-              <a:spcBef>
-                <a:spcPct val="20000"/>
-              </a:spcBef>
-              <a:buFont typeface="Arial"/>
-              <a:buChar char="•"/>
-              <a:defRPr sz="2000" kern="1200">
-                <a:solidFill>
-                  <a:schemeClr val="tx1"/>
-                </a:solidFill>
-                <a:latin typeface="+mn-lt"/>
-                <a:ea typeface="+mn-ea"/>
-                <a:cs typeface="+mn-cs"/>
-              </a:defRPr>
-            </a:lvl7pPr>
-            <a:lvl8pPr marL="3429000" indent="-228600" algn="l" defTabSz="457200" rtl="0" eaLnBrk="1" latinLnBrk="0" hangingPunct="1">
-              <a:spcBef>
-                <a:spcPct val="20000"/>
-              </a:spcBef>
-              <a:buFont typeface="Arial"/>
-              <a:buChar char="•"/>
-              <a:defRPr sz="2000" kern="1200">
-                <a:solidFill>
-                  <a:schemeClr val="tx1"/>
-                </a:solidFill>
-                <a:latin typeface="+mn-lt"/>
-                <a:ea typeface="+mn-ea"/>
-                <a:cs typeface="+mn-cs"/>
-              </a:defRPr>
-            </a:lvl8pPr>
-            <a:lvl9pPr marL="3886200" indent="-228600" algn="l" defTabSz="457200" rtl="0" eaLnBrk="1" latinLnBrk="0" hangingPunct="1">
-              <a:spcBef>
-                <a:spcPct val="20000"/>
-              </a:spcBef>
-              <a:buFont typeface="Arial"/>
-              <a:buChar char="•"/>
-              <a:defRPr sz="2000" kern="1200">
-                <a:solidFill>
-                  <a:schemeClr val="tx1"/>
-                </a:solidFill>
-                <a:latin typeface="+mn-lt"/>
-                <a:ea typeface="+mn-ea"/>
-                <a:cs typeface="+mn-cs"/>
-              </a:defRPr>
-            </a:lvl9pPr>
-          </a:lstStyle>
-          <a:p>
-            <a:pPr marL="257175" indent="-257175" defTabSz="342900"/>
-            <a:r>
-              <a:rPr lang="en-US" sz="2400" b="0" dirty="0">
-                <a:solidFill>
-                  <a:prstClr val="black"/>
-                </a:solidFill>
-              </a:rPr>
-              <a:t>Q:  Assume a byte-addressable memory with a data bus that is 32 bits (4 bytes) wide. </a:t>
-            </a:r>
-          </a:p>
-          <a:p>
-            <a:pPr marL="657225" lvl="1" indent="-257175" defTabSz="342900"/>
-            <a:r>
-              <a:rPr lang="en-US" altLang="zh-CN" sz="2000" b="0" dirty="0">
-                <a:solidFill>
-                  <a:prstClr val="black"/>
-                </a:solidFill>
-              </a:rPr>
-              <a:t>It takes ____ memory cycle(s) to read a Byte from memory</a:t>
-            </a:r>
-          </a:p>
-          <a:p>
-            <a:pPr marL="657225" lvl="1" indent="-257175" defTabSz="342900"/>
-            <a:r>
-              <a:rPr lang="en-US" altLang="zh-CN" sz="2000" b="0" dirty="0">
-                <a:solidFill>
-                  <a:prstClr val="black"/>
-                </a:solidFill>
-              </a:rPr>
-              <a:t>It takes ____ memory cycle(s) to read a half-word from memory</a:t>
-            </a:r>
-          </a:p>
-          <a:p>
-            <a:pPr marL="657225" lvl="1" indent="-257175" defTabSz="342900"/>
-            <a:r>
-              <a:rPr lang="en-US" altLang="zh-CN" sz="2000" b="0" dirty="0">
-                <a:solidFill>
-                  <a:prstClr val="black"/>
-                </a:solidFill>
-              </a:rPr>
-              <a:t>It takes ____ memory cycle(s) to read a word from memory</a:t>
-            </a:r>
-          </a:p>
-          <a:p>
-            <a:pPr marL="657225" lvl="1" indent="-257175" defTabSz="342900"/>
-            <a:r>
-              <a:rPr lang="en-US" altLang="zh-CN" sz="2000" b="0" dirty="0">
-                <a:solidFill>
-                  <a:prstClr val="black"/>
-                </a:solidFill>
-              </a:rPr>
-              <a:t>It takes ____ memory cycle(s) to read a double word from memory</a:t>
-            </a:r>
-            <a:endParaRPr lang="en-US" sz="2400" b="0" dirty="0">
-              <a:solidFill>
-                <a:prstClr val="black"/>
-              </a:solidFill>
-              <a:latin typeface="Calibri"/>
-            </a:endParaRPr>
-          </a:p>
-        </p:txBody>
-      </p:sp>
-      <p:pic>
-        <p:nvPicPr>
-          <p:cNvPr id="5" name="Picture 4"/>
-          <p:cNvPicPr>
-            <a:picLocks noChangeAspect="1"/>
-          </p:cNvPicPr>
-          <p:nvPr/>
-        </p:nvPicPr>
-        <p:blipFill>
-          <a:blip r:embed="rId2"/>
-          <a:stretch>
-            <a:fillRect/>
-          </a:stretch>
-        </p:blipFill>
-        <p:spPr>
-          <a:xfrm>
-            <a:off x="5029200" y="-6804"/>
-            <a:ext cx="4067187" cy="1560642"/>
-          </a:xfrm>
-          <a:prstGeom prst="rect">
-            <a:avLst/>
-          </a:prstGeom>
-        </p:spPr>
-      </p:pic>
-      <p:sp>
-        <p:nvSpPr>
-          <p:cNvPr id="9" name="Title 1">
-            <a:extLst>
-              <a:ext uri="{FF2B5EF4-FFF2-40B4-BE49-F238E27FC236}">
-                <a16:creationId xmlns:a16="http://schemas.microsoft.com/office/drawing/2014/main" id="{78DA596E-85CA-C0C6-85A8-74A98C3DFFDB}"/>
-              </a:ext>
-            </a:extLst>
-          </p:cNvPr>
-          <p:cNvSpPr>
-            <a:spLocks noGrp="1"/>
-          </p:cNvSpPr>
-          <p:nvPr>
-            <p:ph type="title"/>
-          </p:nvPr>
-        </p:nvSpPr>
-        <p:spPr>
-          <a:xfrm>
-            <a:off x="0" y="22225"/>
-            <a:ext cx="8229600" cy="1143000"/>
-          </a:xfrm>
-        </p:spPr>
-        <p:txBody>
-          <a:bodyPr/>
-          <a:lstStyle/>
-          <a:p>
-            <a:r>
-              <a:rPr lang="en-US" dirty="0"/>
-              <a:t>Answer: Memory Cycles</a:t>
-            </a:r>
-          </a:p>
-        </p:txBody>
-      </p:sp>
-    </p:spTree>
-    <p:extLst>
-      <p:ext uri="{BB962C8B-B14F-4D97-AF65-F5344CB8AC3E}">
-        <p14:creationId xmlns:p14="http://schemas.microsoft.com/office/powerpoint/2010/main" val="1910717593"/>
-      </p:ext>
-    </p:extLst>
-  </p:cSld>
-  <p:clrMapOvr>
-    <a:masterClrMapping/>
-  </p:clrMapOvr>
-  <p:transition>
-    <p:pull dir="ru"/>
-  </p:transition>
-  <p:timing>
-    <p:tnLst>
-      <p:par>
-        <p:cTn id="1" dur="indefinite" restart="never" nodeType="tmRoot">
-          <p:childTnLst>
-            <p:seq concurrent="1" nextAc="seek">
-              <p:cTn id="2" dur="indefinite" nodeType="mainSeq">
-                <p:childTnLst>
-                  <p:par>
-                    <p:cTn id="3" fill="hold">
-                      <p:stCondLst>
-                        <p:cond delay="indefinite"/>
-                      </p:stCondLst>
-                      <p:childTnLst>
-                        <p:par>
-                          <p:cTn id="4" fill="hold">
-                            <p:stCondLst>
-                              <p:cond delay="0"/>
-                            </p:stCondLst>
-                            <p:childTnLst>
-                              <p:par>
-                                <p:cTn id="5" presetID="1" presetClass="entr" presetSubtype="0" fill="hold" grpId="0" nodeType="clickEffect">
-                                  <p:stCondLst>
-                                    <p:cond delay="0"/>
-                                  </p:stCondLst>
-                                  <p:childTnLst>
-                                    <p:set>
-                                      <p:cBhvr>
-                                        <p:cTn id="6" dur="1" fill="hold">
-                                          <p:stCondLst>
-                                            <p:cond delay="0"/>
-                                          </p:stCondLst>
-                                        </p:cTn>
-                                        <p:tgtEl>
-                                          <p:spTgt spid="4">
-                                            <p:txEl>
-                                              <p:pRg st="0" end="0"/>
-                                            </p:txEl>
-                                          </p:spTgt>
-                                        </p:tgtEl>
-                                        <p:attrNameLst>
-                                          <p:attrName>style.visibility</p:attrName>
-                                        </p:attrNameLst>
-                                      </p:cBhvr>
-                                      <p:to>
-                                        <p:strVal val="visible"/>
-                                      </p:to>
-                                    </p:set>
-                                  </p:childTnLst>
-                                </p:cTn>
-                              </p:par>
-                              <p:par>
-                                <p:cTn id="7" presetID="1" presetClass="entr" presetSubtype="0" fill="hold" grpId="0" nodeType="withEffect">
-                                  <p:stCondLst>
-                                    <p:cond delay="0"/>
-                                  </p:stCondLst>
-                                  <p:childTnLst>
-                                    <p:set>
-                                      <p:cBhvr>
-                                        <p:cTn id="8" dur="1" fill="hold">
-                                          <p:stCondLst>
-                                            <p:cond delay="0"/>
-                                          </p:stCondLst>
-                                        </p:cTn>
-                                        <p:tgtEl>
-                                          <p:spTgt spid="4">
-                                            <p:txEl>
-                                              <p:pRg st="1" end="1"/>
-                                            </p:txEl>
-                                          </p:spTgt>
-                                        </p:tgtEl>
-                                        <p:attrNameLst>
-                                          <p:attrName>style.visibility</p:attrName>
-                                        </p:attrNameLst>
-                                      </p:cBhvr>
-                                      <p:to>
-                                        <p:strVal val="visible"/>
-                                      </p:to>
-                                    </p:set>
-                                  </p:childTnLst>
-                                </p:cTn>
-                              </p:par>
-                              <p:par>
-                                <p:cTn id="9" presetID="1" presetClass="entr" presetSubtype="0" fill="hold" grpId="0" nodeType="withEffect">
-                                  <p:stCondLst>
-                                    <p:cond delay="0"/>
-                                  </p:stCondLst>
-                                  <p:childTnLst>
-                                    <p:set>
-                                      <p:cBhvr>
-                                        <p:cTn id="10" dur="1" fill="hold">
-                                          <p:stCondLst>
-                                            <p:cond delay="0"/>
-                                          </p:stCondLst>
-                                        </p:cTn>
-                                        <p:tgtEl>
-                                          <p:spTgt spid="4">
-                                            <p:txEl>
-                                              <p:pRg st="2" end="2"/>
-                                            </p:txEl>
-                                          </p:spTgt>
-                                        </p:tgtEl>
-                                        <p:attrNameLst>
-                                          <p:attrName>style.visibility</p:attrName>
-                                        </p:attrNameLst>
-                                      </p:cBhvr>
-                                      <p:to>
-                                        <p:strVal val="visible"/>
-                                      </p:to>
-                                    </p:set>
-                                  </p:childTnLst>
-                                </p:cTn>
-                              </p:par>
-                              <p:par>
-                                <p:cTn id="11" presetID="1" presetClass="entr" presetSubtype="0" fill="hold" grpId="0" nodeType="withEffect">
-                                  <p:stCondLst>
-                                    <p:cond delay="0"/>
-                                  </p:stCondLst>
-                                  <p:childTnLst>
-                                    <p:set>
-                                      <p:cBhvr>
-                                        <p:cTn id="12" dur="1" fill="hold">
-                                          <p:stCondLst>
-                                            <p:cond delay="0"/>
-                                          </p:stCondLst>
-                                        </p:cTn>
-                                        <p:tgtEl>
-                                          <p:spTgt spid="4">
-                                            <p:txEl>
-                                              <p:pRg st="3" end="3"/>
-                                            </p:txEl>
-                                          </p:spTgt>
-                                        </p:tgtEl>
-                                        <p:attrNameLst>
-                                          <p:attrName>style.visibility</p:attrName>
-                                        </p:attrNameLst>
-                                      </p:cBhvr>
-                                      <p:to>
-                                        <p:strVal val="visible"/>
-                                      </p:to>
-                                    </p:set>
-                                  </p:childTnLst>
-                                </p:cTn>
-                              </p:par>
-                              <p:par>
-                                <p:cTn id="13" presetID="1" presetClass="entr" presetSubtype="0" fill="hold" grpId="0" nodeType="withEffect">
-                                  <p:stCondLst>
-                                    <p:cond delay="0"/>
-                                  </p:stCondLst>
-                                  <p:childTnLst>
-                                    <p:set>
-                                      <p:cBhvr>
-                                        <p:cTn id="14" dur="1" fill="hold">
-                                          <p:stCondLst>
-                                            <p:cond delay="0"/>
-                                          </p:stCondLst>
-                                        </p:cTn>
-                                        <p:tgtEl>
-                                          <p:spTgt spid="4">
-                                            <p:txEl>
-                                              <p:pRg st="4" end="4"/>
-                                            </p:txEl>
-                                          </p:spTgt>
-                                        </p:tgtEl>
-                                        <p:attrNameLst>
-                                          <p:attrName>style.visibility</p:attrName>
-                                        </p:attrNameLst>
-                                      </p:cBhvr>
-                                      <p:to>
-                                        <p:strVal val="visible"/>
-                                      </p:to>
-                                    </p:set>
-                                  </p:childTnLst>
-                                </p:cTn>
-                              </p:par>
-                            </p:childTnLst>
-                          </p:cTn>
-                        </p:par>
-                      </p:childTnLst>
-                    </p:cTn>
-                  </p:par>
-                </p:childTnLst>
-              </p:cTn>
-              <p:prevCondLst>
-                <p:cond evt="onPrev" delay="0">
-                  <p:tgtEl>
-                    <p:sldTgt/>
-                  </p:tgtEl>
-                </p:cond>
-              </p:prevCondLst>
-              <p:nextCondLst>
-                <p:cond evt="onNext" delay="0">
-                  <p:tgtEl>
-                    <p:sldTgt/>
-                  </p:tgtEl>
-                </p:cond>
-              </p:nextCondLst>
-            </p:seq>
-          </p:childTnLst>
-        </p:cTn>
-      </p:par>
-    </p:tnLst>
-    <p:bldLst>
-      <p:bldP spid="4" grpId="0" build="p"/>
-    </p:bldLst>
-  </p:timing>
 </p:sld>
 </file>
 

--- a/PPTs/Ch5_ARM_Load_Store_Exercises.pptx
+++ b/PPTs/Ch5_ARM_Load_Store_Exercises.pptx
@@ -5,10 +5,10 @@
     <p:sldMasterId id="2147483686" r:id="rId1"/>
   </p:sldMasterIdLst>
   <p:notesMasterIdLst>
-    <p:notesMasterId r:id="rId15"/>
+    <p:notesMasterId r:id="rId16"/>
   </p:notesMasterIdLst>
   <p:handoutMasterIdLst>
-    <p:handoutMasterId r:id="rId16"/>
+    <p:handoutMasterId r:id="rId17"/>
   </p:handoutMasterIdLst>
   <p:sldIdLst>
     <p:sldId id="385" r:id="rId2"/>
@@ -24,6 +24,7 @@
     <p:sldId id="365" r:id="rId12"/>
     <p:sldId id="801" r:id="rId13"/>
     <p:sldId id="804" r:id="rId14"/>
+    <p:sldId id="815" r:id="rId15"/>
   </p:sldIdLst>
   <p:sldSz cx="9144000" cy="6858000" type="screen4x3"/>
   <p:notesSz cx="9601200" cy="7315200"/>
@@ -208,7 +209,7 @@
 <file path=ppt/revisionInfo.xml><?xml version="1.0" encoding="utf-8"?>
 <p1510:revInfo xmlns:a="http://schemas.openxmlformats.org/drawingml/2006/main" xmlns:r="http://schemas.openxmlformats.org/officeDocument/2006/relationships" xmlns:p1510="http://schemas.microsoft.com/office/powerpoint/2015/10/main">
   <p1510:revLst>
-    <p1510:client id="{93E05C3B-B728-42D2-90B4-B4A194916ABF}" v="3" dt="2025-10-08T02:00:48.824"/>
+    <p1510:client id="{93E05C3B-B728-42D2-90B4-B4A194916ABF}" v="4" dt="2025-10-16T21:53:10.887"/>
   </p1510:revLst>
 </p1510:revInfo>
 </file>
@@ -218,7 +219,7 @@
   <pc:docChgLst>
     <pc:chgData name="Zonghua Gu" userId="9a7e1853e1951ef5" providerId="LiveId" clId="{CF1FAA12-072C-4ED5-BA76-0FFFAEFDB88A}"/>
     <pc:docChg chg="undo custSel addSld delSld modSld sldOrd">
-      <pc:chgData name="Zonghua Gu" userId="9a7e1853e1951ef5" providerId="LiveId" clId="{CF1FAA12-072C-4ED5-BA76-0FFFAEFDB88A}" dt="2025-10-08T02:00:59.295" v="631" actId="14100"/>
+      <pc:chgData name="Zonghua Gu" userId="9a7e1853e1951ef5" providerId="LiveId" clId="{CF1FAA12-072C-4ED5-BA76-0FFFAEFDB88A}" dt="2025-10-16T21:53:10.887" v="632"/>
       <pc:docMkLst>
         <pc:docMk/>
       </pc:docMkLst>
@@ -1205,6 +1206,13 @@
           </ac:spMkLst>
         </pc:spChg>
       </pc:sldChg>
+      <pc:sldChg chg="add">
+        <pc:chgData name="Zonghua Gu" userId="9a7e1853e1951ef5" providerId="LiveId" clId="{CF1FAA12-072C-4ED5-BA76-0FFFAEFDB88A}" dt="2025-10-16T21:53:10.887" v="632"/>
+        <pc:sldMkLst>
+          <pc:docMk/>
+          <pc:sldMk cId="754608230" sldId="815"/>
+        </pc:sldMkLst>
+      </pc:sldChg>
     </pc:docChg>
   </pc:docChgLst>
 </pc:chgInfo>
@@ -2630,6 +2638,184 @@
 </p:notes>
 </file>
 
+<file path=ppt/notesSlides/notesSlide8.xml><?xml version="1.0" encoding="utf-8"?>
+<p:notes xmlns:a="http://schemas.openxmlformats.org/drawingml/2006/main" xmlns:r="http://schemas.openxmlformats.org/officeDocument/2006/relationships" xmlns:p="http://schemas.openxmlformats.org/presentationml/2006/main">
+  <p:cSld>
+    <p:spTree>
+      <p:nvGrpSpPr>
+        <p:cNvPr id="1" name=""/>
+        <p:cNvGrpSpPr/>
+        <p:nvPr/>
+      </p:nvGrpSpPr>
+      <p:grpSpPr>
+        <a:xfrm>
+          <a:off x="0" y="0"/>
+          <a:ext cx="0" cy="0"/>
+          <a:chOff x="0" y="0"/>
+          <a:chExt cx="0" cy="0"/>
+        </a:xfrm>
+      </p:grpSpPr>
+      <p:sp>
+        <p:nvSpPr>
+          <p:cNvPr id="2" name="Slide Image Placeholder 1"/>
+          <p:cNvSpPr>
+            <a:spLocks noGrp="1" noRot="1" noChangeAspect="1"/>
+          </p:cNvSpPr>
+          <p:nvPr>
+            <p:ph type="sldImg"/>
+          </p:nvPr>
+        </p:nvSpPr>
+        <p:spPr/>
+      </p:sp>
+      <p:sp>
+        <p:nvSpPr>
+          <p:cNvPr id="3" name="Notes Placeholder 2"/>
+          <p:cNvSpPr>
+            <a:spLocks noGrp="1"/>
+          </p:cNvSpPr>
+          <p:nvPr>
+            <p:ph type="body" idx="1"/>
+          </p:nvPr>
+        </p:nvSpPr>
+        <p:spPr/>
+        <p:txBody>
+          <a:bodyPr/>
+          <a:lstStyle/>
+          <a:p>
+            <a:r>
+              <a:rPr lang="pt-BR" sz="1200" b="0" i="0" kern="1200" dirty="0">
+                <a:solidFill>
+                  <a:schemeClr val="tx1"/>
+                </a:solidFill>
+                <a:effectLst/>
+                <a:latin typeface="Times New Roman" pitchFamily="18" charset="0"/>
+                <a:ea typeface="+mn-ea"/>
+                <a:cs typeface="+mn-cs"/>
+              </a:rPr>
+              <a:t>R0 | 0x00000000</a:t>
+            </a:r>
+            <a:br>
+              <a:rPr lang="pt-BR" dirty="0"/>
+            </a:br>
+            <a:r>
+              <a:rPr lang="pt-BR" sz="1200" b="0" i="0" kern="1200" dirty="0">
+                <a:solidFill>
+                  <a:schemeClr val="tx1"/>
+                </a:solidFill>
+                <a:effectLst/>
+                <a:latin typeface="Times New Roman" pitchFamily="18" charset="0"/>
+                <a:ea typeface="+mn-ea"/>
+                <a:cs typeface="+mn-cs"/>
+              </a:rPr>
+              <a:t>R1 | 0x10000200</a:t>
+            </a:r>
+            <a:br>
+              <a:rPr lang="pt-BR" dirty="0"/>
+            </a:br>
+            <a:r>
+              <a:rPr lang="pt-BR" sz="1200" b="0" i="0" kern="1200" dirty="0">
+                <a:solidFill>
+                  <a:schemeClr val="tx1"/>
+                </a:solidFill>
+                <a:effectLst/>
+                <a:latin typeface="Times New Roman" pitchFamily="18" charset="0"/>
+                <a:ea typeface="+mn-ea"/>
+                <a:cs typeface="+mn-cs"/>
+              </a:rPr>
+              <a:t>R2 | 0x0000FFFF</a:t>
+            </a:r>
+            <a:br>
+              <a:rPr lang="pt-BR" dirty="0"/>
+            </a:br>
+            <a:r>
+              <a:rPr lang="pt-BR" sz="1200" b="0" i="0" kern="1200" dirty="0">
+                <a:solidFill>
+                  <a:schemeClr val="tx1"/>
+                </a:solidFill>
+                <a:effectLst/>
+                <a:latin typeface="Times New Roman" pitchFamily="18" charset="0"/>
+                <a:ea typeface="+mn-ea"/>
+                <a:cs typeface="+mn-cs"/>
+              </a:rPr>
+              <a:t>R3 | 0x18675309</a:t>
+            </a:r>
+            <a:br>
+              <a:rPr lang="pt-BR" dirty="0"/>
+            </a:br>
+            <a:r>
+              <a:rPr lang="pt-BR" sz="1200" b="0" i="0" kern="1200" dirty="0">
+                <a:solidFill>
+                  <a:schemeClr val="tx1"/>
+                </a:solidFill>
+                <a:effectLst/>
+                <a:latin typeface="Times New Roman" pitchFamily="18" charset="0"/>
+                <a:ea typeface="+mn-ea"/>
+                <a:cs typeface="+mn-cs"/>
+              </a:rPr>
+              <a:t>R4 | 0x00000000</a:t>
+            </a:r>
+            <a:br>
+              <a:rPr lang="pt-BR" dirty="0"/>
+            </a:br>
+            <a:r>
+              <a:rPr lang="pt-BR" sz="1200" b="0" i="0" kern="1200" dirty="0">
+                <a:solidFill>
+                  <a:schemeClr val="tx1"/>
+                </a:solidFill>
+                <a:effectLst/>
+                <a:latin typeface="Times New Roman" pitchFamily="18" charset="0"/>
+                <a:ea typeface="+mn-ea"/>
+                <a:cs typeface="+mn-cs"/>
+              </a:rPr>
+              <a:t>R5 | 0x00000000</a:t>
+            </a:r>
+            <a:br>
+              <a:rPr lang="pt-BR" dirty="0"/>
+            </a:br>
+            <a:r>
+              <a:rPr lang="pt-BR" sz="1200" b="0" i="0" kern="1200" dirty="0">
+                <a:solidFill>
+                  <a:schemeClr val="tx1"/>
+                </a:solidFill>
+                <a:effectLst/>
+                <a:latin typeface="Times New Roman" pitchFamily="18" charset="0"/>
+                <a:ea typeface="+mn-ea"/>
+                <a:cs typeface="+mn-cs"/>
+              </a:rPr>
+              <a:t>...</a:t>
+            </a:r>
+            <a:br>
+              <a:rPr lang="pt-BR" dirty="0"/>
+            </a:br>
+            <a:r>
+              <a:rPr lang="pt-BR" sz="1200" b="0" i="0" kern="1200" dirty="0">
+                <a:solidFill>
+                  <a:schemeClr val="tx1"/>
+                </a:solidFill>
+                <a:effectLst/>
+                <a:latin typeface="Times New Roman" pitchFamily="18" charset="0"/>
+                <a:ea typeface="+mn-ea"/>
+                <a:cs typeface="+mn-cs"/>
+              </a:rPr>
+              <a:t>R13 | 0x10000200</a:t>
+            </a:r>
+            <a:endParaRPr lang="en-US" dirty="0"/>
+          </a:p>
+        </p:txBody>
+      </p:sp>
+    </p:spTree>
+    <p:extLst>
+      <p:ext uri="{BB962C8B-B14F-4D97-AF65-F5344CB8AC3E}">
+        <p14:creationId xmlns:p14="http://schemas.microsoft.com/office/powerpoint/2010/main" val="2351661810"/>
+      </p:ext>
+    </p:extLst>
+  </p:cSld>
+  <p:clrMapOvr>
+    <a:masterClrMapping/>
+  </p:clrMapOvr>
+</p:notes>
+</file>
+
 <file path=ppt/slideLayouts/slideLayout1.xml><?xml version="1.0" encoding="utf-8"?>
 <p:sldLayout xmlns:a="http://schemas.openxmlformats.org/drawingml/2006/main" xmlns:r="http://schemas.openxmlformats.org/officeDocument/2006/relationships" xmlns:p="http://schemas.openxmlformats.org/presentationml/2006/main" showMasterSp="0" type="title" preserve="1">
   <p:cSld name="Title Slide">
@@ -2772,7 +2958,7 @@
             <a:fld id="{BA00D299-558C-468E-A8B3-0F5C3BFA45F9}" type="datetime1">
               <a:rPr lang="en-US" smtClean="0"/>
               <a:pPr/>
-              <a:t>10/7/2025</a:t>
+              <a:t>10/16/2025</a:t>
             </a:fld>
             <a:endParaRPr lang="en-US"/>
           </a:p>
@@ -3136,7 +3322,7 @@
             <a:fld id="{8B22D175-8905-42BE-8088-EB39001CF9E2}" type="datetime1">
               <a:rPr lang="en-US" smtClean="0"/>
               <a:pPr/>
-              <a:t>10/7/2025</a:t>
+              <a:t>10/16/2025</a:t>
             </a:fld>
             <a:endParaRPr lang="en-US"/>
           </a:p>
@@ -3315,7 +3501,7 @@
             <a:fld id="{E62AA8DD-1B66-47DA-8A31-5DCDA0DEF224}" type="datetime1">
               <a:rPr lang="en-US" smtClean="0"/>
               <a:pPr/>
-              <a:t>10/7/2025</a:t>
+              <a:t>10/16/2025</a:t>
             </a:fld>
             <a:endParaRPr lang="en-US"/>
           </a:p>
@@ -3554,7 +3740,7 @@
             <a:fld id="{D3A8BFB9-75E0-4A72-9D54-3C687B559A4D}" type="datetime1">
               <a:rPr lang="en-US" smtClean="0"/>
               <a:pPr/>
-              <a:t>10/7/2025</a:t>
+              <a:t>10/16/2025</a:t>
             </a:fld>
             <a:endParaRPr lang="en-US"/>
           </a:p>
@@ -3827,7 +4013,7 @@
             <a:fld id="{E470CD76-7AB7-4744-8178-DC5367B833CD}" type="datetime1">
               <a:rPr lang="en-US" smtClean="0"/>
               <a:pPr/>
-              <a:t>10/7/2025</a:t>
+              <a:t>10/16/2025</a:t>
             </a:fld>
             <a:endParaRPr lang="en-US"/>
           </a:p>
@@ -4051,7 +4237,7 @@
             <a:fld id="{A5E3FC63-82A8-4ACC-B2CB-6D46E8B59216}" type="datetime1">
               <a:rPr lang="en-US" smtClean="0"/>
               <a:pPr/>
-              <a:t>10/7/2025</a:t>
+              <a:t>10/16/2025</a:t>
             </a:fld>
             <a:endParaRPr lang="en-US"/>
           </a:p>
@@ -4407,7 +4593,7 @@
             <a:fld id="{D3A9B8A6-94F4-4AF6-98DE-0FFC617E1C31}" type="datetime1">
               <a:rPr lang="en-US" smtClean="0"/>
               <a:pPr/>
-              <a:t>10/7/2025</a:t>
+              <a:t>10/16/2025</a:t>
             </a:fld>
             <a:endParaRPr lang="en-US"/>
           </a:p>
@@ -4643,7 +4829,7 @@
             <a:fld id="{573CF4FC-8D0E-4C14-A02E-A429C4519FEF}" type="datetime1">
               <a:rPr lang="en-US" smtClean="0"/>
               <a:pPr/>
-              <a:t>10/7/2025</a:t>
+              <a:t>10/16/2025</a:t>
             </a:fld>
             <a:endParaRPr lang="en-US"/>
           </a:p>
@@ -4788,7 +4974,7 @@
             <a:fld id="{06BDC487-A287-485A-B215-4EC98DD3E443}" type="datetime1">
               <a:rPr lang="en-US" smtClean="0"/>
               <a:pPr/>
-              <a:t>10/7/2025</a:t>
+              <a:t>10/16/2025</a:t>
             </a:fld>
             <a:endParaRPr lang="en-US"/>
           </a:p>
@@ -5069,7 +5255,7 @@
             <a:fld id="{46049AC6-4AC4-4D5F-9A1B-0E1C0FF133F9}" type="datetime1">
               <a:rPr lang="en-US" smtClean="0"/>
               <a:pPr/>
-              <a:t>10/7/2025</a:t>
+              <a:t>10/16/2025</a:t>
             </a:fld>
             <a:endParaRPr lang="en-US"/>
           </a:p>
@@ -5480,7 +5666,7 @@
             <a:fld id="{83AF4EF9-9AC8-4842-AFC3-C27337CCABE8}" type="datetime1">
               <a:rPr lang="en-US" smtClean="0"/>
               <a:pPr/>
-              <a:t>10/7/2025</a:t>
+              <a:t>10/16/2025</a:t>
             </a:fld>
             <a:endParaRPr lang="en-US"/>
           </a:p>
@@ -5821,7 +6007,7 @@
             <a:fld id="{8DF0DD18-6EB7-49F7-A70C-A012EDB48BDB}" type="datetime1">
               <a:rPr lang="en-US" smtClean="0"/>
               <a:pPr/>
-              <a:t>10/7/2025</a:t>
+              <a:t>10/16/2025</a:t>
             </a:fld>
             <a:endParaRPr lang="en-US"/>
           </a:p>
@@ -8888,6 +9074,2249 @@
     <p:extLst>
       <p:ext uri="{BB962C8B-B14F-4D97-AF65-F5344CB8AC3E}">
         <p14:creationId xmlns:p14="http://schemas.microsoft.com/office/powerpoint/2010/main" val="2882502133"/>
+      </p:ext>
+    </p:extLst>
+  </p:cSld>
+  <p:clrMapOvr>
+    <a:masterClrMapping/>
+  </p:clrMapOvr>
+  <p:transition>
+    <p:pull dir="ru"/>
+  </p:transition>
+</p:sld>
+</file>
+
+<file path=ppt/slides/slide14.xml><?xml version="1.0" encoding="utf-8"?>
+<p:sld xmlns:a="http://schemas.openxmlformats.org/drawingml/2006/main" xmlns:r="http://schemas.openxmlformats.org/officeDocument/2006/relationships" xmlns:p="http://schemas.openxmlformats.org/presentationml/2006/main">
+  <p:cSld>
+    <p:spTree>
+      <p:nvGrpSpPr>
+        <p:cNvPr id="1" name=""/>
+        <p:cNvGrpSpPr/>
+        <p:nvPr/>
+      </p:nvGrpSpPr>
+      <p:grpSpPr>
+        <a:xfrm>
+          <a:off x="0" y="0"/>
+          <a:ext cx="0" cy="0"/>
+          <a:chOff x="0" y="0"/>
+          <a:chExt cx="0" cy="0"/>
+        </a:xfrm>
+      </p:grpSpPr>
+      <p:sp>
+        <p:nvSpPr>
+          <p:cNvPr id="2" name="Title 1">
+            <a:extLst>
+              <a:ext uri="{FF2B5EF4-FFF2-40B4-BE49-F238E27FC236}">
+                <a16:creationId xmlns:a16="http://schemas.microsoft.com/office/drawing/2014/main" id="{F578278E-4A38-6767-6648-B9C79941AF43}"/>
+              </a:ext>
+            </a:extLst>
+          </p:cNvPr>
+          <p:cNvSpPr>
+            <a:spLocks noGrp="1"/>
+          </p:cNvSpPr>
+          <p:nvPr>
+            <p:ph type="title"/>
+          </p:nvPr>
+        </p:nvSpPr>
+        <p:spPr>
+          <a:xfrm>
+            <a:off x="4464040" y="243245"/>
+            <a:ext cx="4676172" cy="990600"/>
+          </a:xfrm>
+        </p:spPr>
+        <p:txBody>
+          <a:bodyPr>
+            <a:normAutofit fontScale="90000"/>
+          </a:bodyPr>
+          <a:lstStyle/>
+          <a:p>
+            <a:r>
+              <a:rPr lang="en-US" dirty="0"/>
+              <a:t>Compute register and memory values at each step of this program</a:t>
+            </a:r>
+          </a:p>
+        </p:txBody>
+      </p:sp>
+      <p:sp>
+        <p:nvSpPr>
+          <p:cNvPr id="3" name="Slide Number Placeholder 2">
+            <a:extLst>
+              <a:ext uri="{FF2B5EF4-FFF2-40B4-BE49-F238E27FC236}">
+                <a16:creationId xmlns:a16="http://schemas.microsoft.com/office/drawing/2014/main" id="{475BC598-EF55-AB51-D906-12E17238C9A8}"/>
+              </a:ext>
+            </a:extLst>
+          </p:cNvPr>
+          <p:cNvSpPr>
+            <a:spLocks noGrp="1"/>
+          </p:cNvSpPr>
+          <p:nvPr>
+            <p:ph type="sldNum" sz="quarter" idx="12"/>
+          </p:nvPr>
+        </p:nvSpPr>
+        <p:spPr>
+          <a:xfrm>
+            <a:off x="724422" y="6277253"/>
+            <a:ext cx="1981200" cy="365760"/>
+          </a:xfrm>
+        </p:spPr>
+        <p:txBody>
+          <a:bodyPr/>
+          <a:lstStyle/>
+          <a:p>
+            <a:fld id="{AEE14D4A-FE32-40AF-B06D-E9622816B101}" type="slidenum">
+              <a:rPr lang="en-US" smtClean="0"/>
+              <a:pPr/>
+              <a:t>14</a:t>
+            </a:fld>
+            <a:endParaRPr lang="en-US"/>
+          </a:p>
+        </p:txBody>
+      </p:sp>
+      <p:graphicFrame>
+        <p:nvGraphicFramePr>
+          <p:cNvPr id="5" name="Content Placeholder 4">
+            <a:extLst>
+              <a:ext uri="{FF2B5EF4-FFF2-40B4-BE49-F238E27FC236}">
+                <a16:creationId xmlns:a16="http://schemas.microsoft.com/office/drawing/2014/main" id="{291244C1-EEA0-B959-8AAA-2875319F934B}"/>
+              </a:ext>
+            </a:extLst>
+          </p:cNvPr>
+          <p:cNvGraphicFramePr>
+            <a:graphicFrameLocks noGrp="1"/>
+          </p:cNvGraphicFramePr>
+          <p:nvPr>
+            <p:ph sz="quarter" idx="1"/>
+          </p:nvPr>
+        </p:nvGraphicFramePr>
+        <p:xfrm>
+          <a:off x="6802126" y="3426241"/>
+          <a:ext cx="2219325" cy="2966720"/>
+        </p:xfrm>
+        <a:graphic>
+          <a:graphicData uri="http://schemas.openxmlformats.org/drawingml/2006/table">
+            <a:tbl>
+              <a:tblPr firstRow="1" bandRow="1">
+                <a:tableStyleId>{5940675A-B579-460E-94D1-54222C63F5DA}</a:tableStyleId>
+              </a:tblPr>
+              <a:tblGrid>
+                <a:gridCol w="537012">
+                  <a:extLst>
+                    <a:ext uri="{9D8B030D-6E8A-4147-A177-3AD203B41FA5}">
+                      <a16:colId xmlns:a16="http://schemas.microsoft.com/office/drawing/2014/main" val="3133599075"/>
+                    </a:ext>
+                  </a:extLst>
+                </a:gridCol>
+                <a:gridCol w="1682313">
+                  <a:extLst>
+                    <a:ext uri="{9D8B030D-6E8A-4147-A177-3AD203B41FA5}">
+                      <a16:colId xmlns:a16="http://schemas.microsoft.com/office/drawing/2014/main" val="1327154262"/>
+                    </a:ext>
+                  </a:extLst>
+                </a:gridCol>
+              </a:tblGrid>
+              <a:tr h="370840">
+                <a:tc>
+                  <a:txBody>
+                    <a:bodyPr/>
+                    <a:lstStyle/>
+                    <a:p>
+                      <a:pPr marL="0" algn="ctr" rtl="0" eaLnBrk="1" latinLnBrk="0" hangingPunct="1"/>
+                      <a:r>
+                        <a:rPr kumimoji="0" lang="en-US" kern="1200" dirty="0">
+                          <a:solidFill>
+                            <a:schemeClr val="tx1"/>
+                          </a:solidFill>
+                          <a:latin typeface="+mn-lt"/>
+                          <a:ea typeface="+mn-ea"/>
+                          <a:cs typeface="+mn-cs"/>
+                        </a:rPr>
+                        <a:t>R0</a:t>
+                      </a:r>
+                    </a:p>
+                  </a:txBody>
+                  <a:tcPr/>
+                </a:tc>
+                <a:tc>
+                  <a:txBody>
+                    <a:bodyPr/>
+                    <a:lstStyle/>
+                    <a:p>
+                      <a:pPr marL="0" algn="ctr" rtl="0" eaLnBrk="1" latinLnBrk="0" hangingPunct="1"/>
+                      <a:r>
+                        <a:rPr kumimoji="0" lang="pt-BR" kern="1200" dirty="0">
+                          <a:solidFill>
+                            <a:schemeClr val="tx1"/>
+                          </a:solidFill>
+                          <a:latin typeface="+mn-lt"/>
+                          <a:ea typeface="+mn-ea"/>
+                          <a:cs typeface="+mn-cs"/>
+                        </a:rPr>
+                        <a:t>0x00000000</a:t>
+                      </a:r>
+                      <a:endParaRPr kumimoji="0" lang="en-US" kern="1200" dirty="0">
+                        <a:solidFill>
+                          <a:schemeClr val="tx1"/>
+                        </a:solidFill>
+                        <a:latin typeface="+mn-lt"/>
+                        <a:ea typeface="+mn-ea"/>
+                        <a:cs typeface="+mn-cs"/>
+                      </a:endParaRPr>
+                    </a:p>
+                  </a:txBody>
+                  <a:tcPr/>
+                </a:tc>
+                <a:extLst>
+                  <a:ext uri="{0D108BD9-81ED-4DB2-BD59-A6C34878D82A}">
+                    <a16:rowId xmlns:a16="http://schemas.microsoft.com/office/drawing/2014/main" val="1814596732"/>
+                  </a:ext>
+                </a:extLst>
+              </a:tr>
+              <a:tr h="370840">
+                <a:tc>
+                  <a:txBody>
+                    <a:bodyPr/>
+                    <a:lstStyle/>
+                    <a:p>
+                      <a:pPr marL="0" algn="ctr" rtl="0" eaLnBrk="1" latinLnBrk="0" hangingPunct="1"/>
+                      <a:r>
+                        <a:rPr kumimoji="0" lang="en-US" kern="1200" dirty="0">
+                          <a:solidFill>
+                            <a:schemeClr val="tx1"/>
+                          </a:solidFill>
+                          <a:latin typeface="+mn-lt"/>
+                          <a:ea typeface="+mn-ea"/>
+                          <a:cs typeface="+mn-cs"/>
+                        </a:rPr>
+                        <a:t>R1</a:t>
+                      </a:r>
+                    </a:p>
+                  </a:txBody>
+                  <a:tcPr/>
+                </a:tc>
+                <a:tc>
+                  <a:txBody>
+                    <a:bodyPr/>
+                    <a:lstStyle/>
+                    <a:p>
+                      <a:pPr marL="0" algn="ctr" rtl="0" eaLnBrk="1" latinLnBrk="0" hangingPunct="1"/>
+                      <a:r>
+                        <a:rPr lang="pt-BR" sz="1800" b="0" i="0" kern="1200" dirty="0">
+                          <a:solidFill>
+                            <a:schemeClr val="tx1"/>
+                          </a:solidFill>
+                          <a:effectLst/>
+                          <a:latin typeface="Times New Roman" pitchFamily="18" charset="0"/>
+                          <a:ea typeface="+mn-ea"/>
+                          <a:cs typeface="+mn-cs"/>
+                        </a:rPr>
+                        <a:t>0x10000200</a:t>
+                      </a:r>
+                      <a:endParaRPr kumimoji="0" lang="en-US" kern="1200" dirty="0">
+                        <a:solidFill>
+                          <a:schemeClr val="tx1"/>
+                        </a:solidFill>
+                        <a:latin typeface="+mn-lt"/>
+                        <a:ea typeface="+mn-ea"/>
+                        <a:cs typeface="+mn-cs"/>
+                      </a:endParaRPr>
+                    </a:p>
+                  </a:txBody>
+                  <a:tcPr/>
+                </a:tc>
+                <a:extLst>
+                  <a:ext uri="{0D108BD9-81ED-4DB2-BD59-A6C34878D82A}">
+                    <a16:rowId xmlns:a16="http://schemas.microsoft.com/office/drawing/2014/main" val="481549779"/>
+                  </a:ext>
+                </a:extLst>
+              </a:tr>
+              <a:tr h="370840">
+                <a:tc>
+                  <a:txBody>
+                    <a:bodyPr/>
+                    <a:lstStyle/>
+                    <a:p>
+                      <a:pPr marL="0" algn="ctr" rtl="0" eaLnBrk="1" latinLnBrk="0" hangingPunct="1"/>
+                      <a:r>
+                        <a:rPr kumimoji="0" lang="en-US" kern="1200" dirty="0">
+                          <a:solidFill>
+                            <a:schemeClr val="tx1"/>
+                          </a:solidFill>
+                          <a:latin typeface="+mn-lt"/>
+                          <a:ea typeface="+mn-ea"/>
+                          <a:cs typeface="+mn-cs"/>
+                        </a:rPr>
+                        <a:t>R2</a:t>
+                      </a:r>
+                    </a:p>
+                  </a:txBody>
+                  <a:tcPr/>
+                </a:tc>
+                <a:tc>
+                  <a:txBody>
+                    <a:bodyPr/>
+                    <a:lstStyle/>
+                    <a:p>
+                      <a:pPr marL="0" algn="ctr" rtl="0" eaLnBrk="1" latinLnBrk="0" hangingPunct="1"/>
+                      <a:r>
+                        <a:rPr lang="pt-BR" sz="1800" b="0" i="0" kern="1200" dirty="0">
+                          <a:solidFill>
+                            <a:schemeClr val="tx1"/>
+                          </a:solidFill>
+                          <a:effectLst/>
+                          <a:latin typeface="Times New Roman" pitchFamily="18" charset="0"/>
+                          <a:ea typeface="+mn-ea"/>
+                          <a:cs typeface="+mn-cs"/>
+                        </a:rPr>
+                        <a:t>0x0000FFFF</a:t>
+                      </a:r>
+                      <a:endParaRPr kumimoji="0" lang="en-US" kern="1200" dirty="0">
+                        <a:solidFill>
+                          <a:schemeClr val="tx1"/>
+                        </a:solidFill>
+                        <a:latin typeface="+mn-lt"/>
+                        <a:ea typeface="+mn-ea"/>
+                        <a:cs typeface="+mn-cs"/>
+                      </a:endParaRPr>
+                    </a:p>
+                  </a:txBody>
+                  <a:tcPr/>
+                </a:tc>
+                <a:extLst>
+                  <a:ext uri="{0D108BD9-81ED-4DB2-BD59-A6C34878D82A}">
+                    <a16:rowId xmlns:a16="http://schemas.microsoft.com/office/drawing/2014/main" val="1337800547"/>
+                  </a:ext>
+                </a:extLst>
+              </a:tr>
+              <a:tr h="370840">
+                <a:tc>
+                  <a:txBody>
+                    <a:bodyPr/>
+                    <a:lstStyle/>
+                    <a:p>
+                      <a:pPr marL="0" algn="ctr" rtl="0" eaLnBrk="1" latinLnBrk="0" hangingPunct="1"/>
+                      <a:r>
+                        <a:rPr kumimoji="0" lang="en-US" kern="1200" dirty="0">
+                          <a:solidFill>
+                            <a:schemeClr val="tx1"/>
+                          </a:solidFill>
+                          <a:latin typeface="+mn-lt"/>
+                          <a:ea typeface="+mn-ea"/>
+                          <a:cs typeface="+mn-cs"/>
+                        </a:rPr>
+                        <a:t>R3</a:t>
+                      </a:r>
+                    </a:p>
+                  </a:txBody>
+                  <a:tcPr/>
+                </a:tc>
+                <a:tc>
+                  <a:txBody>
+                    <a:bodyPr/>
+                    <a:lstStyle/>
+                    <a:p>
+                      <a:pPr marL="0" algn="ctr" rtl="0" eaLnBrk="1" latinLnBrk="0" hangingPunct="1"/>
+                      <a:r>
+                        <a:rPr lang="pt-BR" sz="1800" b="0" i="0" kern="1200" dirty="0">
+                          <a:solidFill>
+                            <a:schemeClr val="tx1"/>
+                          </a:solidFill>
+                          <a:effectLst/>
+                          <a:latin typeface="Times New Roman" pitchFamily="18" charset="0"/>
+                          <a:ea typeface="+mn-ea"/>
+                          <a:cs typeface="+mn-cs"/>
+                        </a:rPr>
+                        <a:t>0x18675309</a:t>
+                      </a:r>
+                      <a:endParaRPr kumimoji="0" lang="en-US" kern="1200" dirty="0">
+                        <a:solidFill>
+                          <a:schemeClr val="tx1"/>
+                        </a:solidFill>
+                        <a:latin typeface="+mn-lt"/>
+                        <a:ea typeface="+mn-ea"/>
+                        <a:cs typeface="+mn-cs"/>
+                      </a:endParaRPr>
+                    </a:p>
+                  </a:txBody>
+                  <a:tcPr/>
+                </a:tc>
+                <a:extLst>
+                  <a:ext uri="{0D108BD9-81ED-4DB2-BD59-A6C34878D82A}">
+                    <a16:rowId xmlns:a16="http://schemas.microsoft.com/office/drawing/2014/main" val="365453190"/>
+                  </a:ext>
+                </a:extLst>
+              </a:tr>
+              <a:tr h="370840">
+                <a:tc>
+                  <a:txBody>
+                    <a:bodyPr/>
+                    <a:lstStyle/>
+                    <a:p>
+                      <a:pPr marL="0" algn="ctr" rtl="0" eaLnBrk="1" latinLnBrk="0" hangingPunct="1"/>
+                      <a:r>
+                        <a:rPr kumimoji="0" lang="en-US" kern="1200" dirty="0">
+                          <a:solidFill>
+                            <a:schemeClr val="tx1"/>
+                          </a:solidFill>
+                          <a:latin typeface="+mn-lt"/>
+                          <a:ea typeface="+mn-ea"/>
+                          <a:cs typeface="+mn-cs"/>
+                        </a:rPr>
+                        <a:t>R4</a:t>
+                      </a:r>
+                    </a:p>
+                  </a:txBody>
+                  <a:tcPr/>
+                </a:tc>
+                <a:tc>
+                  <a:txBody>
+                    <a:bodyPr/>
+                    <a:lstStyle/>
+                    <a:p>
+                      <a:pPr marL="0" algn="ctr" rtl="0" eaLnBrk="1" latinLnBrk="0" hangingPunct="1"/>
+                      <a:r>
+                        <a:rPr lang="pt-BR" sz="1800" b="0" i="0" kern="1200" dirty="0">
+                          <a:solidFill>
+                            <a:schemeClr val="tx1"/>
+                          </a:solidFill>
+                          <a:effectLst/>
+                          <a:latin typeface="Times New Roman" pitchFamily="18" charset="0"/>
+                          <a:ea typeface="+mn-ea"/>
+                          <a:cs typeface="+mn-cs"/>
+                        </a:rPr>
+                        <a:t>0x00000000</a:t>
+                      </a:r>
+                      <a:endParaRPr kumimoji="0" lang="en-US" kern="1200" dirty="0">
+                        <a:solidFill>
+                          <a:schemeClr val="tx1"/>
+                        </a:solidFill>
+                        <a:latin typeface="+mn-lt"/>
+                        <a:ea typeface="+mn-ea"/>
+                        <a:cs typeface="+mn-cs"/>
+                      </a:endParaRPr>
+                    </a:p>
+                  </a:txBody>
+                  <a:tcPr/>
+                </a:tc>
+                <a:extLst>
+                  <a:ext uri="{0D108BD9-81ED-4DB2-BD59-A6C34878D82A}">
+                    <a16:rowId xmlns:a16="http://schemas.microsoft.com/office/drawing/2014/main" val="2217285831"/>
+                  </a:ext>
+                </a:extLst>
+              </a:tr>
+              <a:tr h="370840">
+                <a:tc>
+                  <a:txBody>
+                    <a:bodyPr/>
+                    <a:lstStyle/>
+                    <a:p>
+                      <a:pPr marL="0" algn="ctr" rtl="0" eaLnBrk="1" latinLnBrk="0" hangingPunct="1"/>
+                      <a:r>
+                        <a:rPr kumimoji="0" lang="en-US" kern="1200" dirty="0">
+                          <a:solidFill>
+                            <a:schemeClr val="tx1"/>
+                          </a:solidFill>
+                          <a:latin typeface="+mn-lt"/>
+                          <a:ea typeface="+mn-ea"/>
+                          <a:cs typeface="+mn-cs"/>
+                        </a:rPr>
+                        <a:t>R5</a:t>
+                      </a:r>
+                    </a:p>
+                  </a:txBody>
+                  <a:tcPr/>
+                </a:tc>
+                <a:tc>
+                  <a:txBody>
+                    <a:bodyPr/>
+                    <a:lstStyle/>
+                    <a:p>
+                      <a:pPr marL="0" algn="ctr" rtl="0" eaLnBrk="1" latinLnBrk="0" hangingPunct="1"/>
+                      <a:r>
+                        <a:rPr lang="pt-BR" sz="1800" b="0" i="0" kern="1200" dirty="0">
+                          <a:solidFill>
+                            <a:schemeClr val="tx1"/>
+                          </a:solidFill>
+                          <a:effectLst/>
+                          <a:latin typeface="Times New Roman" pitchFamily="18" charset="0"/>
+                          <a:ea typeface="+mn-ea"/>
+                          <a:cs typeface="+mn-cs"/>
+                        </a:rPr>
+                        <a:t>0x00000000</a:t>
+                      </a:r>
+                      <a:endParaRPr kumimoji="0" lang="en-US" kern="1200" dirty="0">
+                        <a:solidFill>
+                          <a:schemeClr val="tx1"/>
+                        </a:solidFill>
+                        <a:latin typeface="+mn-lt"/>
+                        <a:ea typeface="+mn-ea"/>
+                        <a:cs typeface="+mn-cs"/>
+                      </a:endParaRPr>
+                    </a:p>
+                  </a:txBody>
+                  <a:tcPr/>
+                </a:tc>
+                <a:extLst>
+                  <a:ext uri="{0D108BD9-81ED-4DB2-BD59-A6C34878D82A}">
+                    <a16:rowId xmlns:a16="http://schemas.microsoft.com/office/drawing/2014/main" val="4012525772"/>
+                  </a:ext>
+                </a:extLst>
+              </a:tr>
+              <a:tr h="370840">
+                <a:tc>
+                  <a:txBody>
+                    <a:bodyPr/>
+                    <a:lstStyle/>
+                    <a:p>
+                      <a:pPr marL="0" algn="ctr" rtl="0" eaLnBrk="1" latinLnBrk="0" hangingPunct="1"/>
+                      <a:r>
+                        <a:rPr kumimoji="0" lang="en-US" kern="1200" dirty="0">
+                          <a:solidFill>
+                            <a:schemeClr val="tx1"/>
+                          </a:solidFill>
+                          <a:latin typeface="+mn-lt"/>
+                          <a:ea typeface="+mn-ea"/>
+                          <a:cs typeface="+mn-cs"/>
+                        </a:rPr>
+                        <a:t>…</a:t>
+                      </a:r>
+                    </a:p>
+                  </a:txBody>
+                  <a:tcPr/>
+                </a:tc>
+                <a:tc>
+                  <a:txBody>
+                    <a:bodyPr/>
+                    <a:lstStyle/>
+                    <a:p>
+                      <a:pPr marL="0" algn="ctr" rtl="0" eaLnBrk="1" latinLnBrk="0" hangingPunct="1"/>
+                      <a:endParaRPr kumimoji="0" lang="en-US" kern="1200" dirty="0">
+                        <a:solidFill>
+                          <a:schemeClr val="tx1"/>
+                        </a:solidFill>
+                        <a:latin typeface="+mn-lt"/>
+                        <a:ea typeface="+mn-ea"/>
+                        <a:cs typeface="+mn-cs"/>
+                      </a:endParaRPr>
+                    </a:p>
+                  </a:txBody>
+                  <a:tcPr/>
+                </a:tc>
+                <a:extLst>
+                  <a:ext uri="{0D108BD9-81ED-4DB2-BD59-A6C34878D82A}">
+                    <a16:rowId xmlns:a16="http://schemas.microsoft.com/office/drawing/2014/main" val="1767889990"/>
+                  </a:ext>
+                </a:extLst>
+              </a:tr>
+              <a:tr h="370840">
+                <a:tc>
+                  <a:txBody>
+                    <a:bodyPr/>
+                    <a:lstStyle/>
+                    <a:p>
+                      <a:pPr marL="0" algn="ctr" rtl="0" eaLnBrk="1" latinLnBrk="0" hangingPunct="1"/>
+                      <a:r>
+                        <a:rPr kumimoji="0" lang="en-US" sz="1600" kern="1200" dirty="0">
+                          <a:solidFill>
+                            <a:schemeClr val="tx1"/>
+                          </a:solidFill>
+                          <a:latin typeface="+mn-lt"/>
+                          <a:ea typeface="+mn-ea"/>
+                          <a:cs typeface="+mn-cs"/>
+                        </a:rPr>
+                        <a:t>R13</a:t>
+                      </a:r>
+                    </a:p>
+                  </a:txBody>
+                  <a:tcPr/>
+                </a:tc>
+                <a:tc>
+                  <a:txBody>
+                    <a:bodyPr/>
+                    <a:lstStyle/>
+                    <a:p>
+                      <a:pPr marL="0" algn="ctr" rtl="0" eaLnBrk="1" latinLnBrk="0" hangingPunct="1"/>
+                      <a:r>
+                        <a:rPr lang="pt-BR" sz="1800" b="0" i="0" kern="1200" dirty="0">
+                          <a:solidFill>
+                            <a:schemeClr val="tx1"/>
+                          </a:solidFill>
+                          <a:effectLst/>
+                          <a:latin typeface="Times New Roman" pitchFamily="18" charset="0"/>
+                          <a:ea typeface="+mn-ea"/>
+                          <a:cs typeface="+mn-cs"/>
+                        </a:rPr>
+                        <a:t>0x10000200</a:t>
+                      </a:r>
+                      <a:endParaRPr kumimoji="0" lang="en-US" kern="1200" dirty="0">
+                        <a:solidFill>
+                          <a:schemeClr val="tx1"/>
+                        </a:solidFill>
+                        <a:latin typeface="+mn-lt"/>
+                        <a:ea typeface="+mn-ea"/>
+                        <a:cs typeface="+mn-cs"/>
+                      </a:endParaRPr>
+                    </a:p>
+                  </a:txBody>
+                  <a:tcPr/>
+                </a:tc>
+                <a:extLst>
+                  <a:ext uri="{0D108BD9-81ED-4DB2-BD59-A6C34878D82A}">
+                    <a16:rowId xmlns:a16="http://schemas.microsoft.com/office/drawing/2014/main" val="2656245920"/>
+                  </a:ext>
+                </a:extLst>
+              </a:tr>
+            </a:tbl>
+          </a:graphicData>
+        </a:graphic>
+      </p:graphicFrame>
+      <p:graphicFrame>
+        <p:nvGraphicFramePr>
+          <p:cNvPr id="10" name="Content Placeholder 9">
+            <a:extLst>
+              <a:ext uri="{FF2B5EF4-FFF2-40B4-BE49-F238E27FC236}">
+                <a16:creationId xmlns:a16="http://schemas.microsoft.com/office/drawing/2014/main" id="{C66D22D6-5FBA-4885-A9F9-CB0B7935CCAF}"/>
+              </a:ext>
+            </a:extLst>
+          </p:cNvPr>
+          <p:cNvGraphicFramePr>
+            <a:graphicFrameLocks/>
+          </p:cNvGraphicFramePr>
+          <p:nvPr/>
+        </p:nvGraphicFramePr>
+        <p:xfrm>
+          <a:off x="404523" y="243245"/>
+          <a:ext cx="599580" cy="5933440"/>
+        </p:xfrm>
+        <a:graphic>
+          <a:graphicData uri="http://schemas.openxmlformats.org/drawingml/2006/table">
+            <a:tbl>
+              <a:tblPr firstRow="1" bandRow="1">
+                <a:tableStyleId>{5940675A-B579-460E-94D1-54222C63F5DA}</a:tableStyleId>
+              </a:tblPr>
+              <a:tblGrid>
+                <a:gridCol w="599580">
+                  <a:extLst>
+                    <a:ext uri="{9D8B030D-6E8A-4147-A177-3AD203B41FA5}">
+                      <a16:colId xmlns:a16="http://schemas.microsoft.com/office/drawing/2014/main" val="484224260"/>
+                    </a:ext>
+                  </a:extLst>
+                </a:gridCol>
+              </a:tblGrid>
+              <a:tr h="370840">
+                <a:tc>
+                  <a:txBody>
+                    <a:bodyPr/>
+                    <a:lstStyle/>
+                    <a:p>
+                      <a:pPr algn="ctr"/>
+                      <a:r>
+                        <a:rPr lang="en-US" dirty="0"/>
+                        <a:t>0F</a:t>
+                      </a:r>
+                    </a:p>
+                  </a:txBody>
+                  <a:tcPr/>
+                </a:tc>
+                <a:extLst>
+                  <a:ext uri="{0D108BD9-81ED-4DB2-BD59-A6C34878D82A}">
+                    <a16:rowId xmlns:a16="http://schemas.microsoft.com/office/drawing/2014/main" val="2369013834"/>
+                  </a:ext>
+                </a:extLst>
+              </a:tr>
+              <a:tr h="370840">
+                <a:tc>
+                  <a:txBody>
+                    <a:bodyPr/>
+                    <a:lstStyle/>
+                    <a:p>
+                      <a:pPr algn="ctr"/>
+                      <a:r>
+                        <a:rPr lang="en-US" dirty="0"/>
+                        <a:t>0E</a:t>
+                      </a:r>
+                    </a:p>
+                  </a:txBody>
+                  <a:tcPr/>
+                </a:tc>
+                <a:extLst>
+                  <a:ext uri="{0D108BD9-81ED-4DB2-BD59-A6C34878D82A}">
+                    <a16:rowId xmlns:a16="http://schemas.microsoft.com/office/drawing/2014/main" val="859108738"/>
+                  </a:ext>
+                </a:extLst>
+              </a:tr>
+              <a:tr h="370840">
+                <a:tc>
+                  <a:txBody>
+                    <a:bodyPr/>
+                    <a:lstStyle/>
+                    <a:p>
+                      <a:pPr algn="ctr"/>
+                      <a:r>
+                        <a:rPr lang="en-US" dirty="0"/>
+                        <a:t>0D</a:t>
+                      </a:r>
+                    </a:p>
+                  </a:txBody>
+                  <a:tcPr/>
+                </a:tc>
+                <a:extLst>
+                  <a:ext uri="{0D108BD9-81ED-4DB2-BD59-A6C34878D82A}">
+                    <a16:rowId xmlns:a16="http://schemas.microsoft.com/office/drawing/2014/main" val="771704"/>
+                  </a:ext>
+                </a:extLst>
+              </a:tr>
+              <a:tr h="370840">
+                <a:tc>
+                  <a:txBody>
+                    <a:bodyPr/>
+                    <a:lstStyle/>
+                    <a:p>
+                      <a:pPr algn="ctr"/>
+                      <a:r>
+                        <a:rPr lang="en-US" dirty="0"/>
+                        <a:t>0C</a:t>
+                      </a:r>
+                    </a:p>
+                  </a:txBody>
+                  <a:tcPr/>
+                </a:tc>
+                <a:extLst>
+                  <a:ext uri="{0D108BD9-81ED-4DB2-BD59-A6C34878D82A}">
+                    <a16:rowId xmlns:a16="http://schemas.microsoft.com/office/drawing/2014/main" val="3326601895"/>
+                  </a:ext>
+                </a:extLst>
+              </a:tr>
+              <a:tr h="370840">
+                <a:tc>
+                  <a:txBody>
+                    <a:bodyPr/>
+                    <a:lstStyle/>
+                    <a:p>
+                      <a:pPr algn="ctr"/>
+                      <a:r>
+                        <a:rPr lang="en-US" dirty="0"/>
+                        <a:t>0B</a:t>
+                      </a:r>
+                    </a:p>
+                  </a:txBody>
+                  <a:tcPr/>
+                </a:tc>
+                <a:extLst>
+                  <a:ext uri="{0D108BD9-81ED-4DB2-BD59-A6C34878D82A}">
+                    <a16:rowId xmlns:a16="http://schemas.microsoft.com/office/drawing/2014/main" val="3935045626"/>
+                  </a:ext>
+                </a:extLst>
+              </a:tr>
+              <a:tr h="370840">
+                <a:tc>
+                  <a:txBody>
+                    <a:bodyPr/>
+                    <a:lstStyle/>
+                    <a:p>
+                      <a:pPr algn="ctr"/>
+                      <a:r>
+                        <a:rPr lang="en-US" dirty="0"/>
+                        <a:t>0A</a:t>
+                      </a:r>
+                    </a:p>
+                  </a:txBody>
+                  <a:tcPr/>
+                </a:tc>
+                <a:extLst>
+                  <a:ext uri="{0D108BD9-81ED-4DB2-BD59-A6C34878D82A}">
+                    <a16:rowId xmlns:a16="http://schemas.microsoft.com/office/drawing/2014/main" val="1822976809"/>
+                  </a:ext>
+                </a:extLst>
+              </a:tr>
+              <a:tr h="370840">
+                <a:tc>
+                  <a:txBody>
+                    <a:bodyPr/>
+                    <a:lstStyle/>
+                    <a:p>
+                      <a:pPr algn="ctr"/>
+                      <a:r>
+                        <a:rPr lang="en-US" dirty="0"/>
+                        <a:t>09</a:t>
+                      </a:r>
+                    </a:p>
+                  </a:txBody>
+                  <a:tcPr/>
+                </a:tc>
+                <a:extLst>
+                  <a:ext uri="{0D108BD9-81ED-4DB2-BD59-A6C34878D82A}">
+                    <a16:rowId xmlns:a16="http://schemas.microsoft.com/office/drawing/2014/main" val="4097080959"/>
+                  </a:ext>
+                </a:extLst>
+              </a:tr>
+              <a:tr h="370840">
+                <a:tc>
+                  <a:txBody>
+                    <a:bodyPr/>
+                    <a:lstStyle/>
+                    <a:p>
+                      <a:pPr algn="ctr"/>
+                      <a:r>
+                        <a:rPr lang="en-US" dirty="0"/>
+                        <a:t>08</a:t>
+                      </a:r>
+                    </a:p>
+                  </a:txBody>
+                  <a:tcPr/>
+                </a:tc>
+                <a:extLst>
+                  <a:ext uri="{0D108BD9-81ED-4DB2-BD59-A6C34878D82A}">
+                    <a16:rowId xmlns:a16="http://schemas.microsoft.com/office/drawing/2014/main" val="2491619246"/>
+                  </a:ext>
+                </a:extLst>
+              </a:tr>
+              <a:tr h="370840">
+                <a:tc>
+                  <a:txBody>
+                    <a:bodyPr/>
+                    <a:lstStyle/>
+                    <a:p>
+                      <a:pPr algn="ctr"/>
+                      <a:r>
+                        <a:rPr lang="en-US" dirty="0"/>
+                        <a:t>07</a:t>
+                      </a:r>
+                    </a:p>
+                  </a:txBody>
+                  <a:tcPr/>
+                </a:tc>
+                <a:extLst>
+                  <a:ext uri="{0D108BD9-81ED-4DB2-BD59-A6C34878D82A}">
+                    <a16:rowId xmlns:a16="http://schemas.microsoft.com/office/drawing/2014/main" val="1151578626"/>
+                  </a:ext>
+                </a:extLst>
+              </a:tr>
+              <a:tr h="370840">
+                <a:tc>
+                  <a:txBody>
+                    <a:bodyPr/>
+                    <a:lstStyle/>
+                    <a:p>
+                      <a:pPr algn="ctr"/>
+                      <a:r>
+                        <a:rPr lang="en-US" dirty="0"/>
+                        <a:t>06</a:t>
+                      </a:r>
+                    </a:p>
+                  </a:txBody>
+                  <a:tcPr/>
+                </a:tc>
+                <a:extLst>
+                  <a:ext uri="{0D108BD9-81ED-4DB2-BD59-A6C34878D82A}">
+                    <a16:rowId xmlns:a16="http://schemas.microsoft.com/office/drawing/2014/main" val="619717567"/>
+                  </a:ext>
+                </a:extLst>
+              </a:tr>
+              <a:tr h="370840">
+                <a:tc>
+                  <a:txBody>
+                    <a:bodyPr/>
+                    <a:lstStyle/>
+                    <a:p>
+                      <a:pPr algn="ctr"/>
+                      <a:r>
+                        <a:rPr lang="en-US" dirty="0"/>
+                        <a:t>05</a:t>
+                      </a:r>
+                    </a:p>
+                  </a:txBody>
+                  <a:tcPr/>
+                </a:tc>
+                <a:extLst>
+                  <a:ext uri="{0D108BD9-81ED-4DB2-BD59-A6C34878D82A}">
+                    <a16:rowId xmlns:a16="http://schemas.microsoft.com/office/drawing/2014/main" val="873267540"/>
+                  </a:ext>
+                </a:extLst>
+              </a:tr>
+              <a:tr h="370840">
+                <a:tc>
+                  <a:txBody>
+                    <a:bodyPr/>
+                    <a:lstStyle/>
+                    <a:p>
+                      <a:pPr algn="ctr"/>
+                      <a:r>
+                        <a:rPr lang="en-US" dirty="0"/>
+                        <a:t>04</a:t>
+                      </a:r>
+                    </a:p>
+                  </a:txBody>
+                  <a:tcPr/>
+                </a:tc>
+                <a:extLst>
+                  <a:ext uri="{0D108BD9-81ED-4DB2-BD59-A6C34878D82A}">
+                    <a16:rowId xmlns:a16="http://schemas.microsoft.com/office/drawing/2014/main" val="2595540954"/>
+                  </a:ext>
+                </a:extLst>
+              </a:tr>
+              <a:tr h="370840">
+                <a:tc>
+                  <a:txBody>
+                    <a:bodyPr/>
+                    <a:lstStyle/>
+                    <a:p>
+                      <a:pPr algn="ctr"/>
+                      <a:r>
+                        <a:rPr lang="en-US" dirty="0"/>
+                        <a:t>03</a:t>
+                      </a:r>
+                    </a:p>
+                  </a:txBody>
+                  <a:tcPr/>
+                </a:tc>
+                <a:extLst>
+                  <a:ext uri="{0D108BD9-81ED-4DB2-BD59-A6C34878D82A}">
+                    <a16:rowId xmlns:a16="http://schemas.microsoft.com/office/drawing/2014/main" val="3259480353"/>
+                  </a:ext>
+                </a:extLst>
+              </a:tr>
+              <a:tr h="370840">
+                <a:tc>
+                  <a:txBody>
+                    <a:bodyPr/>
+                    <a:lstStyle/>
+                    <a:p>
+                      <a:pPr algn="ctr"/>
+                      <a:r>
+                        <a:rPr lang="en-US" dirty="0"/>
+                        <a:t>02</a:t>
+                      </a:r>
+                    </a:p>
+                  </a:txBody>
+                  <a:tcPr/>
+                </a:tc>
+                <a:extLst>
+                  <a:ext uri="{0D108BD9-81ED-4DB2-BD59-A6C34878D82A}">
+                    <a16:rowId xmlns:a16="http://schemas.microsoft.com/office/drawing/2014/main" val="930990083"/>
+                  </a:ext>
+                </a:extLst>
+              </a:tr>
+              <a:tr h="370840">
+                <a:tc>
+                  <a:txBody>
+                    <a:bodyPr/>
+                    <a:lstStyle/>
+                    <a:p>
+                      <a:pPr algn="ctr"/>
+                      <a:r>
+                        <a:rPr lang="en-US" dirty="0"/>
+                        <a:t>01</a:t>
+                      </a:r>
+                    </a:p>
+                  </a:txBody>
+                  <a:tcPr/>
+                </a:tc>
+                <a:extLst>
+                  <a:ext uri="{0D108BD9-81ED-4DB2-BD59-A6C34878D82A}">
+                    <a16:rowId xmlns:a16="http://schemas.microsoft.com/office/drawing/2014/main" val="1201759903"/>
+                  </a:ext>
+                </a:extLst>
+              </a:tr>
+              <a:tr h="370840">
+                <a:tc>
+                  <a:txBody>
+                    <a:bodyPr/>
+                    <a:lstStyle/>
+                    <a:p>
+                      <a:pPr algn="ctr"/>
+                      <a:r>
+                        <a:rPr lang="en-US" dirty="0"/>
+                        <a:t>00</a:t>
+                      </a:r>
+                    </a:p>
+                  </a:txBody>
+                  <a:tcPr/>
+                </a:tc>
+                <a:extLst>
+                  <a:ext uri="{0D108BD9-81ED-4DB2-BD59-A6C34878D82A}">
+                    <a16:rowId xmlns:a16="http://schemas.microsoft.com/office/drawing/2014/main" val="3680620396"/>
+                  </a:ext>
+                </a:extLst>
+              </a:tr>
+            </a:tbl>
+          </a:graphicData>
+        </a:graphic>
+      </p:graphicFrame>
+      <p:graphicFrame>
+        <p:nvGraphicFramePr>
+          <p:cNvPr id="11" name="Content Placeholder 9">
+            <a:extLst>
+              <a:ext uri="{FF2B5EF4-FFF2-40B4-BE49-F238E27FC236}">
+                <a16:creationId xmlns:a16="http://schemas.microsoft.com/office/drawing/2014/main" id="{77A79F3C-0AA4-B3F6-0754-9C4A0DBE1DEF}"/>
+              </a:ext>
+            </a:extLst>
+          </p:cNvPr>
+          <p:cNvGraphicFramePr>
+            <a:graphicFrameLocks/>
+          </p:cNvGraphicFramePr>
+          <p:nvPr/>
+        </p:nvGraphicFramePr>
+        <p:xfrm>
+          <a:off x="1725741" y="223520"/>
+          <a:ext cx="599580" cy="5933440"/>
+        </p:xfrm>
+        <a:graphic>
+          <a:graphicData uri="http://schemas.openxmlformats.org/drawingml/2006/table">
+            <a:tbl>
+              <a:tblPr firstRow="1" bandRow="1">
+                <a:tableStyleId>{5940675A-B579-460E-94D1-54222C63F5DA}</a:tableStyleId>
+              </a:tblPr>
+              <a:tblGrid>
+                <a:gridCol w="599580">
+                  <a:extLst>
+                    <a:ext uri="{9D8B030D-6E8A-4147-A177-3AD203B41FA5}">
+                      <a16:colId xmlns:a16="http://schemas.microsoft.com/office/drawing/2014/main" val="484224260"/>
+                    </a:ext>
+                  </a:extLst>
+                </a:gridCol>
+              </a:tblGrid>
+              <a:tr h="370840">
+                <a:tc>
+                  <a:txBody>
+                    <a:bodyPr/>
+                    <a:lstStyle/>
+                    <a:p>
+                      <a:pPr algn="ctr"/>
+                      <a:r>
+                        <a:rPr lang="en-US" dirty="0"/>
+                        <a:t>1F</a:t>
+                      </a:r>
+                    </a:p>
+                  </a:txBody>
+                  <a:tcPr/>
+                </a:tc>
+                <a:extLst>
+                  <a:ext uri="{0D108BD9-81ED-4DB2-BD59-A6C34878D82A}">
+                    <a16:rowId xmlns:a16="http://schemas.microsoft.com/office/drawing/2014/main" val="2369013834"/>
+                  </a:ext>
+                </a:extLst>
+              </a:tr>
+              <a:tr h="370840">
+                <a:tc>
+                  <a:txBody>
+                    <a:bodyPr/>
+                    <a:lstStyle/>
+                    <a:p>
+                      <a:pPr algn="ctr"/>
+                      <a:r>
+                        <a:rPr lang="en-US" dirty="0"/>
+                        <a:t>1E</a:t>
+                      </a:r>
+                    </a:p>
+                  </a:txBody>
+                  <a:tcPr/>
+                </a:tc>
+                <a:extLst>
+                  <a:ext uri="{0D108BD9-81ED-4DB2-BD59-A6C34878D82A}">
+                    <a16:rowId xmlns:a16="http://schemas.microsoft.com/office/drawing/2014/main" val="859108738"/>
+                  </a:ext>
+                </a:extLst>
+              </a:tr>
+              <a:tr h="370840">
+                <a:tc>
+                  <a:txBody>
+                    <a:bodyPr/>
+                    <a:lstStyle/>
+                    <a:p>
+                      <a:pPr algn="ctr"/>
+                      <a:r>
+                        <a:rPr lang="en-US" dirty="0"/>
+                        <a:t>1D</a:t>
+                      </a:r>
+                    </a:p>
+                  </a:txBody>
+                  <a:tcPr/>
+                </a:tc>
+                <a:extLst>
+                  <a:ext uri="{0D108BD9-81ED-4DB2-BD59-A6C34878D82A}">
+                    <a16:rowId xmlns:a16="http://schemas.microsoft.com/office/drawing/2014/main" val="771704"/>
+                  </a:ext>
+                </a:extLst>
+              </a:tr>
+              <a:tr h="370840">
+                <a:tc>
+                  <a:txBody>
+                    <a:bodyPr/>
+                    <a:lstStyle/>
+                    <a:p>
+                      <a:pPr algn="ctr"/>
+                      <a:r>
+                        <a:rPr lang="en-US" dirty="0"/>
+                        <a:t>1C</a:t>
+                      </a:r>
+                    </a:p>
+                  </a:txBody>
+                  <a:tcPr/>
+                </a:tc>
+                <a:extLst>
+                  <a:ext uri="{0D108BD9-81ED-4DB2-BD59-A6C34878D82A}">
+                    <a16:rowId xmlns:a16="http://schemas.microsoft.com/office/drawing/2014/main" val="3326601895"/>
+                  </a:ext>
+                </a:extLst>
+              </a:tr>
+              <a:tr h="370840">
+                <a:tc>
+                  <a:txBody>
+                    <a:bodyPr/>
+                    <a:lstStyle/>
+                    <a:p>
+                      <a:pPr algn="ctr"/>
+                      <a:r>
+                        <a:rPr lang="en-US" dirty="0"/>
+                        <a:t>1B</a:t>
+                      </a:r>
+                    </a:p>
+                  </a:txBody>
+                  <a:tcPr/>
+                </a:tc>
+                <a:extLst>
+                  <a:ext uri="{0D108BD9-81ED-4DB2-BD59-A6C34878D82A}">
+                    <a16:rowId xmlns:a16="http://schemas.microsoft.com/office/drawing/2014/main" val="3935045626"/>
+                  </a:ext>
+                </a:extLst>
+              </a:tr>
+              <a:tr h="370840">
+                <a:tc>
+                  <a:txBody>
+                    <a:bodyPr/>
+                    <a:lstStyle/>
+                    <a:p>
+                      <a:pPr algn="ctr"/>
+                      <a:r>
+                        <a:rPr lang="en-US" dirty="0"/>
+                        <a:t>1A</a:t>
+                      </a:r>
+                    </a:p>
+                  </a:txBody>
+                  <a:tcPr/>
+                </a:tc>
+                <a:extLst>
+                  <a:ext uri="{0D108BD9-81ED-4DB2-BD59-A6C34878D82A}">
+                    <a16:rowId xmlns:a16="http://schemas.microsoft.com/office/drawing/2014/main" val="1822976809"/>
+                  </a:ext>
+                </a:extLst>
+              </a:tr>
+              <a:tr h="370840">
+                <a:tc>
+                  <a:txBody>
+                    <a:bodyPr/>
+                    <a:lstStyle/>
+                    <a:p>
+                      <a:pPr algn="ctr"/>
+                      <a:r>
+                        <a:rPr lang="en-US" dirty="0"/>
+                        <a:t>19</a:t>
+                      </a:r>
+                    </a:p>
+                  </a:txBody>
+                  <a:tcPr/>
+                </a:tc>
+                <a:extLst>
+                  <a:ext uri="{0D108BD9-81ED-4DB2-BD59-A6C34878D82A}">
+                    <a16:rowId xmlns:a16="http://schemas.microsoft.com/office/drawing/2014/main" val="4097080959"/>
+                  </a:ext>
+                </a:extLst>
+              </a:tr>
+              <a:tr h="370840">
+                <a:tc>
+                  <a:txBody>
+                    <a:bodyPr/>
+                    <a:lstStyle/>
+                    <a:p>
+                      <a:pPr algn="ctr"/>
+                      <a:r>
+                        <a:rPr lang="en-US" dirty="0"/>
+                        <a:t>18</a:t>
+                      </a:r>
+                    </a:p>
+                  </a:txBody>
+                  <a:tcPr/>
+                </a:tc>
+                <a:extLst>
+                  <a:ext uri="{0D108BD9-81ED-4DB2-BD59-A6C34878D82A}">
+                    <a16:rowId xmlns:a16="http://schemas.microsoft.com/office/drawing/2014/main" val="2491619246"/>
+                  </a:ext>
+                </a:extLst>
+              </a:tr>
+              <a:tr h="370840">
+                <a:tc>
+                  <a:txBody>
+                    <a:bodyPr/>
+                    <a:lstStyle/>
+                    <a:p>
+                      <a:pPr algn="ctr"/>
+                      <a:r>
+                        <a:rPr lang="en-US" dirty="0"/>
+                        <a:t>17</a:t>
+                      </a:r>
+                    </a:p>
+                  </a:txBody>
+                  <a:tcPr/>
+                </a:tc>
+                <a:extLst>
+                  <a:ext uri="{0D108BD9-81ED-4DB2-BD59-A6C34878D82A}">
+                    <a16:rowId xmlns:a16="http://schemas.microsoft.com/office/drawing/2014/main" val="1151578626"/>
+                  </a:ext>
+                </a:extLst>
+              </a:tr>
+              <a:tr h="370840">
+                <a:tc>
+                  <a:txBody>
+                    <a:bodyPr/>
+                    <a:lstStyle/>
+                    <a:p>
+                      <a:pPr algn="ctr"/>
+                      <a:r>
+                        <a:rPr lang="en-US" dirty="0"/>
+                        <a:t>16</a:t>
+                      </a:r>
+                    </a:p>
+                  </a:txBody>
+                  <a:tcPr/>
+                </a:tc>
+                <a:extLst>
+                  <a:ext uri="{0D108BD9-81ED-4DB2-BD59-A6C34878D82A}">
+                    <a16:rowId xmlns:a16="http://schemas.microsoft.com/office/drawing/2014/main" val="619717567"/>
+                  </a:ext>
+                </a:extLst>
+              </a:tr>
+              <a:tr h="370840">
+                <a:tc>
+                  <a:txBody>
+                    <a:bodyPr/>
+                    <a:lstStyle/>
+                    <a:p>
+                      <a:pPr algn="ctr"/>
+                      <a:r>
+                        <a:rPr lang="en-US" dirty="0"/>
+                        <a:t>15</a:t>
+                      </a:r>
+                    </a:p>
+                  </a:txBody>
+                  <a:tcPr/>
+                </a:tc>
+                <a:extLst>
+                  <a:ext uri="{0D108BD9-81ED-4DB2-BD59-A6C34878D82A}">
+                    <a16:rowId xmlns:a16="http://schemas.microsoft.com/office/drawing/2014/main" val="873267540"/>
+                  </a:ext>
+                </a:extLst>
+              </a:tr>
+              <a:tr h="370840">
+                <a:tc>
+                  <a:txBody>
+                    <a:bodyPr/>
+                    <a:lstStyle/>
+                    <a:p>
+                      <a:pPr algn="ctr"/>
+                      <a:r>
+                        <a:rPr lang="en-US" dirty="0"/>
+                        <a:t>14</a:t>
+                      </a:r>
+                    </a:p>
+                  </a:txBody>
+                  <a:tcPr/>
+                </a:tc>
+                <a:extLst>
+                  <a:ext uri="{0D108BD9-81ED-4DB2-BD59-A6C34878D82A}">
+                    <a16:rowId xmlns:a16="http://schemas.microsoft.com/office/drawing/2014/main" val="2595540954"/>
+                  </a:ext>
+                </a:extLst>
+              </a:tr>
+              <a:tr h="370840">
+                <a:tc>
+                  <a:txBody>
+                    <a:bodyPr/>
+                    <a:lstStyle/>
+                    <a:p>
+                      <a:pPr algn="ctr"/>
+                      <a:r>
+                        <a:rPr lang="en-US" dirty="0"/>
+                        <a:t>13</a:t>
+                      </a:r>
+                    </a:p>
+                  </a:txBody>
+                  <a:tcPr/>
+                </a:tc>
+                <a:extLst>
+                  <a:ext uri="{0D108BD9-81ED-4DB2-BD59-A6C34878D82A}">
+                    <a16:rowId xmlns:a16="http://schemas.microsoft.com/office/drawing/2014/main" val="3259480353"/>
+                  </a:ext>
+                </a:extLst>
+              </a:tr>
+              <a:tr h="370840">
+                <a:tc>
+                  <a:txBody>
+                    <a:bodyPr/>
+                    <a:lstStyle/>
+                    <a:p>
+                      <a:pPr algn="ctr"/>
+                      <a:r>
+                        <a:rPr lang="en-US" dirty="0"/>
+                        <a:t>12</a:t>
+                      </a:r>
+                    </a:p>
+                  </a:txBody>
+                  <a:tcPr/>
+                </a:tc>
+                <a:extLst>
+                  <a:ext uri="{0D108BD9-81ED-4DB2-BD59-A6C34878D82A}">
+                    <a16:rowId xmlns:a16="http://schemas.microsoft.com/office/drawing/2014/main" val="930990083"/>
+                  </a:ext>
+                </a:extLst>
+              </a:tr>
+              <a:tr h="370840">
+                <a:tc>
+                  <a:txBody>
+                    <a:bodyPr/>
+                    <a:lstStyle/>
+                    <a:p>
+                      <a:pPr algn="ctr"/>
+                      <a:r>
+                        <a:rPr lang="en-US" dirty="0"/>
+                        <a:t>11</a:t>
+                      </a:r>
+                    </a:p>
+                  </a:txBody>
+                  <a:tcPr/>
+                </a:tc>
+                <a:extLst>
+                  <a:ext uri="{0D108BD9-81ED-4DB2-BD59-A6C34878D82A}">
+                    <a16:rowId xmlns:a16="http://schemas.microsoft.com/office/drawing/2014/main" val="1201759903"/>
+                  </a:ext>
+                </a:extLst>
+              </a:tr>
+              <a:tr h="370840">
+                <a:tc>
+                  <a:txBody>
+                    <a:bodyPr/>
+                    <a:lstStyle/>
+                    <a:p>
+                      <a:pPr algn="ctr"/>
+                      <a:r>
+                        <a:rPr lang="en-US" dirty="0"/>
+                        <a:t>10</a:t>
+                      </a:r>
+                    </a:p>
+                  </a:txBody>
+                  <a:tcPr/>
+                </a:tc>
+                <a:extLst>
+                  <a:ext uri="{0D108BD9-81ED-4DB2-BD59-A6C34878D82A}">
+                    <a16:rowId xmlns:a16="http://schemas.microsoft.com/office/drawing/2014/main" val="3680620396"/>
+                  </a:ext>
+                </a:extLst>
+              </a:tr>
+            </a:tbl>
+          </a:graphicData>
+        </a:graphic>
+      </p:graphicFrame>
+      <p:graphicFrame>
+        <p:nvGraphicFramePr>
+          <p:cNvPr id="12" name="Content Placeholder 9">
+            <a:extLst>
+              <a:ext uri="{FF2B5EF4-FFF2-40B4-BE49-F238E27FC236}">
+                <a16:creationId xmlns:a16="http://schemas.microsoft.com/office/drawing/2014/main" id="{8E0D479D-BD41-9749-78E1-AE7DB7FEF62B}"/>
+              </a:ext>
+            </a:extLst>
+          </p:cNvPr>
+          <p:cNvGraphicFramePr>
+            <a:graphicFrameLocks/>
+          </p:cNvGraphicFramePr>
+          <p:nvPr/>
+        </p:nvGraphicFramePr>
+        <p:xfrm>
+          <a:off x="3320795" y="219948"/>
+          <a:ext cx="599580" cy="5933440"/>
+        </p:xfrm>
+        <a:graphic>
+          <a:graphicData uri="http://schemas.openxmlformats.org/drawingml/2006/table">
+            <a:tbl>
+              <a:tblPr firstRow="1" bandRow="1">
+                <a:tableStyleId>{5940675A-B579-460E-94D1-54222C63F5DA}</a:tableStyleId>
+              </a:tblPr>
+              <a:tblGrid>
+                <a:gridCol w="599580">
+                  <a:extLst>
+                    <a:ext uri="{9D8B030D-6E8A-4147-A177-3AD203B41FA5}">
+                      <a16:colId xmlns:a16="http://schemas.microsoft.com/office/drawing/2014/main" val="484224260"/>
+                    </a:ext>
+                  </a:extLst>
+                </a:gridCol>
+              </a:tblGrid>
+              <a:tr h="370840">
+                <a:tc>
+                  <a:txBody>
+                    <a:bodyPr/>
+                    <a:lstStyle/>
+                    <a:p>
+                      <a:pPr algn="ctr"/>
+                      <a:r>
+                        <a:rPr lang="en-US" dirty="0"/>
+                        <a:t>AA</a:t>
+                      </a:r>
+                    </a:p>
+                  </a:txBody>
+                  <a:tcPr/>
+                </a:tc>
+                <a:extLst>
+                  <a:ext uri="{0D108BD9-81ED-4DB2-BD59-A6C34878D82A}">
+                    <a16:rowId xmlns:a16="http://schemas.microsoft.com/office/drawing/2014/main" val="2369013834"/>
+                  </a:ext>
+                </a:extLst>
+              </a:tr>
+              <a:tr h="370840">
+                <a:tc>
+                  <a:txBody>
+                    <a:bodyPr/>
+                    <a:lstStyle/>
+                    <a:p>
+                      <a:pPr algn="ctr"/>
+                      <a:r>
+                        <a:rPr lang="en-US" dirty="0"/>
+                        <a:t>99</a:t>
+                      </a:r>
+                    </a:p>
+                  </a:txBody>
+                  <a:tcPr/>
+                </a:tc>
+                <a:extLst>
+                  <a:ext uri="{0D108BD9-81ED-4DB2-BD59-A6C34878D82A}">
+                    <a16:rowId xmlns:a16="http://schemas.microsoft.com/office/drawing/2014/main" val="859108738"/>
+                  </a:ext>
+                </a:extLst>
+              </a:tr>
+              <a:tr h="370840">
+                <a:tc>
+                  <a:txBody>
+                    <a:bodyPr/>
+                    <a:lstStyle/>
+                    <a:p>
+                      <a:pPr algn="ctr"/>
+                      <a:r>
+                        <a:rPr lang="en-US" dirty="0"/>
+                        <a:t>88</a:t>
+                      </a:r>
+                    </a:p>
+                  </a:txBody>
+                  <a:tcPr/>
+                </a:tc>
+                <a:extLst>
+                  <a:ext uri="{0D108BD9-81ED-4DB2-BD59-A6C34878D82A}">
+                    <a16:rowId xmlns:a16="http://schemas.microsoft.com/office/drawing/2014/main" val="771704"/>
+                  </a:ext>
+                </a:extLst>
+              </a:tr>
+              <a:tr h="370840">
+                <a:tc>
+                  <a:txBody>
+                    <a:bodyPr/>
+                    <a:lstStyle/>
+                    <a:p>
+                      <a:pPr algn="ctr"/>
+                      <a:r>
+                        <a:rPr lang="en-US" dirty="0"/>
+                        <a:t>77</a:t>
+                      </a:r>
+                    </a:p>
+                  </a:txBody>
+                  <a:tcPr/>
+                </a:tc>
+                <a:extLst>
+                  <a:ext uri="{0D108BD9-81ED-4DB2-BD59-A6C34878D82A}">
+                    <a16:rowId xmlns:a16="http://schemas.microsoft.com/office/drawing/2014/main" val="3326601895"/>
+                  </a:ext>
+                </a:extLst>
+              </a:tr>
+              <a:tr h="370840">
+                <a:tc>
+                  <a:txBody>
+                    <a:bodyPr/>
+                    <a:lstStyle/>
+                    <a:p>
+                      <a:pPr algn="ctr"/>
+                      <a:r>
+                        <a:rPr lang="en-US" dirty="0"/>
+                        <a:t>66</a:t>
+                      </a:r>
+                    </a:p>
+                  </a:txBody>
+                  <a:tcPr/>
+                </a:tc>
+                <a:extLst>
+                  <a:ext uri="{0D108BD9-81ED-4DB2-BD59-A6C34878D82A}">
+                    <a16:rowId xmlns:a16="http://schemas.microsoft.com/office/drawing/2014/main" val="3935045626"/>
+                  </a:ext>
+                </a:extLst>
+              </a:tr>
+              <a:tr h="370840">
+                <a:tc>
+                  <a:txBody>
+                    <a:bodyPr/>
+                    <a:lstStyle/>
+                    <a:p>
+                      <a:pPr algn="ctr"/>
+                      <a:r>
+                        <a:rPr lang="en-US" dirty="0"/>
+                        <a:t>55</a:t>
+                      </a:r>
+                    </a:p>
+                  </a:txBody>
+                  <a:tcPr/>
+                </a:tc>
+                <a:extLst>
+                  <a:ext uri="{0D108BD9-81ED-4DB2-BD59-A6C34878D82A}">
+                    <a16:rowId xmlns:a16="http://schemas.microsoft.com/office/drawing/2014/main" val="1822976809"/>
+                  </a:ext>
+                </a:extLst>
+              </a:tr>
+              <a:tr h="370840">
+                <a:tc>
+                  <a:txBody>
+                    <a:bodyPr/>
+                    <a:lstStyle/>
+                    <a:p>
+                      <a:pPr algn="ctr"/>
+                      <a:r>
+                        <a:rPr lang="en-US" dirty="0"/>
+                        <a:t>44</a:t>
+                      </a:r>
+                    </a:p>
+                  </a:txBody>
+                  <a:tcPr/>
+                </a:tc>
+                <a:extLst>
+                  <a:ext uri="{0D108BD9-81ED-4DB2-BD59-A6C34878D82A}">
+                    <a16:rowId xmlns:a16="http://schemas.microsoft.com/office/drawing/2014/main" val="4097080959"/>
+                  </a:ext>
+                </a:extLst>
+              </a:tr>
+              <a:tr h="370840">
+                <a:tc>
+                  <a:txBody>
+                    <a:bodyPr/>
+                    <a:lstStyle/>
+                    <a:p>
+                      <a:pPr algn="ctr"/>
+                      <a:r>
+                        <a:rPr lang="en-US" dirty="0"/>
+                        <a:t>33</a:t>
+                      </a:r>
+                    </a:p>
+                  </a:txBody>
+                  <a:tcPr/>
+                </a:tc>
+                <a:extLst>
+                  <a:ext uri="{0D108BD9-81ED-4DB2-BD59-A6C34878D82A}">
+                    <a16:rowId xmlns:a16="http://schemas.microsoft.com/office/drawing/2014/main" val="2491619246"/>
+                  </a:ext>
+                </a:extLst>
+              </a:tr>
+              <a:tr h="370840">
+                <a:tc>
+                  <a:txBody>
+                    <a:bodyPr/>
+                    <a:lstStyle/>
+                    <a:p>
+                      <a:pPr algn="ctr"/>
+                      <a:r>
+                        <a:rPr lang="en-US" dirty="0"/>
+                        <a:t>22</a:t>
+                      </a:r>
+                    </a:p>
+                  </a:txBody>
+                  <a:tcPr/>
+                </a:tc>
+                <a:extLst>
+                  <a:ext uri="{0D108BD9-81ED-4DB2-BD59-A6C34878D82A}">
+                    <a16:rowId xmlns:a16="http://schemas.microsoft.com/office/drawing/2014/main" val="1151578626"/>
+                  </a:ext>
+                </a:extLst>
+              </a:tr>
+              <a:tr h="370840">
+                <a:tc>
+                  <a:txBody>
+                    <a:bodyPr/>
+                    <a:lstStyle/>
+                    <a:p>
+                      <a:pPr algn="ctr"/>
+                      <a:r>
+                        <a:rPr lang="en-US" dirty="0"/>
+                        <a:t>11</a:t>
+                      </a:r>
+                    </a:p>
+                  </a:txBody>
+                  <a:tcPr/>
+                </a:tc>
+                <a:extLst>
+                  <a:ext uri="{0D108BD9-81ED-4DB2-BD59-A6C34878D82A}">
+                    <a16:rowId xmlns:a16="http://schemas.microsoft.com/office/drawing/2014/main" val="619717567"/>
+                  </a:ext>
+                </a:extLst>
+              </a:tr>
+              <a:tr h="370840">
+                <a:tc>
+                  <a:txBody>
+                    <a:bodyPr/>
+                    <a:lstStyle/>
+                    <a:p>
+                      <a:pPr algn="ctr"/>
+                      <a:r>
+                        <a:rPr lang="en-US" dirty="0"/>
+                        <a:t>FF</a:t>
+                      </a:r>
+                    </a:p>
+                  </a:txBody>
+                  <a:tcPr/>
+                </a:tc>
+                <a:extLst>
+                  <a:ext uri="{0D108BD9-81ED-4DB2-BD59-A6C34878D82A}">
+                    <a16:rowId xmlns:a16="http://schemas.microsoft.com/office/drawing/2014/main" val="873267540"/>
+                  </a:ext>
+                </a:extLst>
+              </a:tr>
+              <a:tr h="370840">
+                <a:tc>
+                  <a:txBody>
+                    <a:bodyPr/>
+                    <a:lstStyle/>
+                    <a:p>
+                      <a:pPr algn="ctr"/>
+                      <a:r>
+                        <a:rPr lang="en-US" dirty="0"/>
+                        <a:t>EE</a:t>
+                      </a:r>
+                    </a:p>
+                  </a:txBody>
+                  <a:tcPr/>
+                </a:tc>
+                <a:extLst>
+                  <a:ext uri="{0D108BD9-81ED-4DB2-BD59-A6C34878D82A}">
+                    <a16:rowId xmlns:a16="http://schemas.microsoft.com/office/drawing/2014/main" val="2595540954"/>
+                  </a:ext>
+                </a:extLst>
+              </a:tr>
+              <a:tr h="370840">
+                <a:tc>
+                  <a:txBody>
+                    <a:bodyPr/>
+                    <a:lstStyle/>
+                    <a:p>
+                      <a:pPr algn="ctr"/>
+                      <a:r>
+                        <a:rPr lang="en-US" dirty="0"/>
+                        <a:t>12</a:t>
+                      </a:r>
+                    </a:p>
+                  </a:txBody>
+                  <a:tcPr/>
+                </a:tc>
+                <a:extLst>
+                  <a:ext uri="{0D108BD9-81ED-4DB2-BD59-A6C34878D82A}">
+                    <a16:rowId xmlns:a16="http://schemas.microsoft.com/office/drawing/2014/main" val="3259480353"/>
+                  </a:ext>
+                </a:extLst>
+              </a:tr>
+              <a:tr h="370840">
+                <a:tc>
+                  <a:txBody>
+                    <a:bodyPr/>
+                    <a:lstStyle/>
+                    <a:p>
+                      <a:pPr algn="ctr"/>
+                      <a:r>
+                        <a:rPr lang="en-US" dirty="0"/>
+                        <a:t>11</a:t>
+                      </a:r>
+                    </a:p>
+                  </a:txBody>
+                  <a:tcPr/>
+                </a:tc>
+                <a:extLst>
+                  <a:ext uri="{0D108BD9-81ED-4DB2-BD59-A6C34878D82A}">
+                    <a16:rowId xmlns:a16="http://schemas.microsoft.com/office/drawing/2014/main" val="930990083"/>
+                  </a:ext>
+                </a:extLst>
+              </a:tr>
+              <a:tr h="370840">
+                <a:tc>
+                  <a:txBody>
+                    <a:bodyPr/>
+                    <a:lstStyle/>
+                    <a:p>
+                      <a:pPr algn="ctr"/>
+                      <a:r>
+                        <a:rPr lang="en-US" dirty="0"/>
+                        <a:t>1B</a:t>
+                      </a:r>
+                    </a:p>
+                  </a:txBody>
+                  <a:tcPr/>
+                </a:tc>
+                <a:extLst>
+                  <a:ext uri="{0D108BD9-81ED-4DB2-BD59-A6C34878D82A}">
+                    <a16:rowId xmlns:a16="http://schemas.microsoft.com/office/drawing/2014/main" val="1201759903"/>
+                  </a:ext>
+                </a:extLst>
+              </a:tr>
+              <a:tr h="370840">
+                <a:tc>
+                  <a:txBody>
+                    <a:bodyPr/>
+                    <a:lstStyle/>
+                    <a:p>
+                      <a:pPr algn="ctr"/>
+                      <a:r>
+                        <a:rPr lang="en-US" dirty="0"/>
+                        <a:t>AA</a:t>
+                      </a:r>
+                    </a:p>
+                  </a:txBody>
+                  <a:tcPr/>
+                </a:tc>
+                <a:extLst>
+                  <a:ext uri="{0D108BD9-81ED-4DB2-BD59-A6C34878D82A}">
+                    <a16:rowId xmlns:a16="http://schemas.microsoft.com/office/drawing/2014/main" val="3680620396"/>
+                  </a:ext>
+                </a:extLst>
+              </a:tr>
+            </a:tbl>
+          </a:graphicData>
+        </a:graphic>
+      </p:graphicFrame>
+      <p:sp>
+        <p:nvSpPr>
+          <p:cNvPr id="16" name="TextBox 15">
+            <a:extLst>
+              <a:ext uri="{FF2B5EF4-FFF2-40B4-BE49-F238E27FC236}">
+                <a16:creationId xmlns:a16="http://schemas.microsoft.com/office/drawing/2014/main" id="{D8691280-3701-7284-8180-9F8BD7E6732F}"/>
+              </a:ext>
+            </a:extLst>
+          </p:cNvPr>
+          <p:cNvSpPr txBox="1"/>
+          <p:nvPr/>
+        </p:nvSpPr>
+        <p:spPr>
+          <a:xfrm>
+            <a:off x="0" y="6156960"/>
+            <a:ext cx="1452880" cy="369332"/>
+          </a:xfrm>
+          <a:prstGeom prst="rect">
+            <a:avLst/>
+          </a:prstGeom>
+          <a:noFill/>
+        </p:spPr>
+        <p:txBody>
+          <a:bodyPr wrap="square">
+            <a:spAutoFit/>
+          </a:bodyPr>
+          <a:lstStyle/>
+          <a:p>
+            <a:r>
+              <a:rPr lang="en-US" sz="1800" b="0" dirty="0">
+                <a:latin typeface="Consolas" panose="020B0609020204030204" pitchFamily="49" charset="0"/>
+                <a:cs typeface="Consolas" panose="020B0609020204030204" pitchFamily="49" charset="0"/>
+              </a:rPr>
+              <a:t>0x100001E0</a:t>
+            </a:r>
+          </a:p>
+        </p:txBody>
+      </p:sp>
+      <p:sp>
+        <p:nvSpPr>
+          <p:cNvPr id="17" name="TextBox 16">
+            <a:extLst>
+              <a:ext uri="{FF2B5EF4-FFF2-40B4-BE49-F238E27FC236}">
+                <a16:creationId xmlns:a16="http://schemas.microsoft.com/office/drawing/2014/main" id="{54DAF454-D38A-E54A-0A83-F3163F2194FD}"/>
+              </a:ext>
+            </a:extLst>
+          </p:cNvPr>
+          <p:cNvSpPr txBox="1"/>
+          <p:nvPr/>
+        </p:nvSpPr>
+        <p:spPr>
+          <a:xfrm>
+            <a:off x="10017" y="6396533"/>
+            <a:ext cx="1818921" cy="369332"/>
+          </a:xfrm>
+          <a:prstGeom prst="rect">
+            <a:avLst/>
+          </a:prstGeom>
+          <a:noFill/>
+        </p:spPr>
+        <p:txBody>
+          <a:bodyPr wrap="square">
+            <a:spAutoFit/>
+          </a:bodyPr>
+          <a:lstStyle/>
+          <a:p>
+            <a:r>
+              <a:rPr lang="en-US" sz="1800" b="0" dirty="0">
+                <a:latin typeface="+mn-lt"/>
+                <a:cs typeface="Consolas" panose="020B0609020204030204" pitchFamily="49" charset="0"/>
+              </a:rPr>
+              <a:t>Mem Address</a:t>
+            </a:r>
+          </a:p>
+        </p:txBody>
+      </p:sp>
+      <p:sp>
+        <p:nvSpPr>
+          <p:cNvPr id="18" name="TextBox 17">
+            <a:extLst>
+              <a:ext uri="{FF2B5EF4-FFF2-40B4-BE49-F238E27FC236}">
+                <a16:creationId xmlns:a16="http://schemas.microsoft.com/office/drawing/2014/main" id="{7E2E3134-A567-7018-92F0-D86F35E570CB}"/>
+              </a:ext>
+            </a:extLst>
+          </p:cNvPr>
+          <p:cNvSpPr txBox="1"/>
+          <p:nvPr/>
+        </p:nvSpPr>
+        <p:spPr>
+          <a:xfrm>
+            <a:off x="1487315" y="6156960"/>
+            <a:ext cx="1452880" cy="369332"/>
+          </a:xfrm>
+          <a:prstGeom prst="rect">
+            <a:avLst/>
+          </a:prstGeom>
+          <a:noFill/>
+        </p:spPr>
+        <p:txBody>
+          <a:bodyPr wrap="square">
+            <a:spAutoFit/>
+          </a:bodyPr>
+          <a:lstStyle/>
+          <a:p>
+            <a:r>
+              <a:rPr lang="en-US" sz="1800" b="0" dirty="0">
+                <a:latin typeface="Consolas" panose="020B0609020204030204" pitchFamily="49" charset="0"/>
+              </a:rPr>
+              <a:t>0x100001F0</a:t>
+            </a:r>
+            <a:endParaRPr lang="en-US" sz="1800" b="0" dirty="0">
+              <a:latin typeface="Consolas" panose="020B0609020204030204" pitchFamily="49" charset="0"/>
+              <a:cs typeface="Consolas" panose="020B0609020204030204" pitchFamily="49" charset="0"/>
+            </a:endParaRPr>
+          </a:p>
+        </p:txBody>
+      </p:sp>
+      <p:sp>
+        <p:nvSpPr>
+          <p:cNvPr id="19" name="TextBox 18">
+            <a:extLst>
+              <a:ext uri="{FF2B5EF4-FFF2-40B4-BE49-F238E27FC236}">
+                <a16:creationId xmlns:a16="http://schemas.microsoft.com/office/drawing/2014/main" id="{57E19796-203A-5975-9E7E-A51D96722A9D}"/>
+              </a:ext>
+            </a:extLst>
+          </p:cNvPr>
+          <p:cNvSpPr txBox="1"/>
+          <p:nvPr/>
+        </p:nvSpPr>
+        <p:spPr>
+          <a:xfrm>
+            <a:off x="2894145" y="6159458"/>
+            <a:ext cx="1452880" cy="369332"/>
+          </a:xfrm>
+          <a:prstGeom prst="rect">
+            <a:avLst/>
+          </a:prstGeom>
+          <a:noFill/>
+        </p:spPr>
+        <p:txBody>
+          <a:bodyPr wrap="square">
+            <a:spAutoFit/>
+          </a:bodyPr>
+          <a:lstStyle/>
+          <a:p>
+            <a:r>
+              <a:rPr lang="en-US" sz="1800" b="0" dirty="0">
+                <a:latin typeface="Consolas" panose="020B0609020204030204" pitchFamily="49" charset="0"/>
+              </a:rPr>
+              <a:t>0x10000200</a:t>
+            </a:r>
+            <a:endParaRPr lang="en-US" sz="1800" b="0" dirty="0">
+              <a:latin typeface="Consolas" panose="020B0609020204030204" pitchFamily="49" charset="0"/>
+              <a:cs typeface="Consolas" panose="020B0609020204030204" pitchFamily="49" charset="0"/>
+            </a:endParaRPr>
+          </a:p>
+        </p:txBody>
+      </p:sp>
+      <p:sp>
+        <p:nvSpPr>
+          <p:cNvPr id="20" name="TextBox 19">
+            <a:extLst>
+              <a:ext uri="{FF2B5EF4-FFF2-40B4-BE49-F238E27FC236}">
+                <a16:creationId xmlns:a16="http://schemas.microsoft.com/office/drawing/2014/main" id="{4246B73D-93B0-BE96-6E77-F5047B876FB4}"/>
+              </a:ext>
+            </a:extLst>
+          </p:cNvPr>
+          <p:cNvSpPr txBox="1"/>
+          <p:nvPr/>
+        </p:nvSpPr>
+        <p:spPr>
+          <a:xfrm>
+            <a:off x="1459041" y="6396533"/>
+            <a:ext cx="1562908" cy="365760"/>
+          </a:xfrm>
+          <a:prstGeom prst="rect">
+            <a:avLst/>
+          </a:prstGeom>
+          <a:noFill/>
+        </p:spPr>
+        <p:txBody>
+          <a:bodyPr wrap="square">
+            <a:spAutoFit/>
+          </a:bodyPr>
+          <a:lstStyle/>
+          <a:p>
+            <a:r>
+              <a:rPr lang="en-US" sz="1800" b="0" dirty="0">
+                <a:latin typeface="+mn-lt"/>
+                <a:cs typeface="Consolas" panose="020B0609020204030204" pitchFamily="49" charset="0"/>
+              </a:rPr>
+              <a:t>Mem Address</a:t>
+            </a:r>
+          </a:p>
+        </p:txBody>
+      </p:sp>
+      <p:sp>
+        <p:nvSpPr>
+          <p:cNvPr id="21" name="TextBox 20">
+            <a:extLst>
+              <a:ext uri="{FF2B5EF4-FFF2-40B4-BE49-F238E27FC236}">
+                <a16:creationId xmlns:a16="http://schemas.microsoft.com/office/drawing/2014/main" id="{2D08279E-530F-10AE-C181-2446B85EE3E6}"/>
+              </a:ext>
+            </a:extLst>
+          </p:cNvPr>
+          <p:cNvSpPr txBox="1"/>
+          <p:nvPr/>
+        </p:nvSpPr>
+        <p:spPr>
+          <a:xfrm>
+            <a:off x="2949805" y="6392961"/>
+            <a:ext cx="1562909" cy="369332"/>
+          </a:xfrm>
+          <a:prstGeom prst="rect">
+            <a:avLst/>
+          </a:prstGeom>
+          <a:noFill/>
+        </p:spPr>
+        <p:txBody>
+          <a:bodyPr wrap="square">
+            <a:spAutoFit/>
+          </a:bodyPr>
+          <a:lstStyle/>
+          <a:p>
+            <a:r>
+              <a:rPr lang="en-US" sz="1800" b="0" dirty="0">
+                <a:latin typeface="+mn-lt"/>
+                <a:cs typeface="Consolas" panose="020B0609020204030204" pitchFamily="49" charset="0"/>
+              </a:rPr>
+              <a:t>Mem Address</a:t>
+            </a:r>
+          </a:p>
+        </p:txBody>
+      </p:sp>
+      <p:sp>
+        <p:nvSpPr>
+          <p:cNvPr id="6" name="Content Placeholder 3">
+            <a:extLst>
+              <a:ext uri="{FF2B5EF4-FFF2-40B4-BE49-F238E27FC236}">
+                <a16:creationId xmlns:a16="http://schemas.microsoft.com/office/drawing/2014/main" id="{57F96825-B097-324D-C2F7-FAFF800F7FC6}"/>
+              </a:ext>
+            </a:extLst>
+          </p:cNvPr>
+          <p:cNvSpPr txBox="1">
+            <a:spLocks/>
+          </p:cNvSpPr>
+          <p:nvPr/>
+        </p:nvSpPr>
+        <p:spPr>
+          <a:xfrm>
+            <a:off x="4091355" y="1331259"/>
+            <a:ext cx="4877877" cy="2686131"/>
+          </a:xfrm>
+          <a:prstGeom prst="rect">
+            <a:avLst/>
+          </a:prstGeom>
+        </p:spPr>
+        <p:txBody>
+          <a:bodyPr vert="horz">
+            <a:normAutofit fontScale="92500" lnSpcReduction="20000"/>
+          </a:bodyPr>
+          <a:lstStyle>
+            <a:lvl1pPr marL="274320" indent="-274320" algn="l" rtl="0" eaLnBrk="1" latinLnBrk="0" hangingPunct="1">
+              <a:spcBef>
+                <a:spcPts val="600"/>
+              </a:spcBef>
+              <a:buClr>
+                <a:schemeClr val="accent1"/>
+              </a:buClr>
+              <a:buSzPct val="76000"/>
+              <a:buFont typeface="Wingdings 3"/>
+              <a:buChar char=""/>
+              <a:defRPr kumimoji="0" sz="2600" kern="1200">
+                <a:solidFill>
+                  <a:schemeClr val="tx1"/>
+                </a:solidFill>
+                <a:latin typeface="+mn-lt"/>
+                <a:ea typeface="+mn-ea"/>
+                <a:cs typeface="+mn-cs"/>
+              </a:defRPr>
+            </a:lvl1pPr>
+            <a:lvl2pPr marL="548640" indent="-274320" algn="l" rtl="0" eaLnBrk="1" latinLnBrk="0" hangingPunct="1">
+              <a:spcBef>
+                <a:spcPts val="500"/>
+              </a:spcBef>
+              <a:buClr>
+                <a:schemeClr val="accent2"/>
+              </a:buClr>
+              <a:buSzPct val="76000"/>
+              <a:buFont typeface="Wingdings 3"/>
+              <a:buChar char=""/>
+              <a:defRPr kumimoji="0" sz="2300" kern="1200">
+                <a:solidFill>
+                  <a:schemeClr val="tx2"/>
+                </a:solidFill>
+                <a:latin typeface="+mn-lt"/>
+                <a:ea typeface="+mn-ea"/>
+                <a:cs typeface="+mn-cs"/>
+              </a:defRPr>
+            </a:lvl2pPr>
+            <a:lvl3pPr marL="822960" indent="-228600" algn="l" rtl="0" eaLnBrk="1" latinLnBrk="0" hangingPunct="1">
+              <a:spcBef>
+                <a:spcPts val="500"/>
+              </a:spcBef>
+              <a:buClr>
+                <a:schemeClr val="bg1">
+                  <a:shade val="50000"/>
+                </a:schemeClr>
+              </a:buClr>
+              <a:buSzPct val="76000"/>
+              <a:buFont typeface="Wingdings 3"/>
+              <a:buChar char=""/>
+              <a:defRPr kumimoji="0" sz="2000" kern="1200">
+                <a:solidFill>
+                  <a:schemeClr val="tx1"/>
+                </a:solidFill>
+                <a:latin typeface="+mn-lt"/>
+                <a:ea typeface="+mn-ea"/>
+                <a:cs typeface="+mn-cs"/>
+              </a:defRPr>
+            </a:lvl3pPr>
+            <a:lvl4pPr marL="1097280" indent="-228600" algn="l" rtl="0" eaLnBrk="1" latinLnBrk="0" hangingPunct="1">
+              <a:spcBef>
+                <a:spcPts val="400"/>
+              </a:spcBef>
+              <a:buClr>
+                <a:schemeClr val="accent2">
+                  <a:shade val="75000"/>
+                </a:schemeClr>
+              </a:buClr>
+              <a:buSzPct val="70000"/>
+              <a:buFont typeface="Wingdings"/>
+              <a:buChar char=""/>
+              <a:defRPr kumimoji="0" sz="1800" kern="1200">
+                <a:solidFill>
+                  <a:schemeClr val="tx1"/>
+                </a:solidFill>
+                <a:latin typeface="+mn-lt"/>
+                <a:ea typeface="+mn-ea"/>
+                <a:cs typeface="+mn-cs"/>
+              </a:defRPr>
+            </a:lvl4pPr>
+            <a:lvl5pPr marL="1371600" indent="-228600" algn="l" rtl="0" eaLnBrk="1" latinLnBrk="0" hangingPunct="1">
+              <a:spcBef>
+                <a:spcPts val="300"/>
+              </a:spcBef>
+              <a:buClr>
+                <a:schemeClr val="accent2"/>
+              </a:buClr>
+              <a:buSzPct val="70000"/>
+              <a:buFont typeface="Wingdings"/>
+              <a:buChar char=""/>
+              <a:defRPr kumimoji="0" sz="1600" kern="1200">
+                <a:solidFill>
+                  <a:schemeClr val="tx1"/>
+                </a:solidFill>
+                <a:latin typeface="+mn-lt"/>
+                <a:ea typeface="+mn-ea"/>
+                <a:cs typeface="+mn-cs"/>
+              </a:defRPr>
+            </a:lvl5pPr>
+            <a:lvl6pPr marL="1645920" indent="-182880" algn="l" rtl="0" eaLnBrk="1" latinLnBrk="0" hangingPunct="1">
+              <a:spcBef>
+                <a:spcPts val="300"/>
+              </a:spcBef>
+              <a:buClr>
+                <a:srgbClr val="9FB8CD">
+                  <a:shade val="75000"/>
+                </a:srgbClr>
+              </a:buClr>
+              <a:buSzPct val="75000"/>
+              <a:buFont typeface="Wingdings 3"/>
+              <a:buChar char=""/>
+              <a:defRPr kumimoji="0" lang="en-US" sz="1600" kern="1200" smtClean="0">
+                <a:solidFill>
+                  <a:schemeClr val="tx1"/>
+                </a:solidFill>
+                <a:latin typeface="+mn-lt"/>
+                <a:ea typeface="+mn-ea"/>
+                <a:cs typeface="+mn-cs"/>
+              </a:defRPr>
+            </a:lvl6pPr>
+            <a:lvl7pPr marL="1828800" indent="-182880" algn="l" rtl="0" eaLnBrk="1" latinLnBrk="0" hangingPunct="1">
+              <a:spcBef>
+                <a:spcPts val="300"/>
+              </a:spcBef>
+              <a:buClr>
+                <a:srgbClr val="727CA3">
+                  <a:shade val="75000"/>
+                </a:srgbClr>
+              </a:buClr>
+              <a:buSzPct val="75000"/>
+              <a:buFont typeface="Wingdings 3"/>
+              <a:buChar char=""/>
+              <a:defRPr kumimoji="0" lang="en-US" sz="1400" kern="1200" smtClean="0">
+                <a:solidFill>
+                  <a:schemeClr val="tx1"/>
+                </a:solidFill>
+                <a:latin typeface="+mn-lt"/>
+                <a:ea typeface="+mn-ea"/>
+                <a:cs typeface="+mn-cs"/>
+              </a:defRPr>
+            </a:lvl7pPr>
+            <a:lvl8pPr marL="2011680" indent="-182880" algn="l" rtl="0" eaLnBrk="1" latinLnBrk="0" hangingPunct="1">
+              <a:spcBef>
+                <a:spcPts val="300"/>
+              </a:spcBef>
+              <a:buClr>
+                <a:prstClr val="white">
+                  <a:shade val="50000"/>
+                </a:prstClr>
+              </a:buClr>
+              <a:buSzPct val="75000"/>
+              <a:buFont typeface="Wingdings 3"/>
+              <a:buChar char=""/>
+              <a:defRPr kumimoji="0" lang="en-US" sz="1400" kern="1200" smtClean="0">
+                <a:solidFill>
+                  <a:schemeClr val="tx1"/>
+                </a:solidFill>
+                <a:latin typeface="+mn-lt"/>
+                <a:ea typeface="+mn-ea"/>
+                <a:cs typeface="+mn-cs"/>
+              </a:defRPr>
+            </a:lvl8pPr>
+            <a:lvl9pPr marL="2194560" indent="-182880" algn="l" rtl="0" eaLnBrk="1" latinLnBrk="0" hangingPunct="1">
+              <a:spcBef>
+                <a:spcPts val="300"/>
+              </a:spcBef>
+              <a:buClr>
+                <a:srgbClr val="9FB8CD"/>
+              </a:buClr>
+              <a:buSzPct val="75000"/>
+              <a:buFont typeface="Wingdings 3"/>
+              <a:buChar char=""/>
+              <a:defRPr kumimoji="0" lang="en-US" sz="1200" kern="1200" smtClean="0">
+                <a:solidFill>
+                  <a:schemeClr val="tx1"/>
+                </a:solidFill>
+                <a:latin typeface="+mn-lt"/>
+                <a:ea typeface="+mn-ea"/>
+                <a:cs typeface="+mn-cs"/>
+              </a:defRPr>
+            </a:lvl9pPr>
+          </a:lstStyle>
+          <a:p>
+            <a:pPr fontAlgn="auto">
+              <a:spcAft>
+                <a:spcPts val="0"/>
+              </a:spcAft>
+            </a:pPr>
+            <a:r>
+              <a:rPr lang="pt-BR" b="0" dirty="0"/>
+              <a:t>MOVW R0, #0xAFE1</a:t>
+            </a:r>
+          </a:p>
+          <a:p>
+            <a:pPr fontAlgn="auto">
+              <a:spcAft>
+                <a:spcPts val="0"/>
+              </a:spcAft>
+            </a:pPr>
+            <a:r>
+              <a:rPr lang="pt-BR" b="0" dirty="0"/>
+              <a:t>MOVT R0, #0xBADC</a:t>
+            </a:r>
+          </a:p>
+          <a:p>
+            <a:pPr fontAlgn="auto">
+              <a:spcAft>
+                <a:spcPts val="0"/>
+              </a:spcAft>
+            </a:pPr>
+            <a:r>
+              <a:rPr lang="pt-BR" b="0" dirty="0"/>
+              <a:t>MOVT R2, #0xABCD</a:t>
+            </a:r>
+          </a:p>
+          <a:p>
+            <a:pPr fontAlgn="auto">
+              <a:spcAft>
+                <a:spcPts val="0"/>
+              </a:spcAft>
+            </a:pPr>
+            <a:r>
+              <a:rPr lang="pt-BR" b="0" dirty="0"/>
+              <a:t>STR R3, [R1]</a:t>
+            </a:r>
+          </a:p>
+          <a:p>
+            <a:pPr fontAlgn="auto">
+              <a:spcAft>
+                <a:spcPts val="0"/>
+              </a:spcAft>
+            </a:pPr>
+            <a:r>
+              <a:rPr lang="pt-BR" b="0" dirty="0"/>
+              <a:t>LDRSH R4, (R1, #0xC)</a:t>
+            </a:r>
+          </a:p>
+          <a:p>
+            <a:pPr fontAlgn="auto">
+              <a:spcAft>
+                <a:spcPts val="0"/>
+              </a:spcAft>
+            </a:pPr>
+            <a:r>
+              <a:rPr lang="pt-BR" b="0" dirty="0"/>
+              <a:t>PUSH (R1, R3)</a:t>
+            </a:r>
+          </a:p>
+          <a:p>
+            <a:pPr fontAlgn="auto">
+              <a:spcAft>
+                <a:spcPts val="0"/>
+              </a:spcAft>
+            </a:pPr>
+            <a:r>
+              <a:rPr lang="pt-BR" b="0" dirty="0"/>
+              <a:t>POP (R5)</a:t>
+            </a:r>
+            <a:endParaRPr lang="en-US" b="0" dirty="0"/>
+          </a:p>
+        </p:txBody>
+      </p:sp>
+    </p:spTree>
+    <p:extLst>
+      <p:ext uri="{BB962C8B-B14F-4D97-AF65-F5344CB8AC3E}">
+        <p14:creationId xmlns:p14="http://schemas.microsoft.com/office/powerpoint/2010/main" val="754608230"/>
       </p:ext>
     </p:extLst>
   </p:cSld>

--- a/PPTs/Ch5_ARM_Load_Store_Exercises.pptx
+++ b/PPTs/Ch5_ARM_Load_Store_Exercises.pptx
@@ -219,7 +219,7 @@
   <pc:docChgLst>
     <pc:chgData name="Zonghua Gu" userId="9a7e1853e1951ef5" providerId="LiveId" clId="{CF1FAA12-072C-4ED5-BA76-0FFFAEFDB88A}"/>
     <pc:docChg chg="undo custSel addSld delSld modSld sldOrd">
-      <pc:chgData name="Zonghua Gu" userId="9a7e1853e1951ef5" providerId="LiveId" clId="{CF1FAA12-072C-4ED5-BA76-0FFFAEFDB88A}" dt="2025-10-16T21:53:10.887" v="632"/>
+      <pc:chgData name="Zonghua Gu" userId="9a7e1853e1951ef5" providerId="LiveId" clId="{CF1FAA12-072C-4ED5-BA76-0FFFAEFDB88A}" dt="2025-10-16T21:56:45.873" v="688" actId="20577"/>
       <pc:docMkLst>
         <pc:docMk/>
       </pc:docMkLst>
@@ -1206,12 +1206,44 @@
           </ac:spMkLst>
         </pc:spChg>
       </pc:sldChg>
-      <pc:sldChg chg="add">
-        <pc:chgData name="Zonghua Gu" userId="9a7e1853e1951ef5" providerId="LiveId" clId="{CF1FAA12-072C-4ED5-BA76-0FFFAEFDB88A}" dt="2025-10-16T21:53:10.887" v="632"/>
+      <pc:sldChg chg="addSp delSp modSp add mod">
+        <pc:chgData name="Zonghua Gu" userId="9a7e1853e1951ef5" providerId="LiveId" clId="{CF1FAA12-072C-4ED5-BA76-0FFFAEFDB88A}" dt="2025-10-16T21:56:45.873" v="688" actId="20577"/>
         <pc:sldMkLst>
           <pc:docMk/>
           <pc:sldMk cId="754608230" sldId="815"/>
         </pc:sldMkLst>
+        <pc:spChg chg="mod">
+          <ac:chgData name="Zonghua Gu" userId="9a7e1853e1951ef5" providerId="LiveId" clId="{CF1FAA12-072C-4ED5-BA76-0FFFAEFDB88A}" dt="2025-10-16T21:56:45.873" v="688" actId="20577"/>
+          <ac:spMkLst>
+            <pc:docMk/>
+            <pc:sldMk cId="754608230" sldId="815"/>
+            <ac:spMk id="2" creationId="{F578278E-4A38-6767-6648-B9C79941AF43}"/>
+          </ac:spMkLst>
+        </pc:spChg>
+        <pc:spChg chg="del">
+          <ac:chgData name="Zonghua Gu" userId="9a7e1853e1951ef5" providerId="LiveId" clId="{CF1FAA12-072C-4ED5-BA76-0FFFAEFDB88A}" dt="2025-10-16T21:56:11.601" v="640" actId="478"/>
+          <ac:spMkLst>
+            <pc:docMk/>
+            <pc:sldMk cId="754608230" sldId="815"/>
+            <ac:spMk id="3" creationId="{475BC598-EF55-AB51-D906-12E17238C9A8}"/>
+          </ac:spMkLst>
+        </pc:spChg>
+        <pc:spChg chg="add del">
+          <ac:chgData name="Zonghua Gu" userId="9a7e1853e1951ef5" providerId="LiveId" clId="{CF1FAA12-072C-4ED5-BA76-0FFFAEFDB88A}" dt="2025-10-16T21:56:08.552" v="639" actId="478"/>
+          <ac:spMkLst>
+            <pc:docMk/>
+            <pc:sldMk cId="754608230" sldId="815"/>
+            <ac:spMk id="16" creationId="{D8691280-3701-7284-8180-9F8BD7E6732F}"/>
+          </ac:spMkLst>
+        </pc:spChg>
+        <pc:spChg chg="add del mod">
+          <ac:chgData name="Zonghua Gu" userId="9a7e1853e1951ef5" providerId="LiveId" clId="{CF1FAA12-072C-4ED5-BA76-0FFFAEFDB88A}" dt="2025-10-16T21:56:22.198" v="642" actId="1076"/>
+          <ac:spMkLst>
+            <pc:docMk/>
+            <pc:sldMk cId="754608230" sldId="815"/>
+            <ac:spMk id="17" creationId="{54DAF454-D38A-E54A-0A83-F3163F2194FD}"/>
+          </ac:spMkLst>
+        </pc:spChg>
       </pc:sldChg>
     </pc:docChg>
   </pc:docChgLst>
@@ -9121,55 +9153,25 @@
         </p:nvSpPr>
         <p:spPr>
           <a:xfrm>
-            <a:off x="4464040" y="243245"/>
+            <a:off x="4193236" y="107156"/>
             <a:ext cx="4676172" cy="990600"/>
           </a:xfrm>
         </p:spPr>
         <p:txBody>
           <a:bodyPr>
-            <a:normAutofit fontScale="90000"/>
+            <a:noAutofit/>
           </a:bodyPr>
           <a:lstStyle/>
           <a:p>
             <a:r>
-              <a:rPr lang="en-US" dirty="0"/>
-              <a:t>Compute register and memory values at each step of this program</a:t>
-            </a:r>
-          </a:p>
-        </p:txBody>
-      </p:sp>
-      <p:sp>
-        <p:nvSpPr>
-          <p:cNvPr id="3" name="Slide Number Placeholder 2">
-            <a:extLst>
-              <a:ext uri="{FF2B5EF4-FFF2-40B4-BE49-F238E27FC236}">
-                <a16:creationId xmlns:a16="http://schemas.microsoft.com/office/drawing/2014/main" id="{475BC598-EF55-AB51-D906-12E17238C9A8}"/>
-              </a:ext>
-            </a:extLst>
-          </p:cNvPr>
-          <p:cNvSpPr>
-            <a:spLocks noGrp="1"/>
-          </p:cNvSpPr>
-          <p:nvPr>
-            <p:ph type="sldNum" sz="quarter" idx="12"/>
-          </p:nvPr>
-        </p:nvSpPr>
-        <p:spPr>
-          <a:xfrm>
-            <a:off x="724422" y="6277253"/>
-            <a:ext cx="1981200" cy="365760"/>
-          </a:xfrm>
-        </p:spPr>
-        <p:txBody>
-          <a:bodyPr/>
-          <a:lstStyle/>
-          <a:p>
-            <a:fld id="{AEE14D4A-FE32-40AF-B06D-E9622816B101}" type="slidenum">
-              <a:rPr lang="en-US" smtClean="0"/>
-              <a:pPr/>
-              <a:t>14</a:t>
-            </a:fld>
-            <a:endParaRPr lang="en-US"/>
+              <a:rPr lang="en-US" sz="2000" dirty="0"/>
+              <a:t>Compute register and memory values at each step of this program (assuming </a:t>
+            </a:r>
+            <a:r>
+              <a:rPr lang="en-US" sz="2000"/>
+              <a:t>Little Endian ordering)</a:t>
+            </a:r>
+            <a:endParaRPr lang="en-US" sz="2000" dirty="0"/>
           </a:p>
         </p:txBody>
       </p:sp>
@@ -10841,7 +10843,7 @@
         </p:nvSpPr>
         <p:spPr>
           <a:xfrm>
-            <a:off x="10017" y="6396533"/>
+            <a:off x="38216" y="6449814"/>
             <a:ext cx="1818921" cy="369332"/>
           </a:xfrm>
           <a:prstGeom prst="rect">

--- a/PPTs/Ch5_ARM_Load_Store_Exercises.pptx
+++ b/PPTs/Ch5_ARM_Load_Store_Exercises.pptx
@@ -5,10 +5,10 @@
     <p:sldMasterId id="2147483686" r:id="rId1"/>
   </p:sldMasterIdLst>
   <p:notesMasterIdLst>
-    <p:notesMasterId r:id="rId16"/>
+    <p:notesMasterId r:id="rId17"/>
   </p:notesMasterIdLst>
   <p:handoutMasterIdLst>
-    <p:handoutMasterId r:id="rId17"/>
+    <p:handoutMasterId r:id="rId18"/>
   </p:handoutMasterIdLst>
   <p:sldIdLst>
     <p:sldId id="385" r:id="rId2"/>
@@ -24,7 +24,8 @@
     <p:sldId id="365" r:id="rId12"/>
     <p:sldId id="801" r:id="rId13"/>
     <p:sldId id="804" r:id="rId14"/>
-    <p:sldId id="815" r:id="rId15"/>
+    <p:sldId id="816" r:id="rId15"/>
+    <p:sldId id="818" r:id="rId16"/>
   </p:sldIdLst>
   <p:sldSz cx="9144000" cy="6858000" type="screen4x3"/>
   <p:notesSz cx="9601200" cy="7315200"/>
@@ -209,7 +210,7 @@
 <file path=ppt/revisionInfo.xml><?xml version="1.0" encoding="utf-8"?>
 <p1510:revInfo xmlns:a="http://schemas.openxmlformats.org/drawingml/2006/main" xmlns:r="http://schemas.openxmlformats.org/officeDocument/2006/relationships" xmlns:p1510="http://schemas.microsoft.com/office/powerpoint/2015/10/main">
   <p1510:revLst>
-    <p1510:client id="{93E05C3B-B728-42D2-90B4-B4A194916ABF}" v="4" dt="2025-10-16T21:53:10.887"/>
+    <p1510:client id="{93E05C3B-B728-42D2-90B4-B4A194916ABF}" v="5" dt="2025-10-21T23:17:32.972"/>
   </p1510:revLst>
 </p1510:revInfo>
 </file>
@@ -219,969 +220,15 @@
   <pc:docChgLst>
     <pc:chgData name="Zonghua Gu" userId="9a7e1853e1951ef5" providerId="LiveId" clId="{CF1FAA12-072C-4ED5-BA76-0FFFAEFDB88A}"/>
     <pc:docChg chg="undo custSel addSld delSld modSld sldOrd">
-      <pc:chgData name="Zonghua Gu" userId="9a7e1853e1951ef5" providerId="LiveId" clId="{CF1FAA12-072C-4ED5-BA76-0FFFAEFDB88A}" dt="2025-10-16T21:56:45.873" v="688" actId="20577"/>
+      <pc:chgData name="Zonghua Gu" userId="9a7e1853e1951ef5" providerId="LiveId" clId="{CF1FAA12-072C-4ED5-BA76-0FFFAEFDB88A}" dt="2025-10-21T23:17:32.957" v="690"/>
       <pc:docMkLst>
         <pc:docMk/>
       </pc:docMkLst>
-      <pc:sldChg chg="modSp add del mod modTransition">
-        <pc:chgData name="Zonghua Gu" userId="9a7e1853e1951ef5" providerId="LiveId" clId="{CF1FAA12-072C-4ED5-BA76-0FFFAEFDB88A}" dt="2025-09-18T02:44:38.303" v="450" actId="20577"/>
-        <pc:sldMkLst>
-          <pc:docMk/>
-          <pc:sldMk cId="936686548" sldId="345"/>
-        </pc:sldMkLst>
-        <pc:spChg chg="mod">
-          <ac:chgData name="Zonghua Gu" userId="9a7e1853e1951ef5" providerId="LiveId" clId="{CF1FAA12-072C-4ED5-BA76-0FFFAEFDB88A}" dt="2025-09-18T02:44:38.303" v="450" actId="20577"/>
-          <ac:spMkLst>
-            <pc:docMk/>
-            <pc:sldMk cId="936686548" sldId="345"/>
-            <ac:spMk id="4" creationId="{00000000-0000-0000-0000-000000000000}"/>
-          </ac:spMkLst>
-        </pc:spChg>
-      </pc:sldChg>
-      <pc:sldChg chg="add del">
-        <pc:chgData name="Zonghua Gu" userId="9a7e1853e1951ef5" providerId="LiveId" clId="{CF1FAA12-072C-4ED5-BA76-0FFFAEFDB88A}" dt="2025-09-18T02:43:33.109" v="441"/>
-        <pc:sldMkLst>
-          <pc:docMk/>
-          <pc:sldMk cId="2671398132" sldId="345"/>
-        </pc:sldMkLst>
-      </pc:sldChg>
-      <pc:sldChg chg="modSp add del mod modTransition">
-        <pc:chgData name="Zonghua Gu" userId="9a7e1853e1951ef5" providerId="LiveId" clId="{CF1FAA12-072C-4ED5-BA76-0FFFAEFDB88A}" dt="2025-09-18T21:25:59.830" v="619" actId="47"/>
-        <pc:sldMkLst>
-          <pc:docMk/>
-          <pc:sldMk cId="2173526811" sldId="346"/>
-        </pc:sldMkLst>
-      </pc:sldChg>
-      <pc:sldChg chg="add del">
-        <pc:chgData name="Zonghua Gu" userId="9a7e1853e1951ef5" providerId="LiveId" clId="{CF1FAA12-072C-4ED5-BA76-0FFFAEFDB88A}" dt="2025-09-18T02:48:47.595" v="511" actId="2696"/>
-        <pc:sldMkLst>
-          <pc:docMk/>
-          <pc:sldMk cId="966429473" sldId="356"/>
-        </pc:sldMkLst>
-      </pc:sldChg>
-      <pc:sldChg chg="add">
-        <pc:chgData name="Zonghua Gu" userId="9a7e1853e1951ef5" providerId="LiveId" clId="{CF1FAA12-072C-4ED5-BA76-0FFFAEFDB88A}" dt="2025-09-18T02:48:49.161" v="512"/>
-        <pc:sldMkLst>
-          <pc:docMk/>
-          <pc:sldMk cId="3359075723" sldId="356"/>
-        </pc:sldMkLst>
-      </pc:sldChg>
-      <pc:sldChg chg="add del">
-        <pc:chgData name="Zonghua Gu" userId="9a7e1853e1951ef5" providerId="LiveId" clId="{CF1FAA12-072C-4ED5-BA76-0FFFAEFDB88A}" dt="2025-09-18T21:25:34.166" v="612" actId="47"/>
-        <pc:sldMkLst>
-          <pc:docMk/>
-          <pc:sldMk cId="1209470724" sldId="357"/>
-        </pc:sldMkLst>
-      </pc:sldChg>
-      <pc:sldChg chg="add del">
-        <pc:chgData name="Zonghua Gu" userId="9a7e1853e1951ef5" providerId="LiveId" clId="{CF1FAA12-072C-4ED5-BA76-0FFFAEFDB88A}" dt="2025-09-18T02:48:47.595" v="511" actId="2696"/>
-        <pc:sldMkLst>
-          <pc:docMk/>
-          <pc:sldMk cId="1239709488" sldId="357"/>
-        </pc:sldMkLst>
-      </pc:sldChg>
-      <pc:sldChg chg="add del">
-        <pc:chgData name="Zonghua Gu" userId="9a7e1853e1951ef5" providerId="LiveId" clId="{CF1FAA12-072C-4ED5-BA76-0FFFAEFDB88A}" dt="2025-09-18T02:25:29.686" v="185"/>
-        <pc:sldMkLst>
-          <pc:docMk/>
-          <pc:sldMk cId="1502810167" sldId="358"/>
-        </pc:sldMkLst>
-      </pc:sldChg>
-      <pc:sldChg chg="add del">
-        <pc:chgData name="Zonghua Gu" userId="9a7e1853e1951ef5" providerId="LiveId" clId="{CF1FAA12-072C-4ED5-BA76-0FFFAEFDB88A}" dt="2025-09-18T21:25:47.173" v="616" actId="47"/>
-        <pc:sldMkLst>
-          <pc:docMk/>
-          <pc:sldMk cId="670903100" sldId="359"/>
-        </pc:sldMkLst>
-      </pc:sldChg>
-      <pc:sldChg chg="del">
-        <pc:chgData name="Zonghua Gu" userId="9a7e1853e1951ef5" providerId="LiveId" clId="{CF1FAA12-072C-4ED5-BA76-0FFFAEFDB88A}" dt="2025-09-18T02:23:48.757" v="174" actId="47"/>
-        <pc:sldMkLst>
-          <pc:docMk/>
-          <pc:sldMk cId="0" sldId="360"/>
-        </pc:sldMkLst>
-      </pc:sldChg>
-      <pc:sldChg chg="addSp delSp modSp add mod">
-        <pc:chgData name="Zonghua Gu" userId="9a7e1853e1951ef5" providerId="LiveId" clId="{CF1FAA12-072C-4ED5-BA76-0FFFAEFDB88A}" dt="2025-09-18T02:30:15.818" v="265" actId="1076"/>
-        <pc:sldMkLst>
-          <pc:docMk/>
-          <pc:sldMk cId="3486040908" sldId="363"/>
-        </pc:sldMkLst>
-        <pc:spChg chg="add mod">
-          <ac:chgData name="Zonghua Gu" userId="9a7e1853e1951ef5" providerId="LiveId" clId="{CF1FAA12-072C-4ED5-BA76-0FFFAEFDB88A}" dt="2025-09-18T02:30:15.818" v="265" actId="1076"/>
-          <ac:spMkLst>
-            <pc:docMk/>
-            <pc:sldMk cId="3486040908" sldId="363"/>
-            <ac:spMk id="4" creationId="{4D035A48-A6FE-397D-11E7-79A26D57EE6C}"/>
-          </ac:spMkLst>
-        </pc:spChg>
-        <pc:spChg chg="mod">
-          <ac:chgData name="Zonghua Gu" userId="9a7e1853e1951ef5" providerId="LiveId" clId="{CF1FAA12-072C-4ED5-BA76-0FFFAEFDB88A}" dt="2025-09-18T02:25:55.360" v="196" actId="403"/>
-          <ac:spMkLst>
-            <pc:docMk/>
-            <pc:sldMk cId="3486040908" sldId="363"/>
-            <ac:spMk id="5" creationId="{49EAAEAC-5A83-FC31-3AD1-D95A0084E014}"/>
-          </ac:spMkLst>
-        </pc:spChg>
-        <pc:spChg chg="mod">
-          <ac:chgData name="Zonghua Gu" userId="9a7e1853e1951ef5" providerId="LiveId" clId="{CF1FAA12-072C-4ED5-BA76-0FFFAEFDB88A}" dt="2025-09-18T02:29:57.414" v="262" actId="1076"/>
-          <ac:spMkLst>
-            <pc:docMk/>
-            <pc:sldMk cId="3486040908" sldId="363"/>
-            <ac:spMk id="14" creationId="{78CA3B04-30BA-AB52-96CE-C4D0D46EBB0E}"/>
-          </ac:spMkLst>
-        </pc:spChg>
-        <pc:spChg chg="mod">
-          <ac:chgData name="Zonghua Gu" userId="9a7e1853e1951ef5" providerId="LiveId" clId="{CF1FAA12-072C-4ED5-BA76-0FFFAEFDB88A}" dt="2025-09-18T02:29:48.132" v="261" actId="1076"/>
-          <ac:spMkLst>
-            <pc:docMk/>
-            <pc:sldMk cId="3486040908" sldId="363"/>
-            <ac:spMk id="15" creationId="{23CD2F51-C323-A016-AE65-89BBE14397AE}"/>
-          </ac:spMkLst>
-        </pc:spChg>
-        <pc:spChg chg="mod">
-          <ac:chgData name="Zonghua Gu" userId="9a7e1853e1951ef5" providerId="LiveId" clId="{CF1FAA12-072C-4ED5-BA76-0FFFAEFDB88A}" dt="2025-09-18T02:29:39.553" v="260" actId="1036"/>
-          <ac:spMkLst>
-            <pc:docMk/>
-            <pc:sldMk cId="3486040908" sldId="363"/>
-            <ac:spMk id="16" creationId="{3604BC0F-A245-42B3-C099-6BBF3E77DA07}"/>
-          </ac:spMkLst>
-        </pc:spChg>
-        <pc:spChg chg="mod">
-          <ac:chgData name="Zonghua Gu" userId="9a7e1853e1951ef5" providerId="LiveId" clId="{CF1FAA12-072C-4ED5-BA76-0FFFAEFDB88A}" dt="2025-09-18T02:29:39.553" v="260" actId="1036"/>
-          <ac:spMkLst>
-            <pc:docMk/>
-            <pc:sldMk cId="3486040908" sldId="363"/>
-            <ac:spMk id="17" creationId="{92DF79D3-BC63-01D9-8A39-ECF46F38BC95}"/>
-          </ac:spMkLst>
-        </pc:spChg>
-        <pc:spChg chg="add mod">
-          <ac:chgData name="Zonghua Gu" userId="9a7e1853e1951ef5" providerId="LiveId" clId="{CF1FAA12-072C-4ED5-BA76-0FFFAEFDB88A}" dt="2025-09-18T02:30:15.818" v="265" actId="1076"/>
-          <ac:spMkLst>
-            <pc:docMk/>
-            <pc:sldMk cId="3486040908" sldId="363"/>
-            <ac:spMk id="30" creationId="{D39685E5-F44B-9935-D033-23E4B449AF2C}"/>
-          </ac:spMkLst>
-        </pc:spChg>
-        <pc:spChg chg="add mod">
-          <ac:chgData name="Zonghua Gu" userId="9a7e1853e1951ef5" providerId="LiveId" clId="{CF1FAA12-072C-4ED5-BA76-0FFFAEFDB88A}" dt="2025-09-18T02:30:15.818" v="265" actId="1076"/>
-          <ac:spMkLst>
-            <pc:docMk/>
-            <pc:sldMk cId="3486040908" sldId="363"/>
-            <ac:spMk id="31" creationId="{A1DE57DA-AF45-14AC-B21C-DE925BE7BF0E}"/>
-          </ac:spMkLst>
-        </pc:spChg>
-        <pc:spChg chg="add mod">
-          <ac:chgData name="Zonghua Gu" userId="9a7e1853e1951ef5" providerId="LiveId" clId="{CF1FAA12-072C-4ED5-BA76-0FFFAEFDB88A}" dt="2025-09-18T02:30:15.818" v="265" actId="1076"/>
-          <ac:spMkLst>
-            <pc:docMk/>
-            <pc:sldMk cId="3486040908" sldId="363"/>
-            <ac:spMk id="32" creationId="{50CEED7B-77A7-495A-418F-A75FFEAB6E65}"/>
-          </ac:spMkLst>
-        </pc:spChg>
-      </pc:sldChg>
-      <pc:sldChg chg="addSp delSp modSp add del mod modAnim">
-        <pc:chgData name="Zonghua Gu" userId="9a7e1853e1951ef5" providerId="LiveId" clId="{CF1FAA12-072C-4ED5-BA76-0FFFAEFDB88A}" dt="2025-09-18T21:25:35.614" v="613" actId="47"/>
-        <pc:sldMkLst>
-          <pc:docMk/>
-          <pc:sldMk cId="3561992185" sldId="364"/>
-        </pc:sldMkLst>
-      </pc:sldChg>
-      <pc:sldChg chg="modSp add del mod modTransition">
-        <pc:chgData name="Zonghua Gu" userId="9a7e1853e1951ef5" providerId="LiveId" clId="{CF1FAA12-072C-4ED5-BA76-0FFFAEFDB88A}" dt="2025-09-18T02:46:44.688" v="499" actId="20577"/>
-        <pc:sldMkLst>
-          <pc:docMk/>
-          <pc:sldMk cId="802972020" sldId="365"/>
-        </pc:sldMkLst>
-        <pc:spChg chg="mod">
-          <ac:chgData name="Zonghua Gu" userId="9a7e1853e1951ef5" providerId="LiveId" clId="{CF1FAA12-072C-4ED5-BA76-0FFFAEFDB88A}" dt="2025-09-18T02:46:44.688" v="499" actId="20577"/>
-          <ac:spMkLst>
-            <pc:docMk/>
-            <pc:sldMk cId="802972020" sldId="365"/>
-            <ac:spMk id="4" creationId="{00000000-0000-0000-0000-000000000000}"/>
-          </ac:spMkLst>
-        </pc:spChg>
-      </pc:sldChg>
-      <pc:sldChg chg="modSp add del mod modTransition modAnim">
-        <pc:chgData name="Zonghua Gu" userId="9a7e1853e1951ef5" providerId="LiveId" clId="{CF1FAA12-072C-4ED5-BA76-0FFFAEFDB88A}" dt="2025-09-18T21:26:04.575" v="622" actId="47"/>
-        <pc:sldMkLst>
-          <pc:docMk/>
-          <pc:sldMk cId="415260018" sldId="366"/>
-        </pc:sldMkLst>
-      </pc:sldChg>
-      <pc:sldChg chg="addSp delSp modSp add del mod modTransition">
-        <pc:chgData name="Zonghua Gu" userId="9a7e1853e1951ef5" providerId="LiveId" clId="{CF1FAA12-072C-4ED5-BA76-0FFFAEFDB88A}" dt="2025-09-18T02:45:44.426" v="467"/>
-        <pc:sldMkLst>
-          <pc:docMk/>
-          <pc:sldMk cId="1910717593" sldId="367"/>
-        </pc:sldMkLst>
-        <pc:spChg chg="mod">
-          <ac:chgData name="Zonghua Gu" userId="9a7e1853e1951ef5" providerId="LiveId" clId="{CF1FAA12-072C-4ED5-BA76-0FFFAEFDB88A}" dt="2025-09-18T02:45:22.049" v="461" actId="20577"/>
-          <ac:spMkLst>
-            <pc:docMk/>
-            <pc:sldMk cId="1910717593" sldId="367"/>
-            <ac:spMk id="4" creationId="{00000000-0000-0000-0000-000000000000}"/>
-          </ac:spMkLst>
-        </pc:spChg>
-        <pc:spChg chg="add mod">
-          <ac:chgData name="Zonghua Gu" userId="9a7e1853e1951ef5" providerId="LiveId" clId="{CF1FAA12-072C-4ED5-BA76-0FFFAEFDB88A}" dt="2025-09-18T02:45:44.426" v="467"/>
-          <ac:spMkLst>
-            <pc:docMk/>
-            <pc:sldMk cId="1910717593" sldId="367"/>
-            <ac:spMk id="9" creationId="{78DA596E-85CA-C0C6-85A8-74A98C3DFFDB}"/>
-          </ac:spMkLst>
-        </pc:spChg>
-      </pc:sldChg>
-      <pc:sldChg chg="modSp add del mod modTransition">
-        <pc:chgData name="Zonghua Gu" userId="9a7e1853e1951ef5" providerId="LiveId" clId="{CF1FAA12-072C-4ED5-BA76-0FFFAEFDB88A}" dt="2025-09-18T21:26:02.469" v="621" actId="47"/>
-        <pc:sldMkLst>
-          <pc:docMk/>
-          <pc:sldMk cId="3116329460" sldId="368"/>
-        </pc:sldMkLst>
-      </pc:sldChg>
-      <pc:sldChg chg="modSp add del mod ord modTransition">
-        <pc:chgData name="Zonghua Gu" userId="9a7e1853e1951ef5" providerId="LiveId" clId="{CF1FAA12-072C-4ED5-BA76-0FFFAEFDB88A}" dt="2025-09-18T02:43:42.643" v="444" actId="2696"/>
-        <pc:sldMkLst>
-          <pc:docMk/>
-          <pc:sldMk cId="587842027" sldId="369"/>
-        </pc:sldMkLst>
-      </pc:sldChg>
-      <pc:sldChg chg="modSp add mod">
-        <pc:chgData name="Zonghua Gu" userId="9a7e1853e1951ef5" providerId="LiveId" clId="{CF1FAA12-072C-4ED5-BA76-0FFFAEFDB88A}" dt="2025-09-18T02:44:42.165" v="452" actId="20577"/>
-        <pc:sldMkLst>
-          <pc:docMk/>
-          <pc:sldMk cId="1545068738" sldId="369"/>
-        </pc:sldMkLst>
-        <pc:spChg chg="mod">
-          <ac:chgData name="Zonghua Gu" userId="9a7e1853e1951ef5" providerId="LiveId" clId="{CF1FAA12-072C-4ED5-BA76-0FFFAEFDB88A}" dt="2025-09-18T02:44:42.165" v="452" actId="20577"/>
-          <ac:spMkLst>
-            <pc:docMk/>
-            <pc:sldMk cId="1545068738" sldId="369"/>
-            <ac:spMk id="4" creationId="{00000000-0000-0000-0000-000000000000}"/>
-          </ac:spMkLst>
-        </pc:spChg>
-      </pc:sldChg>
-      <pc:sldChg chg="add del">
-        <pc:chgData name="Zonghua Gu" userId="9a7e1853e1951ef5" providerId="LiveId" clId="{CF1FAA12-072C-4ED5-BA76-0FFFAEFDB88A}" dt="2025-09-18T02:43:33.109" v="441"/>
-        <pc:sldMkLst>
-          <pc:docMk/>
-          <pc:sldMk cId="3308441144" sldId="369"/>
-        </pc:sldMkLst>
-      </pc:sldChg>
-      <pc:sldChg chg="modSp add del mod modNotesTx">
-        <pc:chgData name="Zonghua Gu" userId="9a7e1853e1951ef5" providerId="LiveId" clId="{CF1FAA12-072C-4ED5-BA76-0FFFAEFDB88A}" dt="2025-09-18T21:26:00.741" v="620" actId="47"/>
-        <pc:sldMkLst>
-          <pc:docMk/>
-          <pc:sldMk cId="598515287" sldId="370"/>
-        </pc:sldMkLst>
-      </pc:sldChg>
-      <pc:sldChg chg="modSp add del mod ord modTransition modNotesTx">
-        <pc:chgData name="Zonghua Gu" userId="9a7e1853e1951ef5" providerId="LiveId" clId="{CF1FAA12-072C-4ED5-BA76-0FFFAEFDB88A}" dt="2025-09-18T02:43:42.643" v="444" actId="2696"/>
-        <pc:sldMkLst>
-          <pc:docMk/>
-          <pc:sldMk cId="1352278469" sldId="370"/>
-        </pc:sldMkLst>
-      </pc:sldChg>
-      <pc:sldChg chg="add del modTransition">
-        <pc:chgData name="Zonghua Gu" userId="9a7e1853e1951ef5" providerId="LiveId" clId="{CF1FAA12-072C-4ED5-BA76-0FFFAEFDB88A}" dt="2025-09-16T21:18:03.494" v="42" actId="47"/>
-        <pc:sldMkLst>
-          <pc:docMk/>
-          <pc:sldMk cId="3221067157" sldId="371"/>
-        </pc:sldMkLst>
-      </pc:sldChg>
-      <pc:sldChg chg="addSp modSp mod">
-        <pc:chgData name="Zonghua Gu" userId="9a7e1853e1951ef5" providerId="LiveId" clId="{CF1FAA12-072C-4ED5-BA76-0FFFAEFDB88A}" dt="2025-09-18T21:26:15.452" v="623" actId="20577"/>
-        <pc:sldMkLst>
-          <pc:docMk/>
-          <pc:sldMk cId="0" sldId="385"/>
-        </pc:sldMkLst>
-        <pc:spChg chg="add mod">
-          <ac:chgData name="Zonghua Gu" userId="9a7e1853e1951ef5" providerId="LiveId" clId="{CF1FAA12-072C-4ED5-BA76-0FFFAEFDB88A}" dt="2025-09-17T21:20:32.046" v="173" actId="1076"/>
-          <ac:spMkLst>
-            <pc:docMk/>
-            <pc:sldMk cId="0" sldId="385"/>
-            <ac:spMk id="3" creationId="{414636B5-1A15-392F-777F-ACB6D0BF1A0E}"/>
-          </ac:spMkLst>
-        </pc:spChg>
-        <pc:spChg chg="mod">
-          <ac:chgData name="Zonghua Gu" userId="9a7e1853e1951ef5" providerId="LiveId" clId="{CF1FAA12-072C-4ED5-BA76-0FFFAEFDB88A}" dt="2025-09-18T21:26:15.452" v="623" actId="20577"/>
-          <ac:spMkLst>
-            <pc:docMk/>
-            <pc:sldMk cId="0" sldId="385"/>
-            <ac:spMk id="11" creationId="{00000000-0000-0000-0000-000000000000}"/>
-          </ac:spMkLst>
-        </pc:spChg>
-        <pc:spChg chg="mod">
-          <ac:chgData name="Zonghua Gu" userId="9a7e1853e1951ef5" providerId="LiveId" clId="{CF1FAA12-072C-4ED5-BA76-0FFFAEFDB88A}" dt="2025-09-17T20:50:13.719" v="106" actId="20577"/>
-          <ac:spMkLst>
-            <pc:docMk/>
-            <pc:sldMk cId="0" sldId="385"/>
-            <ac:spMk id="12" creationId="{00000000-0000-0000-0000-000000000000}"/>
-          </ac:spMkLst>
-        </pc:spChg>
-        <pc:spChg chg="mod">
-          <ac:chgData name="Zonghua Gu" userId="9a7e1853e1951ef5" providerId="LiveId" clId="{CF1FAA12-072C-4ED5-BA76-0FFFAEFDB88A}" dt="2025-09-17T20:50:06.160" v="101" actId="20577"/>
-          <ac:spMkLst>
-            <pc:docMk/>
-            <pc:sldMk cId="0" sldId="385"/>
-            <ac:spMk id="14" creationId="{00000000-0000-0000-0000-000000000000}"/>
-          </ac:spMkLst>
-        </pc:spChg>
-      </pc:sldChg>
-      <pc:sldChg chg="add del">
-        <pc:chgData name="Zonghua Gu" userId="9a7e1853e1951ef5" providerId="LiveId" clId="{CF1FAA12-072C-4ED5-BA76-0FFFAEFDB88A}" dt="2025-09-18T02:25:27.723" v="184" actId="47"/>
-        <pc:sldMkLst>
-          <pc:docMk/>
-          <pc:sldMk cId="3486040908" sldId="388"/>
-        </pc:sldMkLst>
-      </pc:sldChg>
-      <pc:sldChg chg="del">
-        <pc:chgData name="Zonghua Gu" userId="9a7e1853e1951ef5" providerId="LiveId" clId="{CF1FAA12-072C-4ED5-BA76-0FFFAEFDB88A}" dt="2025-09-18T02:23:48.757" v="174" actId="47"/>
-        <pc:sldMkLst>
-          <pc:docMk/>
-          <pc:sldMk cId="0" sldId="406"/>
-        </pc:sldMkLst>
-      </pc:sldChg>
-      <pc:sldChg chg="delSp modSp del mod delAnim modAnim">
-        <pc:chgData name="Zonghua Gu" userId="9a7e1853e1951ef5" providerId="LiveId" clId="{CF1FAA12-072C-4ED5-BA76-0FFFAEFDB88A}" dt="2025-09-18T02:23:48.757" v="174" actId="47"/>
-        <pc:sldMkLst>
-          <pc:docMk/>
-          <pc:sldMk cId="0" sldId="408"/>
-        </pc:sldMkLst>
-      </pc:sldChg>
-      <pc:sldChg chg="delSp modSp del mod delAnim modAnim">
-        <pc:chgData name="Zonghua Gu" userId="9a7e1853e1951ef5" providerId="LiveId" clId="{CF1FAA12-072C-4ED5-BA76-0FFFAEFDB88A}" dt="2025-09-18T02:23:48.757" v="174" actId="47"/>
-        <pc:sldMkLst>
-          <pc:docMk/>
-          <pc:sldMk cId="0" sldId="409"/>
-        </pc:sldMkLst>
-      </pc:sldChg>
-      <pc:sldChg chg="addSp modSp del mod">
-        <pc:chgData name="Zonghua Gu" userId="9a7e1853e1951ef5" providerId="LiveId" clId="{CF1FAA12-072C-4ED5-BA76-0FFFAEFDB88A}" dt="2025-09-18T02:23:48.757" v="174" actId="47"/>
-        <pc:sldMkLst>
-          <pc:docMk/>
-          <pc:sldMk cId="0" sldId="410"/>
-        </pc:sldMkLst>
-      </pc:sldChg>
-      <pc:sldChg chg="addSp delSp modSp del mod">
-        <pc:chgData name="Zonghua Gu" userId="9a7e1853e1951ef5" providerId="LiveId" clId="{CF1FAA12-072C-4ED5-BA76-0FFFAEFDB88A}" dt="2025-09-18T02:23:48.757" v="174" actId="47"/>
-        <pc:sldMkLst>
-          <pc:docMk/>
-          <pc:sldMk cId="0" sldId="411"/>
-        </pc:sldMkLst>
-      </pc:sldChg>
-      <pc:sldChg chg="addSp modSp del">
-        <pc:chgData name="Zonghua Gu" userId="9a7e1853e1951ef5" providerId="LiveId" clId="{CF1FAA12-072C-4ED5-BA76-0FFFAEFDB88A}" dt="2025-09-18T02:23:48.757" v="174" actId="47"/>
-        <pc:sldMkLst>
-          <pc:docMk/>
-          <pc:sldMk cId="0" sldId="412"/>
-        </pc:sldMkLst>
-      </pc:sldChg>
-      <pc:sldChg chg="addSp modSp del">
-        <pc:chgData name="Zonghua Gu" userId="9a7e1853e1951ef5" providerId="LiveId" clId="{CF1FAA12-072C-4ED5-BA76-0FFFAEFDB88A}" dt="2025-09-18T02:23:48.757" v="174" actId="47"/>
-        <pc:sldMkLst>
-          <pc:docMk/>
-          <pc:sldMk cId="0" sldId="413"/>
-        </pc:sldMkLst>
-      </pc:sldChg>
-      <pc:sldChg chg="addSp modSp del">
-        <pc:chgData name="Zonghua Gu" userId="9a7e1853e1951ef5" providerId="LiveId" clId="{CF1FAA12-072C-4ED5-BA76-0FFFAEFDB88A}" dt="2025-09-18T02:23:48.757" v="174" actId="47"/>
-        <pc:sldMkLst>
-          <pc:docMk/>
-          <pc:sldMk cId="0" sldId="414"/>
-        </pc:sldMkLst>
-      </pc:sldChg>
-      <pc:sldChg chg="addSp modSp del">
-        <pc:chgData name="Zonghua Gu" userId="9a7e1853e1951ef5" providerId="LiveId" clId="{CF1FAA12-072C-4ED5-BA76-0FFFAEFDB88A}" dt="2025-09-18T02:23:48.757" v="174" actId="47"/>
-        <pc:sldMkLst>
-          <pc:docMk/>
-          <pc:sldMk cId="0" sldId="415"/>
-        </pc:sldMkLst>
-      </pc:sldChg>
-      <pc:sldChg chg="addSp delSp modSp add del mod delAnim modAnim">
-        <pc:chgData name="Zonghua Gu" userId="9a7e1853e1951ef5" providerId="LiveId" clId="{CF1FAA12-072C-4ED5-BA76-0FFFAEFDB88A}" dt="2025-09-18T20:06:59.886" v="611"/>
-        <pc:sldMkLst>
-          <pc:docMk/>
-          <pc:sldMk cId="0" sldId="417"/>
-        </pc:sldMkLst>
-        <pc:spChg chg="add mod">
-          <ac:chgData name="Zonghua Gu" userId="9a7e1853e1951ef5" providerId="LiveId" clId="{CF1FAA12-072C-4ED5-BA76-0FFFAEFDB88A}" dt="2025-09-18T20:04:02.966" v="574" actId="1076"/>
-          <ac:spMkLst>
-            <pc:docMk/>
-            <pc:sldMk cId="0" sldId="417"/>
-            <ac:spMk id="2" creationId="{03BF8BEC-CBCA-3D53-1D6F-7FE4217EF5F8}"/>
-          </ac:spMkLst>
-        </pc:spChg>
-        <pc:spChg chg="add mod">
-          <ac:chgData name="Zonghua Gu" userId="9a7e1853e1951ef5" providerId="LiveId" clId="{CF1FAA12-072C-4ED5-BA76-0FFFAEFDB88A}" dt="2025-09-18T20:04:24.814" v="585" actId="1076"/>
-          <ac:spMkLst>
-            <pc:docMk/>
-            <pc:sldMk cId="0" sldId="417"/>
-            <ac:spMk id="3" creationId="{D80FA951-DE02-3C91-9A1E-27C70066528C}"/>
-          </ac:spMkLst>
-        </pc:spChg>
-        <pc:spChg chg="mod">
-          <ac:chgData name="Zonghua Gu" userId="9a7e1853e1951ef5" providerId="LiveId" clId="{CF1FAA12-072C-4ED5-BA76-0FFFAEFDB88A}" dt="2025-09-18T20:04:02.966" v="574" actId="1076"/>
-          <ac:spMkLst>
-            <pc:docMk/>
-            <pc:sldMk cId="0" sldId="417"/>
-            <ac:spMk id="11" creationId="{00000000-0000-0000-0000-000000000000}"/>
-          </ac:spMkLst>
-        </pc:spChg>
-        <pc:spChg chg="mod">
-          <ac:chgData name="Zonghua Gu" userId="9a7e1853e1951ef5" providerId="LiveId" clId="{CF1FAA12-072C-4ED5-BA76-0FFFAEFDB88A}" dt="2025-09-18T20:04:02.966" v="574" actId="1076"/>
-          <ac:spMkLst>
-            <pc:docMk/>
-            <pc:sldMk cId="0" sldId="417"/>
-            <ac:spMk id="12" creationId="{00000000-0000-0000-0000-000000000000}"/>
-          </ac:spMkLst>
-        </pc:spChg>
-        <pc:spChg chg="mod">
-          <ac:chgData name="Zonghua Gu" userId="9a7e1853e1951ef5" providerId="LiveId" clId="{CF1FAA12-072C-4ED5-BA76-0FFFAEFDB88A}" dt="2025-09-18T20:04:02.966" v="574" actId="1076"/>
-          <ac:spMkLst>
-            <pc:docMk/>
-            <pc:sldMk cId="0" sldId="417"/>
-            <ac:spMk id="13" creationId="{00000000-0000-0000-0000-000000000000}"/>
-          </ac:spMkLst>
-        </pc:spChg>
-        <pc:spChg chg="mod">
-          <ac:chgData name="Zonghua Gu" userId="9a7e1853e1951ef5" providerId="LiveId" clId="{CF1FAA12-072C-4ED5-BA76-0FFFAEFDB88A}" dt="2025-09-18T20:04:18.734" v="584" actId="1076"/>
-          <ac:spMkLst>
-            <pc:docMk/>
-            <pc:sldMk cId="0" sldId="417"/>
-            <ac:spMk id="14" creationId="{00000000-0000-0000-0000-000000000000}"/>
-          </ac:spMkLst>
-        </pc:spChg>
-        <pc:spChg chg="mod">
-          <ac:chgData name="Zonghua Gu" userId="9a7e1853e1951ef5" providerId="LiveId" clId="{CF1FAA12-072C-4ED5-BA76-0FFFAEFDB88A}" dt="2025-09-18T20:03:46.505" v="573" actId="20577"/>
-          <ac:spMkLst>
-            <pc:docMk/>
-            <pc:sldMk cId="0" sldId="417"/>
-            <ac:spMk id="25606" creationId="{00000000-0000-0000-0000-000000000000}"/>
-          </ac:spMkLst>
-        </pc:spChg>
-        <pc:graphicFrameChg chg="mod">
-          <ac:chgData name="Zonghua Gu" userId="9a7e1853e1951ef5" providerId="LiveId" clId="{CF1FAA12-072C-4ED5-BA76-0FFFAEFDB88A}" dt="2025-09-18T20:06:59.886" v="611"/>
-          <ac:graphicFrameMkLst>
-            <pc:docMk/>
-            <pc:sldMk cId="0" sldId="417"/>
-            <ac:graphicFrameMk id="9" creationId="{00000000-0000-0000-0000-000000000000}"/>
-          </ac:graphicFrameMkLst>
-        </pc:graphicFrameChg>
-      </pc:sldChg>
-      <pc:sldChg chg="del">
-        <pc:chgData name="Zonghua Gu" userId="9a7e1853e1951ef5" providerId="LiveId" clId="{CF1FAA12-072C-4ED5-BA76-0FFFAEFDB88A}" dt="2025-09-18T02:23:48.757" v="174" actId="47"/>
-        <pc:sldMkLst>
-          <pc:docMk/>
-          <pc:sldMk cId="392340819" sldId="453"/>
-        </pc:sldMkLst>
-      </pc:sldChg>
-      <pc:sldChg chg="del">
-        <pc:chgData name="Zonghua Gu" userId="9a7e1853e1951ef5" providerId="LiveId" clId="{CF1FAA12-072C-4ED5-BA76-0FFFAEFDB88A}" dt="2025-09-18T02:23:48.757" v="174" actId="47"/>
-        <pc:sldMkLst>
-          <pc:docMk/>
-          <pc:sldMk cId="2630635621" sldId="454"/>
-        </pc:sldMkLst>
-      </pc:sldChg>
-      <pc:sldChg chg="del">
-        <pc:chgData name="Zonghua Gu" userId="9a7e1853e1951ef5" providerId="LiveId" clId="{CF1FAA12-072C-4ED5-BA76-0FFFAEFDB88A}" dt="2025-09-18T02:23:48.757" v="174" actId="47"/>
-        <pc:sldMkLst>
-          <pc:docMk/>
-          <pc:sldMk cId="1881575936" sldId="455"/>
-        </pc:sldMkLst>
-      </pc:sldChg>
-      <pc:sldChg chg="del">
-        <pc:chgData name="Zonghua Gu" userId="9a7e1853e1951ef5" providerId="LiveId" clId="{CF1FAA12-072C-4ED5-BA76-0FFFAEFDB88A}" dt="2025-09-18T02:23:48.757" v="174" actId="47"/>
-        <pc:sldMkLst>
-          <pc:docMk/>
-          <pc:sldMk cId="2117905533" sldId="456"/>
-        </pc:sldMkLst>
-      </pc:sldChg>
-      <pc:sldChg chg="del">
-        <pc:chgData name="Zonghua Gu" userId="9a7e1853e1951ef5" providerId="LiveId" clId="{CF1FAA12-072C-4ED5-BA76-0FFFAEFDB88A}" dt="2025-09-18T02:23:48.757" v="174" actId="47"/>
-        <pc:sldMkLst>
-          <pc:docMk/>
-          <pc:sldMk cId="2240450818" sldId="463"/>
-        </pc:sldMkLst>
-      </pc:sldChg>
-      <pc:sldChg chg="del">
-        <pc:chgData name="Zonghua Gu" userId="9a7e1853e1951ef5" providerId="LiveId" clId="{CF1FAA12-072C-4ED5-BA76-0FFFAEFDB88A}" dt="2025-09-18T02:23:48.757" v="174" actId="47"/>
-        <pc:sldMkLst>
-          <pc:docMk/>
-          <pc:sldMk cId="3483046466" sldId="469"/>
-        </pc:sldMkLst>
-      </pc:sldChg>
-      <pc:sldChg chg="addSp modSp del mod modNotesTx">
-        <pc:chgData name="Zonghua Gu" userId="9a7e1853e1951ef5" providerId="LiveId" clId="{CF1FAA12-072C-4ED5-BA76-0FFFAEFDB88A}" dt="2025-09-18T02:23:48.757" v="174" actId="47"/>
-        <pc:sldMkLst>
-          <pc:docMk/>
-          <pc:sldMk cId="282921071" sldId="471"/>
-        </pc:sldMkLst>
-      </pc:sldChg>
-      <pc:sldChg chg="del">
-        <pc:chgData name="Zonghua Gu" userId="9a7e1853e1951ef5" providerId="LiveId" clId="{CF1FAA12-072C-4ED5-BA76-0FFFAEFDB88A}" dt="2025-09-18T02:23:48.757" v="174" actId="47"/>
-        <pc:sldMkLst>
-          <pc:docMk/>
-          <pc:sldMk cId="929278538" sldId="472"/>
-        </pc:sldMkLst>
-      </pc:sldChg>
-      <pc:sldChg chg="del">
-        <pc:chgData name="Zonghua Gu" userId="9a7e1853e1951ef5" providerId="LiveId" clId="{CF1FAA12-072C-4ED5-BA76-0FFFAEFDB88A}" dt="2025-09-18T02:23:48.757" v="174" actId="47"/>
-        <pc:sldMkLst>
-          <pc:docMk/>
-          <pc:sldMk cId="2963767799" sldId="473"/>
-        </pc:sldMkLst>
-      </pc:sldChg>
-      <pc:sldChg chg="addSp modSp del mod">
-        <pc:chgData name="Zonghua Gu" userId="9a7e1853e1951ef5" providerId="LiveId" clId="{CF1FAA12-072C-4ED5-BA76-0FFFAEFDB88A}" dt="2025-09-18T02:23:48.757" v="174" actId="47"/>
-        <pc:sldMkLst>
-          <pc:docMk/>
-          <pc:sldMk cId="3751033725" sldId="474"/>
-        </pc:sldMkLst>
-      </pc:sldChg>
-      <pc:sldChg chg="del">
-        <pc:chgData name="Zonghua Gu" userId="9a7e1853e1951ef5" providerId="LiveId" clId="{CF1FAA12-072C-4ED5-BA76-0FFFAEFDB88A}" dt="2025-09-18T02:23:48.757" v="174" actId="47"/>
-        <pc:sldMkLst>
-          <pc:docMk/>
-          <pc:sldMk cId="2700446461" sldId="475"/>
-        </pc:sldMkLst>
-      </pc:sldChg>
-      <pc:sldChg chg="del">
-        <pc:chgData name="Zonghua Gu" userId="9a7e1853e1951ef5" providerId="LiveId" clId="{CF1FAA12-072C-4ED5-BA76-0FFFAEFDB88A}" dt="2025-09-18T02:23:48.757" v="174" actId="47"/>
-        <pc:sldMkLst>
-          <pc:docMk/>
-          <pc:sldMk cId="3517712416" sldId="476"/>
-        </pc:sldMkLst>
-      </pc:sldChg>
-      <pc:sldChg chg="modSp del mod">
-        <pc:chgData name="Zonghua Gu" userId="9a7e1853e1951ef5" providerId="LiveId" clId="{CF1FAA12-072C-4ED5-BA76-0FFFAEFDB88A}" dt="2025-09-18T02:23:48.757" v="174" actId="47"/>
-        <pc:sldMkLst>
-          <pc:docMk/>
-          <pc:sldMk cId="4040755182" sldId="478"/>
-        </pc:sldMkLst>
-      </pc:sldChg>
-      <pc:sldChg chg="modSp del mod">
-        <pc:chgData name="Zonghua Gu" userId="9a7e1853e1951ef5" providerId="LiveId" clId="{CF1FAA12-072C-4ED5-BA76-0FFFAEFDB88A}" dt="2025-09-18T02:23:48.757" v="174" actId="47"/>
-        <pc:sldMkLst>
-          <pc:docMk/>
-          <pc:sldMk cId="3783602394" sldId="479"/>
-        </pc:sldMkLst>
-      </pc:sldChg>
-      <pc:sldChg chg="del">
-        <pc:chgData name="Zonghua Gu" userId="9a7e1853e1951ef5" providerId="LiveId" clId="{CF1FAA12-072C-4ED5-BA76-0FFFAEFDB88A}" dt="2025-09-18T02:23:48.757" v="174" actId="47"/>
-        <pc:sldMkLst>
-          <pc:docMk/>
-          <pc:sldMk cId="403617877" sldId="484"/>
-        </pc:sldMkLst>
-      </pc:sldChg>
-      <pc:sldChg chg="del">
-        <pc:chgData name="Zonghua Gu" userId="9a7e1853e1951ef5" providerId="LiveId" clId="{CF1FAA12-072C-4ED5-BA76-0FFFAEFDB88A}" dt="2025-09-18T02:23:48.757" v="174" actId="47"/>
-        <pc:sldMkLst>
-          <pc:docMk/>
-          <pc:sldMk cId="1902260443" sldId="489"/>
-        </pc:sldMkLst>
-      </pc:sldChg>
-      <pc:sldChg chg="del">
-        <pc:chgData name="Zonghua Gu" userId="9a7e1853e1951ef5" providerId="LiveId" clId="{CF1FAA12-072C-4ED5-BA76-0FFFAEFDB88A}" dt="2025-09-18T02:23:48.757" v="174" actId="47"/>
-        <pc:sldMkLst>
-          <pc:docMk/>
-          <pc:sldMk cId="3886267364" sldId="490"/>
-        </pc:sldMkLst>
-      </pc:sldChg>
-      <pc:sldChg chg="del">
-        <pc:chgData name="Zonghua Gu" userId="9a7e1853e1951ef5" providerId="LiveId" clId="{CF1FAA12-072C-4ED5-BA76-0FFFAEFDB88A}" dt="2025-09-18T02:23:48.757" v="174" actId="47"/>
-        <pc:sldMkLst>
-          <pc:docMk/>
-          <pc:sldMk cId="2314866584" sldId="492"/>
-        </pc:sldMkLst>
-      </pc:sldChg>
-      <pc:sldChg chg="del">
-        <pc:chgData name="Zonghua Gu" userId="9a7e1853e1951ef5" providerId="LiveId" clId="{CF1FAA12-072C-4ED5-BA76-0FFFAEFDB88A}" dt="2025-09-18T02:23:48.757" v="174" actId="47"/>
-        <pc:sldMkLst>
-          <pc:docMk/>
-          <pc:sldMk cId="4175052033" sldId="493"/>
-        </pc:sldMkLst>
-      </pc:sldChg>
-      <pc:sldChg chg="del">
-        <pc:chgData name="Zonghua Gu" userId="9a7e1853e1951ef5" providerId="LiveId" clId="{CF1FAA12-072C-4ED5-BA76-0FFFAEFDB88A}" dt="2025-09-18T02:23:48.757" v="174" actId="47"/>
-        <pc:sldMkLst>
-          <pc:docMk/>
-          <pc:sldMk cId="1620255952" sldId="494"/>
-        </pc:sldMkLst>
-      </pc:sldChg>
-      <pc:sldChg chg="del">
-        <pc:chgData name="Zonghua Gu" userId="9a7e1853e1951ef5" providerId="LiveId" clId="{CF1FAA12-072C-4ED5-BA76-0FFFAEFDB88A}" dt="2025-09-18T02:23:48.757" v="174" actId="47"/>
-        <pc:sldMkLst>
-          <pc:docMk/>
-          <pc:sldMk cId="146821145" sldId="495"/>
-        </pc:sldMkLst>
-      </pc:sldChg>
-      <pc:sldChg chg="del">
-        <pc:chgData name="Zonghua Gu" userId="9a7e1853e1951ef5" providerId="LiveId" clId="{CF1FAA12-072C-4ED5-BA76-0FFFAEFDB88A}" dt="2025-09-18T02:23:48.757" v="174" actId="47"/>
-        <pc:sldMkLst>
-          <pc:docMk/>
-          <pc:sldMk cId="4138289989" sldId="496"/>
-        </pc:sldMkLst>
-      </pc:sldChg>
-      <pc:sldChg chg="del">
-        <pc:chgData name="Zonghua Gu" userId="9a7e1853e1951ef5" providerId="LiveId" clId="{CF1FAA12-072C-4ED5-BA76-0FFFAEFDB88A}" dt="2025-09-18T02:23:48.757" v="174" actId="47"/>
-        <pc:sldMkLst>
-          <pc:docMk/>
-          <pc:sldMk cId="3495259654" sldId="497"/>
-        </pc:sldMkLst>
-      </pc:sldChg>
-      <pc:sldChg chg="del">
-        <pc:chgData name="Zonghua Gu" userId="9a7e1853e1951ef5" providerId="LiveId" clId="{CF1FAA12-072C-4ED5-BA76-0FFFAEFDB88A}" dt="2025-09-18T02:23:48.757" v="174" actId="47"/>
-        <pc:sldMkLst>
-          <pc:docMk/>
-          <pc:sldMk cId="2595803636" sldId="498"/>
-        </pc:sldMkLst>
-      </pc:sldChg>
-      <pc:sldChg chg="del">
-        <pc:chgData name="Zonghua Gu" userId="9a7e1853e1951ef5" providerId="LiveId" clId="{CF1FAA12-072C-4ED5-BA76-0FFFAEFDB88A}" dt="2025-09-18T02:23:48.757" v="174" actId="47"/>
-        <pc:sldMkLst>
-          <pc:docMk/>
-          <pc:sldMk cId="692813522" sldId="499"/>
-        </pc:sldMkLst>
-      </pc:sldChg>
-      <pc:sldChg chg="del">
-        <pc:chgData name="Zonghua Gu" userId="9a7e1853e1951ef5" providerId="LiveId" clId="{CF1FAA12-072C-4ED5-BA76-0FFFAEFDB88A}" dt="2025-09-16T21:19:40.243" v="56" actId="47"/>
-        <pc:sldMkLst>
-          <pc:docMk/>
-          <pc:sldMk cId="3157601905" sldId="500"/>
-        </pc:sldMkLst>
-      </pc:sldChg>
-      <pc:sldChg chg="modSp del mod">
-        <pc:chgData name="Zonghua Gu" userId="9a7e1853e1951ef5" providerId="LiveId" clId="{CF1FAA12-072C-4ED5-BA76-0FFFAEFDB88A}" dt="2025-09-18T02:23:48.757" v="174" actId="47"/>
-        <pc:sldMkLst>
-          <pc:docMk/>
-          <pc:sldMk cId="794990730" sldId="501"/>
-        </pc:sldMkLst>
-      </pc:sldChg>
-      <pc:sldChg chg="del">
-        <pc:chgData name="Zonghua Gu" userId="9a7e1853e1951ef5" providerId="LiveId" clId="{CF1FAA12-072C-4ED5-BA76-0FFFAEFDB88A}" dt="2025-09-18T02:23:48.757" v="174" actId="47"/>
-        <pc:sldMkLst>
-          <pc:docMk/>
-          <pc:sldMk cId="3476175039" sldId="503"/>
-        </pc:sldMkLst>
-      </pc:sldChg>
-      <pc:sldChg chg="del">
-        <pc:chgData name="Zonghua Gu" userId="9a7e1853e1951ef5" providerId="LiveId" clId="{CF1FAA12-072C-4ED5-BA76-0FFFAEFDB88A}" dt="2025-09-18T02:23:48.757" v="174" actId="47"/>
-        <pc:sldMkLst>
-          <pc:docMk/>
-          <pc:sldMk cId="213693986" sldId="504"/>
-        </pc:sldMkLst>
-      </pc:sldChg>
-      <pc:sldChg chg="del">
-        <pc:chgData name="Zonghua Gu" userId="9a7e1853e1951ef5" providerId="LiveId" clId="{CF1FAA12-072C-4ED5-BA76-0FFFAEFDB88A}" dt="2025-09-18T02:23:48.757" v="174" actId="47"/>
-        <pc:sldMkLst>
-          <pc:docMk/>
-          <pc:sldMk cId="709916207" sldId="505"/>
-        </pc:sldMkLst>
-      </pc:sldChg>
-      <pc:sldChg chg="del">
-        <pc:chgData name="Zonghua Gu" userId="9a7e1853e1951ef5" providerId="LiveId" clId="{CF1FAA12-072C-4ED5-BA76-0FFFAEFDB88A}" dt="2025-09-18T02:23:48.757" v="174" actId="47"/>
-        <pc:sldMkLst>
-          <pc:docMk/>
-          <pc:sldMk cId="1106957169" sldId="506"/>
-        </pc:sldMkLst>
-      </pc:sldChg>
-      <pc:sldChg chg="del">
-        <pc:chgData name="Zonghua Gu" userId="9a7e1853e1951ef5" providerId="LiveId" clId="{CF1FAA12-072C-4ED5-BA76-0FFFAEFDB88A}" dt="2025-09-18T02:23:48.757" v="174" actId="47"/>
-        <pc:sldMkLst>
-          <pc:docMk/>
-          <pc:sldMk cId="3987401790" sldId="507"/>
-        </pc:sldMkLst>
-      </pc:sldChg>
-      <pc:sldChg chg="del">
-        <pc:chgData name="Zonghua Gu" userId="9a7e1853e1951ef5" providerId="LiveId" clId="{CF1FAA12-072C-4ED5-BA76-0FFFAEFDB88A}" dt="2025-09-18T02:23:48.757" v="174" actId="47"/>
-        <pc:sldMkLst>
-          <pc:docMk/>
-          <pc:sldMk cId="115375760" sldId="508"/>
-        </pc:sldMkLst>
-      </pc:sldChg>
-      <pc:sldChg chg="del">
-        <pc:chgData name="Zonghua Gu" userId="9a7e1853e1951ef5" providerId="LiveId" clId="{CF1FAA12-072C-4ED5-BA76-0FFFAEFDB88A}" dt="2025-09-18T02:23:48.757" v="174" actId="47"/>
-        <pc:sldMkLst>
-          <pc:docMk/>
-          <pc:sldMk cId="4203467745" sldId="509"/>
-        </pc:sldMkLst>
-      </pc:sldChg>
-      <pc:sldChg chg="del">
-        <pc:chgData name="Zonghua Gu" userId="9a7e1853e1951ef5" providerId="LiveId" clId="{CF1FAA12-072C-4ED5-BA76-0FFFAEFDB88A}" dt="2025-09-18T02:23:48.757" v="174" actId="47"/>
-        <pc:sldMkLst>
-          <pc:docMk/>
-          <pc:sldMk cId="2746898804" sldId="510"/>
-        </pc:sldMkLst>
-      </pc:sldChg>
-      <pc:sldChg chg="del">
-        <pc:chgData name="Zonghua Gu" userId="9a7e1853e1951ef5" providerId="LiveId" clId="{CF1FAA12-072C-4ED5-BA76-0FFFAEFDB88A}" dt="2025-09-18T02:23:48.757" v="174" actId="47"/>
-        <pc:sldMkLst>
-          <pc:docMk/>
-          <pc:sldMk cId="778945240" sldId="511"/>
-        </pc:sldMkLst>
-      </pc:sldChg>
-      <pc:sldChg chg="del">
-        <pc:chgData name="Zonghua Gu" userId="9a7e1853e1951ef5" providerId="LiveId" clId="{CF1FAA12-072C-4ED5-BA76-0FFFAEFDB88A}" dt="2025-09-18T02:23:48.757" v="174" actId="47"/>
-        <pc:sldMkLst>
-          <pc:docMk/>
-          <pc:sldMk cId="631850479" sldId="512"/>
-        </pc:sldMkLst>
-      </pc:sldChg>
-      <pc:sldChg chg="del">
-        <pc:chgData name="Zonghua Gu" userId="9a7e1853e1951ef5" providerId="LiveId" clId="{CF1FAA12-072C-4ED5-BA76-0FFFAEFDB88A}" dt="2025-09-18T02:23:48.757" v="174" actId="47"/>
-        <pc:sldMkLst>
-          <pc:docMk/>
-          <pc:sldMk cId="983958110" sldId="513"/>
-        </pc:sldMkLst>
-      </pc:sldChg>
-      <pc:sldChg chg="del">
-        <pc:chgData name="Zonghua Gu" userId="9a7e1853e1951ef5" providerId="LiveId" clId="{CF1FAA12-072C-4ED5-BA76-0FFFAEFDB88A}" dt="2025-09-18T02:23:48.757" v="174" actId="47"/>
-        <pc:sldMkLst>
-          <pc:docMk/>
-          <pc:sldMk cId="2856238415" sldId="514"/>
-        </pc:sldMkLst>
-      </pc:sldChg>
-      <pc:sldChg chg="del">
-        <pc:chgData name="Zonghua Gu" userId="9a7e1853e1951ef5" providerId="LiveId" clId="{CF1FAA12-072C-4ED5-BA76-0FFFAEFDB88A}" dt="2025-09-18T02:23:48.757" v="174" actId="47"/>
-        <pc:sldMkLst>
-          <pc:docMk/>
-          <pc:sldMk cId="4207137356" sldId="515"/>
-        </pc:sldMkLst>
-      </pc:sldChg>
-      <pc:sldChg chg="del">
-        <pc:chgData name="Zonghua Gu" userId="9a7e1853e1951ef5" providerId="LiveId" clId="{CF1FAA12-072C-4ED5-BA76-0FFFAEFDB88A}" dt="2025-09-18T02:23:48.757" v="174" actId="47"/>
-        <pc:sldMkLst>
-          <pc:docMk/>
-          <pc:sldMk cId="3489353238" sldId="516"/>
-        </pc:sldMkLst>
-      </pc:sldChg>
-      <pc:sldChg chg="del">
-        <pc:chgData name="Zonghua Gu" userId="9a7e1853e1951ef5" providerId="LiveId" clId="{CF1FAA12-072C-4ED5-BA76-0FFFAEFDB88A}" dt="2025-09-18T02:23:48.757" v="174" actId="47"/>
-        <pc:sldMkLst>
-          <pc:docMk/>
-          <pc:sldMk cId="688032704" sldId="519"/>
-        </pc:sldMkLst>
-      </pc:sldChg>
-      <pc:sldChg chg="del">
-        <pc:chgData name="Zonghua Gu" userId="9a7e1853e1951ef5" providerId="LiveId" clId="{CF1FAA12-072C-4ED5-BA76-0FFFAEFDB88A}" dt="2025-09-18T02:23:48.757" v="174" actId="47"/>
-        <pc:sldMkLst>
-          <pc:docMk/>
-          <pc:sldMk cId="315641243" sldId="520"/>
-        </pc:sldMkLst>
-      </pc:sldChg>
-      <pc:sldChg chg="del">
-        <pc:chgData name="Zonghua Gu" userId="9a7e1853e1951ef5" providerId="LiveId" clId="{CF1FAA12-072C-4ED5-BA76-0FFFAEFDB88A}" dt="2025-09-18T02:23:48.757" v="174" actId="47"/>
-        <pc:sldMkLst>
-          <pc:docMk/>
-          <pc:sldMk cId="2243932543" sldId="521"/>
-        </pc:sldMkLst>
-      </pc:sldChg>
-      <pc:sldChg chg="del">
-        <pc:chgData name="Zonghua Gu" userId="9a7e1853e1951ef5" providerId="LiveId" clId="{CF1FAA12-072C-4ED5-BA76-0FFFAEFDB88A}" dt="2025-09-18T02:23:48.757" v="174" actId="47"/>
-        <pc:sldMkLst>
-          <pc:docMk/>
-          <pc:sldMk cId="2249747507" sldId="522"/>
-        </pc:sldMkLst>
-      </pc:sldChg>
-      <pc:sldChg chg="del">
-        <pc:chgData name="Zonghua Gu" userId="9a7e1853e1951ef5" providerId="LiveId" clId="{CF1FAA12-072C-4ED5-BA76-0FFFAEFDB88A}" dt="2025-09-18T02:23:48.757" v="174" actId="47"/>
-        <pc:sldMkLst>
-          <pc:docMk/>
-          <pc:sldMk cId="3088857373" sldId="523"/>
-        </pc:sldMkLst>
-      </pc:sldChg>
-      <pc:sldChg chg="del">
-        <pc:chgData name="Zonghua Gu" userId="9a7e1853e1951ef5" providerId="LiveId" clId="{CF1FAA12-072C-4ED5-BA76-0FFFAEFDB88A}" dt="2025-09-18T02:23:48.757" v="174" actId="47"/>
-        <pc:sldMkLst>
-          <pc:docMk/>
-          <pc:sldMk cId="4202413975" sldId="524"/>
-        </pc:sldMkLst>
-      </pc:sldChg>
-      <pc:sldChg chg="del">
-        <pc:chgData name="Zonghua Gu" userId="9a7e1853e1951ef5" providerId="LiveId" clId="{CF1FAA12-072C-4ED5-BA76-0FFFAEFDB88A}" dt="2025-09-18T02:23:48.757" v="174" actId="47"/>
-        <pc:sldMkLst>
-          <pc:docMk/>
-          <pc:sldMk cId="3686948551" sldId="525"/>
-        </pc:sldMkLst>
-      </pc:sldChg>
-      <pc:sldChg chg="del">
-        <pc:chgData name="Zonghua Gu" userId="9a7e1853e1951ef5" providerId="LiveId" clId="{CF1FAA12-072C-4ED5-BA76-0FFFAEFDB88A}" dt="2025-09-18T02:23:48.757" v="174" actId="47"/>
-        <pc:sldMkLst>
-          <pc:docMk/>
-          <pc:sldMk cId="2666442587" sldId="526"/>
-        </pc:sldMkLst>
-      </pc:sldChg>
-      <pc:sldChg chg="del">
-        <pc:chgData name="Zonghua Gu" userId="9a7e1853e1951ef5" providerId="LiveId" clId="{CF1FAA12-072C-4ED5-BA76-0FFFAEFDB88A}" dt="2025-09-18T02:23:48.757" v="174" actId="47"/>
-        <pc:sldMkLst>
-          <pc:docMk/>
-          <pc:sldMk cId="2434851217" sldId="527"/>
-        </pc:sldMkLst>
-      </pc:sldChg>
-      <pc:sldChg chg="del">
-        <pc:chgData name="Zonghua Gu" userId="9a7e1853e1951ef5" providerId="LiveId" clId="{CF1FAA12-072C-4ED5-BA76-0FFFAEFDB88A}" dt="2025-09-18T02:23:48.757" v="174" actId="47"/>
-        <pc:sldMkLst>
-          <pc:docMk/>
-          <pc:sldMk cId="2210249931" sldId="528"/>
-        </pc:sldMkLst>
-      </pc:sldChg>
-      <pc:sldChg chg="del">
-        <pc:chgData name="Zonghua Gu" userId="9a7e1853e1951ef5" providerId="LiveId" clId="{CF1FAA12-072C-4ED5-BA76-0FFFAEFDB88A}" dt="2025-09-18T02:23:48.757" v="174" actId="47"/>
-        <pc:sldMkLst>
-          <pc:docMk/>
-          <pc:sldMk cId="3797967072" sldId="529"/>
-        </pc:sldMkLst>
-      </pc:sldChg>
-      <pc:sldChg chg="delSp modSp add del mod modTransition modAnim">
-        <pc:chgData name="Zonghua Gu" userId="9a7e1853e1951ef5" providerId="LiveId" clId="{CF1FAA12-072C-4ED5-BA76-0FFFAEFDB88A}" dt="2025-09-18T02:31:49.931" v="272" actId="14100"/>
-        <pc:sldMkLst>
-          <pc:docMk/>
-          <pc:sldMk cId="1864663475" sldId="774"/>
-        </pc:sldMkLst>
-        <pc:spChg chg="mod topLvl">
-          <ac:chgData name="Zonghua Gu" userId="9a7e1853e1951ef5" providerId="LiveId" clId="{CF1FAA12-072C-4ED5-BA76-0FFFAEFDB88A}" dt="2025-09-18T02:31:45.976" v="270" actId="165"/>
-          <ac:spMkLst>
-            <pc:docMk/>
-            <pc:sldMk cId="1864663475" sldId="774"/>
-            <ac:spMk id="16" creationId="{00000000-0000-0000-0000-000000000000}"/>
-          </ac:spMkLst>
-        </pc:spChg>
-        <pc:picChg chg="mod topLvl">
-          <ac:chgData name="Zonghua Gu" userId="9a7e1853e1951ef5" providerId="LiveId" clId="{CF1FAA12-072C-4ED5-BA76-0FFFAEFDB88A}" dt="2025-09-18T02:31:49.931" v="272" actId="14100"/>
-          <ac:picMkLst>
-            <pc:docMk/>
-            <pc:sldMk cId="1864663475" sldId="774"/>
-            <ac:picMk id="12" creationId="{00000000-0000-0000-0000-000000000000}"/>
-          </ac:picMkLst>
-        </pc:picChg>
-        <pc:picChg chg="mod topLvl">
-          <ac:chgData name="Zonghua Gu" userId="9a7e1853e1951ef5" providerId="LiveId" clId="{CF1FAA12-072C-4ED5-BA76-0FFFAEFDB88A}" dt="2025-09-18T02:31:49.931" v="272" actId="14100"/>
-          <ac:picMkLst>
-            <pc:docMk/>
-            <pc:sldMk cId="1864663475" sldId="774"/>
-            <ac:picMk id="13" creationId="{00000000-0000-0000-0000-000000000000}"/>
-          </ac:picMkLst>
-        </pc:picChg>
-        <pc:picChg chg="mod topLvl">
-          <ac:chgData name="Zonghua Gu" userId="9a7e1853e1951ef5" providerId="LiveId" clId="{CF1FAA12-072C-4ED5-BA76-0FFFAEFDB88A}" dt="2025-09-18T02:31:49.931" v="272" actId="14100"/>
-          <ac:picMkLst>
-            <pc:docMk/>
-            <pc:sldMk cId="1864663475" sldId="774"/>
-            <ac:picMk id="14" creationId="{00000000-0000-0000-0000-000000000000}"/>
-          </ac:picMkLst>
-        </pc:picChg>
-      </pc:sldChg>
-      <pc:sldChg chg="add del">
-        <pc:chgData name="Zonghua Gu" userId="9a7e1853e1951ef5" providerId="LiveId" clId="{CF1FAA12-072C-4ED5-BA76-0FFFAEFDB88A}" dt="2025-09-18T02:23:48.757" v="174" actId="47"/>
-        <pc:sldMkLst>
-          <pc:docMk/>
-          <pc:sldMk cId="3575795538" sldId="774"/>
-        </pc:sldMkLst>
-      </pc:sldChg>
-      <pc:sldChg chg="add del modTransition">
-        <pc:chgData name="Zonghua Gu" userId="9a7e1853e1951ef5" providerId="LiveId" clId="{CF1FAA12-072C-4ED5-BA76-0FFFAEFDB88A}" dt="2025-09-18T02:25:27.723" v="184" actId="47"/>
-        <pc:sldMkLst>
-          <pc:docMk/>
-          <pc:sldMk cId="936686548" sldId="775"/>
-        </pc:sldMkLst>
-      </pc:sldChg>
-      <pc:sldChg chg="add del modTransition">
-        <pc:chgData name="Zonghua Gu" userId="9a7e1853e1951ef5" providerId="LiveId" clId="{CF1FAA12-072C-4ED5-BA76-0FFFAEFDB88A}" dt="2025-09-16T21:18:32.771" v="45" actId="2696"/>
-        <pc:sldMkLst>
-          <pc:docMk/>
-          <pc:sldMk cId="1395983037" sldId="789"/>
-        </pc:sldMkLst>
-      </pc:sldChg>
-      <pc:sldChg chg="modSp add del">
-        <pc:chgData name="Zonghua Gu" userId="9a7e1853e1951ef5" providerId="LiveId" clId="{CF1FAA12-072C-4ED5-BA76-0FFFAEFDB88A}" dt="2025-09-16T21:21:18.768" v="77" actId="2696"/>
-        <pc:sldMkLst>
-          <pc:docMk/>
-          <pc:sldMk cId="2509807301" sldId="789"/>
-        </pc:sldMkLst>
-      </pc:sldChg>
-      <pc:sldChg chg="add del">
-        <pc:chgData name="Zonghua Gu" userId="9a7e1853e1951ef5" providerId="LiveId" clId="{CF1FAA12-072C-4ED5-BA76-0FFFAEFDB88A}" dt="2025-09-18T02:23:48.757" v="174" actId="47"/>
-        <pc:sldMkLst>
-          <pc:docMk/>
-          <pc:sldMk cId="1149374474" sldId="790"/>
-        </pc:sldMkLst>
-      </pc:sldChg>
-      <pc:sldChg chg="add del modTransition">
-        <pc:chgData name="Zonghua Gu" userId="9a7e1853e1951ef5" providerId="LiveId" clId="{CF1FAA12-072C-4ED5-BA76-0FFFAEFDB88A}" dt="2025-09-16T21:18:32.771" v="45" actId="2696"/>
-        <pc:sldMkLst>
-          <pc:docMk/>
-          <pc:sldMk cId="2133584576" sldId="790"/>
-        </pc:sldMkLst>
-      </pc:sldChg>
-      <pc:sldChg chg="add del modTransition">
-        <pc:chgData name="Zonghua Gu" userId="9a7e1853e1951ef5" providerId="LiveId" clId="{CF1FAA12-072C-4ED5-BA76-0FFFAEFDB88A}" dt="2025-09-16T21:13:04.721" v="1" actId="47"/>
-        <pc:sldMkLst>
-          <pc:docMk/>
-          <pc:sldMk cId="3725504313" sldId="791"/>
-        </pc:sldMkLst>
-      </pc:sldChg>
-      <pc:sldChg chg="add del modTransition">
-        <pc:chgData name="Zonghua Gu" userId="9a7e1853e1951ef5" providerId="LiveId" clId="{CF1FAA12-072C-4ED5-BA76-0FFFAEFDB88A}" dt="2025-09-16T21:18:09.568" v="43" actId="2696"/>
-        <pc:sldMkLst>
-          <pc:docMk/>
-          <pc:sldMk cId="1629909525" sldId="793"/>
-        </pc:sldMkLst>
-      </pc:sldChg>
-      <pc:sldChg chg="modSp add del mod">
-        <pc:chgData name="Zonghua Gu" userId="9a7e1853e1951ef5" providerId="LiveId" clId="{CF1FAA12-072C-4ED5-BA76-0FFFAEFDB88A}" dt="2025-09-18T02:23:48.757" v="174" actId="47"/>
-        <pc:sldMkLst>
-          <pc:docMk/>
-          <pc:sldMk cId="3190402835" sldId="793"/>
-        </pc:sldMkLst>
-      </pc:sldChg>
-      <pc:sldChg chg="add del">
-        <pc:chgData name="Zonghua Gu" userId="9a7e1853e1951ef5" providerId="LiveId" clId="{CF1FAA12-072C-4ED5-BA76-0FFFAEFDB88A}" dt="2025-09-18T02:23:48.757" v="174" actId="47"/>
-        <pc:sldMkLst>
-          <pc:docMk/>
-          <pc:sldMk cId="2753210025" sldId="794"/>
-        </pc:sldMkLst>
-      </pc:sldChg>
-      <pc:sldChg chg="add del">
-        <pc:chgData name="Zonghua Gu" userId="9a7e1853e1951ef5" providerId="LiveId" clId="{CF1FAA12-072C-4ED5-BA76-0FFFAEFDB88A}" dt="2025-09-18T02:23:48.757" v="174" actId="47"/>
-        <pc:sldMkLst>
-          <pc:docMk/>
-          <pc:sldMk cId="1493324092" sldId="795"/>
-        </pc:sldMkLst>
-      </pc:sldChg>
-      <pc:sldChg chg="modSp add del mod">
-        <pc:chgData name="Zonghua Gu" userId="9a7e1853e1951ef5" providerId="LiveId" clId="{CF1FAA12-072C-4ED5-BA76-0FFFAEFDB88A}" dt="2025-09-18T20:05:47.919" v="606" actId="47"/>
-        <pc:sldMkLst>
-          <pc:docMk/>
-          <pc:sldMk cId="3491198584" sldId="796"/>
-        </pc:sldMkLst>
-      </pc:sldChg>
-      <pc:sldChg chg="add del">
-        <pc:chgData name="Zonghua Gu" userId="9a7e1853e1951ef5" providerId="LiveId" clId="{CF1FAA12-072C-4ED5-BA76-0FFFAEFDB88A}" dt="2025-09-18T21:25:47.888" v="617" actId="47"/>
-        <pc:sldMkLst>
-          <pc:docMk/>
-          <pc:sldMk cId="1115551691" sldId="797"/>
-        </pc:sldMkLst>
-      </pc:sldChg>
-      <pc:sldChg chg="addSp delSp modSp add del mod modAnim">
-        <pc:chgData name="Zonghua Gu" userId="9a7e1853e1951ef5" providerId="LiveId" clId="{CF1FAA12-072C-4ED5-BA76-0FFFAEFDB88A}" dt="2025-09-18T21:25:53.788" v="618" actId="47"/>
-        <pc:sldMkLst>
-          <pc:docMk/>
-          <pc:sldMk cId="1422403682" sldId="798"/>
-        </pc:sldMkLst>
-      </pc:sldChg>
       <pc:sldChg chg="add">
         <pc:chgData name="Zonghua Gu" userId="9a7e1853e1951ef5" providerId="LiveId" clId="{CF1FAA12-072C-4ED5-BA76-0FFFAEFDB88A}" dt="2025-09-24T22:03:01.373" v="624"/>
         <pc:sldMkLst>
           <pc:docMk/>
           <pc:sldMk cId="3968162788" sldId="801"/>
-        </pc:sldMkLst>
-      </pc:sldChg>
-      <pc:sldChg chg="add del">
-        <pc:chgData name="Zonghua Gu" userId="9a7e1853e1951ef5" providerId="LiveId" clId="{CF1FAA12-072C-4ED5-BA76-0FFFAEFDB88A}" dt="2025-09-25T21:59:22.977" v="626" actId="47"/>
-        <pc:sldMkLst>
-          <pc:docMk/>
-          <pc:sldMk cId="413444979" sldId="802"/>
         </pc:sldMkLst>
       </pc:sldChg>
       <pc:sldChg chg="add">
@@ -1206,44 +253,26 @@
           </ac:spMkLst>
         </pc:spChg>
       </pc:sldChg>
-      <pc:sldChg chg="addSp delSp modSp add mod">
-        <pc:chgData name="Zonghua Gu" userId="9a7e1853e1951ef5" providerId="LiveId" clId="{CF1FAA12-072C-4ED5-BA76-0FFFAEFDB88A}" dt="2025-10-16T21:56:45.873" v="688" actId="20577"/>
+      <pc:sldChg chg="addSp delSp modSp add del mod">
+        <pc:chgData name="Zonghua Gu" userId="9a7e1853e1951ef5" providerId="LiveId" clId="{CF1FAA12-072C-4ED5-BA76-0FFFAEFDB88A}" dt="2025-10-21T23:17:31.496" v="689" actId="47"/>
         <pc:sldMkLst>
           <pc:docMk/>
           <pc:sldMk cId="754608230" sldId="815"/>
         </pc:sldMkLst>
-        <pc:spChg chg="mod">
-          <ac:chgData name="Zonghua Gu" userId="9a7e1853e1951ef5" providerId="LiveId" clId="{CF1FAA12-072C-4ED5-BA76-0FFFAEFDB88A}" dt="2025-10-16T21:56:45.873" v="688" actId="20577"/>
-          <ac:spMkLst>
-            <pc:docMk/>
-            <pc:sldMk cId="754608230" sldId="815"/>
-            <ac:spMk id="2" creationId="{F578278E-4A38-6767-6648-B9C79941AF43}"/>
-          </ac:spMkLst>
-        </pc:spChg>
-        <pc:spChg chg="del">
-          <ac:chgData name="Zonghua Gu" userId="9a7e1853e1951ef5" providerId="LiveId" clId="{CF1FAA12-072C-4ED5-BA76-0FFFAEFDB88A}" dt="2025-10-16T21:56:11.601" v="640" actId="478"/>
-          <ac:spMkLst>
-            <pc:docMk/>
-            <pc:sldMk cId="754608230" sldId="815"/>
-            <ac:spMk id="3" creationId="{475BC598-EF55-AB51-D906-12E17238C9A8}"/>
-          </ac:spMkLst>
-        </pc:spChg>
-        <pc:spChg chg="add del">
-          <ac:chgData name="Zonghua Gu" userId="9a7e1853e1951ef5" providerId="LiveId" clId="{CF1FAA12-072C-4ED5-BA76-0FFFAEFDB88A}" dt="2025-10-16T21:56:08.552" v="639" actId="478"/>
-          <ac:spMkLst>
-            <pc:docMk/>
-            <pc:sldMk cId="754608230" sldId="815"/>
-            <ac:spMk id="16" creationId="{D8691280-3701-7284-8180-9F8BD7E6732F}"/>
-          </ac:spMkLst>
-        </pc:spChg>
-        <pc:spChg chg="add del mod">
-          <ac:chgData name="Zonghua Gu" userId="9a7e1853e1951ef5" providerId="LiveId" clId="{CF1FAA12-072C-4ED5-BA76-0FFFAEFDB88A}" dt="2025-10-16T21:56:22.198" v="642" actId="1076"/>
-          <ac:spMkLst>
-            <pc:docMk/>
-            <pc:sldMk cId="754608230" sldId="815"/>
-            <ac:spMk id="17" creationId="{54DAF454-D38A-E54A-0A83-F3163F2194FD}"/>
-          </ac:spMkLst>
-        </pc:spChg>
+      </pc:sldChg>
+      <pc:sldChg chg="add">
+        <pc:chgData name="Zonghua Gu" userId="9a7e1853e1951ef5" providerId="LiveId" clId="{CF1FAA12-072C-4ED5-BA76-0FFFAEFDB88A}" dt="2025-10-21T23:17:32.957" v="690"/>
+        <pc:sldMkLst>
+          <pc:docMk/>
+          <pc:sldMk cId="811401925" sldId="816"/>
+        </pc:sldMkLst>
+      </pc:sldChg>
+      <pc:sldChg chg="add">
+        <pc:chgData name="Zonghua Gu" userId="9a7e1853e1951ef5" providerId="LiveId" clId="{CF1FAA12-072C-4ED5-BA76-0FFFAEFDB88A}" dt="2025-10-21T23:17:32.957" v="690"/>
+        <pc:sldMkLst>
+          <pc:docMk/>
+          <pc:sldMk cId="3488595267" sldId="818"/>
+        </pc:sldMkLst>
       </pc:sldChg>
     </pc:docChg>
   </pc:docChgLst>
@@ -2715,7 +1744,7 @@
           <a:lstStyle/>
           <a:p>
             <a:r>
-              <a:rPr lang="pt-BR" sz="1200" b="0" i="0" kern="1200" dirty="0">
+              <a:rPr lang="de-DE" sz="1200" b="0" i="0" kern="1200" dirty="0">
                 <a:solidFill>
                   <a:schemeClr val="tx1"/>
                 </a:solidFill>
@@ -2724,112 +1753,7 @@
                 <a:ea typeface="+mn-ea"/>
                 <a:cs typeface="+mn-cs"/>
               </a:rPr>
-              <a:t>R0 | 0x00000000</a:t>
-            </a:r>
-            <a:br>
-              <a:rPr lang="pt-BR" dirty="0"/>
-            </a:br>
-            <a:r>
-              <a:rPr lang="pt-BR" sz="1200" b="0" i="0" kern="1200" dirty="0">
-                <a:solidFill>
-                  <a:schemeClr val="tx1"/>
-                </a:solidFill>
-                <a:effectLst/>
-                <a:latin typeface="Times New Roman" pitchFamily="18" charset="0"/>
-                <a:ea typeface="+mn-ea"/>
-                <a:cs typeface="+mn-cs"/>
-              </a:rPr>
-              <a:t>R1 | 0x10000200</a:t>
-            </a:r>
-            <a:br>
-              <a:rPr lang="pt-BR" dirty="0"/>
-            </a:br>
-            <a:r>
-              <a:rPr lang="pt-BR" sz="1200" b="0" i="0" kern="1200" dirty="0">
-                <a:solidFill>
-                  <a:schemeClr val="tx1"/>
-                </a:solidFill>
-                <a:effectLst/>
-                <a:latin typeface="Times New Roman" pitchFamily="18" charset="0"/>
-                <a:ea typeface="+mn-ea"/>
-                <a:cs typeface="+mn-cs"/>
-              </a:rPr>
-              <a:t>R2 | 0x0000FFFF</a:t>
-            </a:r>
-            <a:br>
-              <a:rPr lang="pt-BR" dirty="0"/>
-            </a:br>
-            <a:r>
-              <a:rPr lang="pt-BR" sz="1200" b="0" i="0" kern="1200" dirty="0">
-                <a:solidFill>
-                  <a:schemeClr val="tx1"/>
-                </a:solidFill>
-                <a:effectLst/>
-                <a:latin typeface="Times New Roman" pitchFamily="18" charset="0"/>
-                <a:ea typeface="+mn-ea"/>
-                <a:cs typeface="+mn-cs"/>
-              </a:rPr>
-              <a:t>R3 | 0x18675309</a:t>
-            </a:r>
-            <a:br>
-              <a:rPr lang="pt-BR" dirty="0"/>
-            </a:br>
-            <a:r>
-              <a:rPr lang="pt-BR" sz="1200" b="0" i="0" kern="1200" dirty="0">
-                <a:solidFill>
-                  <a:schemeClr val="tx1"/>
-                </a:solidFill>
-                <a:effectLst/>
-                <a:latin typeface="Times New Roman" pitchFamily="18" charset="0"/>
-                <a:ea typeface="+mn-ea"/>
-                <a:cs typeface="+mn-cs"/>
-              </a:rPr>
-              <a:t>R4 | 0x00000000</a:t>
-            </a:r>
-            <a:br>
-              <a:rPr lang="pt-BR" dirty="0"/>
-            </a:br>
-            <a:r>
-              <a:rPr lang="pt-BR" sz="1200" b="0" i="0" kern="1200" dirty="0">
-                <a:solidFill>
-                  <a:schemeClr val="tx1"/>
-                </a:solidFill>
-                <a:effectLst/>
-                <a:latin typeface="Times New Roman" pitchFamily="18" charset="0"/>
-                <a:ea typeface="+mn-ea"/>
-                <a:cs typeface="+mn-cs"/>
-              </a:rPr>
-              <a:t>R5 | 0x00000000</a:t>
-            </a:r>
-            <a:br>
-              <a:rPr lang="pt-BR" dirty="0"/>
-            </a:br>
-            <a:r>
-              <a:rPr lang="pt-BR" sz="1200" b="0" i="0" kern="1200" dirty="0">
-                <a:solidFill>
-                  <a:schemeClr val="tx1"/>
-                </a:solidFill>
-                <a:effectLst/>
-                <a:latin typeface="Times New Roman" pitchFamily="18" charset="0"/>
-                <a:ea typeface="+mn-ea"/>
-                <a:cs typeface="+mn-cs"/>
-              </a:rPr>
-              <a:t>...</a:t>
-            </a:r>
-            <a:br>
-              <a:rPr lang="pt-BR" dirty="0"/>
-            </a:br>
-            <a:r>
-              <a:rPr lang="pt-BR" sz="1200" b="0" i="0" kern="1200" dirty="0">
-                <a:solidFill>
-                  <a:schemeClr val="tx1"/>
-                </a:solidFill>
-                <a:effectLst/>
-                <a:latin typeface="Times New Roman" pitchFamily="18" charset="0"/>
-                <a:ea typeface="+mn-ea"/>
-                <a:cs typeface="+mn-cs"/>
-              </a:rPr>
-              <a:t>R13 | 0x10000200</a:t>
+              <a:t>0x10000010 FF EF CD AB 00 00 CD AB D0 BC D7 A8</a:t>
             </a:r>
             <a:endParaRPr lang="en-US" dirty="0"/>
           </a:p>
@@ -2838,7 +1762,7 @@
     </p:spTree>
     <p:extLst>
       <p:ext uri="{BB962C8B-B14F-4D97-AF65-F5344CB8AC3E}">
-        <p14:creationId xmlns:p14="http://schemas.microsoft.com/office/powerpoint/2010/main" val="2351661810"/>
+        <p14:creationId xmlns:p14="http://schemas.microsoft.com/office/powerpoint/2010/main" val="2373245885"/>
       </p:ext>
     </p:extLst>
   </p:cSld>
@@ -2990,7 +1914,7 @@
             <a:fld id="{BA00D299-558C-468E-A8B3-0F5C3BFA45F9}" type="datetime1">
               <a:rPr lang="en-US" smtClean="0"/>
               <a:pPr/>
-              <a:t>10/16/2025</a:t>
+              <a:t>10/21/2025</a:t>
             </a:fld>
             <a:endParaRPr lang="en-US"/>
           </a:p>
@@ -3354,7 +2278,7 @@
             <a:fld id="{8B22D175-8905-42BE-8088-EB39001CF9E2}" type="datetime1">
               <a:rPr lang="en-US" smtClean="0"/>
               <a:pPr/>
-              <a:t>10/16/2025</a:t>
+              <a:t>10/21/2025</a:t>
             </a:fld>
             <a:endParaRPr lang="en-US"/>
           </a:p>
@@ -3533,7 +2457,7 @@
             <a:fld id="{E62AA8DD-1B66-47DA-8A31-5DCDA0DEF224}" type="datetime1">
               <a:rPr lang="en-US" smtClean="0"/>
               <a:pPr/>
-              <a:t>10/16/2025</a:t>
+              <a:t>10/21/2025</a:t>
             </a:fld>
             <a:endParaRPr lang="en-US"/>
           </a:p>
@@ -3772,7 +2696,7 @@
             <a:fld id="{D3A8BFB9-75E0-4A72-9D54-3C687B559A4D}" type="datetime1">
               <a:rPr lang="en-US" smtClean="0"/>
               <a:pPr/>
-              <a:t>10/16/2025</a:t>
+              <a:t>10/21/2025</a:t>
             </a:fld>
             <a:endParaRPr lang="en-US"/>
           </a:p>
@@ -4045,7 +2969,7 @@
             <a:fld id="{E470CD76-7AB7-4744-8178-DC5367B833CD}" type="datetime1">
               <a:rPr lang="en-US" smtClean="0"/>
               <a:pPr/>
-              <a:t>10/16/2025</a:t>
+              <a:t>10/21/2025</a:t>
             </a:fld>
             <a:endParaRPr lang="en-US"/>
           </a:p>
@@ -4269,7 +3193,7 @@
             <a:fld id="{A5E3FC63-82A8-4ACC-B2CB-6D46E8B59216}" type="datetime1">
               <a:rPr lang="en-US" smtClean="0"/>
               <a:pPr/>
-              <a:t>10/16/2025</a:t>
+              <a:t>10/21/2025</a:t>
             </a:fld>
             <a:endParaRPr lang="en-US"/>
           </a:p>
@@ -4625,7 +3549,7 @@
             <a:fld id="{D3A9B8A6-94F4-4AF6-98DE-0FFC617E1C31}" type="datetime1">
               <a:rPr lang="en-US" smtClean="0"/>
               <a:pPr/>
-              <a:t>10/16/2025</a:t>
+              <a:t>10/21/2025</a:t>
             </a:fld>
             <a:endParaRPr lang="en-US"/>
           </a:p>
@@ -4861,7 +3785,7 @@
             <a:fld id="{573CF4FC-8D0E-4C14-A02E-A429C4519FEF}" type="datetime1">
               <a:rPr lang="en-US" smtClean="0"/>
               <a:pPr/>
-              <a:t>10/16/2025</a:t>
+              <a:t>10/21/2025</a:t>
             </a:fld>
             <a:endParaRPr lang="en-US"/>
           </a:p>
@@ -5006,7 +3930,7 @@
             <a:fld id="{06BDC487-A287-485A-B215-4EC98DD3E443}" type="datetime1">
               <a:rPr lang="en-US" smtClean="0"/>
               <a:pPr/>
-              <a:t>10/16/2025</a:t>
+              <a:t>10/21/2025</a:t>
             </a:fld>
             <a:endParaRPr lang="en-US"/>
           </a:p>
@@ -5287,7 +4211,7 @@
             <a:fld id="{46049AC6-4AC4-4D5F-9A1B-0E1C0FF133F9}" type="datetime1">
               <a:rPr lang="en-US" smtClean="0"/>
               <a:pPr/>
-              <a:t>10/16/2025</a:t>
+              <a:t>10/21/2025</a:t>
             </a:fld>
             <a:endParaRPr lang="en-US"/>
           </a:p>
@@ -5698,7 +4622,7 @@
             <a:fld id="{83AF4EF9-9AC8-4842-AFC3-C27337CCABE8}" type="datetime1">
               <a:rPr lang="en-US" smtClean="0"/>
               <a:pPr/>
-              <a:t>10/16/2025</a:t>
+              <a:t>10/21/2025</a:t>
             </a:fld>
             <a:endParaRPr lang="en-US"/>
           </a:p>
@@ -6039,7 +4963,7 @@
             <a:fld id="{8DF0DD18-6EB7-49F7-A70C-A012EDB48BDB}" type="datetime1">
               <a:rPr lang="en-US" smtClean="0"/>
               <a:pPr/>
-              <a:t>10/16/2025</a:t>
+              <a:t>10/21/2025</a:t>
             </a:fld>
             <a:endParaRPr lang="en-US"/>
           </a:p>
@@ -9140,7 +8064,7 @@
           <p:cNvPr id="2" name="Title 1">
             <a:extLst>
               <a:ext uri="{FF2B5EF4-FFF2-40B4-BE49-F238E27FC236}">
-                <a16:creationId xmlns:a16="http://schemas.microsoft.com/office/drawing/2014/main" id="{F578278E-4A38-6767-6648-B9C79941AF43}"/>
+                <a16:creationId xmlns:a16="http://schemas.microsoft.com/office/drawing/2014/main" id="{ED346943-56FC-4F00-B4C2-002F4BD6545D}"/>
               </a:ext>
             </a:extLst>
           </p:cNvPr>
@@ -9151,36 +8075,54 @@
             <p:ph type="title"/>
           </p:nvPr>
         </p:nvSpPr>
-        <p:spPr>
-          <a:xfrm>
-            <a:off x="4193236" y="107156"/>
-            <a:ext cx="4676172" cy="990600"/>
-          </a:xfrm>
-        </p:spPr>
+        <p:spPr/>
         <p:txBody>
-          <a:bodyPr>
-            <a:noAutofit/>
-          </a:bodyPr>
+          <a:bodyPr/>
           <a:lstStyle/>
           <a:p>
             <a:r>
-              <a:rPr lang="en-US" sz="2000" dirty="0"/>
-              <a:t>Compute register and memory values at each step of this program (assuming </a:t>
-            </a:r>
-            <a:r>
-              <a:rPr lang="en-US" sz="2000"/>
-              <a:t>Little Endian ordering)</a:t>
-            </a:r>
-            <a:endParaRPr lang="en-US" sz="2000" dirty="0"/>
+              <a:rPr lang="en-US" dirty="0"/>
+              <a:t>Program Understanding</a:t>
+            </a:r>
+          </a:p>
+        </p:txBody>
+      </p:sp>
+      <p:sp>
+        <p:nvSpPr>
+          <p:cNvPr id="3" name="Slide Number Placeholder 2">
+            <a:extLst>
+              <a:ext uri="{FF2B5EF4-FFF2-40B4-BE49-F238E27FC236}">
+                <a16:creationId xmlns:a16="http://schemas.microsoft.com/office/drawing/2014/main" id="{8990BACD-3920-5666-CE72-223F9F2FC606}"/>
+              </a:ext>
+            </a:extLst>
+          </p:cNvPr>
+          <p:cNvSpPr>
+            <a:spLocks noGrp="1"/>
+          </p:cNvSpPr>
+          <p:nvPr>
+            <p:ph type="sldNum" sz="quarter" idx="12"/>
+          </p:nvPr>
+        </p:nvSpPr>
+        <p:spPr/>
+        <p:txBody>
+          <a:bodyPr/>
+          <a:lstStyle/>
+          <a:p>
+            <a:fld id="{AEE14D4A-FE32-40AF-B06D-E9622816B101}" type="slidenum">
+              <a:rPr lang="en-US" smtClean="0"/>
+              <a:pPr/>
+              <a:t>14</a:t>
+            </a:fld>
+            <a:endParaRPr lang="en-US"/>
           </a:p>
         </p:txBody>
       </p:sp>
       <p:graphicFrame>
         <p:nvGraphicFramePr>
-          <p:cNvPr id="5" name="Content Placeholder 4">
+          <p:cNvPr id="7" name="Content Placeholder 6">
             <a:extLst>
               <a:ext uri="{FF2B5EF4-FFF2-40B4-BE49-F238E27FC236}">
-                <a16:creationId xmlns:a16="http://schemas.microsoft.com/office/drawing/2014/main" id="{291244C1-EEA0-B959-8AAA-2875319F934B}"/>
+                <a16:creationId xmlns:a16="http://schemas.microsoft.com/office/drawing/2014/main" id="{921A7FA2-20A5-D70A-4C8A-128BD78BDA7C}"/>
               </a:ext>
             </a:extLst>
           </p:cNvPr>
@@ -9192,7 +8134,1267 @@
           </p:nvPr>
         </p:nvGraphicFramePr>
         <p:xfrm>
-          <a:off x="6802126" y="3426241"/>
+          <a:off x="12661" y="5145594"/>
+          <a:ext cx="9117892" cy="1112520"/>
+        </p:xfrm>
+        <a:graphic>
+          <a:graphicData uri="http://schemas.openxmlformats.org/drawingml/2006/table">
+            <a:tbl>
+              <a:tblPr firstRow="1" bandRow="1">
+                <a:tableStyleId>{5940675A-B579-460E-94D1-54222C63F5DA}</a:tableStyleId>
+              </a:tblPr>
+              <a:tblGrid>
+                <a:gridCol w="1562417">
+                  <a:extLst>
+                    <a:ext uri="{9D8B030D-6E8A-4147-A177-3AD203B41FA5}">
+                      <a16:colId xmlns:a16="http://schemas.microsoft.com/office/drawing/2014/main" val="4041087470"/>
+                    </a:ext>
+                  </a:extLst>
+                </a:gridCol>
+                <a:gridCol w="472033">
+                  <a:extLst>
+                    <a:ext uri="{9D8B030D-6E8A-4147-A177-3AD203B41FA5}">
+                      <a16:colId xmlns:a16="http://schemas.microsoft.com/office/drawing/2014/main" val="475833553"/>
+                    </a:ext>
+                  </a:extLst>
+                </a:gridCol>
+                <a:gridCol w="472033">
+                  <a:extLst>
+                    <a:ext uri="{9D8B030D-6E8A-4147-A177-3AD203B41FA5}">
+                      <a16:colId xmlns:a16="http://schemas.microsoft.com/office/drawing/2014/main" val="3440583969"/>
+                    </a:ext>
+                  </a:extLst>
+                </a:gridCol>
+                <a:gridCol w="472033">
+                  <a:extLst>
+                    <a:ext uri="{9D8B030D-6E8A-4147-A177-3AD203B41FA5}">
+                      <a16:colId xmlns:a16="http://schemas.microsoft.com/office/drawing/2014/main" val="3973726920"/>
+                    </a:ext>
+                  </a:extLst>
+                </a:gridCol>
+                <a:gridCol w="472033">
+                  <a:extLst>
+                    <a:ext uri="{9D8B030D-6E8A-4147-A177-3AD203B41FA5}">
+                      <a16:colId xmlns:a16="http://schemas.microsoft.com/office/drawing/2014/main" val="1099364392"/>
+                    </a:ext>
+                  </a:extLst>
+                </a:gridCol>
+                <a:gridCol w="472033">
+                  <a:extLst>
+                    <a:ext uri="{9D8B030D-6E8A-4147-A177-3AD203B41FA5}">
+                      <a16:colId xmlns:a16="http://schemas.microsoft.com/office/drawing/2014/main" val="598594491"/>
+                    </a:ext>
+                  </a:extLst>
+                </a:gridCol>
+                <a:gridCol w="472033">
+                  <a:extLst>
+                    <a:ext uri="{9D8B030D-6E8A-4147-A177-3AD203B41FA5}">
+                      <a16:colId xmlns:a16="http://schemas.microsoft.com/office/drawing/2014/main" val="3299168853"/>
+                    </a:ext>
+                  </a:extLst>
+                </a:gridCol>
+                <a:gridCol w="472033">
+                  <a:extLst>
+                    <a:ext uri="{9D8B030D-6E8A-4147-A177-3AD203B41FA5}">
+                      <a16:colId xmlns:a16="http://schemas.microsoft.com/office/drawing/2014/main" val="3639377261"/>
+                    </a:ext>
+                  </a:extLst>
+                </a:gridCol>
+                <a:gridCol w="472033">
+                  <a:extLst>
+                    <a:ext uri="{9D8B030D-6E8A-4147-A177-3AD203B41FA5}">
+                      <a16:colId xmlns:a16="http://schemas.microsoft.com/office/drawing/2014/main" val="2095656865"/>
+                    </a:ext>
+                  </a:extLst>
+                </a:gridCol>
+                <a:gridCol w="474980">
+                  <a:extLst>
+                    <a:ext uri="{9D8B030D-6E8A-4147-A177-3AD203B41FA5}">
+                      <a16:colId xmlns:a16="http://schemas.microsoft.com/office/drawing/2014/main" val="2172498307"/>
+                    </a:ext>
+                  </a:extLst>
+                </a:gridCol>
+                <a:gridCol w="472033">
+                  <a:extLst>
+                    <a:ext uri="{9D8B030D-6E8A-4147-A177-3AD203B41FA5}">
+                      <a16:colId xmlns:a16="http://schemas.microsoft.com/office/drawing/2014/main" val="3928751653"/>
+                    </a:ext>
+                  </a:extLst>
+                </a:gridCol>
+                <a:gridCol w="472033">
+                  <a:extLst>
+                    <a:ext uri="{9D8B030D-6E8A-4147-A177-3AD203B41FA5}">
+                      <a16:colId xmlns:a16="http://schemas.microsoft.com/office/drawing/2014/main" val="1178522413"/>
+                    </a:ext>
+                  </a:extLst>
+                </a:gridCol>
+                <a:gridCol w="472033">
+                  <a:extLst>
+                    <a:ext uri="{9D8B030D-6E8A-4147-A177-3AD203B41FA5}">
+                      <a16:colId xmlns:a16="http://schemas.microsoft.com/office/drawing/2014/main" val="4096721898"/>
+                    </a:ext>
+                  </a:extLst>
+                </a:gridCol>
+                <a:gridCol w="472033">
+                  <a:extLst>
+                    <a:ext uri="{9D8B030D-6E8A-4147-A177-3AD203B41FA5}">
+                      <a16:colId xmlns:a16="http://schemas.microsoft.com/office/drawing/2014/main" val="1208970794"/>
+                    </a:ext>
+                  </a:extLst>
+                </a:gridCol>
+                <a:gridCol w="472033">
+                  <a:extLst>
+                    <a:ext uri="{9D8B030D-6E8A-4147-A177-3AD203B41FA5}">
+                      <a16:colId xmlns:a16="http://schemas.microsoft.com/office/drawing/2014/main" val="2430138671"/>
+                    </a:ext>
+                  </a:extLst>
+                </a:gridCol>
+                <a:gridCol w="472033">
+                  <a:extLst>
+                    <a:ext uri="{9D8B030D-6E8A-4147-A177-3AD203B41FA5}">
+                      <a16:colId xmlns:a16="http://schemas.microsoft.com/office/drawing/2014/main" val="2553032553"/>
+                    </a:ext>
+                  </a:extLst>
+                </a:gridCol>
+                <a:gridCol w="472033">
+                  <a:extLst>
+                    <a:ext uri="{9D8B030D-6E8A-4147-A177-3AD203B41FA5}">
+                      <a16:colId xmlns:a16="http://schemas.microsoft.com/office/drawing/2014/main" val="2472361676"/>
+                    </a:ext>
+                  </a:extLst>
+                </a:gridCol>
+              </a:tblGrid>
+              <a:tr h="370840">
+                <a:tc>
+                  <a:txBody>
+                    <a:bodyPr/>
+                    <a:lstStyle/>
+                    <a:p>
+                      <a:pPr marL="0" marR="0" lvl="0" indent="0" algn="ctr" defTabSz="914400" rtl="0" eaLnBrk="1" fontAlgn="auto" latinLnBrk="0" hangingPunct="1">
+                        <a:lnSpc>
+                          <a:spcPct val="100000"/>
+                        </a:lnSpc>
+                        <a:spcBef>
+                          <a:spcPts val="0"/>
+                        </a:spcBef>
+                        <a:spcAft>
+                          <a:spcPts val="0"/>
+                        </a:spcAft>
+                        <a:buClrTx/>
+                        <a:buSzTx/>
+                        <a:buFontTx/>
+                        <a:buNone/>
+                        <a:tabLst/>
+                        <a:defRPr/>
+                      </a:pPr>
+                      <a:r>
+                        <a:rPr lang="en-US" sz="1800" b="0" dirty="0">
+                          <a:latin typeface="Consolas" panose="020B0609020204030204" pitchFamily="49" charset="0"/>
+                          <a:cs typeface="Consolas" panose="020B0609020204030204" pitchFamily="49" charset="0"/>
+                        </a:rPr>
+                        <a:t>0x10000200</a:t>
+                      </a:r>
+                    </a:p>
+                  </a:txBody>
+                  <a:tcPr/>
+                </a:tc>
+                <a:tc>
+                  <a:txBody>
+                    <a:bodyPr/>
+                    <a:lstStyle/>
+                    <a:p>
+                      <a:pPr algn="ctr"/>
+                      <a:r>
+                        <a:rPr lang="en-US" dirty="0"/>
+                        <a:t>60</a:t>
+                      </a:r>
+                    </a:p>
+                  </a:txBody>
+                  <a:tcPr/>
+                </a:tc>
+                <a:tc>
+                  <a:txBody>
+                    <a:bodyPr/>
+                    <a:lstStyle/>
+                    <a:p>
+                      <a:pPr marL="0" algn="ctr" rtl="0" eaLnBrk="1" latinLnBrk="0" hangingPunct="1"/>
+                      <a:r>
+                        <a:rPr kumimoji="0" lang="en-US" kern="1200" dirty="0">
+                          <a:solidFill>
+                            <a:schemeClr val="tx1"/>
+                          </a:solidFill>
+                          <a:latin typeface="+mn-lt"/>
+                          <a:ea typeface="+mn-ea"/>
+                          <a:cs typeface="+mn-cs"/>
+                        </a:rPr>
+                        <a:t>1B</a:t>
+                      </a:r>
+                    </a:p>
+                  </a:txBody>
+                  <a:tcPr/>
+                </a:tc>
+                <a:tc>
+                  <a:txBody>
+                    <a:bodyPr/>
+                    <a:lstStyle/>
+                    <a:p>
+                      <a:pPr marL="0" algn="ctr" rtl="0" eaLnBrk="1" latinLnBrk="0" hangingPunct="1"/>
+                      <a:r>
+                        <a:rPr kumimoji="0" lang="en-US" kern="1200" dirty="0">
+                          <a:solidFill>
+                            <a:schemeClr val="tx1"/>
+                          </a:solidFill>
+                          <a:latin typeface="+mn-lt"/>
+                          <a:ea typeface="+mn-ea"/>
+                          <a:cs typeface="+mn-cs"/>
+                        </a:rPr>
+                        <a:t>11</a:t>
+                      </a:r>
+                    </a:p>
+                  </a:txBody>
+                  <a:tcPr/>
+                </a:tc>
+                <a:tc>
+                  <a:txBody>
+                    <a:bodyPr/>
+                    <a:lstStyle/>
+                    <a:p>
+                      <a:pPr marL="0" algn="ctr" rtl="0" eaLnBrk="1" latinLnBrk="0" hangingPunct="1"/>
+                      <a:r>
+                        <a:rPr kumimoji="0" lang="en-US" kern="1200" dirty="0">
+                          <a:solidFill>
+                            <a:schemeClr val="tx1"/>
+                          </a:solidFill>
+                          <a:latin typeface="+mn-lt"/>
+                          <a:ea typeface="+mn-ea"/>
+                          <a:cs typeface="+mn-cs"/>
+                        </a:rPr>
+                        <a:t>12</a:t>
+                      </a:r>
+                    </a:p>
+                  </a:txBody>
+                  <a:tcPr/>
+                </a:tc>
+                <a:tc>
+                  <a:txBody>
+                    <a:bodyPr/>
+                    <a:lstStyle/>
+                    <a:p>
+                      <a:pPr marL="0" algn="ctr" rtl="0" eaLnBrk="1" latinLnBrk="0" hangingPunct="1"/>
+                      <a:r>
+                        <a:rPr kumimoji="0" lang="en-US" kern="1200" dirty="0">
+                          <a:solidFill>
+                            <a:schemeClr val="tx1"/>
+                          </a:solidFill>
+                          <a:latin typeface="+mn-lt"/>
+                          <a:ea typeface="+mn-ea"/>
+                          <a:cs typeface="+mn-cs"/>
+                        </a:rPr>
+                        <a:t>EE</a:t>
+                      </a:r>
+                    </a:p>
+                  </a:txBody>
+                  <a:tcPr/>
+                </a:tc>
+                <a:tc>
+                  <a:txBody>
+                    <a:bodyPr/>
+                    <a:lstStyle/>
+                    <a:p>
+                      <a:pPr marL="0" algn="ctr" rtl="0" eaLnBrk="1" latinLnBrk="0" hangingPunct="1"/>
+                      <a:r>
+                        <a:rPr kumimoji="0" lang="en-US" kern="1200" dirty="0">
+                          <a:solidFill>
+                            <a:schemeClr val="tx1"/>
+                          </a:solidFill>
+                          <a:latin typeface="+mn-lt"/>
+                          <a:ea typeface="+mn-ea"/>
+                          <a:cs typeface="+mn-cs"/>
+                        </a:rPr>
+                        <a:t>FF</a:t>
+                      </a:r>
+                    </a:p>
+                  </a:txBody>
+                  <a:tcPr/>
+                </a:tc>
+                <a:tc>
+                  <a:txBody>
+                    <a:bodyPr/>
+                    <a:lstStyle/>
+                    <a:p>
+                      <a:pPr marL="0" algn="ctr" rtl="0" eaLnBrk="1" latinLnBrk="0" hangingPunct="1"/>
+                      <a:r>
+                        <a:rPr kumimoji="0" lang="en-US" kern="1200" dirty="0">
+                          <a:solidFill>
+                            <a:schemeClr val="tx1"/>
+                          </a:solidFill>
+                          <a:latin typeface="+mn-lt"/>
+                          <a:ea typeface="+mn-ea"/>
+                          <a:cs typeface="+mn-cs"/>
+                        </a:rPr>
+                        <a:t>11</a:t>
+                      </a:r>
+                    </a:p>
+                  </a:txBody>
+                  <a:tcPr/>
+                </a:tc>
+                <a:tc>
+                  <a:txBody>
+                    <a:bodyPr/>
+                    <a:lstStyle/>
+                    <a:p>
+                      <a:pPr marL="0" algn="ctr" rtl="0" eaLnBrk="1" latinLnBrk="0" hangingPunct="1"/>
+                      <a:r>
+                        <a:rPr kumimoji="0" lang="en-US" kern="1200" dirty="0">
+                          <a:solidFill>
+                            <a:schemeClr val="tx1"/>
+                          </a:solidFill>
+                          <a:latin typeface="+mn-lt"/>
+                          <a:ea typeface="+mn-ea"/>
+                          <a:cs typeface="+mn-cs"/>
+                        </a:rPr>
+                        <a:t>22</a:t>
+                      </a:r>
+                    </a:p>
+                  </a:txBody>
+                  <a:tcPr/>
+                </a:tc>
+                <a:tc>
+                  <a:txBody>
+                    <a:bodyPr/>
+                    <a:lstStyle/>
+                    <a:p>
+                      <a:pPr marL="0" algn="ctr" rtl="0" eaLnBrk="1" latinLnBrk="0" hangingPunct="1"/>
+                      <a:r>
+                        <a:rPr kumimoji="0" lang="en-US" kern="1200" dirty="0">
+                          <a:solidFill>
+                            <a:schemeClr val="tx1"/>
+                          </a:solidFill>
+                          <a:latin typeface="+mn-lt"/>
+                          <a:ea typeface="+mn-ea"/>
+                          <a:cs typeface="+mn-cs"/>
+                        </a:rPr>
+                        <a:t>33</a:t>
+                      </a:r>
+                    </a:p>
+                  </a:txBody>
+                  <a:tcPr/>
+                </a:tc>
+                <a:tc>
+                  <a:txBody>
+                    <a:bodyPr/>
+                    <a:lstStyle/>
+                    <a:p>
+                      <a:pPr marL="0" algn="ctr" rtl="0" eaLnBrk="1" latinLnBrk="0" hangingPunct="1"/>
+                      <a:r>
+                        <a:rPr kumimoji="0" lang="en-US" kern="1200" dirty="0">
+                          <a:solidFill>
+                            <a:schemeClr val="tx1"/>
+                          </a:solidFill>
+                          <a:latin typeface="+mn-lt"/>
+                          <a:ea typeface="+mn-ea"/>
+                          <a:cs typeface="+mn-cs"/>
+                        </a:rPr>
+                        <a:t>44</a:t>
+                      </a:r>
+                    </a:p>
+                  </a:txBody>
+                  <a:tcPr/>
+                </a:tc>
+                <a:tc>
+                  <a:txBody>
+                    <a:bodyPr/>
+                    <a:lstStyle/>
+                    <a:p>
+                      <a:pPr marL="0" algn="ctr" rtl="0" eaLnBrk="1" latinLnBrk="0" hangingPunct="1"/>
+                      <a:r>
+                        <a:rPr kumimoji="0" lang="en-US" kern="1200" dirty="0">
+                          <a:solidFill>
+                            <a:schemeClr val="tx1"/>
+                          </a:solidFill>
+                          <a:latin typeface="+mn-lt"/>
+                          <a:ea typeface="+mn-ea"/>
+                          <a:cs typeface="+mn-cs"/>
+                        </a:rPr>
+                        <a:t>55</a:t>
+                      </a:r>
+                    </a:p>
+                  </a:txBody>
+                  <a:tcPr/>
+                </a:tc>
+                <a:tc>
+                  <a:txBody>
+                    <a:bodyPr/>
+                    <a:lstStyle/>
+                    <a:p>
+                      <a:pPr marL="0" algn="ctr" rtl="0" eaLnBrk="1" latinLnBrk="0" hangingPunct="1"/>
+                      <a:r>
+                        <a:rPr kumimoji="0" lang="en-US" kern="1200" dirty="0">
+                          <a:solidFill>
+                            <a:schemeClr val="tx1"/>
+                          </a:solidFill>
+                          <a:latin typeface="+mn-lt"/>
+                          <a:ea typeface="+mn-ea"/>
+                          <a:cs typeface="+mn-cs"/>
+                        </a:rPr>
+                        <a:t>66</a:t>
+                      </a:r>
+                    </a:p>
+                  </a:txBody>
+                  <a:tcPr/>
+                </a:tc>
+                <a:tc>
+                  <a:txBody>
+                    <a:bodyPr/>
+                    <a:lstStyle/>
+                    <a:p>
+                      <a:pPr marL="0" algn="ctr" rtl="0" eaLnBrk="1" latinLnBrk="0" hangingPunct="1"/>
+                      <a:r>
+                        <a:rPr kumimoji="0" lang="en-US" kern="1200" dirty="0">
+                          <a:solidFill>
+                            <a:schemeClr val="tx1"/>
+                          </a:solidFill>
+                          <a:latin typeface="+mn-lt"/>
+                          <a:ea typeface="+mn-ea"/>
+                          <a:cs typeface="+mn-cs"/>
+                        </a:rPr>
+                        <a:t>77</a:t>
+                      </a:r>
+                    </a:p>
+                  </a:txBody>
+                  <a:tcPr/>
+                </a:tc>
+                <a:tc>
+                  <a:txBody>
+                    <a:bodyPr/>
+                    <a:lstStyle/>
+                    <a:p>
+                      <a:pPr marL="0" algn="ctr" rtl="0" eaLnBrk="1" latinLnBrk="0" hangingPunct="1"/>
+                      <a:r>
+                        <a:rPr kumimoji="0" lang="en-US" kern="1200" dirty="0">
+                          <a:solidFill>
+                            <a:schemeClr val="tx1"/>
+                          </a:solidFill>
+                          <a:latin typeface="+mn-lt"/>
+                          <a:ea typeface="+mn-ea"/>
+                          <a:cs typeface="+mn-cs"/>
+                        </a:rPr>
+                        <a:t>88</a:t>
+                      </a:r>
+                    </a:p>
+                  </a:txBody>
+                  <a:tcPr/>
+                </a:tc>
+                <a:tc>
+                  <a:txBody>
+                    <a:bodyPr/>
+                    <a:lstStyle/>
+                    <a:p>
+                      <a:pPr marL="0" algn="ctr" rtl="0" eaLnBrk="1" latinLnBrk="0" hangingPunct="1"/>
+                      <a:r>
+                        <a:rPr kumimoji="0" lang="en-US" kern="1200" dirty="0">
+                          <a:solidFill>
+                            <a:schemeClr val="tx1"/>
+                          </a:solidFill>
+                          <a:latin typeface="+mn-lt"/>
+                          <a:ea typeface="+mn-ea"/>
+                          <a:cs typeface="+mn-cs"/>
+                        </a:rPr>
+                        <a:t>99</a:t>
+                      </a:r>
+                    </a:p>
+                  </a:txBody>
+                  <a:tcPr/>
+                </a:tc>
+                <a:tc>
+                  <a:txBody>
+                    <a:bodyPr/>
+                    <a:lstStyle/>
+                    <a:p>
+                      <a:pPr marL="0" algn="ctr" rtl="0" eaLnBrk="1" latinLnBrk="0" hangingPunct="1"/>
+                      <a:r>
+                        <a:rPr kumimoji="0" lang="en-US" kern="1200" dirty="0">
+                          <a:solidFill>
+                            <a:schemeClr val="tx1"/>
+                          </a:solidFill>
+                          <a:latin typeface="+mn-lt"/>
+                          <a:ea typeface="+mn-ea"/>
+                          <a:cs typeface="+mn-cs"/>
+                        </a:rPr>
+                        <a:t>92</a:t>
+                      </a:r>
+                    </a:p>
+                  </a:txBody>
+                  <a:tcPr/>
+                </a:tc>
+                <a:extLst>
+                  <a:ext uri="{0D108BD9-81ED-4DB2-BD59-A6C34878D82A}">
+                    <a16:rowId xmlns:a16="http://schemas.microsoft.com/office/drawing/2014/main" val="972262183"/>
+                  </a:ext>
+                </a:extLst>
+              </a:tr>
+              <a:tr h="370840">
+                <a:tc>
+                  <a:txBody>
+                    <a:bodyPr/>
+                    <a:lstStyle/>
+                    <a:p>
+                      <a:pPr algn="ctr"/>
+                      <a:r>
+                        <a:rPr lang="en-US" sz="1800" b="0" dirty="0">
+                          <a:latin typeface="Consolas" panose="020B0609020204030204" pitchFamily="49" charset="0"/>
+                          <a:cs typeface="Consolas" panose="020B0609020204030204" pitchFamily="49" charset="0"/>
+                        </a:rPr>
+                        <a:t>0x100001F0</a:t>
+                      </a:r>
+                      <a:endParaRPr lang="en-US" dirty="0"/>
+                    </a:p>
+                  </a:txBody>
+                  <a:tcPr/>
+                </a:tc>
+                <a:tc>
+                  <a:txBody>
+                    <a:bodyPr/>
+                    <a:lstStyle/>
+                    <a:p>
+                      <a:pPr algn="ctr"/>
+                      <a:r>
+                        <a:rPr lang="en-US" dirty="0"/>
+                        <a:t>10</a:t>
+                      </a:r>
+                    </a:p>
+                  </a:txBody>
+                  <a:tcPr/>
+                </a:tc>
+                <a:tc>
+                  <a:txBody>
+                    <a:bodyPr/>
+                    <a:lstStyle/>
+                    <a:p>
+                      <a:pPr marL="0" algn="ctr" rtl="0" eaLnBrk="1" latinLnBrk="0" hangingPunct="1"/>
+                      <a:r>
+                        <a:rPr kumimoji="0" lang="en-US" kern="1200" dirty="0">
+                          <a:solidFill>
+                            <a:schemeClr val="tx1"/>
+                          </a:solidFill>
+                          <a:latin typeface="+mn-lt"/>
+                          <a:ea typeface="+mn-ea"/>
+                          <a:cs typeface="+mn-cs"/>
+                        </a:rPr>
+                        <a:t>11</a:t>
+                      </a:r>
+                    </a:p>
+                  </a:txBody>
+                  <a:tcPr/>
+                </a:tc>
+                <a:tc>
+                  <a:txBody>
+                    <a:bodyPr/>
+                    <a:lstStyle/>
+                    <a:p>
+                      <a:pPr marL="0" algn="ctr" rtl="0" eaLnBrk="1" latinLnBrk="0" hangingPunct="1"/>
+                      <a:r>
+                        <a:rPr kumimoji="0" lang="en-US" kern="1200" dirty="0">
+                          <a:solidFill>
+                            <a:schemeClr val="tx1"/>
+                          </a:solidFill>
+                          <a:latin typeface="+mn-lt"/>
+                          <a:ea typeface="+mn-ea"/>
+                          <a:cs typeface="+mn-cs"/>
+                        </a:rPr>
+                        <a:t>12</a:t>
+                      </a:r>
+                    </a:p>
+                  </a:txBody>
+                  <a:tcPr/>
+                </a:tc>
+                <a:tc>
+                  <a:txBody>
+                    <a:bodyPr/>
+                    <a:lstStyle/>
+                    <a:p>
+                      <a:pPr marL="0" algn="ctr" rtl="0" eaLnBrk="1" latinLnBrk="0" hangingPunct="1"/>
+                      <a:r>
+                        <a:rPr kumimoji="0" lang="en-US" kern="1200" dirty="0">
+                          <a:solidFill>
+                            <a:schemeClr val="tx1"/>
+                          </a:solidFill>
+                          <a:latin typeface="+mn-lt"/>
+                          <a:ea typeface="+mn-ea"/>
+                          <a:cs typeface="+mn-cs"/>
+                        </a:rPr>
+                        <a:t>13</a:t>
+                      </a:r>
+                    </a:p>
+                  </a:txBody>
+                  <a:tcPr/>
+                </a:tc>
+                <a:tc>
+                  <a:txBody>
+                    <a:bodyPr/>
+                    <a:lstStyle/>
+                    <a:p>
+                      <a:pPr marL="0" algn="ctr" rtl="0" eaLnBrk="1" latinLnBrk="0" hangingPunct="1"/>
+                      <a:r>
+                        <a:rPr kumimoji="0" lang="en-US" kern="1200" dirty="0">
+                          <a:solidFill>
+                            <a:schemeClr val="tx1"/>
+                          </a:solidFill>
+                          <a:latin typeface="+mn-lt"/>
+                          <a:ea typeface="+mn-ea"/>
+                          <a:cs typeface="+mn-cs"/>
+                        </a:rPr>
+                        <a:t>14</a:t>
+                      </a:r>
+                    </a:p>
+                  </a:txBody>
+                  <a:tcPr/>
+                </a:tc>
+                <a:tc>
+                  <a:txBody>
+                    <a:bodyPr/>
+                    <a:lstStyle/>
+                    <a:p>
+                      <a:pPr marL="0" algn="ctr" rtl="0" eaLnBrk="1" latinLnBrk="0" hangingPunct="1"/>
+                      <a:r>
+                        <a:rPr kumimoji="0" lang="en-US" kern="1200" dirty="0">
+                          <a:solidFill>
+                            <a:schemeClr val="tx1"/>
+                          </a:solidFill>
+                          <a:latin typeface="+mn-lt"/>
+                          <a:ea typeface="+mn-ea"/>
+                          <a:cs typeface="+mn-cs"/>
+                        </a:rPr>
+                        <a:t>15</a:t>
+                      </a:r>
+                    </a:p>
+                  </a:txBody>
+                  <a:tcPr/>
+                </a:tc>
+                <a:tc>
+                  <a:txBody>
+                    <a:bodyPr/>
+                    <a:lstStyle/>
+                    <a:p>
+                      <a:pPr marL="0" algn="ctr" rtl="0" eaLnBrk="1" latinLnBrk="0" hangingPunct="1"/>
+                      <a:r>
+                        <a:rPr kumimoji="0" lang="en-US" kern="1200" dirty="0">
+                          <a:solidFill>
+                            <a:schemeClr val="tx1"/>
+                          </a:solidFill>
+                          <a:latin typeface="+mn-lt"/>
+                          <a:ea typeface="+mn-ea"/>
+                          <a:cs typeface="+mn-cs"/>
+                        </a:rPr>
+                        <a:t>16</a:t>
+                      </a:r>
+                    </a:p>
+                  </a:txBody>
+                  <a:tcPr/>
+                </a:tc>
+                <a:tc>
+                  <a:txBody>
+                    <a:bodyPr/>
+                    <a:lstStyle/>
+                    <a:p>
+                      <a:pPr marL="0" algn="ctr" rtl="0" eaLnBrk="1" latinLnBrk="0" hangingPunct="1"/>
+                      <a:r>
+                        <a:rPr kumimoji="0" lang="en-US" kern="1200" dirty="0">
+                          <a:solidFill>
+                            <a:schemeClr val="tx1"/>
+                          </a:solidFill>
+                          <a:latin typeface="+mn-lt"/>
+                          <a:ea typeface="+mn-ea"/>
+                          <a:cs typeface="+mn-cs"/>
+                        </a:rPr>
+                        <a:t>17</a:t>
+                      </a:r>
+                    </a:p>
+                  </a:txBody>
+                  <a:tcPr/>
+                </a:tc>
+                <a:tc>
+                  <a:txBody>
+                    <a:bodyPr/>
+                    <a:lstStyle/>
+                    <a:p>
+                      <a:pPr marL="0" algn="ctr" rtl="0" eaLnBrk="1" latinLnBrk="0" hangingPunct="1"/>
+                      <a:r>
+                        <a:rPr kumimoji="0" lang="en-US" kern="1200" dirty="0">
+                          <a:solidFill>
+                            <a:schemeClr val="tx1"/>
+                          </a:solidFill>
+                          <a:latin typeface="+mn-lt"/>
+                          <a:ea typeface="+mn-ea"/>
+                          <a:cs typeface="+mn-cs"/>
+                        </a:rPr>
+                        <a:t>18</a:t>
+                      </a:r>
+                    </a:p>
+                  </a:txBody>
+                  <a:tcPr/>
+                </a:tc>
+                <a:tc>
+                  <a:txBody>
+                    <a:bodyPr/>
+                    <a:lstStyle/>
+                    <a:p>
+                      <a:pPr marL="0" algn="ctr" rtl="0" eaLnBrk="1" latinLnBrk="0" hangingPunct="1"/>
+                      <a:r>
+                        <a:rPr kumimoji="0" lang="en-US" kern="1200" dirty="0">
+                          <a:solidFill>
+                            <a:schemeClr val="tx1"/>
+                          </a:solidFill>
+                          <a:latin typeface="+mn-lt"/>
+                          <a:ea typeface="+mn-ea"/>
+                          <a:cs typeface="+mn-cs"/>
+                        </a:rPr>
+                        <a:t>19</a:t>
+                      </a:r>
+                    </a:p>
+                  </a:txBody>
+                  <a:tcPr/>
+                </a:tc>
+                <a:tc>
+                  <a:txBody>
+                    <a:bodyPr/>
+                    <a:lstStyle/>
+                    <a:p>
+                      <a:pPr marL="0" algn="ctr" rtl="0" eaLnBrk="1" latinLnBrk="0" hangingPunct="1"/>
+                      <a:r>
+                        <a:rPr kumimoji="0" lang="en-US" kern="1200" dirty="0">
+                          <a:solidFill>
+                            <a:schemeClr val="tx1"/>
+                          </a:solidFill>
+                          <a:latin typeface="+mn-lt"/>
+                          <a:ea typeface="+mn-ea"/>
+                          <a:cs typeface="+mn-cs"/>
+                        </a:rPr>
+                        <a:t>1</a:t>
+                      </a:r>
+                      <a:r>
+                        <a:rPr kumimoji="0" lang="en-US" altLang="zh-CN" kern="1200" dirty="0">
+                          <a:solidFill>
+                            <a:schemeClr val="tx1"/>
+                          </a:solidFill>
+                          <a:latin typeface="+mn-lt"/>
+                          <a:ea typeface="+mn-ea"/>
+                          <a:cs typeface="+mn-cs"/>
+                        </a:rPr>
+                        <a:t>A</a:t>
+                      </a:r>
+                      <a:endParaRPr kumimoji="0" lang="en-US" kern="1200" dirty="0">
+                        <a:solidFill>
+                          <a:schemeClr val="tx1"/>
+                        </a:solidFill>
+                        <a:latin typeface="+mn-lt"/>
+                        <a:ea typeface="+mn-ea"/>
+                        <a:cs typeface="+mn-cs"/>
+                      </a:endParaRPr>
+                    </a:p>
+                  </a:txBody>
+                  <a:tcPr/>
+                </a:tc>
+                <a:tc>
+                  <a:txBody>
+                    <a:bodyPr/>
+                    <a:lstStyle/>
+                    <a:p>
+                      <a:pPr marL="0" algn="ctr" rtl="0" eaLnBrk="1" latinLnBrk="0" hangingPunct="1"/>
+                      <a:r>
+                        <a:rPr kumimoji="0" lang="en-US" kern="1200" dirty="0">
+                          <a:solidFill>
+                            <a:schemeClr val="tx1"/>
+                          </a:solidFill>
+                          <a:latin typeface="+mn-lt"/>
+                          <a:ea typeface="+mn-ea"/>
+                          <a:cs typeface="+mn-cs"/>
+                        </a:rPr>
+                        <a:t>1B</a:t>
+                      </a:r>
+                    </a:p>
+                  </a:txBody>
+                  <a:tcPr/>
+                </a:tc>
+                <a:tc>
+                  <a:txBody>
+                    <a:bodyPr/>
+                    <a:lstStyle/>
+                    <a:p>
+                      <a:pPr marL="0" algn="ctr" rtl="0" eaLnBrk="1" latinLnBrk="0" hangingPunct="1"/>
+                      <a:r>
+                        <a:rPr kumimoji="0" lang="en-US" kern="1200" dirty="0">
+                          <a:solidFill>
+                            <a:schemeClr val="tx1"/>
+                          </a:solidFill>
+                          <a:latin typeface="+mn-lt"/>
+                          <a:ea typeface="+mn-ea"/>
+                          <a:cs typeface="+mn-cs"/>
+                        </a:rPr>
+                        <a:t>1C</a:t>
+                      </a:r>
+                    </a:p>
+                  </a:txBody>
+                  <a:tcPr/>
+                </a:tc>
+                <a:tc>
+                  <a:txBody>
+                    <a:bodyPr/>
+                    <a:lstStyle/>
+                    <a:p>
+                      <a:pPr marL="0" algn="ctr" rtl="0" eaLnBrk="1" latinLnBrk="0" hangingPunct="1"/>
+                      <a:r>
+                        <a:rPr kumimoji="0" lang="en-US" kern="1200" dirty="0">
+                          <a:solidFill>
+                            <a:schemeClr val="tx1"/>
+                          </a:solidFill>
+                          <a:latin typeface="+mn-lt"/>
+                          <a:ea typeface="+mn-ea"/>
+                          <a:cs typeface="+mn-cs"/>
+                        </a:rPr>
+                        <a:t>1D</a:t>
+                      </a:r>
+                    </a:p>
+                  </a:txBody>
+                  <a:tcPr/>
+                </a:tc>
+                <a:tc>
+                  <a:txBody>
+                    <a:bodyPr/>
+                    <a:lstStyle/>
+                    <a:p>
+                      <a:pPr marL="0" algn="ctr" rtl="0" eaLnBrk="1" latinLnBrk="0" hangingPunct="1"/>
+                      <a:r>
+                        <a:rPr kumimoji="0" lang="en-US" kern="1200" dirty="0">
+                          <a:solidFill>
+                            <a:schemeClr val="tx1"/>
+                          </a:solidFill>
+                          <a:latin typeface="+mn-lt"/>
+                          <a:ea typeface="+mn-ea"/>
+                          <a:cs typeface="+mn-cs"/>
+                        </a:rPr>
+                        <a:t>1E</a:t>
+                      </a:r>
+                    </a:p>
+                  </a:txBody>
+                  <a:tcPr/>
+                </a:tc>
+                <a:tc>
+                  <a:txBody>
+                    <a:bodyPr/>
+                    <a:lstStyle/>
+                    <a:p>
+                      <a:pPr marL="0" algn="ctr" rtl="0" eaLnBrk="1" latinLnBrk="0" hangingPunct="1"/>
+                      <a:r>
+                        <a:rPr kumimoji="0" lang="en-US" kern="1200" dirty="0">
+                          <a:solidFill>
+                            <a:schemeClr val="tx1"/>
+                          </a:solidFill>
+                          <a:latin typeface="+mn-lt"/>
+                          <a:ea typeface="+mn-ea"/>
+                          <a:cs typeface="+mn-cs"/>
+                        </a:rPr>
+                        <a:t>1F</a:t>
+                      </a:r>
+                    </a:p>
+                  </a:txBody>
+                  <a:tcPr/>
+                </a:tc>
+                <a:extLst>
+                  <a:ext uri="{0D108BD9-81ED-4DB2-BD59-A6C34878D82A}">
+                    <a16:rowId xmlns:a16="http://schemas.microsoft.com/office/drawing/2014/main" val="1568566092"/>
+                  </a:ext>
+                </a:extLst>
+              </a:tr>
+              <a:tr h="370840">
+                <a:tc>
+                  <a:txBody>
+                    <a:bodyPr/>
+                    <a:lstStyle/>
+                    <a:p>
+                      <a:pPr marL="0" marR="0" lvl="0" indent="0" algn="ctr" defTabSz="914400" rtl="0" eaLnBrk="1" fontAlgn="auto" latinLnBrk="0" hangingPunct="1">
+                        <a:lnSpc>
+                          <a:spcPct val="100000"/>
+                        </a:lnSpc>
+                        <a:spcBef>
+                          <a:spcPts val="0"/>
+                        </a:spcBef>
+                        <a:spcAft>
+                          <a:spcPts val="0"/>
+                        </a:spcAft>
+                        <a:buClrTx/>
+                        <a:buSzTx/>
+                        <a:buFontTx/>
+                        <a:buNone/>
+                        <a:tabLst/>
+                        <a:defRPr/>
+                      </a:pPr>
+                      <a:r>
+                        <a:rPr lang="en-US" sz="1800" b="0" dirty="0">
+                          <a:latin typeface="Consolas" panose="020B0609020204030204" pitchFamily="49" charset="0"/>
+                          <a:cs typeface="Consolas" panose="020B0609020204030204" pitchFamily="49" charset="0"/>
+                        </a:rPr>
+                        <a:t>0x100001E0</a:t>
+                      </a:r>
+                    </a:p>
+                  </a:txBody>
+                  <a:tcPr/>
+                </a:tc>
+                <a:tc>
+                  <a:txBody>
+                    <a:bodyPr/>
+                    <a:lstStyle/>
+                    <a:p>
+                      <a:pPr algn="ctr"/>
+                      <a:r>
+                        <a:rPr lang="en-US" dirty="0"/>
+                        <a:t>00</a:t>
+                      </a:r>
+                    </a:p>
+                  </a:txBody>
+                  <a:tcPr/>
+                </a:tc>
+                <a:tc>
+                  <a:txBody>
+                    <a:bodyPr/>
+                    <a:lstStyle/>
+                    <a:p>
+                      <a:pPr marL="0" algn="ctr" rtl="0" eaLnBrk="1" latinLnBrk="0" hangingPunct="1"/>
+                      <a:r>
+                        <a:rPr kumimoji="0" lang="en-US" kern="1200" dirty="0">
+                          <a:solidFill>
+                            <a:schemeClr val="tx1"/>
+                          </a:solidFill>
+                          <a:latin typeface="+mn-lt"/>
+                          <a:ea typeface="+mn-ea"/>
+                          <a:cs typeface="+mn-cs"/>
+                        </a:rPr>
+                        <a:t>01</a:t>
+                      </a:r>
+                    </a:p>
+                  </a:txBody>
+                  <a:tcPr/>
+                </a:tc>
+                <a:tc>
+                  <a:txBody>
+                    <a:bodyPr/>
+                    <a:lstStyle/>
+                    <a:p>
+                      <a:pPr marL="0" algn="ctr" rtl="0" eaLnBrk="1" latinLnBrk="0" hangingPunct="1"/>
+                      <a:r>
+                        <a:rPr kumimoji="0" lang="en-US" kern="1200" dirty="0">
+                          <a:solidFill>
+                            <a:schemeClr val="tx1"/>
+                          </a:solidFill>
+                          <a:latin typeface="+mn-lt"/>
+                          <a:ea typeface="+mn-ea"/>
+                          <a:cs typeface="+mn-cs"/>
+                        </a:rPr>
+                        <a:t>02</a:t>
+                      </a:r>
+                    </a:p>
+                  </a:txBody>
+                  <a:tcPr/>
+                </a:tc>
+                <a:tc>
+                  <a:txBody>
+                    <a:bodyPr/>
+                    <a:lstStyle/>
+                    <a:p>
+                      <a:pPr marL="0" algn="ctr" rtl="0" eaLnBrk="1" latinLnBrk="0" hangingPunct="1"/>
+                      <a:r>
+                        <a:rPr kumimoji="0" lang="en-US" kern="1200" dirty="0">
+                          <a:solidFill>
+                            <a:schemeClr val="tx1"/>
+                          </a:solidFill>
+                          <a:latin typeface="+mn-lt"/>
+                          <a:ea typeface="+mn-ea"/>
+                          <a:cs typeface="+mn-cs"/>
+                        </a:rPr>
+                        <a:t>03</a:t>
+                      </a:r>
+                    </a:p>
+                  </a:txBody>
+                  <a:tcPr/>
+                </a:tc>
+                <a:tc>
+                  <a:txBody>
+                    <a:bodyPr/>
+                    <a:lstStyle/>
+                    <a:p>
+                      <a:pPr marL="0" algn="ctr" rtl="0" eaLnBrk="1" latinLnBrk="0" hangingPunct="1"/>
+                      <a:r>
+                        <a:rPr kumimoji="0" lang="en-US" kern="1200" dirty="0">
+                          <a:solidFill>
+                            <a:schemeClr val="tx1"/>
+                          </a:solidFill>
+                          <a:latin typeface="+mn-lt"/>
+                          <a:ea typeface="+mn-ea"/>
+                          <a:cs typeface="+mn-cs"/>
+                        </a:rPr>
+                        <a:t>04</a:t>
+                      </a:r>
+                    </a:p>
+                  </a:txBody>
+                  <a:tcPr/>
+                </a:tc>
+                <a:tc>
+                  <a:txBody>
+                    <a:bodyPr/>
+                    <a:lstStyle/>
+                    <a:p>
+                      <a:pPr marL="0" algn="ctr" rtl="0" eaLnBrk="1" latinLnBrk="0" hangingPunct="1"/>
+                      <a:r>
+                        <a:rPr kumimoji="0" lang="en-US" kern="1200" dirty="0">
+                          <a:solidFill>
+                            <a:schemeClr val="tx1"/>
+                          </a:solidFill>
+                          <a:latin typeface="+mn-lt"/>
+                          <a:ea typeface="+mn-ea"/>
+                          <a:cs typeface="+mn-cs"/>
+                        </a:rPr>
+                        <a:t>05</a:t>
+                      </a:r>
+                    </a:p>
+                  </a:txBody>
+                  <a:tcPr/>
+                </a:tc>
+                <a:tc>
+                  <a:txBody>
+                    <a:bodyPr/>
+                    <a:lstStyle/>
+                    <a:p>
+                      <a:pPr marL="0" algn="ctr" rtl="0" eaLnBrk="1" latinLnBrk="0" hangingPunct="1"/>
+                      <a:r>
+                        <a:rPr kumimoji="0" lang="en-US" kern="1200" dirty="0">
+                          <a:solidFill>
+                            <a:schemeClr val="tx1"/>
+                          </a:solidFill>
+                          <a:latin typeface="+mn-lt"/>
+                          <a:ea typeface="+mn-ea"/>
+                          <a:cs typeface="+mn-cs"/>
+                        </a:rPr>
+                        <a:t>06</a:t>
+                      </a:r>
+                    </a:p>
+                  </a:txBody>
+                  <a:tcPr/>
+                </a:tc>
+                <a:tc>
+                  <a:txBody>
+                    <a:bodyPr/>
+                    <a:lstStyle/>
+                    <a:p>
+                      <a:pPr marL="0" algn="ctr" rtl="0" eaLnBrk="1" latinLnBrk="0" hangingPunct="1"/>
+                      <a:r>
+                        <a:rPr kumimoji="0" lang="en-US" kern="1200" dirty="0">
+                          <a:solidFill>
+                            <a:schemeClr val="tx1"/>
+                          </a:solidFill>
+                          <a:latin typeface="+mn-lt"/>
+                          <a:ea typeface="+mn-ea"/>
+                          <a:cs typeface="+mn-cs"/>
+                        </a:rPr>
+                        <a:t>07</a:t>
+                      </a:r>
+                    </a:p>
+                  </a:txBody>
+                  <a:tcPr/>
+                </a:tc>
+                <a:tc>
+                  <a:txBody>
+                    <a:bodyPr/>
+                    <a:lstStyle/>
+                    <a:p>
+                      <a:pPr marL="0" algn="ctr" rtl="0" eaLnBrk="1" latinLnBrk="0" hangingPunct="1"/>
+                      <a:r>
+                        <a:rPr kumimoji="0" lang="en-US" kern="1200" dirty="0">
+                          <a:solidFill>
+                            <a:schemeClr val="tx1"/>
+                          </a:solidFill>
+                          <a:latin typeface="+mn-lt"/>
+                          <a:ea typeface="+mn-ea"/>
+                          <a:cs typeface="+mn-cs"/>
+                        </a:rPr>
+                        <a:t>08</a:t>
+                      </a:r>
+                    </a:p>
+                  </a:txBody>
+                  <a:tcPr/>
+                </a:tc>
+                <a:tc>
+                  <a:txBody>
+                    <a:bodyPr/>
+                    <a:lstStyle/>
+                    <a:p>
+                      <a:pPr marL="0" algn="ctr" rtl="0" eaLnBrk="1" latinLnBrk="0" hangingPunct="1"/>
+                      <a:r>
+                        <a:rPr kumimoji="0" lang="en-US" kern="1200" dirty="0">
+                          <a:solidFill>
+                            <a:schemeClr val="tx1"/>
+                          </a:solidFill>
+                          <a:latin typeface="+mn-lt"/>
+                          <a:ea typeface="+mn-ea"/>
+                          <a:cs typeface="+mn-cs"/>
+                        </a:rPr>
+                        <a:t>09</a:t>
+                      </a:r>
+                    </a:p>
+                  </a:txBody>
+                  <a:tcPr/>
+                </a:tc>
+                <a:tc>
+                  <a:txBody>
+                    <a:bodyPr/>
+                    <a:lstStyle/>
+                    <a:p>
+                      <a:pPr marL="0" algn="ctr" rtl="0" eaLnBrk="1" latinLnBrk="0" hangingPunct="1"/>
+                      <a:r>
+                        <a:rPr kumimoji="0" lang="en-US" kern="1200" dirty="0">
+                          <a:solidFill>
+                            <a:schemeClr val="tx1"/>
+                          </a:solidFill>
+                          <a:latin typeface="+mn-lt"/>
+                          <a:ea typeface="+mn-ea"/>
+                          <a:cs typeface="+mn-cs"/>
+                        </a:rPr>
+                        <a:t>0A</a:t>
+                      </a:r>
+                    </a:p>
+                  </a:txBody>
+                  <a:tcPr/>
+                </a:tc>
+                <a:tc>
+                  <a:txBody>
+                    <a:bodyPr/>
+                    <a:lstStyle/>
+                    <a:p>
+                      <a:pPr marL="0" algn="ctr" rtl="0" eaLnBrk="1" latinLnBrk="0" hangingPunct="1"/>
+                      <a:r>
+                        <a:rPr kumimoji="0" lang="en-US" kern="1200" dirty="0">
+                          <a:solidFill>
+                            <a:schemeClr val="tx1"/>
+                          </a:solidFill>
+                          <a:latin typeface="+mn-lt"/>
+                          <a:ea typeface="+mn-ea"/>
+                          <a:cs typeface="+mn-cs"/>
+                        </a:rPr>
+                        <a:t>0B</a:t>
+                      </a:r>
+                    </a:p>
+                  </a:txBody>
+                  <a:tcPr/>
+                </a:tc>
+                <a:tc>
+                  <a:txBody>
+                    <a:bodyPr/>
+                    <a:lstStyle/>
+                    <a:p>
+                      <a:pPr marL="0" algn="ctr" rtl="0" eaLnBrk="1" latinLnBrk="0" hangingPunct="1"/>
+                      <a:r>
+                        <a:rPr kumimoji="0" lang="en-US" kern="1200" dirty="0">
+                          <a:solidFill>
+                            <a:schemeClr val="tx1"/>
+                          </a:solidFill>
+                          <a:latin typeface="+mn-lt"/>
+                          <a:ea typeface="+mn-ea"/>
+                          <a:cs typeface="+mn-cs"/>
+                        </a:rPr>
+                        <a:t>0C</a:t>
+                      </a:r>
+                    </a:p>
+                  </a:txBody>
+                  <a:tcPr/>
+                </a:tc>
+                <a:tc>
+                  <a:txBody>
+                    <a:bodyPr/>
+                    <a:lstStyle/>
+                    <a:p>
+                      <a:pPr marL="0" algn="ctr" rtl="0" eaLnBrk="1" latinLnBrk="0" hangingPunct="1"/>
+                      <a:r>
+                        <a:rPr kumimoji="0" lang="en-US" kern="1200" dirty="0">
+                          <a:solidFill>
+                            <a:schemeClr val="tx1"/>
+                          </a:solidFill>
+                          <a:latin typeface="+mn-lt"/>
+                          <a:ea typeface="+mn-ea"/>
+                          <a:cs typeface="+mn-cs"/>
+                        </a:rPr>
+                        <a:t>0D</a:t>
+                      </a:r>
+                    </a:p>
+                  </a:txBody>
+                  <a:tcPr/>
+                </a:tc>
+                <a:tc>
+                  <a:txBody>
+                    <a:bodyPr/>
+                    <a:lstStyle/>
+                    <a:p>
+                      <a:pPr marL="0" algn="ctr" rtl="0" eaLnBrk="1" latinLnBrk="0" hangingPunct="1"/>
+                      <a:r>
+                        <a:rPr kumimoji="0" lang="en-US" kern="1200" dirty="0">
+                          <a:solidFill>
+                            <a:schemeClr val="tx1"/>
+                          </a:solidFill>
+                          <a:latin typeface="+mn-lt"/>
+                          <a:ea typeface="+mn-ea"/>
+                          <a:cs typeface="+mn-cs"/>
+                        </a:rPr>
+                        <a:t>0E</a:t>
+                      </a:r>
+                    </a:p>
+                  </a:txBody>
+                  <a:tcPr/>
+                </a:tc>
+                <a:tc>
+                  <a:txBody>
+                    <a:bodyPr/>
+                    <a:lstStyle/>
+                    <a:p>
+                      <a:pPr marL="0" algn="ctr" rtl="0" eaLnBrk="1" latinLnBrk="0" hangingPunct="1"/>
+                      <a:r>
+                        <a:rPr kumimoji="0" lang="en-US" kern="1200" dirty="0">
+                          <a:solidFill>
+                            <a:schemeClr val="tx1"/>
+                          </a:solidFill>
+                          <a:latin typeface="+mn-lt"/>
+                          <a:ea typeface="+mn-ea"/>
+                          <a:cs typeface="+mn-cs"/>
+                        </a:rPr>
+                        <a:t>0F</a:t>
+                      </a:r>
+                    </a:p>
+                  </a:txBody>
+                  <a:tcPr/>
+                </a:tc>
+                <a:extLst>
+                  <a:ext uri="{0D108BD9-81ED-4DB2-BD59-A6C34878D82A}">
+                    <a16:rowId xmlns:a16="http://schemas.microsoft.com/office/drawing/2014/main" val="3396541759"/>
+                  </a:ext>
+                </a:extLst>
+              </a:tr>
+            </a:tbl>
+          </a:graphicData>
+        </a:graphic>
+      </p:graphicFrame>
+      <p:graphicFrame>
+        <p:nvGraphicFramePr>
+          <p:cNvPr id="8" name="Content Placeholder 4">
+            <a:extLst>
+              <a:ext uri="{FF2B5EF4-FFF2-40B4-BE49-F238E27FC236}">
+                <a16:creationId xmlns:a16="http://schemas.microsoft.com/office/drawing/2014/main" id="{D888B29E-C3F6-5701-3FB8-7AD8E9E5634F}"/>
+              </a:ext>
+            </a:extLst>
+          </p:cNvPr>
+          <p:cNvGraphicFramePr>
+            <a:graphicFrameLocks/>
+          </p:cNvGraphicFramePr>
+          <p:nvPr/>
+        </p:nvGraphicFramePr>
+        <p:xfrm>
+          <a:off x="6707997" y="1945640"/>
           <a:ext cx="2219325" cy="2966720"/>
         </p:xfrm>
         <a:graphic>
@@ -9225,7 +9427,7 @@
                     <a:p>
                       <a:pPr marL="0" algn="ctr" rtl="0" eaLnBrk="1" latinLnBrk="0" hangingPunct="1"/>
                       <a:r>
-                        <a:rPr kumimoji="0" lang="en-US" kern="1200" dirty="0">
+                        <a:rPr kumimoji="0" lang="en-US" b="0" kern="1200" dirty="0">
                           <a:solidFill>
                             <a:schemeClr val="tx1"/>
                           </a:solidFill>
@@ -9246,7 +9448,7 @@
                     <a:p>
                       <a:pPr marL="0" algn="ctr" rtl="0" eaLnBrk="1" latinLnBrk="0" hangingPunct="1"/>
                       <a:r>
-                        <a:rPr kumimoji="0" lang="pt-BR" kern="1200" dirty="0">
+                        <a:rPr kumimoji="0" lang="pt-BR" b="0" kern="1200" dirty="0">
                           <a:solidFill>
                             <a:schemeClr val="tx1"/>
                           </a:solidFill>
@@ -9256,7 +9458,7 @@
                         </a:rPr>
                         <a:t>0x00000000</a:t>
                       </a:r>
-                      <a:endParaRPr kumimoji="0" lang="en-US" kern="1200" dirty="0">
+                      <a:endParaRPr kumimoji="0" lang="en-US" b="0" kern="1200" dirty="0">
                         <a:solidFill>
                           <a:schemeClr val="tx1"/>
                         </a:solidFill>
@@ -9282,7 +9484,7 @@
                     <a:p>
                       <a:pPr marL="0" algn="ctr" rtl="0" eaLnBrk="1" latinLnBrk="0" hangingPunct="1"/>
                       <a:r>
-                        <a:rPr kumimoji="0" lang="en-US" kern="1200" dirty="0">
+                        <a:rPr kumimoji="0" lang="en-US" b="0" kern="1200" dirty="0">
                           <a:solidFill>
                             <a:schemeClr val="tx1"/>
                           </a:solidFill>
@@ -9314,7 +9516,7 @@
                         </a:rPr>
                         <a:t>0x10000200</a:t>
                       </a:r>
-                      <a:endParaRPr kumimoji="0" lang="en-US" kern="1200" dirty="0">
+                      <a:endParaRPr kumimoji="0" lang="en-US" b="0" kern="1200" dirty="0">
                         <a:solidFill>
                           <a:schemeClr val="tx1"/>
                         </a:solidFill>
@@ -9340,7 +9542,7 @@
                     <a:p>
                       <a:pPr marL="0" algn="ctr" rtl="0" eaLnBrk="1" latinLnBrk="0" hangingPunct="1"/>
                       <a:r>
-                        <a:rPr kumimoji="0" lang="en-US" kern="1200" dirty="0">
+                        <a:rPr kumimoji="0" lang="en-US" b="0" kern="1200" dirty="0">
                           <a:solidFill>
                             <a:schemeClr val="tx1"/>
                           </a:solidFill>
@@ -9372,7 +9574,7 @@
                         </a:rPr>
                         <a:t>0x0000FFFF</a:t>
                       </a:r>
-                      <a:endParaRPr kumimoji="0" lang="en-US" kern="1200" dirty="0">
+                      <a:endParaRPr kumimoji="0" lang="en-US" b="0" kern="1200" dirty="0">
                         <a:solidFill>
                           <a:schemeClr val="tx1"/>
                         </a:solidFill>
@@ -9398,7 +9600,7 @@
                     <a:p>
                       <a:pPr marL="0" algn="ctr" rtl="0" eaLnBrk="1" latinLnBrk="0" hangingPunct="1"/>
                       <a:r>
-                        <a:rPr kumimoji="0" lang="en-US" kern="1200" dirty="0">
+                        <a:rPr kumimoji="0" lang="en-US" b="0" kern="1200" dirty="0">
                           <a:solidFill>
                             <a:schemeClr val="tx1"/>
                           </a:solidFill>
@@ -9430,7 +9632,7 @@
                         </a:rPr>
                         <a:t>0x18675309</a:t>
                       </a:r>
-                      <a:endParaRPr kumimoji="0" lang="en-US" kern="1200" dirty="0">
+                      <a:endParaRPr kumimoji="0" lang="en-US" b="0" kern="1200" dirty="0">
                         <a:solidFill>
                           <a:schemeClr val="tx1"/>
                         </a:solidFill>
@@ -9456,7 +9658,7 @@
                     <a:p>
                       <a:pPr marL="0" algn="ctr" rtl="0" eaLnBrk="1" latinLnBrk="0" hangingPunct="1"/>
                       <a:r>
-                        <a:rPr kumimoji="0" lang="en-US" kern="1200" dirty="0">
+                        <a:rPr kumimoji="0" lang="en-US" b="0" kern="1200" dirty="0">
                           <a:solidFill>
                             <a:schemeClr val="tx1"/>
                           </a:solidFill>
@@ -9488,7 +9690,7 @@
                         </a:rPr>
                         <a:t>0x00000000</a:t>
                       </a:r>
-                      <a:endParaRPr kumimoji="0" lang="en-US" kern="1200" dirty="0">
+                      <a:endParaRPr kumimoji="0" lang="en-US" b="0" kern="1200" dirty="0">
                         <a:solidFill>
                           <a:schemeClr val="tx1"/>
                         </a:solidFill>
@@ -9514,7 +9716,7 @@
                     <a:p>
                       <a:pPr marL="0" algn="ctr" rtl="0" eaLnBrk="1" latinLnBrk="0" hangingPunct="1"/>
                       <a:r>
-                        <a:rPr kumimoji="0" lang="en-US" kern="1200" dirty="0">
+                        <a:rPr kumimoji="0" lang="en-US" b="0" kern="1200" dirty="0">
                           <a:solidFill>
                             <a:schemeClr val="tx1"/>
                           </a:solidFill>
@@ -9546,7 +9748,7 @@
                         </a:rPr>
                         <a:t>0x00000000</a:t>
                       </a:r>
-                      <a:endParaRPr kumimoji="0" lang="en-US" kern="1200" dirty="0">
+                      <a:endParaRPr kumimoji="0" lang="en-US" b="0" kern="1200" dirty="0">
                         <a:solidFill>
                           <a:schemeClr val="tx1"/>
                         </a:solidFill>
@@ -9572,7 +9774,7 @@
                     <a:p>
                       <a:pPr marL="0" algn="ctr" rtl="0" eaLnBrk="1" latinLnBrk="0" hangingPunct="1"/>
                       <a:r>
-                        <a:rPr kumimoji="0" lang="en-US" kern="1200" dirty="0">
+                        <a:rPr kumimoji="0" lang="en-US" b="0" kern="1200" dirty="0">
                           <a:solidFill>
                             <a:schemeClr val="tx1"/>
                           </a:solidFill>
@@ -9592,7 +9794,7 @@
                     <a:lstStyle/>
                     <a:p>
                       <a:pPr marL="0" algn="ctr" rtl="0" eaLnBrk="1" latinLnBrk="0" hangingPunct="1"/>
-                      <a:endParaRPr kumimoji="0" lang="en-US" kern="1200" dirty="0">
+                      <a:endParaRPr kumimoji="0" lang="en-US" b="0" kern="1200" dirty="0">
                         <a:solidFill>
                           <a:schemeClr val="tx1"/>
                         </a:solidFill>
@@ -9618,7 +9820,7 @@
                     <a:p>
                       <a:pPr marL="0" algn="ctr" rtl="0" eaLnBrk="1" latinLnBrk="0" hangingPunct="1"/>
                       <a:r>
-                        <a:rPr kumimoji="0" lang="en-US" sz="1600" kern="1200" dirty="0">
+                        <a:rPr kumimoji="0" lang="en-US" sz="1600" b="0" kern="1200" dirty="0">
                           <a:solidFill>
                             <a:schemeClr val="tx1"/>
                           </a:solidFill>
@@ -9650,7 +9852,7 @@
                         </a:rPr>
                         <a:t>0x10000200</a:t>
                       </a:r>
-                      <a:endParaRPr kumimoji="0" lang="en-US" kern="1200" dirty="0">
+                      <a:endParaRPr kumimoji="0" lang="en-US" b="0" kern="1200" dirty="0">
                         <a:solidFill>
                           <a:schemeClr val="tx1"/>
                         </a:solidFill>
@@ -9672,1131 +9874,12 @@
           </a:graphicData>
         </a:graphic>
       </p:graphicFrame>
-      <p:graphicFrame>
-        <p:nvGraphicFramePr>
-          <p:cNvPr id="10" name="Content Placeholder 9">
+      <p:sp>
+        <p:nvSpPr>
+          <p:cNvPr id="10" name="TextBox 9">
             <a:extLst>
               <a:ext uri="{FF2B5EF4-FFF2-40B4-BE49-F238E27FC236}">
-                <a16:creationId xmlns:a16="http://schemas.microsoft.com/office/drawing/2014/main" id="{C66D22D6-5FBA-4885-A9F9-CB0B7935CCAF}"/>
-              </a:ext>
-            </a:extLst>
-          </p:cNvPr>
-          <p:cNvGraphicFramePr>
-            <a:graphicFrameLocks/>
-          </p:cNvGraphicFramePr>
-          <p:nvPr/>
-        </p:nvGraphicFramePr>
-        <p:xfrm>
-          <a:off x="404523" y="243245"/>
-          <a:ext cx="599580" cy="5933440"/>
-        </p:xfrm>
-        <a:graphic>
-          <a:graphicData uri="http://schemas.openxmlformats.org/drawingml/2006/table">
-            <a:tbl>
-              <a:tblPr firstRow="1" bandRow="1">
-                <a:tableStyleId>{5940675A-B579-460E-94D1-54222C63F5DA}</a:tableStyleId>
-              </a:tblPr>
-              <a:tblGrid>
-                <a:gridCol w="599580">
-                  <a:extLst>
-                    <a:ext uri="{9D8B030D-6E8A-4147-A177-3AD203B41FA5}">
-                      <a16:colId xmlns:a16="http://schemas.microsoft.com/office/drawing/2014/main" val="484224260"/>
-                    </a:ext>
-                  </a:extLst>
-                </a:gridCol>
-              </a:tblGrid>
-              <a:tr h="370840">
-                <a:tc>
-                  <a:txBody>
-                    <a:bodyPr/>
-                    <a:lstStyle/>
-                    <a:p>
-                      <a:pPr algn="ctr"/>
-                      <a:r>
-                        <a:rPr lang="en-US" dirty="0"/>
-                        <a:t>0F</a:t>
-                      </a:r>
-                    </a:p>
-                  </a:txBody>
-                  <a:tcPr/>
-                </a:tc>
-                <a:extLst>
-                  <a:ext uri="{0D108BD9-81ED-4DB2-BD59-A6C34878D82A}">
-                    <a16:rowId xmlns:a16="http://schemas.microsoft.com/office/drawing/2014/main" val="2369013834"/>
-                  </a:ext>
-                </a:extLst>
-              </a:tr>
-              <a:tr h="370840">
-                <a:tc>
-                  <a:txBody>
-                    <a:bodyPr/>
-                    <a:lstStyle/>
-                    <a:p>
-                      <a:pPr algn="ctr"/>
-                      <a:r>
-                        <a:rPr lang="en-US" dirty="0"/>
-                        <a:t>0E</a:t>
-                      </a:r>
-                    </a:p>
-                  </a:txBody>
-                  <a:tcPr/>
-                </a:tc>
-                <a:extLst>
-                  <a:ext uri="{0D108BD9-81ED-4DB2-BD59-A6C34878D82A}">
-                    <a16:rowId xmlns:a16="http://schemas.microsoft.com/office/drawing/2014/main" val="859108738"/>
-                  </a:ext>
-                </a:extLst>
-              </a:tr>
-              <a:tr h="370840">
-                <a:tc>
-                  <a:txBody>
-                    <a:bodyPr/>
-                    <a:lstStyle/>
-                    <a:p>
-                      <a:pPr algn="ctr"/>
-                      <a:r>
-                        <a:rPr lang="en-US" dirty="0"/>
-                        <a:t>0D</a:t>
-                      </a:r>
-                    </a:p>
-                  </a:txBody>
-                  <a:tcPr/>
-                </a:tc>
-                <a:extLst>
-                  <a:ext uri="{0D108BD9-81ED-4DB2-BD59-A6C34878D82A}">
-                    <a16:rowId xmlns:a16="http://schemas.microsoft.com/office/drawing/2014/main" val="771704"/>
-                  </a:ext>
-                </a:extLst>
-              </a:tr>
-              <a:tr h="370840">
-                <a:tc>
-                  <a:txBody>
-                    <a:bodyPr/>
-                    <a:lstStyle/>
-                    <a:p>
-                      <a:pPr algn="ctr"/>
-                      <a:r>
-                        <a:rPr lang="en-US" dirty="0"/>
-                        <a:t>0C</a:t>
-                      </a:r>
-                    </a:p>
-                  </a:txBody>
-                  <a:tcPr/>
-                </a:tc>
-                <a:extLst>
-                  <a:ext uri="{0D108BD9-81ED-4DB2-BD59-A6C34878D82A}">
-                    <a16:rowId xmlns:a16="http://schemas.microsoft.com/office/drawing/2014/main" val="3326601895"/>
-                  </a:ext>
-                </a:extLst>
-              </a:tr>
-              <a:tr h="370840">
-                <a:tc>
-                  <a:txBody>
-                    <a:bodyPr/>
-                    <a:lstStyle/>
-                    <a:p>
-                      <a:pPr algn="ctr"/>
-                      <a:r>
-                        <a:rPr lang="en-US" dirty="0"/>
-                        <a:t>0B</a:t>
-                      </a:r>
-                    </a:p>
-                  </a:txBody>
-                  <a:tcPr/>
-                </a:tc>
-                <a:extLst>
-                  <a:ext uri="{0D108BD9-81ED-4DB2-BD59-A6C34878D82A}">
-                    <a16:rowId xmlns:a16="http://schemas.microsoft.com/office/drawing/2014/main" val="3935045626"/>
-                  </a:ext>
-                </a:extLst>
-              </a:tr>
-              <a:tr h="370840">
-                <a:tc>
-                  <a:txBody>
-                    <a:bodyPr/>
-                    <a:lstStyle/>
-                    <a:p>
-                      <a:pPr algn="ctr"/>
-                      <a:r>
-                        <a:rPr lang="en-US" dirty="0"/>
-                        <a:t>0A</a:t>
-                      </a:r>
-                    </a:p>
-                  </a:txBody>
-                  <a:tcPr/>
-                </a:tc>
-                <a:extLst>
-                  <a:ext uri="{0D108BD9-81ED-4DB2-BD59-A6C34878D82A}">
-                    <a16:rowId xmlns:a16="http://schemas.microsoft.com/office/drawing/2014/main" val="1822976809"/>
-                  </a:ext>
-                </a:extLst>
-              </a:tr>
-              <a:tr h="370840">
-                <a:tc>
-                  <a:txBody>
-                    <a:bodyPr/>
-                    <a:lstStyle/>
-                    <a:p>
-                      <a:pPr algn="ctr"/>
-                      <a:r>
-                        <a:rPr lang="en-US" dirty="0"/>
-                        <a:t>09</a:t>
-                      </a:r>
-                    </a:p>
-                  </a:txBody>
-                  <a:tcPr/>
-                </a:tc>
-                <a:extLst>
-                  <a:ext uri="{0D108BD9-81ED-4DB2-BD59-A6C34878D82A}">
-                    <a16:rowId xmlns:a16="http://schemas.microsoft.com/office/drawing/2014/main" val="4097080959"/>
-                  </a:ext>
-                </a:extLst>
-              </a:tr>
-              <a:tr h="370840">
-                <a:tc>
-                  <a:txBody>
-                    <a:bodyPr/>
-                    <a:lstStyle/>
-                    <a:p>
-                      <a:pPr algn="ctr"/>
-                      <a:r>
-                        <a:rPr lang="en-US" dirty="0"/>
-                        <a:t>08</a:t>
-                      </a:r>
-                    </a:p>
-                  </a:txBody>
-                  <a:tcPr/>
-                </a:tc>
-                <a:extLst>
-                  <a:ext uri="{0D108BD9-81ED-4DB2-BD59-A6C34878D82A}">
-                    <a16:rowId xmlns:a16="http://schemas.microsoft.com/office/drawing/2014/main" val="2491619246"/>
-                  </a:ext>
-                </a:extLst>
-              </a:tr>
-              <a:tr h="370840">
-                <a:tc>
-                  <a:txBody>
-                    <a:bodyPr/>
-                    <a:lstStyle/>
-                    <a:p>
-                      <a:pPr algn="ctr"/>
-                      <a:r>
-                        <a:rPr lang="en-US" dirty="0"/>
-                        <a:t>07</a:t>
-                      </a:r>
-                    </a:p>
-                  </a:txBody>
-                  <a:tcPr/>
-                </a:tc>
-                <a:extLst>
-                  <a:ext uri="{0D108BD9-81ED-4DB2-BD59-A6C34878D82A}">
-                    <a16:rowId xmlns:a16="http://schemas.microsoft.com/office/drawing/2014/main" val="1151578626"/>
-                  </a:ext>
-                </a:extLst>
-              </a:tr>
-              <a:tr h="370840">
-                <a:tc>
-                  <a:txBody>
-                    <a:bodyPr/>
-                    <a:lstStyle/>
-                    <a:p>
-                      <a:pPr algn="ctr"/>
-                      <a:r>
-                        <a:rPr lang="en-US" dirty="0"/>
-                        <a:t>06</a:t>
-                      </a:r>
-                    </a:p>
-                  </a:txBody>
-                  <a:tcPr/>
-                </a:tc>
-                <a:extLst>
-                  <a:ext uri="{0D108BD9-81ED-4DB2-BD59-A6C34878D82A}">
-                    <a16:rowId xmlns:a16="http://schemas.microsoft.com/office/drawing/2014/main" val="619717567"/>
-                  </a:ext>
-                </a:extLst>
-              </a:tr>
-              <a:tr h="370840">
-                <a:tc>
-                  <a:txBody>
-                    <a:bodyPr/>
-                    <a:lstStyle/>
-                    <a:p>
-                      <a:pPr algn="ctr"/>
-                      <a:r>
-                        <a:rPr lang="en-US" dirty="0"/>
-                        <a:t>05</a:t>
-                      </a:r>
-                    </a:p>
-                  </a:txBody>
-                  <a:tcPr/>
-                </a:tc>
-                <a:extLst>
-                  <a:ext uri="{0D108BD9-81ED-4DB2-BD59-A6C34878D82A}">
-                    <a16:rowId xmlns:a16="http://schemas.microsoft.com/office/drawing/2014/main" val="873267540"/>
-                  </a:ext>
-                </a:extLst>
-              </a:tr>
-              <a:tr h="370840">
-                <a:tc>
-                  <a:txBody>
-                    <a:bodyPr/>
-                    <a:lstStyle/>
-                    <a:p>
-                      <a:pPr algn="ctr"/>
-                      <a:r>
-                        <a:rPr lang="en-US" dirty="0"/>
-                        <a:t>04</a:t>
-                      </a:r>
-                    </a:p>
-                  </a:txBody>
-                  <a:tcPr/>
-                </a:tc>
-                <a:extLst>
-                  <a:ext uri="{0D108BD9-81ED-4DB2-BD59-A6C34878D82A}">
-                    <a16:rowId xmlns:a16="http://schemas.microsoft.com/office/drawing/2014/main" val="2595540954"/>
-                  </a:ext>
-                </a:extLst>
-              </a:tr>
-              <a:tr h="370840">
-                <a:tc>
-                  <a:txBody>
-                    <a:bodyPr/>
-                    <a:lstStyle/>
-                    <a:p>
-                      <a:pPr algn="ctr"/>
-                      <a:r>
-                        <a:rPr lang="en-US" dirty="0"/>
-                        <a:t>03</a:t>
-                      </a:r>
-                    </a:p>
-                  </a:txBody>
-                  <a:tcPr/>
-                </a:tc>
-                <a:extLst>
-                  <a:ext uri="{0D108BD9-81ED-4DB2-BD59-A6C34878D82A}">
-                    <a16:rowId xmlns:a16="http://schemas.microsoft.com/office/drawing/2014/main" val="3259480353"/>
-                  </a:ext>
-                </a:extLst>
-              </a:tr>
-              <a:tr h="370840">
-                <a:tc>
-                  <a:txBody>
-                    <a:bodyPr/>
-                    <a:lstStyle/>
-                    <a:p>
-                      <a:pPr algn="ctr"/>
-                      <a:r>
-                        <a:rPr lang="en-US" dirty="0"/>
-                        <a:t>02</a:t>
-                      </a:r>
-                    </a:p>
-                  </a:txBody>
-                  <a:tcPr/>
-                </a:tc>
-                <a:extLst>
-                  <a:ext uri="{0D108BD9-81ED-4DB2-BD59-A6C34878D82A}">
-                    <a16:rowId xmlns:a16="http://schemas.microsoft.com/office/drawing/2014/main" val="930990083"/>
-                  </a:ext>
-                </a:extLst>
-              </a:tr>
-              <a:tr h="370840">
-                <a:tc>
-                  <a:txBody>
-                    <a:bodyPr/>
-                    <a:lstStyle/>
-                    <a:p>
-                      <a:pPr algn="ctr"/>
-                      <a:r>
-                        <a:rPr lang="en-US" dirty="0"/>
-                        <a:t>01</a:t>
-                      </a:r>
-                    </a:p>
-                  </a:txBody>
-                  <a:tcPr/>
-                </a:tc>
-                <a:extLst>
-                  <a:ext uri="{0D108BD9-81ED-4DB2-BD59-A6C34878D82A}">
-                    <a16:rowId xmlns:a16="http://schemas.microsoft.com/office/drawing/2014/main" val="1201759903"/>
-                  </a:ext>
-                </a:extLst>
-              </a:tr>
-              <a:tr h="370840">
-                <a:tc>
-                  <a:txBody>
-                    <a:bodyPr/>
-                    <a:lstStyle/>
-                    <a:p>
-                      <a:pPr algn="ctr"/>
-                      <a:r>
-                        <a:rPr lang="en-US" dirty="0"/>
-                        <a:t>00</a:t>
-                      </a:r>
-                    </a:p>
-                  </a:txBody>
-                  <a:tcPr/>
-                </a:tc>
-                <a:extLst>
-                  <a:ext uri="{0D108BD9-81ED-4DB2-BD59-A6C34878D82A}">
-                    <a16:rowId xmlns:a16="http://schemas.microsoft.com/office/drawing/2014/main" val="3680620396"/>
-                  </a:ext>
-                </a:extLst>
-              </a:tr>
-            </a:tbl>
-          </a:graphicData>
-        </a:graphic>
-      </p:graphicFrame>
-      <p:graphicFrame>
-        <p:nvGraphicFramePr>
-          <p:cNvPr id="11" name="Content Placeholder 9">
-            <a:extLst>
-              <a:ext uri="{FF2B5EF4-FFF2-40B4-BE49-F238E27FC236}">
-                <a16:creationId xmlns:a16="http://schemas.microsoft.com/office/drawing/2014/main" id="{77A79F3C-0AA4-B3F6-0754-9C4A0DBE1DEF}"/>
-              </a:ext>
-            </a:extLst>
-          </p:cNvPr>
-          <p:cNvGraphicFramePr>
-            <a:graphicFrameLocks/>
-          </p:cNvGraphicFramePr>
-          <p:nvPr/>
-        </p:nvGraphicFramePr>
-        <p:xfrm>
-          <a:off x="1725741" y="223520"/>
-          <a:ext cx="599580" cy="5933440"/>
-        </p:xfrm>
-        <a:graphic>
-          <a:graphicData uri="http://schemas.openxmlformats.org/drawingml/2006/table">
-            <a:tbl>
-              <a:tblPr firstRow="1" bandRow="1">
-                <a:tableStyleId>{5940675A-B579-460E-94D1-54222C63F5DA}</a:tableStyleId>
-              </a:tblPr>
-              <a:tblGrid>
-                <a:gridCol w="599580">
-                  <a:extLst>
-                    <a:ext uri="{9D8B030D-6E8A-4147-A177-3AD203B41FA5}">
-                      <a16:colId xmlns:a16="http://schemas.microsoft.com/office/drawing/2014/main" val="484224260"/>
-                    </a:ext>
-                  </a:extLst>
-                </a:gridCol>
-              </a:tblGrid>
-              <a:tr h="370840">
-                <a:tc>
-                  <a:txBody>
-                    <a:bodyPr/>
-                    <a:lstStyle/>
-                    <a:p>
-                      <a:pPr algn="ctr"/>
-                      <a:r>
-                        <a:rPr lang="en-US" dirty="0"/>
-                        <a:t>1F</a:t>
-                      </a:r>
-                    </a:p>
-                  </a:txBody>
-                  <a:tcPr/>
-                </a:tc>
-                <a:extLst>
-                  <a:ext uri="{0D108BD9-81ED-4DB2-BD59-A6C34878D82A}">
-                    <a16:rowId xmlns:a16="http://schemas.microsoft.com/office/drawing/2014/main" val="2369013834"/>
-                  </a:ext>
-                </a:extLst>
-              </a:tr>
-              <a:tr h="370840">
-                <a:tc>
-                  <a:txBody>
-                    <a:bodyPr/>
-                    <a:lstStyle/>
-                    <a:p>
-                      <a:pPr algn="ctr"/>
-                      <a:r>
-                        <a:rPr lang="en-US" dirty="0"/>
-                        <a:t>1E</a:t>
-                      </a:r>
-                    </a:p>
-                  </a:txBody>
-                  <a:tcPr/>
-                </a:tc>
-                <a:extLst>
-                  <a:ext uri="{0D108BD9-81ED-4DB2-BD59-A6C34878D82A}">
-                    <a16:rowId xmlns:a16="http://schemas.microsoft.com/office/drawing/2014/main" val="859108738"/>
-                  </a:ext>
-                </a:extLst>
-              </a:tr>
-              <a:tr h="370840">
-                <a:tc>
-                  <a:txBody>
-                    <a:bodyPr/>
-                    <a:lstStyle/>
-                    <a:p>
-                      <a:pPr algn="ctr"/>
-                      <a:r>
-                        <a:rPr lang="en-US" dirty="0"/>
-                        <a:t>1D</a:t>
-                      </a:r>
-                    </a:p>
-                  </a:txBody>
-                  <a:tcPr/>
-                </a:tc>
-                <a:extLst>
-                  <a:ext uri="{0D108BD9-81ED-4DB2-BD59-A6C34878D82A}">
-                    <a16:rowId xmlns:a16="http://schemas.microsoft.com/office/drawing/2014/main" val="771704"/>
-                  </a:ext>
-                </a:extLst>
-              </a:tr>
-              <a:tr h="370840">
-                <a:tc>
-                  <a:txBody>
-                    <a:bodyPr/>
-                    <a:lstStyle/>
-                    <a:p>
-                      <a:pPr algn="ctr"/>
-                      <a:r>
-                        <a:rPr lang="en-US" dirty="0"/>
-                        <a:t>1C</a:t>
-                      </a:r>
-                    </a:p>
-                  </a:txBody>
-                  <a:tcPr/>
-                </a:tc>
-                <a:extLst>
-                  <a:ext uri="{0D108BD9-81ED-4DB2-BD59-A6C34878D82A}">
-                    <a16:rowId xmlns:a16="http://schemas.microsoft.com/office/drawing/2014/main" val="3326601895"/>
-                  </a:ext>
-                </a:extLst>
-              </a:tr>
-              <a:tr h="370840">
-                <a:tc>
-                  <a:txBody>
-                    <a:bodyPr/>
-                    <a:lstStyle/>
-                    <a:p>
-                      <a:pPr algn="ctr"/>
-                      <a:r>
-                        <a:rPr lang="en-US" dirty="0"/>
-                        <a:t>1B</a:t>
-                      </a:r>
-                    </a:p>
-                  </a:txBody>
-                  <a:tcPr/>
-                </a:tc>
-                <a:extLst>
-                  <a:ext uri="{0D108BD9-81ED-4DB2-BD59-A6C34878D82A}">
-                    <a16:rowId xmlns:a16="http://schemas.microsoft.com/office/drawing/2014/main" val="3935045626"/>
-                  </a:ext>
-                </a:extLst>
-              </a:tr>
-              <a:tr h="370840">
-                <a:tc>
-                  <a:txBody>
-                    <a:bodyPr/>
-                    <a:lstStyle/>
-                    <a:p>
-                      <a:pPr algn="ctr"/>
-                      <a:r>
-                        <a:rPr lang="en-US" dirty="0"/>
-                        <a:t>1A</a:t>
-                      </a:r>
-                    </a:p>
-                  </a:txBody>
-                  <a:tcPr/>
-                </a:tc>
-                <a:extLst>
-                  <a:ext uri="{0D108BD9-81ED-4DB2-BD59-A6C34878D82A}">
-                    <a16:rowId xmlns:a16="http://schemas.microsoft.com/office/drawing/2014/main" val="1822976809"/>
-                  </a:ext>
-                </a:extLst>
-              </a:tr>
-              <a:tr h="370840">
-                <a:tc>
-                  <a:txBody>
-                    <a:bodyPr/>
-                    <a:lstStyle/>
-                    <a:p>
-                      <a:pPr algn="ctr"/>
-                      <a:r>
-                        <a:rPr lang="en-US" dirty="0"/>
-                        <a:t>19</a:t>
-                      </a:r>
-                    </a:p>
-                  </a:txBody>
-                  <a:tcPr/>
-                </a:tc>
-                <a:extLst>
-                  <a:ext uri="{0D108BD9-81ED-4DB2-BD59-A6C34878D82A}">
-                    <a16:rowId xmlns:a16="http://schemas.microsoft.com/office/drawing/2014/main" val="4097080959"/>
-                  </a:ext>
-                </a:extLst>
-              </a:tr>
-              <a:tr h="370840">
-                <a:tc>
-                  <a:txBody>
-                    <a:bodyPr/>
-                    <a:lstStyle/>
-                    <a:p>
-                      <a:pPr algn="ctr"/>
-                      <a:r>
-                        <a:rPr lang="en-US" dirty="0"/>
-                        <a:t>18</a:t>
-                      </a:r>
-                    </a:p>
-                  </a:txBody>
-                  <a:tcPr/>
-                </a:tc>
-                <a:extLst>
-                  <a:ext uri="{0D108BD9-81ED-4DB2-BD59-A6C34878D82A}">
-                    <a16:rowId xmlns:a16="http://schemas.microsoft.com/office/drawing/2014/main" val="2491619246"/>
-                  </a:ext>
-                </a:extLst>
-              </a:tr>
-              <a:tr h="370840">
-                <a:tc>
-                  <a:txBody>
-                    <a:bodyPr/>
-                    <a:lstStyle/>
-                    <a:p>
-                      <a:pPr algn="ctr"/>
-                      <a:r>
-                        <a:rPr lang="en-US" dirty="0"/>
-                        <a:t>17</a:t>
-                      </a:r>
-                    </a:p>
-                  </a:txBody>
-                  <a:tcPr/>
-                </a:tc>
-                <a:extLst>
-                  <a:ext uri="{0D108BD9-81ED-4DB2-BD59-A6C34878D82A}">
-                    <a16:rowId xmlns:a16="http://schemas.microsoft.com/office/drawing/2014/main" val="1151578626"/>
-                  </a:ext>
-                </a:extLst>
-              </a:tr>
-              <a:tr h="370840">
-                <a:tc>
-                  <a:txBody>
-                    <a:bodyPr/>
-                    <a:lstStyle/>
-                    <a:p>
-                      <a:pPr algn="ctr"/>
-                      <a:r>
-                        <a:rPr lang="en-US" dirty="0"/>
-                        <a:t>16</a:t>
-                      </a:r>
-                    </a:p>
-                  </a:txBody>
-                  <a:tcPr/>
-                </a:tc>
-                <a:extLst>
-                  <a:ext uri="{0D108BD9-81ED-4DB2-BD59-A6C34878D82A}">
-                    <a16:rowId xmlns:a16="http://schemas.microsoft.com/office/drawing/2014/main" val="619717567"/>
-                  </a:ext>
-                </a:extLst>
-              </a:tr>
-              <a:tr h="370840">
-                <a:tc>
-                  <a:txBody>
-                    <a:bodyPr/>
-                    <a:lstStyle/>
-                    <a:p>
-                      <a:pPr algn="ctr"/>
-                      <a:r>
-                        <a:rPr lang="en-US" dirty="0"/>
-                        <a:t>15</a:t>
-                      </a:r>
-                    </a:p>
-                  </a:txBody>
-                  <a:tcPr/>
-                </a:tc>
-                <a:extLst>
-                  <a:ext uri="{0D108BD9-81ED-4DB2-BD59-A6C34878D82A}">
-                    <a16:rowId xmlns:a16="http://schemas.microsoft.com/office/drawing/2014/main" val="873267540"/>
-                  </a:ext>
-                </a:extLst>
-              </a:tr>
-              <a:tr h="370840">
-                <a:tc>
-                  <a:txBody>
-                    <a:bodyPr/>
-                    <a:lstStyle/>
-                    <a:p>
-                      <a:pPr algn="ctr"/>
-                      <a:r>
-                        <a:rPr lang="en-US" dirty="0"/>
-                        <a:t>14</a:t>
-                      </a:r>
-                    </a:p>
-                  </a:txBody>
-                  <a:tcPr/>
-                </a:tc>
-                <a:extLst>
-                  <a:ext uri="{0D108BD9-81ED-4DB2-BD59-A6C34878D82A}">
-                    <a16:rowId xmlns:a16="http://schemas.microsoft.com/office/drawing/2014/main" val="2595540954"/>
-                  </a:ext>
-                </a:extLst>
-              </a:tr>
-              <a:tr h="370840">
-                <a:tc>
-                  <a:txBody>
-                    <a:bodyPr/>
-                    <a:lstStyle/>
-                    <a:p>
-                      <a:pPr algn="ctr"/>
-                      <a:r>
-                        <a:rPr lang="en-US" dirty="0"/>
-                        <a:t>13</a:t>
-                      </a:r>
-                    </a:p>
-                  </a:txBody>
-                  <a:tcPr/>
-                </a:tc>
-                <a:extLst>
-                  <a:ext uri="{0D108BD9-81ED-4DB2-BD59-A6C34878D82A}">
-                    <a16:rowId xmlns:a16="http://schemas.microsoft.com/office/drawing/2014/main" val="3259480353"/>
-                  </a:ext>
-                </a:extLst>
-              </a:tr>
-              <a:tr h="370840">
-                <a:tc>
-                  <a:txBody>
-                    <a:bodyPr/>
-                    <a:lstStyle/>
-                    <a:p>
-                      <a:pPr algn="ctr"/>
-                      <a:r>
-                        <a:rPr lang="en-US" dirty="0"/>
-                        <a:t>12</a:t>
-                      </a:r>
-                    </a:p>
-                  </a:txBody>
-                  <a:tcPr/>
-                </a:tc>
-                <a:extLst>
-                  <a:ext uri="{0D108BD9-81ED-4DB2-BD59-A6C34878D82A}">
-                    <a16:rowId xmlns:a16="http://schemas.microsoft.com/office/drawing/2014/main" val="930990083"/>
-                  </a:ext>
-                </a:extLst>
-              </a:tr>
-              <a:tr h="370840">
-                <a:tc>
-                  <a:txBody>
-                    <a:bodyPr/>
-                    <a:lstStyle/>
-                    <a:p>
-                      <a:pPr algn="ctr"/>
-                      <a:r>
-                        <a:rPr lang="en-US" dirty="0"/>
-                        <a:t>11</a:t>
-                      </a:r>
-                    </a:p>
-                  </a:txBody>
-                  <a:tcPr/>
-                </a:tc>
-                <a:extLst>
-                  <a:ext uri="{0D108BD9-81ED-4DB2-BD59-A6C34878D82A}">
-                    <a16:rowId xmlns:a16="http://schemas.microsoft.com/office/drawing/2014/main" val="1201759903"/>
-                  </a:ext>
-                </a:extLst>
-              </a:tr>
-              <a:tr h="370840">
-                <a:tc>
-                  <a:txBody>
-                    <a:bodyPr/>
-                    <a:lstStyle/>
-                    <a:p>
-                      <a:pPr algn="ctr"/>
-                      <a:r>
-                        <a:rPr lang="en-US" dirty="0"/>
-                        <a:t>10</a:t>
-                      </a:r>
-                    </a:p>
-                  </a:txBody>
-                  <a:tcPr/>
-                </a:tc>
-                <a:extLst>
-                  <a:ext uri="{0D108BD9-81ED-4DB2-BD59-A6C34878D82A}">
-                    <a16:rowId xmlns:a16="http://schemas.microsoft.com/office/drawing/2014/main" val="3680620396"/>
-                  </a:ext>
-                </a:extLst>
-              </a:tr>
-            </a:tbl>
-          </a:graphicData>
-        </a:graphic>
-      </p:graphicFrame>
-      <p:graphicFrame>
-        <p:nvGraphicFramePr>
-          <p:cNvPr id="12" name="Content Placeholder 9">
-            <a:extLst>
-              <a:ext uri="{FF2B5EF4-FFF2-40B4-BE49-F238E27FC236}">
-                <a16:creationId xmlns:a16="http://schemas.microsoft.com/office/drawing/2014/main" id="{8E0D479D-BD41-9749-78E1-AE7DB7FEF62B}"/>
-              </a:ext>
-            </a:extLst>
-          </p:cNvPr>
-          <p:cNvGraphicFramePr>
-            <a:graphicFrameLocks/>
-          </p:cNvGraphicFramePr>
-          <p:nvPr/>
-        </p:nvGraphicFramePr>
-        <p:xfrm>
-          <a:off x="3320795" y="219948"/>
-          <a:ext cx="599580" cy="5933440"/>
-        </p:xfrm>
-        <a:graphic>
-          <a:graphicData uri="http://schemas.openxmlformats.org/drawingml/2006/table">
-            <a:tbl>
-              <a:tblPr firstRow="1" bandRow="1">
-                <a:tableStyleId>{5940675A-B579-460E-94D1-54222C63F5DA}</a:tableStyleId>
-              </a:tblPr>
-              <a:tblGrid>
-                <a:gridCol w="599580">
-                  <a:extLst>
-                    <a:ext uri="{9D8B030D-6E8A-4147-A177-3AD203B41FA5}">
-                      <a16:colId xmlns:a16="http://schemas.microsoft.com/office/drawing/2014/main" val="484224260"/>
-                    </a:ext>
-                  </a:extLst>
-                </a:gridCol>
-              </a:tblGrid>
-              <a:tr h="370840">
-                <a:tc>
-                  <a:txBody>
-                    <a:bodyPr/>
-                    <a:lstStyle/>
-                    <a:p>
-                      <a:pPr algn="ctr"/>
-                      <a:r>
-                        <a:rPr lang="en-US" dirty="0"/>
-                        <a:t>AA</a:t>
-                      </a:r>
-                    </a:p>
-                  </a:txBody>
-                  <a:tcPr/>
-                </a:tc>
-                <a:extLst>
-                  <a:ext uri="{0D108BD9-81ED-4DB2-BD59-A6C34878D82A}">
-                    <a16:rowId xmlns:a16="http://schemas.microsoft.com/office/drawing/2014/main" val="2369013834"/>
-                  </a:ext>
-                </a:extLst>
-              </a:tr>
-              <a:tr h="370840">
-                <a:tc>
-                  <a:txBody>
-                    <a:bodyPr/>
-                    <a:lstStyle/>
-                    <a:p>
-                      <a:pPr algn="ctr"/>
-                      <a:r>
-                        <a:rPr lang="en-US" dirty="0"/>
-                        <a:t>99</a:t>
-                      </a:r>
-                    </a:p>
-                  </a:txBody>
-                  <a:tcPr/>
-                </a:tc>
-                <a:extLst>
-                  <a:ext uri="{0D108BD9-81ED-4DB2-BD59-A6C34878D82A}">
-                    <a16:rowId xmlns:a16="http://schemas.microsoft.com/office/drawing/2014/main" val="859108738"/>
-                  </a:ext>
-                </a:extLst>
-              </a:tr>
-              <a:tr h="370840">
-                <a:tc>
-                  <a:txBody>
-                    <a:bodyPr/>
-                    <a:lstStyle/>
-                    <a:p>
-                      <a:pPr algn="ctr"/>
-                      <a:r>
-                        <a:rPr lang="en-US" dirty="0"/>
-                        <a:t>88</a:t>
-                      </a:r>
-                    </a:p>
-                  </a:txBody>
-                  <a:tcPr/>
-                </a:tc>
-                <a:extLst>
-                  <a:ext uri="{0D108BD9-81ED-4DB2-BD59-A6C34878D82A}">
-                    <a16:rowId xmlns:a16="http://schemas.microsoft.com/office/drawing/2014/main" val="771704"/>
-                  </a:ext>
-                </a:extLst>
-              </a:tr>
-              <a:tr h="370840">
-                <a:tc>
-                  <a:txBody>
-                    <a:bodyPr/>
-                    <a:lstStyle/>
-                    <a:p>
-                      <a:pPr algn="ctr"/>
-                      <a:r>
-                        <a:rPr lang="en-US" dirty="0"/>
-                        <a:t>77</a:t>
-                      </a:r>
-                    </a:p>
-                  </a:txBody>
-                  <a:tcPr/>
-                </a:tc>
-                <a:extLst>
-                  <a:ext uri="{0D108BD9-81ED-4DB2-BD59-A6C34878D82A}">
-                    <a16:rowId xmlns:a16="http://schemas.microsoft.com/office/drawing/2014/main" val="3326601895"/>
-                  </a:ext>
-                </a:extLst>
-              </a:tr>
-              <a:tr h="370840">
-                <a:tc>
-                  <a:txBody>
-                    <a:bodyPr/>
-                    <a:lstStyle/>
-                    <a:p>
-                      <a:pPr algn="ctr"/>
-                      <a:r>
-                        <a:rPr lang="en-US" dirty="0"/>
-                        <a:t>66</a:t>
-                      </a:r>
-                    </a:p>
-                  </a:txBody>
-                  <a:tcPr/>
-                </a:tc>
-                <a:extLst>
-                  <a:ext uri="{0D108BD9-81ED-4DB2-BD59-A6C34878D82A}">
-                    <a16:rowId xmlns:a16="http://schemas.microsoft.com/office/drawing/2014/main" val="3935045626"/>
-                  </a:ext>
-                </a:extLst>
-              </a:tr>
-              <a:tr h="370840">
-                <a:tc>
-                  <a:txBody>
-                    <a:bodyPr/>
-                    <a:lstStyle/>
-                    <a:p>
-                      <a:pPr algn="ctr"/>
-                      <a:r>
-                        <a:rPr lang="en-US" dirty="0"/>
-                        <a:t>55</a:t>
-                      </a:r>
-                    </a:p>
-                  </a:txBody>
-                  <a:tcPr/>
-                </a:tc>
-                <a:extLst>
-                  <a:ext uri="{0D108BD9-81ED-4DB2-BD59-A6C34878D82A}">
-                    <a16:rowId xmlns:a16="http://schemas.microsoft.com/office/drawing/2014/main" val="1822976809"/>
-                  </a:ext>
-                </a:extLst>
-              </a:tr>
-              <a:tr h="370840">
-                <a:tc>
-                  <a:txBody>
-                    <a:bodyPr/>
-                    <a:lstStyle/>
-                    <a:p>
-                      <a:pPr algn="ctr"/>
-                      <a:r>
-                        <a:rPr lang="en-US" dirty="0"/>
-                        <a:t>44</a:t>
-                      </a:r>
-                    </a:p>
-                  </a:txBody>
-                  <a:tcPr/>
-                </a:tc>
-                <a:extLst>
-                  <a:ext uri="{0D108BD9-81ED-4DB2-BD59-A6C34878D82A}">
-                    <a16:rowId xmlns:a16="http://schemas.microsoft.com/office/drawing/2014/main" val="4097080959"/>
-                  </a:ext>
-                </a:extLst>
-              </a:tr>
-              <a:tr h="370840">
-                <a:tc>
-                  <a:txBody>
-                    <a:bodyPr/>
-                    <a:lstStyle/>
-                    <a:p>
-                      <a:pPr algn="ctr"/>
-                      <a:r>
-                        <a:rPr lang="en-US" dirty="0"/>
-                        <a:t>33</a:t>
-                      </a:r>
-                    </a:p>
-                  </a:txBody>
-                  <a:tcPr/>
-                </a:tc>
-                <a:extLst>
-                  <a:ext uri="{0D108BD9-81ED-4DB2-BD59-A6C34878D82A}">
-                    <a16:rowId xmlns:a16="http://schemas.microsoft.com/office/drawing/2014/main" val="2491619246"/>
-                  </a:ext>
-                </a:extLst>
-              </a:tr>
-              <a:tr h="370840">
-                <a:tc>
-                  <a:txBody>
-                    <a:bodyPr/>
-                    <a:lstStyle/>
-                    <a:p>
-                      <a:pPr algn="ctr"/>
-                      <a:r>
-                        <a:rPr lang="en-US" dirty="0"/>
-                        <a:t>22</a:t>
-                      </a:r>
-                    </a:p>
-                  </a:txBody>
-                  <a:tcPr/>
-                </a:tc>
-                <a:extLst>
-                  <a:ext uri="{0D108BD9-81ED-4DB2-BD59-A6C34878D82A}">
-                    <a16:rowId xmlns:a16="http://schemas.microsoft.com/office/drawing/2014/main" val="1151578626"/>
-                  </a:ext>
-                </a:extLst>
-              </a:tr>
-              <a:tr h="370840">
-                <a:tc>
-                  <a:txBody>
-                    <a:bodyPr/>
-                    <a:lstStyle/>
-                    <a:p>
-                      <a:pPr algn="ctr"/>
-                      <a:r>
-                        <a:rPr lang="en-US" dirty="0"/>
-                        <a:t>11</a:t>
-                      </a:r>
-                    </a:p>
-                  </a:txBody>
-                  <a:tcPr/>
-                </a:tc>
-                <a:extLst>
-                  <a:ext uri="{0D108BD9-81ED-4DB2-BD59-A6C34878D82A}">
-                    <a16:rowId xmlns:a16="http://schemas.microsoft.com/office/drawing/2014/main" val="619717567"/>
-                  </a:ext>
-                </a:extLst>
-              </a:tr>
-              <a:tr h="370840">
-                <a:tc>
-                  <a:txBody>
-                    <a:bodyPr/>
-                    <a:lstStyle/>
-                    <a:p>
-                      <a:pPr algn="ctr"/>
-                      <a:r>
-                        <a:rPr lang="en-US" dirty="0"/>
-                        <a:t>FF</a:t>
-                      </a:r>
-                    </a:p>
-                  </a:txBody>
-                  <a:tcPr/>
-                </a:tc>
-                <a:extLst>
-                  <a:ext uri="{0D108BD9-81ED-4DB2-BD59-A6C34878D82A}">
-                    <a16:rowId xmlns:a16="http://schemas.microsoft.com/office/drawing/2014/main" val="873267540"/>
-                  </a:ext>
-                </a:extLst>
-              </a:tr>
-              <a:tr h="370840">
-                <a:tc>
-                  <a:txBody>
-                    <a:bodyPr/>
-                    <a:lstStyle/>
-                    <a:p>
-                      <a:pPr algn="ctr"/>
-                      <a:r>
-                        <a:rPr lang="en-US" dirty="0"/>
-                        <a:t>EE</a:t>
-                      </a:r>
-                    </a:p>
-                  </a:txBody>
-                  <a:tcPr/>
-                </a:tc>
-                <a:extLst>
-                  <a:ext uri="{0D108BD9-81ED-4DB2-BD59-A6C34878D82A}">
-                    <a16:rowId xmlns:a16="http://schemas.microsoft.com/office/drawing/2014/main" val="2595540954"/>
-                  </a:ext>
-                </a:extLst>
-              </a:tr>
-              <a:tr h="370840">
-                <a:tc>
-                  <a:txBody>
-                    <a:bodyPr/>
-                    <a:lstStyle/>
-                    <a:p>
-                      <a:pPr algn="ctr"/>
-                      <a:r>
-                        <a:rPr lang="en-US" dirty="0"/>
-                        <a:t>12</a:t>
-                      </a:r>
-                    </a:p>
-                  </a:txBody>
-                  <a:tcPr/>
-                </a:tc>
-                <a:extLst>
-                  <a:ext uri="{0D108BD9-81ED-4DB2-BD59-A6C34878D82A}">
-                    <a16:rowId xmlns:a16="http://schemas.microsoft.com/office/drawing/2014/main" val="3259480353"/>
-                  </a:ext>
-                </a:extLst>
-              </a:tr>
-              <a:tr h="370840">
-                <a:tc>
-                  <a:txBody>
-                    <a:bodyPr/>
-                    <a:lstStyle/>
-                    <a:p>
-                      <a:pPr algn="ctr"/>
-                      <a:r>
-                        <a:rPr lang="en-US" dirty="0"/>
-                        <a:t>11</a:t>
-                      </a:r>
-                    </a:p>
-                  </a:txBody>
-                  <a:tcPr/>
-                </a:tc>
-                <a:extLst>
-                  <a:ext uri="{0D108BD9-81ED-4DB2-BD59-A6C34878D82A}">
-                    <a16:rowId xmlns:a16="http://schemas.microsoft.com/office/drawing/2014/main" val="930990083"/>
-                  </a:ext>
-                </a:extLst>
-              </a:tr>
-              <a:tr h="370840">
-                <a:tc>
-                  <a:txBody>
-                    <a:bodyPr/>
-                    <a:lstStyle/>
-                    <a:p>
-                      <a:pPr algn="ctr"/>
-                      <a:r>
-                        <a:rPr lang="en-US" dirty="0"/>
-                        <a:t>1B</a:t>
-                      </a:r>
-                    </a:p>
-                  </a:txBody>
-                  <a:tcPr/>
-                </a:tc>
-                <a:extLst>
-                  <a:ext uri="{0D108BD9-81ED-4DB2-BD59-A6C34878D82A}">
-                    <a16:rowId xmlns:a16="http://schemas.microsoft.com/office/drawing/2014/main" val="1201759903"/>
-                  </a:ext>
-                </a:extLst>
-              </a:tr>
-              <a:tr h="370840">
-                <a:tc>
-                  <a:txBody>
-                    <a:bodyPr/>
-                    <a:lstStyle/>
-                    <a:p>
-                      <a:pPr algn="ctr"/>
-                      <a:r>
-                        <a:rPr lang="en-US" dirty="0"/>
-                        <a:t>AA</a:t>
-                      </a:r>
-                    </a:p>
-                  </a:txBody>
-                  <a:tcPr/>
-                </a:tc>
-                <a:extLst>
-                  <a:ext uri="{0D108BD9-81ED-4DB2-BD59-A6C34878D82A}">
-                    <a16:rowId xmlns:a16="http://schemas.microsoft.com/office/drawing/2014/main" val="3680620396"/>
-                  </a:ext>
-                </a:extLst>
-              </a:tr>
-            </a:tbl>
-          </a:graphicData>
-        </a:graphic>
-      </p:graphicFrame>
-      <p:sp>
-        <p:nvSpPr>
-          <p:cNvPr id="16" name="TextBox 15">
-            <a:extLst>
-              <a:ext uri="{FF2B5EF4-FFF2-40B4-BE49-F238E27FC236}">
-                <a16:creationId xmlns:a16="http://schemas.microsoft.com/office/drawing/2014/main" id="{D8691280-3701-7284-8180-9F8BD7E6732F}"/>
+                <a16:creationId xmlns:a16="http://schemas.microsoft.com/office/drawing/2014/main" id="{1E914C08-96CB-135B-1433-52624F812AD9}"/>
               </a:ext>
             </a:extLst>
           </p:cNvPr>
@@ -10805,232 +9888,216 @@
         </p:nvSpPr>
         <p:spPr>
           <a:xfrm>
-            <a:off x="0" y="6156960"/>
-            <a:ext cx="1452880" cy="369332"/>
+            <a:off x="457200" y="3114268"/>
+            <a:ext cx="3005951" cy="1631216"/>
           </a:xfrm>
           <a:prstGeom prst="rect">
             <a:avLst/>
           </a:prstGeom>
-          <a:noFill/>
+          <a:solidFill>
+            <a:sysClr val="window" lastClr="FFFFFF"/>
+          </a:solidFill>
+          <a:ln w="19050" cap="flat" cmpd="sng" algn="ctr">
+            <a:solidFill>
+              <a:srgbClr val="4F81BD"/>
+            </a:solidFill>
+            <a:prstDash val="solid"/>
+          </a:ln>
+          <a:effectLst/>
         </p:spPr>
         <p:txBody>
-          <a:bodyPr wrap="square">
+          <a:bodyPr wrap="none" rtlCol="0">
             <a:spAutoFit/>
           </a:bodyPr>
           <a:lstStyle/>
           <a:p>
-            <a:r>
-              <a:rPr lang="en-US" sz="1800" b="0" dirty="0">
+            <a:pPr marL="0" marR="0" lvl="0" indent="0" defTabSz="914400" eaLnBrk="1" fontAlgn="auto" latinLnBrk="0" hangingPunct="1">
+              <a:lnSpc>
+                <a:spcPct val="100000"/>
+              </a:lnSpc>
+              <a:spcBef>
+                <a:spcPts val="0"/>
+              </a:spcBef>
+              <a:spcAft>
+                <a:spcPts val="0"/>
+              </a:spcAft>
+              <a:buClrTx/>
+              <a:buSzTx/>
+              <a:buFontTx/>
+              <a:buNone/>
+              <a:tabLst/>
+              <a:defRPr/>
+            </a:pPr>
+            <a:r>
+              <a:rPr kumimoji="0" lang="pt-BR" sz="2000" b="0" i="0" u="none" strike="noStrike" kern="0" cap="none" spc="0" normalizeH="0" baseline="0" noProof="0" dirty="0">
+                <a:ln>
+                  <a:noFill/>
+                </a:ln>
+                <a:solidFill>
+                  <a:prstClr val="black"/>
+                </a:solidFill>
+                <a:effectLst/>
+                <a:uLnTx/>
+                <a:uFillTx/>
                 <a:latin typeface="Consolas" panose="020B0609020204030204" pitchFamily="49" charset="0"/>
+                <a:ea typeface="+mn-ea"/>
                 <a:cs typeface="Consolas" panose="020B0609020204030204" pitchFamily="49" charset="0"/>
               </a:rPr>
-              <a:t>0x100001E0</a:t>
+              <a:t>MOVW R0, #0xAFE1</a:t>
+            </a:r>
+          </a:p>
+          <a:p>
+            <a:pPr marL="0" marR="0" lvl="0" indent="0" defTabSz="914400" eaLnBrk="1" fontAlgn="auto" latinLnBrk="0" hangingPunct="1">
+              <a:lnSpc>
+                <a:spcPct val="100000"/>
+              </a:lnSpc>
+              <a:spcBef>
+                <a:spcPts val="0"/>
+              </a:spcBef>
+              <a:spcAft>
+                <a:spcPts val="0"/>
+              </a:spcAft>
+              <a:buClrTx/>
+              <a:buSzTx/>
+              <a:buFontTx/>
+              <a:buNone/>
+              <a:tabLst/>
+              <a:defRPr/>
+            </a:pPr>
+            <a:r>
+              <a:rPr kumimoji="0" lang="pt-BR" sz="2000" b="0" i="0" u="none" strike="noStrike" kern="0" cap="none" spc="0" normalizeH="0" baseline="0" noProof="0" dirty="0">
+                <a:ln>
+                  <a:noFill/>
+                </a:ln>
+                <a:solidFill>
+                  <a:prstClr val="black"/>
+                </a:solidFill>
+                <a:effectLst/>
+                <a:uLnTx/>
+                <a:uFillTx/>
+                <a:latin typeface="Consolas" panose="020B0609020204030204" pitchFamily="49" charset="0"/>
+                <a:ea typeface="+mn-ea"/>
+                <a:cs typeface="Consolas" panose="020B0609020204030204" pitchFamily="49" charset="0"/>
+              </a:rPr>
+              <a:t>MOVT R0, #0xBADC</a:t>
+            </a:r>
+          </a:p>
+          <a:p>
+            <a:pPr marL="0" marR="0" lvl="0" indent="0" defTabSz="914400" eaLnBrk="1" fontAlgn="auto" latinLnBrk="0" hangingPunct="1">
+              <a:lnSpc>
+                <a:spcPct val="100000"/>
+              </a:lnSpc>
+              <a:spcBef>
+                <a:spcPts val="0"/>
+              </a:spcBef>
+              <a:spcAft>
+                <a:spcPts val="0"/>
+              </a:spcAft>
+              <a:buClrTx/>
+              <a:buSzTx/>
+              <a:buFontTx/>
+              <a:buNone/>
+              <a:tabLst/>
+              <a:defRPr/>
+            </a:pPr>
+            <a:r>
+              <a:rPr kumimoji="0" lang="pt-BR" sz="2000" b="0" i="0" u="none" strike="noStrike" kern="0" cap="none" spc="0" normalizeH="0" baseline="0" noProof="0" dirty="0">
+                <a:ln>
+                  <a:noFill/>
+                </a:ln>
+                <a:solidFill>
+                  <a:prstClr val="black"/>
+                </a:solidFill>
+                <a:effectLst/>
+                <a:uLnTx/>
+                <a:uFillTx/>
+                <a:latin typeface="Consolas" panose="020B0609020204030204" pitchFamily="49" charset="0"/>
+                <a:ea typeface="+mn-ea"/>
+                <a:cs typeface="Consolas" panose="020B0609020204030204" pitchFamily="49" charset="0"/>
+              </a:rPr>
+              <a:t>MOVT R2, #0xABCD</a:t>
+            </a:r>
+          </a:p>
+          <a:p>
+            <a:pPr marL="0" marR="0" lvl="0" indent="0" defTabSz="914400" eaLnBrk="1" fontAlgn="auto" latinLnBrk="0" hangingPunct="1">
+              <a:lnSpc>
+                <a:spcPct val="100000"/>
+              </a:lnSpc>
+              <a:spcBef>
+                <a:spcPts val="0"/>
+              </a:spcBef>
+              <a:spcAft>
+                <a:spcPts val="0"/>
+              </a:spcAft>
+              <a:buClrTx/>
+              <a:buSzTx/>
+              <a:buFontTx/>
+              <a:buNone/>
+              <a:tabLst/>
+              <a:defRPr/>
+            </a:pPr>
+            <a:r>
+              <a:rPr kumimoji="0" lang="pt-BR" sz="2000" b="0" i="0" u="none" strike="noStrike" kern="0" cap="none" spc="0" normalizeH="0" baseline="0" noProof="0" dirty="0">
+                <a:ln>
+                  <a:noFill/>
+                </a:ln>
+                <a:solidFill>
+                  <a:prstClr val="black"/>
+                </a:solidFill>
+                <a:effectLst/>
+                <a:uLnTx/>
+                <a:uFillTx/>
+                <a:latin typeface="Consolas" panose="020B0609020204030204" pitchFamily="49" charset="0"/>
+                <a:ea typeface="+mn-ea"/>
+                <a:cs typeface="Consolas" panose="020B0609020204030204" pitchFamily="49" charset="0"/>
+              </a:rPr>
+              <a:t>STR R3, [R1]</a:t>
+            </a:r>
+          </a:p>
+          <a:p>
+            <a:pPr marL="0" marR="0" lvl="0" indent="0" defTabSz="914400" eaLnBrk="1" fontAlgn="auto" latinLnBrk="0" hangingPunct="1">
+              <a:lnSpc>
+                <a:spcPct val="100000"/>
+              </a:lnSpc>
+              <a:spcBef>
+                <a:spcPts val="0"/>
+              </a:spcBef>
+              <a:spcAft>
+                <a:spcPts val="0"/>
+              </a:spcAft>
+              <a:buClrTx/>
+              <a:buSzTx/>
+              <a:buFontTx/>
+              <a:buNone/>
+              <a:tabLst/>
+              <a:defRPr/>
+            </a:pPr>
+            <a:r>
+              <a:rPr kumimoji="0" lang="pt-BR" sz="2000" b="0" i="0" u="none" strike="noStrike" kern="0" cap="none" spc="0" normalizeH="0" baseline="0" noProof="0" dirty="0">
+                <a:ln>
+                  <a:noFill/>
+                </a:ln>
+                <a:solidFill>
+                  <a:prstClr val="black"/>
+                </a:solidFill>
+                <a:effectLst/>
+                <a:uLnTx/>
+                <a:uFillTx/>
+                <a:latin typeface="Consolas" panose="020B0609020204030204" pitchFamily="49" charset="0"/>
+                <a:ea typeface="+mn-ea"/>
+                <a:cs typeface="Consolas" panose="020B0609020204030204" pitchFamily="49" charset="0"/>
+              </a:rPr>
+              <a:t>LDRSH R4, (R1, #0xC)</a:t>
             </a:r>
           </a:p>
         </p:txBody>
       </p:sp>
       <p:sp>
         <p:nvSpPr>
-          <p:cNvPr id="17" name="TextBox 16">
+          <p:cNvPr id="11" name="Content Placeholder 3">
             <a:extLst>
               <a:ext uri="{FF2B5EF4-FFF2-40B4-BE49-F238E27FC236}">
-                <a16:creationId xmlns:a16="http://schemas.microsoft.com/office/drawing/2014/main" id="{54DAF454-D38A-E54A-0A83-F3163F2194FD}"/>
-              </a:ext>
-            </a:extLst>
-          </p:cNvPr>
-          <p:cNvSpPr txBox="1"/>
-          <p:nvPr/>
-        </p:nvSpPr>
-        <p:spPr>
-          <a:xfrm>
-            <a:off x="38216" y="6449814"/>
-            <a:ext cx="1818921" cy="369332"/>
-          </a:xfrm>
-          <a:prstGeom prst="rect">
-            <a:avLst/>
-          </a:prstGeom>
-          <a:noFill/>
-        </p:spPr>
-        <p:txBody>
-          <a:bodyPr wrap="square">
-            <a:spAutoFit/>
-          </a:bodyPr>
-          <a:lstStyle/>
-          <a:p>
-            <a:r>
-              <a:rPr lang="en-US" sz="1800" b="0" dirty="0">
-                <a:latin typeface="+mn-lt"/>
-                <a:cs typeface="Consolas" panose="020B0609020204030204" pitchFamily="49" charset="0"/>
-              </a:rPr>
-              <a:t>Mem Address</a:t>
-            </a:r>
-          </a:p>
-        </p:txBody>
-      </p:sp>
-      <p:sp>
-        <p:nvSpPr>
-          <p:cNvPr id="18" name="TextBox 17">
-            <a:extLst>
-              <a:ext uri="{FF2B5EF4-FFF2-40B4-BE49-F238E27FC236}">
-                <a16:creationId xmlns:a16="http://schemas.microsoft.com/office/drawing/2014/main" id="{7E2E3134-A567-7018-92F0-D86F35E570CB}"/>
-              </a:ext>
-            </a:extLst>
-          </p:cNvPr>
-          <p:cNvSpPr txBox="1"/>
-          <p:nvPr/>
-        </p:nvSpPr>
-        <p:spPr>
-          <a:xfrm>
-            <a:off x="1487315" y="6156960"/>
-            <a:ext cx="1452880" cy="369332"/>
-          </a:xfrm>
-          <a:prstGeom prst="rect">
-            <a:avLst/>
-          </a:prstGeom>
-          <a:noFill/>
-        </p:spPr>
-        <p:txBody>
-          <a:bodyPr wrap="square">
-            <a:spAutoFit/>
-          </a:bodyPr>
-          <a:lstStyle/>
-          <a:p>
-            <a:r>
-              <a:rPr lang="en-US" sz="1800" b="0" dirty="0">
-                <a:latin typeface="Consolas" panose="020B0609020204030204" pitchFamily="49" charset="0"/>
-              </a:rPr>
-              <a:t>0x100001F0</a:t>
-            </a:r>
-            <a:endParaRPr lang="en-US" sz="1800" b="0" dirty="0">
-              <a:latin typeface="Consolas" panose="020B0609020204030204" pitchFamily="49" charset="0"/>
-              <a:cs typeface="Consolas" panose="020B0609020204030204" pitchFamily="49" charset="0"/>
-            </a:endParaRPr>
-          </a:p>
-        </p:txBody>
-      </p:sp>
-      <p:sp>
-        <p:nvSpPr>
-          <p:cNvPr id="19" name="TextBox 18">
-            <a:extLst>
-              <a:ext uri="{FF2B5EF4-FFF2-40B4-BE49-F238E27FC236}">
-                <a16:creationId xmlns:a16="http://schemas.microsoft.com/office/drawing/2014/main" id="{57E19796-203A-5975-9E7E-A51D96722A9D}"/>
-              </a:ext>
-            </a:extLst>
-          </p:cNvPr>
-          <p:cNvSpPr txBox="1"/>
-          <p:nvPr/>
-        </p:nvSpPr>
-        <p:spPr>
-          <a:xfrm>
-            <a:off x="2894145" y="6159458"/>
-            <a:ext cx="1452880" cy="369332"/>
-          </a:xfrm>
-          <a:prstGeom prst="rect">
-            <a:avLst/>
-          </a:prstGeom>
-          <a:noFill/>
-        </p:spPr>
-        <p:txBody>
-          <a:bodyPr wrap="square">
-            <a:spAutoFit/>
-          </a:bodyPr>
-          <a:lstStyle/>
-          <a:p>
-            <a:r>
-              <a:rPr lang="en-US" sz="1800" b="0" dirty="0">
-                <a:latin typeface="Consolas" panose="020B0609020204030204" pitchFamily="49" charset="0"/>
-              </a:rPr>
-              <a:t>0x10000200</a:t>
-            </a:r>
-            <a:endParaRPr lang="en-US" sz="1800" b="0" dirty="0">
-              <a:latin typeface="Consolas" panose="020B0609020204030204" pitchFamily="49" charset="0"/>
-              <a:cs typeface="Consolas" panose="020B0609020204030204" pitchFamily="49" charset="0"/>
-            </a:endParaRPr>
-          </a:p>
-        </p:txBody>
-      </p:sp>
-      <p:sp>
-        <p:nvSpPr>
-          <p:cNvPr id="20" name="TextBox 19">
-            <a:extLst>
-              <a:ext uri="{FF2B5EF4-FFF2-40B4-BE49-F238E27FC236}">
-                <a16:creationId xmlns:a16="http://schemas.microsoft.com/office/drawing/2014/main" id="{4246B73D-93B0-BE96-6E77-F5047B876FB4}"/>
-              </a:ext>
-            </a:extLst>
-          </p:cNvPr>
-          <p:cNvSpPr txBox="1"/>
-          <p:nvPr/>
-        </p:nvSpPr>
-        <p:spPr>
-          <a:xfrm>
-            <a:off x="1459041" y="6396533"/>
-            <a:ext cx="1562908" cy="365760"/>
-          </a:xfrm>
-          <a:prstGeom prst="rect">
-            <a:avLst/>
-          </a:prstGeom>
-          <a:noFill/>
-        </p:spPr>
-        <p:txBody>
-          <a:bodyPr wrap="square">
-            <a:spAutoFit/>
-          </a:bodyPr>
-          <a:lstStyle/>
-          <a:p>
-            <a:r>
-              <a:rPr lang="en-US" sz="1800" b="0" dirty="0">
-                <a:latin typeface="+mn-lt"/>
-                <a:cs typeface="Consolas" panose="020B0609020204030204" pitchFamily="49" charset="0"/>
-              </a:rPr>
-              <a:t>Mem Address</a:t>
-            </a:r>
-          </a:p>
-        </p:txBody>
-      </p:sp>
-      <p:sp>
-        <p:nvSpPr>
-          <p:cNvPr id="21" name="TextBox 20">
-            <a:extLst>
-              <a:ext uri="{FF2B5EF4-FFF2-40B4-BE49-F238E27FC236}">
-                <a16:creationId xmlns:a16="http://schemas.microsoft.com/office/drawing/2014/main" id="{2D08279E-530F-10AE-C181-2446B85EE3E6}"/>
-              </a:ext>
-            </a:extLst>
-          </p:cNvPr>
-          <p:cNvSpPr txBox="1"/>
-          <p:nvPr/>
-        </p:nvSpPr>
-        <p:spPr>
-          <a:xfrm>
-            <a:off x="2949805" y="6392961"/>
-            <a:ext cx="1562909" cy="369332"/>
-          </a:xfrm>
-          <a:prstGeom prst="rect">
-            <a:avLst/>
-          </a:prstGeom>
-          <a:noFill/>
-        </p:spPr>
-        <p:txBody>
-          <a:bodyPr wrap="square">
-            <a:spAutoFit/>
-          </a:bodyPr>
-          <a:lstStyle/>
-          <a:p>
-            <a:r>
-              <a:rPr lang="en-US" sz="1800" b="0" dirty="0">
-                <a:latin typeface="+mn-lt"/>
-                <a:cs typeface="Consolas" panose="020B0609020204030204" pitchFamily="49" charset="0"/>
-              </a:rPr>
-              <a:t>Mem Address</a:t>
-            </a:r>
-          </a:p>
-        </p:txBody>
-      </p:sp>
-      <p:sp>
-        <p:nvSpPr>
-          <p:cNvPr id="6" name="Content Placeholder 3">
-            <a:extLst>
-              <a:ext uri="{FF2B5EF4-FFF2-40B4-BE49-F238E27FC236}">
-                <a16:creationId xmlns:a16="http://schemas.microsoft.com/office/drawing/2014/main" id="{57F96825-B097-324D-C2F7-FAFF800F7FC6}"/>
+                <a16:creationId xmlns:a16="http://schemas.microsoft.com/office/drawing/2014/main" id="{E0C303F2-641E-019B-CA34-0B02E8722206}"/>
               </a:ext>
             </a:extLst>
           </p:cNvPr>
@@ -11041,8 +10108,8 @@
         </p:nvSpPr>
         <p:spPr>
           <a:xfrm>
-            <a:off x="4091355" y="1331259"/>
-            <a:ext cx="4877877" cy="2686131"/>
+            <a:off x="457200" y="1219200"/>
+            <a:ext cx="8229600" cy="4937760"/>
           </a:xfrm>
           <a:prstGeom prst="rect">
             <a:avLst/>
@@ -11050,7 +10117,7 @@
         </p:spPr>
         <p:txBody>
           <a:bodyPr vert="horz">
-            <a:normAutofit fontScale="92500" lnSpcReduction="20000"/>
+            <a:normAutofit/>
           </a:bodyPr>
           <a:lstStyle>
             <a:lvl1pPr marL="274320" indent="-274320" algn="l" rtl="0" eaLnBrk="1" latinLnBrk="0" hangingPunct="1">
@@ -11242,83 +10309,2224 @@
               </a:spcAft>
             </a:pPr>
             <a:r>
-              <a:rPr lang="pt-BR" b="0" dirty="0"/>
-              <a:t>MOVW R0, #0xAFE1</a:t>
-            </a:r>
-          </a:p>
-          <a:p>
-            <a:pPr fontAlgn="auto">
-              <a:spcAft>
-                <a:spcPts val="0"/>
-              </a:spcAft>
-            </a:pPr>
-            <a:r>
-              <a:rPr lang="pt-BR" b="0" dirty="0"/>
-              <a:t>MOVT R0, #0xBADC</a:t>
-            </a:r>
-          </a:p>
-          <a:p>
-            <a:pPr fontAlgn="auto">
-              <a:spcAft>
-                <a:spcPts val="0"/>
-              </a:spcAft>
-            </a:pPr>
-            <a:r>
-              <a:rPr lang="pt-BR" b="0" dirty="0"/>
-              <a:t>MOVT R2, #0xABCD</a:t>
-            </a:r>
-          </a:p>
-          <a:p>
-            <a:pPr fontAlgn="auto">
-              <a:spcAft>
-                <a:spcPts val="0"/>
-              </a:spcAft>
-            </a:pPr>
-            <a:r>
-              <a:rPr lang="pt-BR" b="0" dirty="0"/>
-              <a:t>STR R3, [R1]</a:t>
-            </a:r>
-          </a:p>
-          <a:p>
-            <a:pPr fontAlgn="auto">
-              <a:spcAft>
-                <a:spcPts val="0"/>
-              </a:spcAft>
-            </a:pPr>
-            <a:r>
-              <a:rPr lang="pt-BR" b="0" dirty="0"/>
-              <a:t>LDRSH R4, (R1, #0xC)</a:t>
-            </a:r>
-          </a:p>
-          <a:p>
-            <a:pPr fontAlgn="auto">
-              <a:spcAft>
-                <a:spcPts val="0"/>
-              </a:spcAft>
-            </a:pPr>
-            <a:r>
-              <a:rPr lang="pt-BR" b="0" dirty="0"/>
-              <a:t>PUSH (R1, R3)</a:t>
-            </a:r>
-          </a:p>
-          <a:p>
-            <a:pPr fontAlgn="auto">
-              <a:spcAft>
-                <a:spcPts val="0"/>
-              </a:spcAft>
-            </a:pPr>
-            <a:r>
-              <a:rPr lang="pt-BR" b="0" dirty="0"/>
-              <a:t>POP (R5)</a:t>
-            </a:r>
-            <a:endParaRPr lang="en-US" b="0" dirty="0"/>
+              <a:rPr lang="en-US" sz="2000" b="0" dirty="0"/>
+              <a:t>Compute register and memory values at each step of this program, given initial register values and memory contents</a:t>
+            </a:r>
+          </a:p>
+        </p:txBody>
+      </p:sp>
+      <p:sp>
+        <p:nvSpPr>
+          <p:cNvPr id="12" name="TextBox 11">
+            <a:extLst>
+              <a:ext uri="{FF2B5EF4-FFF2-40B4-BE49-F238E27FC236}">
+                <a16:creationId xmlns:a16="http://schemas.microsoft.com/office/drawing/2014/main" id="{4C6A6B80-3FEE-6D76-7A51-6A84F29B3557}"/>
+              </a:ext>
+            </a:extLst>
+          </p:cNvPr>
+          <p:cNvSpPr txBox="1"/>
+          <p:nvPr/>
+        </p:nvSpPr>
+        <p:spPr>
+          <a:xfrm>
+            <a:off x="4357032" y="4507329"/>
+            <a:ext cx="2350965" cy="400110"/>
+          </a:xfrm>
+          <a:prstGeom prst="rect">
+            <a:avLst/>
+          </a:prstGeom>
+          <a:noFill/>
+        </p:spPr>
+        <p:txBody>
+          <a:bodyPr wrap="none" rtlCol="0">
+            <a:spAutoFit/>
+          </a:bodyPr>
+          <a:lstStyle/>
+          <a:p>
+            <a:r>
+              <a:rPr lang="en-US" sz="2000" b="0" dirty="0">
+                <a:latin typeface="+mn-lt"/>
+              </a:rPr>
+              <a:t>Initial Register Values</a:t>
+            </a:r>
+          </a:p>
+        </p:txBody>
+      </p:sp>
+      <p:sp>
+        <p:nvSpPr>
+          <p:cNvPr id="13" name="TextBox 12">
+            <a:extLst>
+              <a:ext uri="{FF2B5EF4-FFF2-40B4-BE49-F238E27FC236}">
+                <a16:creationId xmlns:a16="http://schemas.microsoft.com/office/drawing/2014/main" id="{E381BB9B-55E3-DA1B-9EC5-B7BD5B3494A9}"/>
+              </a:ext>
+            </a:extLst>
+          </p:cNvPr>
+          <p:cNvSpPr txBox="1"/>
+          <p:nvPr/>
+        </p:nvSpPr>
+        <p:spPr>
+          <a:xfrm>
+            <a:off x="3832596" y="6258114"/>
+            <a:ext cx="2734659" cy="400110"/>
+          </a:xfrm>
+          <a:prstGeom prst="rect">
+            <a:avLst/>
+          </a:prstGeom>
+          <a:noFill/>
+        </p:spPr>
+        <p:txBody>
+          <a:bodyPr wrap="none" rtlCol="0">
+            <a:spAutoFit/>
+          </a:bodyPr>
+          <a:lstStyle/>
+          <a:p>
+            <a:r>
+              <a:rPr lang="en-US" sz="2000" b="0" dirty="0">
+                <a:latin typeface="+mn-lt"/>
+              </a:rPr>
+              <a:t>Initial Memory Contents</a:t>
+            </a:r>
           </a:p>
         </p:txBody>
       </p:sp>
     </p:spTree>
     <p:extLst>
       <p:ext uri="{BB962C8B-B14F-4D97-AF65-F5344CB8AC3E}">
-        <p14:creationId xmlns:p14="http://schemas.microsoft.com/office/powerpoint/2010/main" val="754608230"/>
+        <p14:creationId xmlns:p14="http://schemas.microsoft.com/office/powerpoint/2010/main" val="811401925"/>
+      </p:ext>
+    </p:extLst>
+  </p:cSld>
+  <p:clrMapOvr>
+    <a:masterClrMapping/>
+  </p:clrMapOvr>
+  <p:transition>
+    <p:pull dir="ru"/>
+  </p:transition>
+</p:sld>
+</file>
+
+<file path=ppt/slides/slide15.xml><?xml version="1.0" encoding="utf-8"?>
+<p:sld xmlns:a="http://schemas.openxmlformats.org/drawingml/2006/main" xmlns:r="http://schemas.openxmlformats.org/officeDocument/2006/relationships" xmlns:p="http://schemas.openxmlformats.org/presentationml/2006/main">
+  <p:cSld>
+    <p:spTree>
+      <p:nvGrpSpPr>
+        <p:cNvPr id="1" name=""/>
+        <p:cNvGrpSpPr/>
+        <p:nvPr/>
+      </p:nvGrpSpPr>
+      <p:grpSpPr>
+        <a:xfrm>
+          <a:off x="0" y="0"/>
+          <a:ext cx="0" cy="0"/>
+          <a:chOff x="0" y="0"/>
+          <a:chExt cx="0" cy="0"/>
+        </a:xfrm>
+      </p:grpSpPr>
+      <p:sp>
+        <p:nvSpPr>
+          <p:cNvPr id="2" name="Title 1">
+            <a:extLst>
+              <a:ext uri="{FF2B5EF4-FFF2-40B4-BE49-F238E27FC236}">
+                <a16:creationId xmlns:a16="http://schemas.microsoft.com/office/drawing/2014/main" id="{A0192FCB-7FF9-9037-3DC9-B18E7B49293F}"/>
+              </a:ext>
+            </a:extLst>
+          </p:cNvPr>
+          <p:cNvSpPr>
+            <a:spLocks noGrp="1"/>
+          </p:cNvSpPr>
+          <p:nvPr>
+            <p:ph type="title"/>
+          </p:nvPr>
+        </p:nvSpPr>
+        <p:spPr/>
+        <p:txBody>
+          <a:bodyPr>
+            <a:normAutofit/>
+          </a:bodyPr>
+          <a:lstStyle/>
+          <a:p>
+            <a:r>
+              <a:rPr lang="en-US" sz="2400" dirty="0"/>
+              <a:t>Program Understanding</a:t>
+            </a:r>
+          </a:p>
+        </p:txBody>
+      </p:sp>
+      <p:sp>
+        <p:nvSpPr>
+          <p:cNvPr id="3" name="Slide Number Placeholder 2">
+            <a:extLst>
+              <a:ext uri="{FF2B5EF4-FFF2-40B4-BE49-F238E27FC236}">
+                <a16:creationId xmlns:a16="http://schemas.microsoft.com/office/drawing/2014/main" id="{51BF2EDE-04BA-CDE6-155B-A94557178B71}"/>
+              </a:ext>
+            </a:extLst>
+          </p:cNvPr>
+          <p:cNvSpPr>
+            <a:spLocks noGrp="1"/>
+          </p:cNvSpPr>
+          <p:nvPr>
+            <p:ph type="sldNum" sz="quarter" idx="12"/>
+          </p:nvPr>
+        </p:nvSpPr>
+        <p:spPr/>
+        <p:txBody>
+          <a:bodyPr/>
+          <a:lstStyle/>
+          <a:p>
+            <a:fld id="{AEE14D4A-FE32-40AF-B06D-E9622816B101}" type="slidenum">
+              <a:rPr lang="en-US" smtClean="0"/>
+              <a:pPr/>
+              <a:t>15</a:t>
+            </a:fld>
+            <a:endParaRPr lang="en-US"/>
+          </a:p>
+        </p:txBody>
+      </p:sp>
+      <p:sp>
+        <p:nvSpPr>
+          <p:cNvPr id="4" name="Content Placeholder 3">
+            <a:extLst>
+              <a:ext uri="{FF2B5EF4-FFF2-40B4-BE49-F238E27FC236}">
+                <a16:creationId xmlns:a16="http://schemas.microsoft.com/office/drawing/2014/main" id="{145B3053-CFB1-6838-AAE4-D5E27021784B}"/>
+              </a:ext>
+            </a:extLst>
+          </p:cNvPr>
+          <p:cNvSpPr>
+            <a:spLocks noGrp="1"/>
+          </p:cNvSpPr>
+          <p:nvPr>
+            <p:ph sz="quarter" idx="1"/>
+          </p:nvPr>
+        </p:nvSpPr>
+        <p:spPr>
+          <a:xfrm>
+            <a:off x="137322" y="1219200"/>
+            <a:ext cx="4821952" cy="4937760"/>
+          </a:xfrm>
+        </p:spPr>
+        <p:txBody>
+          <a:bodyPr/>
+          <a:lstStyle/>
+          <a:p>
+            <a:r>
+              <a:rPr lang="en-US" dirty="0"/>
+              <a:t> Show all updates to registers as the assembly code shown below runs. Show the NZCV flags next to the instruction if they change. Do not update PC each time. You can assume that each instruction is 32 bits.</a:t>
+            </a:r>
+          </a:p>
+        </p:txBody>
+      </p:sp>
+      <p:sp>
+        <p:nvSpPr>
+          <p:cNvPr id="5" name="TextBox 4">
+            <a:extLst>
+              <a:ext uri="{FF2B5EF4-FFF2-40B4-BE49-F238E27FC236}">
+                <a16:creationId xmlns:a16="http://schemas.microsoft.com/office/drawing/2014/main" id="{393557C1-FD7E-7283-65D1-80093EB57E23}"/>
+              </a:ext>
+            </a:extLst>
+          </p:cNvPr>
+          <p:cNvSpPr txBox="1"/>
+          <p:nvPr/>
+        </p:nvSpPr>
+        <p:spPr>
+          <a:xfrm>
+            <a:off x="5442882" y="463094"/>
+            <a:ext cx="3563796" cy="5693866"/>
+          </a:xfrm>
+          <a:prstGeom prst="rect">
+            <a:avLst/>
+          </a:prstGeom>
+          <a:solidFill>
+            <a:sysClr val="window" lastClr="FFFFFF"/>
+          </a:solidFill>
+          <a:ln w="19050" cap="flat" cmpd="sng" algn="ctr">
+            <a:solidFill>
+              <a:srgbClr val="4F81BD"/>
+            </a:solidFill>
+            <a:prstDash val="solid"/>
+          </a:ln>
+          <a:effectLst/>
+        </p:spPr>
+        <p:txBody>
+          <a:bodyPr wrap="none" rtlCol="0">
+            <a:spAutoFit/>
+          </a:bodyPr>
+          <a:lstStyle/>
+          <a:p>
+            <a:pPr marL="0" marR="0" lvl="0" indent="0" defTabSz="914400" eaLnBrk="1" fontAlgn="auto" latinLnBrk="0" hangingPunct="1">
+              <a:lnSpc>
+                <a:spcPct val="100000"/>
+              </a:lnSpc>
+              <a:spcBef>
+                <a:spcPts val="0"/>
+              </a:spcBef>
+              <a:spcAft>
+                <a:spcPts val="0"/>
+              </a:spcAft>
+              <a:buClrTx/>
+              <a:buSzTx/>
+              <a:buFontTx/>
+              <a:buNone/>
+              <a:tabLst/>
+              <a:defRPr/>
+            </a:pPr>
+            <a:r>
+              <a:rPr lang="pt-BR" b="0" kern="0" dirty="0">
+                <a:solidFill>
+                  <a:prstClr val="black"/>
+                </a:solidFill>
+                <a:latin typeface="Consolas" panose="020B0609020204030204" pitchFamily="49" charset="0"/>
+                <a:cs typeface="Consolas" panose="020B0609020204030204" pitchFamily="49" charset="0"/>
+              </a:rPr>
+              <a:t>   </a:t>
+            </a:r>
+            <a:r>
+              <a:rPr kumimoji="0" lang="pt-BR" b="0" i="0" u="none" strike="noStrike" kern="0" cap="none" spc="0" normalizeH="0" baseline="0" noProof="0" dirty="0">
+                <a:ln>
+                  <a:noFill/>
+                </a:ln>
+                <a:solidFill>
+                  <a:prstClr val="black"/>
+                </a:solidFill>
+                <a:effectLst/>
+                <a:uLnTx/>
+                <a:uFillTx/>
+                <a:latin typeface="Consolas" panose="020B0609020204030204" pitchFamily="49" charset="0"/>
+                <a:ea typeface="+mn-ea"/>
+                <a:cs typeface="Consolas" panose="020B0609020204030204" pitchFamily="49" charset="0"/>
+              </a:rPr>
+              <a:t> LDR R1, =0x10000010</a:t>
+            </a:r>
+          </a:p>
+          <a:p>
+            <a:pPr marL="0" marR="0" lvl="0" indent="0" defTabSz="914400" eaLnBrk="1" fontAlgn="auto" latinLnBrk="0" hangingPunct="1">
+              <a:lnSpc>
+                <a:spcPct val="100000"/>
+              </a:lnSpc>
+              <a:spcBef>
+                <a:spcPts val="0"/>
+              </a:spcBef>
+              <a:spcAft>
+                <a:spcPts val="0"/>
+              </a:spcAft>
+              <a:buClrTx/>
+              <a:buSzTx/>
+              <a:buFontTx/>
+              <a:buNone/>
+              <a:tabLst/>
+              <a:defRPr/>
+            </a:pPr>
+            <a:r>
+              <a:rPr kumimoji="0" lang="pt-BR" b="0" i="0" u="none" strike="noStrike" kern="0" cap="none" spc="0" normalizeH="0" baseline="0" noProof="0" dirty="0">
+                <a:ln>
+                  <a:noFill/>
+                </a:ln>
+                <a:solidFill>
+                  <a:prstClr val="black"/>
+                </a:solidFill>
+                <a:effectLst/>
+                <a:uLnTx/>
+                <a:uFillTx/>
+                <a:latin typeface="Consolas" panose="020B0609020204030204" pitchFamily="49" charset="0"/>
+                <a:ea typeface="+mn-ea"/>
+                <a:cs typeface="Consolas" panose="020B0609020204030204" pitchFamily="49" charset="0"/>
+              </a:rPr>
+              <a:t>    LDR R2, [R1]</a:t>
+            </a:r>
+          </a:p>
+          <a:p>
+            <a:pPr marL="0" marR="0" lvl="0" indent="0" defTabSz="914400" eaLnBrk="1" fontAlgn="auto" latinLnBrk="0" hangingPunct="1">
+              <a:lnSpc>
+                <a:spcPct val="100000"/>
+              </a:lnSpc>
+              <a:spcBef>
+                <a:spcPts val="0"/>
+              </a:spcBef>
+              <a:spcAft>
+                <a:spcPts val="0"/>
+              </a:spcAft>
+              <a:buClrTx/>
+              <a:buSzTx/>
+              <a:buFontTx/>
+              <a:buNone/>
+              <a:tabLst/>
+              <a:defRPr/>
+            </a:pPr>
+            <a:r>
+              <a:rPr kumimoji="0" lang="pt-BR" b="0" i="0" u="none" strike="noStrike" kern="0" cap="none" spc="0" normalizeH="0" baseline="0" noProof="0" dirty="0">
+                <a:ln>
+                  <a:noFill/>
+                </a:ln>
+                <a:solidFill>
+                  <a:prstClr val="black"/>
+                </a:solidFill>
+                <a:effectLst/>
+                <a:uLnTx/>
+                <a:uFillTx/>
+                <a:latin typeface="Consolas" panose="020B0609020204030204" pitchFamily="49" charset="0"/>
+                <a:ea typeface="+mn-ea"/>
+                <a:cs typeface="Consolas" panose="020B0609020204030204" pitchFamily="49" charset="0"/>
+              </a:rPr>
+              <a:t>    LDR R3, [R1,#4]</a:t>
+            </a:r>
+          </a:p>
+          <a:p>
+            <a:pPr marL="0" marR="0" lvl="0" indent="0" defTabSz="914400" eaLnBrk="1" fontAlgn="auto" latinLnBrk="0" hangingPunct="1">
+              <a:lnSpc>
+                <a:spcPct val="100000"/>
+              </a:lnSpc>
+              <a:spcBef>
+                <a:spcPts val="0"/>
+              </a:spcBef>
+              <a:spcAft>
+                <a:spcPts val="0"/>
+              </a:spcAft>
+              <a:buClrTx/>
+              <a:buSzTx/>
+              <a:buFontTx/>
+              <a:buNone/>
+              <a:tabLst/>
+              <a:defRPr/>
+            </a:pPr>
+            <a:r>
+              <a:rPr kumimoji="0" lang="pt-BR" b="0" i="0" u="none" strike="noStrike" kern="0" cap="none" spc="0" normalizeH="0" baseline="0" noProof="0" dirty="0">
+                <a:ln>
+                  <a:noFill/>
+                </a:ln>
+                <a:solidFill>
+                  <a:prstClr val="black"/>
+                </a:solidFill>
+                <a:effectLst/>
+                <a:uLnTx/>
+                <a:uFillTx/>
+                <a:latin typeface="Consolas" panose="020B0609020204030204" pitchFamily="49" charset="0"/>
+                <a:ea typeface="+mn-ea"/>
+                <a:cs typeface="Consolas" panose="020B0609020204030204" pitchFamily="49" charset="0"/>
+              </a:rPr>
+              <a:t>    BL max</a:t>
+            </a:r>
+          </a:p>
+          <a:p>
+            <a:pPr marL="0" marR="0" lvl="0" indent="0" defTabSz="914400" eaLnBrk="1" fontAlgn="auto" latinLnBrk="0" hangingPunct="1">
+              <a:lnSpc>
+                <a:spcPct val="100000"/>
+              </a:lnSpc>
+              <a:spcBef>
+                <a:spcPts val="0"/>
+              </a:spcBef>
+              <a:spcAft>
+                <a:spcPts val="0"/>
+              </a:spcAft>
+              <a:buClrTx/>
+              <a:buSzTx/>
+              <a:buFontTx/>
+              <a:buNone/>
+              <a:tabLst/>
+              <a:defRPr/>
+            </a:pPr>
+            <a:r>
+              <a:rPr kumimoji="0" lang="pt-BR" b="0" i="0" u="none" strike="noStrike" kern="0" cap="none" spc="0" normalizeH="0" baseline="0" noProof="0" dirty="0">
+                <a:ln>
+                  <a:noFill/>
+                </a:ln>
+                <a:solidFill>
+                  <a:prstClr val="black"/>
+                </a:solidFill>
+                <a:effectLst/>
+                <a:uLnTx/>
+                <a:uFillTx/>
+                <a:latin typeface="Consolas" panose="020B0609020204030204" pitchFamily="49" charset="0"/>
+                <a:ea typeface="+mn-ea"/>
+                <a:cs typeface="Consolas" panose="020B0609020204030204" pitchFamily="49" charset="0"/>
+              </a:rPr>
+              <a:t>    SUBS R4, R2, R0  @NZCV = 0110</a:t>
+            </a:r>
+          </a:p>
+          <a:p>
+            <a:pPr marL="0" marR="0" lvl="0" indent="0" defTabSz="914400" eaLnBrk="1" fontAlgn="auto" latinLnBrk="0" hangingPunct="1">
+              <a:lnSpc>
+                <a:spcPct val="100000"/>
+              </a:lnSpc>
+              <a:spcBef>
+                <a:spcPts val="0"/>
+              </a:spcBef>
+              <a:spcAft>
+                <a:spcPts val="0"/>
+              </a:spcAft>
+              <a:buClrTx/>
+              <a:buSzTx/>
+              <a:buFontTx/>
+              <a:buNone/>
+              <a:tabLst/>
+              <a:defRPr/>
+            </a:pPr>
+            <a:r>
+              <a:rPr kumimoji="0" lang="pt-BR" b="0" i="0" u="none" strike="noStrike" kern="0" cap="none" spc="0" normalizeH="0" baseline="0" noProof="0" dirty="0">
+                <a:ln>
+                  <a:noFill/>
+                </a:ln>
+                <a:solidFill>
+                  <a:prstClr val="black"/>
+                </a:solidFill>
+                <a:effectLst/>
+                <a:uLnTx/>
+                <a:uFillTx/>
+                <a:latin typeface="Consolas" panose="020B0609020204030204" pitchFamily="49" charset="0"/>
+                <a:ea typeface="+mn-ea"/>
+                <a:cs typeface="Consolas" panose="020B0609020204030204" pitchFamily="49" charset="0"/>
+              </a:rPr>
+              <a:t>    MOVW R5, #1</a:t>
+            </a:r>
+          </a:p>
+          <a:p>
+            <a:pPr marL="0" marR="0" lvl="0" indent="0" defTabSz="914400" eaLnBrk="1" fontAlgn="auto" latinLnBrk="0" hangingPunct="1">
+              <a:lnSpc>
+                <a:spcPct val="100000"/>
+              </a:lnSpc>
+              <a:spcBef>
+                <a:spcPts val="0"/>
+              </a:spcBef>
+              <a:spcAft>
+                <a:spcPts val="0"/>
+              </a:spcAft>
+              <a:buClrTx/>
+              <a:buSzTx/>
+              <a:buFontTx/>
+              <a:buNone/>
+              <a:tabLst/>
+              <a:defRPr/>
+            </a:pPr>
+            <a:r>
+              <a:rPr kumimoji="0" lang="pt-BR" b="0" i="0" u="none" strike="noStrike" kern="0" cap="none" spc="0" normalizeH="0" baseline="0" noProof="0" dirty="0">
+                <a:ln>
+                  <a:noFill/>
+                </a:ln>
+                <a:solidFill>
+                  <a:prstClr val="black"/>
+                </a:solidFill>
+                <a:effectLst/>
+                <a:uLnTx/>
+                <a:uFillTx/>
+                <a:latin typeface="Consolas" panose="020B0609020204030204" pitchFamily="49" charset="0"/>
+                <a:ea typeface="+mn-ea"/>
+                <a:cs typeface="Consolas" panose="020B0609020204030204" pitchFamily="49" charset="0"/>
+              </a:rPr>
+              <a:t>    LSL R6, R5, #4</a:t>
+            </a:r>
+          </a:p>
+          <a:p>
+            <a:pPr marL="0" marR="0" lvl="0" indent="0" defTabSz="914400" eaLnBrk="1" fontAlgn="auto" latinLnBrk="0" hangingPunct="1">
+              <a:lnSpc>
+                <a:spcPct val="100000"/>
+              </a:lnSpc>
+              <a:spcBef>
+                <a:spcPts val="0"/>
+              </a:spcBef>
+              <a:spcAft>
+                <a:spcPts val="0"/>
+              </a:spcAft>
+              <a:buClrTx/>
+              <a:buSzTx/>
+              <a:buFontTx/>
+              <a:buNone/>
+              <a:tabLst/>
+              <a:defRPr/>
+            </a:pPr>
+            <a:r>
+              <a:rPr kumimoji="0" lang="pt-BR" b="0" i="0" u="none" strike="noStrike" kern="0" cap="none" spc="0" normalizeH="0" baseline="0" noProof="0" dirty="0">
+                <a:ln>
+                  <a:noFill/>
+                </a:ln>
+                <a:solidFill>
+                  <a:prstClr val="black"/>
+                </a:solidFill>
+                <a:effectLst/>
+                <a:uLnTx/>
+                <a:uFillTx/>
+                <a:latin typeface="Consolas" panose="020B0609020204030204" pitchFamily="49" charset="0"/>
+                <a:ea typeface="+mn-ea"/>
+                <a:cs typeface="Consolas" panose="020B0609020204030204" pitchFamily="49" charset="0"/>
+              </a:rPr>
+              <a:t>    BIC R7, R2, R4</a:t>
+            </a:r>
+          </a:p>
+          <a:p>
+            <a:pPr marL="0" marR="0" lvl="0" indent="0" defTabSz="914400" eaLnBrk="1" fontAlgn="auto" latinLnBrk="0" hangingPunct="1">
+              <a:lnSpc>
+                <a:spcPct val="100000"/>
+              </a:lnSpc>
+              <a:spcBef>
+                <a:spcPts val="0"/>
+              </a:spcBef>
+              <a:spcAft>
+                <a:spcPts val="0"/>
+              </a:spcAft>
+              <a:buClrTx/>
+              <a:buSzTx/>
+              <a:buFontTx/>
+              <a:buNone/>
+              <a:tabLst/>
+              <a:defRPr/>
+            </a:pPr>
+            <a:r>
+              <a:rPr kumimoji="0" lang="pt-BR" b="0" i="0" u="none" strike="noStrike" kern="0" cap="none" spc="0" normalizeH="0" baseline="0" noProof="0" dirty="0">
+                <a:ln>
+                  <a:noFill/>
+                </a:ln>
+                <a:solidFill>
+                  <a:prstClr val="black"/>
+                </a:solidFill>
+                <a:effectLst/>
+                <a:uLnTx/>
+                <a:uFillTx/>
+                <a:latin typeface="Consolas" panose="020B0609020204030204" pitchFamily="49" charset="0"/>
+                <a:ea typeface="+mn-ea"/>
+                <a:cs typeface="Consolas" panose="020B0609020204030204" pitchFamily="49" charset="0"/>
+              </a:rPr>
+              <a:t>    ANDS R8, R7, </a:t>
+            </a:r>
+            <a:r>
+              <a:rPr lang="pt-BR" b="0" kern="0" dirty="0">
+                <a:solidFill>
+                  <a:prstClr val="black"/>
+                </a:solidFill>
+                <a:latin typeface="Consolas" panose="020B0609020204030204" pitchFamily="49" charset="0"/>
+                <a:cs typeface="Consolas" panose="020B0609020204030204" pitchFamily="49" charset="0"/>
+              </a:rPr>
+              <a:t>R6  @NZCV </a:t>
+            </a:r>
+            <a:r>
+              <a:rPr kumimoji="0" lang="pt-BR" b="0" i="0" u="none" strike="noStrike" kern="0" cap="none" spc="0" normalizeH="0" baseline="0" noProof="0" dirty="0">
+                <a:ln>
+                  <a:noFill/>
+                </a:ln>
+                <a:solidFill>
+                  <a:prstClr val="black"/>
+                </a:solidFill>
+                <a:effectLst/>
+                <a:uLnTx/>
+                <a:uFillTx/>
+                <a:latin typeface="Consolas" panose="020B0609020204030204" pitchFamily="49" charset="0"/>
+                <a:ea typeface="+mn-ea"/>
+                <a:cs typeface="Consolas" panose="020B0609020204030204" pitchFamily="49" charset="0"/>
+              </a:rPr>
+              <a:t>= 0110</a:t>
+            </a:r>
+          </a:p>
+          <a:p>
+            <a:pPr marL="0" marR="0" lvl="0" indent="0" defTabSz="914400" eaLnBrk="1" fontAlgn="auto" latinLnBrk="0" hangingPunct="1">
+              <a:lnSpc>
+                <a:spcPct val="100000"/>
+              </a:lnSpc>
+              <a:spcBef>
+                <a:spcPts val="0"/>
+              </a:spcBef>
+              <a:spcAft>
+                <a:spcPts val="0"/>
+              </a:spcAft>
+              <a:buClrTx/>
+              <a:buSzTx/>
+              <a:buFontTx/>
+              <a:buNone/>
+              <a:tabLst/>
+              <a:defRPr/>
+            </a:pPr>
+            <a:r>
+              <a:rPr kumimoji="0" lang="pt-BR" b="0" i="0" u="none" strike="noStrike" kern="0" cap="none" spc="0" normalizeH="0" baseline="0" noProof="0" dirty="0">
+                <a:ln>
+                  <a:noFill/>
+                </a:ln>
+                <a:solidFill>
+                  <a:prstClr val="black"/>
+                </a:solidFill>
+                <a:effectLst/>
+                <a:uLnTx/>
+                <a:uFillTx/>
+                <a:latin typeface="Consolas" panose="020B0609020204030204" pitchFamily="49" charset="0"/>
+                <a:ea typeface="+mn-ea"/>
+                <a:cs typeface="Consolas" panose="020B0609020204030204" pitchFamily="49" charset="0"/>
+              </a:rPr>
+              <a:t>    ROR R9, R3, #12</a:t>
+            </a:r>
+          </a:p>
+          <a:p>
+            <a:pPr marL="0" marR="0" lvl="0" indent="0" defTabSz="914400" eaLnBrk="1" fontAlgn="auto" latinLnBrk="0" hangingPunct="1">
+              <a:lnSpc>
+                <a:spcPct val="100000"/>
+              </a:lnSpc>
+              <a:spcBef>
+                <a:spcPts val="0"/>
+              </a:spcBef>
+              <a:spcAft>
+                <a:spcPts val="0"/>
+              </a:spcAft>
+              <a:buClrTx/>
+              <a:buSzTx/>
+              <a:buFontTx/>
+              <a:buNone/>
+              <a:tabLst/>
+              <a:defRPr/>
+            </a:pPr>
+            <a:r>
+              <a:rPr kumimoji="0" lang="pt-BR" b="0" i="0" u="none" strike="noStrike" kern="0" cap="none" spc="0" normalizeH="0" baseline="0" noProof="0" dirty="0">
+                <a:ln>
+                  <a:noFill/>
+                </a:ln>
+                <a:solidFill>
+                  <a:prstClr val="black"/>
+                </a:solidFill>
+                <a:effectLst/>
+                <a:uLnTx/>
+                <a:uFillTx/>
+                <a:latin typeface="Consolas" panose="020B0609020204030204" pitchFamily="49" charset="0"/>
+                <a:ea typeface="+mn-ea"/>
+                <a:cs typeface="Consolas" panose="020B0609020204030204" pitchFamily="49" charset="0"/>
+              </a:rPr>
+              <a:t>    REV R10, R9</a:t>
+            </a:r>
+          </a:p>
+          <a:p>
+            <a:pPr marL="0" marR="0" lvl="0" indent="0" defTabSz="914400" eaLnBrk="1" fontAlgn="auto" latinLnBrk="0" hangingPunct="1">
+              <a:lnSpc>
+                <a:spcPct val="100000"/>
+              </a:lnSpc>
+              <a:spcBef>
+                <a:spcPts val="0"/>
+              </a:spcBef>
+              <a:spcAft>
+                <a:spcPts val="0"/>
+              </a:spcAft>
+              <a:buClrTx/>
+              <a:buSzTx/>
+              <a:buFontTx/>
+              <a:buNone/>
+              <a:tabLst/>
+              <a:defRPr/>
+            </a:pPr>
+            <a:r>
+              <a:rPr kumimoji="0" lang="pt-BR" b="0" i="0" u="none" strike="noStrike" kern="0" cap="none" spc="0" normalizeH="0" baseline="0" noProof="0" dirty="0">
+                <a:ln>
+                  <a:noFill/>
+                </a:ln>
+                <a:solidFill>
+                  <a:prstClr val="black"/>
+                </a:solidFill>
+                <a:effectLst/>
+                <a:uLnTx/>
+                <a:uFillTx/>
+                <a:latin typeface="Consolas" panose="020B0609020204030204" pitchFamily="49" charset="0"/>
+                <a:ea typeface="+mn-ea"/>
+                <a:cs typeface="Consolas" panose="020B0609020204030204" pitchFamily="49" charset="0"/>
+              </a:rPr>
+              <a:t>    RBIT R11, R10</a:t>
+            </a:r>
+          </a:p>
+          <a:p>
+            <a:pPr marL="0" marR="0" lvl="0" indent="0" defTabSz="914400" eaLnBrk="1" fontAlgn="auto" latinLnBrk="0" hangingPunct="1">
+              <a:lnSpc>
+                <a:spcPct val="100000"/>
+              </a:lnSpc>
+              <a:spcBef>
+                <a:spcPts val="0"/>
+              </a:spcBef>
+              <a:spcAft>
+                <a:spcPts val="0"/>
+              </a:spcAft>
+              <a:buClrTx/>
+              <a:buSzTx/>
+              <a:buFontTx/>
+              <a:buNone/>
+              <a:tabLst/>
+              <a:defRPr/>
+            </a:pPr>
+            <a:r>
+              <a:rPr kumimoji="0" lang="pt-BR" b="0" i="0" u="none" strike="noStrike" kern="0" cap="none" spc="0" normalizeH="0" baseline="0" noProof="0" dirty="0">
+                <a:ln>
+                  <a:noFill/>
+                </a:ln>
+                <a:solidFill>
+                  <a:prstClr val="black"/>
+                </a:solidFill>
+                <a:effectLst/>
+                <a:uLnTx/>
+                <a:uFillTx/>
+                <a:latin typeface="Consolas" panose="020B0609020204030204" pitchFamily="49" charset="0"/>
+                <a:ea typeface="+mn-ea"/>
+                <a:cs typeface="Consolas" panose="020B0609020204030204" pitchFamily="49" charset="0"/>
+              </a:rPr>
+              <a:t>    ADDS R12, R3, </a:t>
+            </a:r>
+            <a:r>
+              <a:rPr lang="pt-BR" b="0" kern="0" dirty="0">
+                <a:solidFill>
+                  <a:prstClr val="black"/>
+                </a:solidFill>
+                <a:latin typeface="Consolas" panose="020B0609020204030204" pitchFamily="49" charset="0"/>
+                <a:cs typeface="Consolas" panose="020B0609020204030204" pitchFamily="49" charset="0"/>
+              </a:rPr>
+              <a:t>R9 @NZCV </a:t>
+            </a:r>
+            <a:r>
+              <a:rPr kumimoji="0" lang="pt-BR" b="0" i="0" u="none" strike="noStrike" kern="0" cap="none" spc="0" normalizeH="0" baseline="0" noProof="0" dirty="0">
+                <a:ln>
+                  <a:noFill/>
+                </a:ln>
+                <a:solidFill>
+                  <a:prstClr val="black"/>
+                </a:solidFill>
+                <a:effectLst/>
+                <a:uLnTx/>
+                <a:uFillTx/>
+                <a:latin typeface="Consolas" panose="020B0609020204030204" pitchFamily="49" charset="0"/>
+                <a:ea typeface="+mn-ea"/>
+                <a:cs typeface="Consolas" panose="020B0609020204030204" pitchFamily="49" charset="0"/>
+              </a:rPr>
+              <a:t>= 1000</a:t>
+            </a:r>
+          </a:p>
+          <a:p>
+            <a:pPr marL="0" marR="0" lvl="0" indent="0" defTabSz="914400" eaLnBrk="1" fontAlgn="auto" latinLnBrk="0" hangingPunct="1">
+              <a:lnSpc>
+                <a:spcPct val="100000"/>
+              </a:lnSpc>
+              <a:spcBef>
+                <a:spcPts val="0"/>
+              </a:spcBef>
+              <a:spcAft>
+                <a:spcPts val="0"/>
+              </a:spcAft>
+              <a:buClrTx/>
+              <a:buSzTx/>
+              <a:buFontTx/>
+              <a:buNone/>
+              <a:tabLst/>
+              <a:defRPr/>
+            </a:pPr>
+            <a:r>
+              <a:rPr kumimoji="0" lang="pt-BR" b="0" i="0" u="none" strike="noStrike" kern="0" cap="none" spc="0" normalizeH="0" baseline="0" noProof="0" dirty="0">
+                <a:ln>
+                  <a:noFill/>
+                </a:ln>
+                <a:solidFill>
+                  <a:prstClr val="black"/>
+                </a:solidFill>
+                <a:effectLst/>
+                <a:uLnTx/>
+                <a:uFillTx/>
+                <a:latin typeface="Consolas" panose="020B0609020204030204" pitchFamily="49" charset="0"/>
+                <a:ea typeface="+mn-ea"/>
+                <a:cs typeface="Consolas" panose="020B0609020204030204" pitchFamily="49" charset="0"/>
+              </a:rPr>
+              <a:t>    STR R12, [R1,#8]</a:t>
+            </a:r>
+          </a:p>
+          <a:p>
+            <a:pPr marL="0" marR="0" lvl="0" indent="0" defTabSz="914400" eaLnBrk="1" fontAlgn="auto" latinLnBrk="0" hangingPunct="1">
+              <a:lnSpc>
+                <a:spcPct val="100000"/>
+              </a:lnSpc>
+              <a:spcBef>
+                <a:spcPts val="0"/>
+              </a:spcBef>
+              <a:spcAft>
+                <a:spcPts val="0"/>
+              </a:spcAft>
+              <a:buClrTx/>
+              <a:buSzTx/>
+              <a:buFontTx/>
+              <a:buNone/>
+              <a:tabLst/>
+              <a:defRPr/>
+            </a:pPr>
+            <a:endParaRPr kumimoji="0" lang="pt-BR" b="0" i="0" u="none" strike="noStrike" kern="0" cap="none" spc="0" normalizeH="0" baseline="0" noProof="0" dirty="0">
+              <a:ln>
+                <a:noFill/>
+              </a:ln>
+              <a:solidFill>
+                <a:prstClr val="black"/>
+              </a:solidFill>
+              <a:effectLst/>
+              <a:uLnTx/>
+              <a:uFillTx/>
+              <a:latin typeface="Consolas" panose="020B0609020204030204" pitchFamily="49" charset="0"/>
+              <a:ea typeface="+mn-ea"/>
+              <a:cs typeface="Consolas" panose="020B0609020204030204" pitchFamily="49" charset="0"/>
+            </a:endParaRPr>
+          </a:p>
+          <a:p>
+            <a:pPr marL="0" marR="0" lvl="0" indent="0" defTabSz="914400" eaLnBrk="1" fontAlgn="auto" latinLnBrk="0" hangingPunct="1">
+              <a:lnSpc>
+                <a:spcPct val="100000"/>
+              </a:lnSpc>
+              <a:spcBef>
+                <a:spcPts val="0"/>
+              </a:spcBef>
+              <a:spcAft>
+                <a:spcPts val="0"/>
+              </a:spcAft>
+              <a:buClrTx/>
+              <a:buSzTx/>
+              <a:buFontTx/>
+              <a:buNone/>
+              <a:tabLst/>
+              <a:defRPr/>
+            </a:pPr>
+            <a:r>
+              <a:rPr kumimoji="0" lang="pt-BR" b="0" i="0" u="none" strike="noStrike" kern="0" cap="none" spc="0" normalizeH="0" baseline="0" noProof="0" dirty="0">
+                <a:ln>
+                  <a:noFill/>
+                </a:ln>
+                <a:solidFill>
+                  <a:prstClr val="black"/>
+                </a:solidFill>
+                <a:effectLst/>
+                <a:uLnTx/>
+                <a:uFillTx/>
+                <a:latin typeface="Consolas" panose="020B0609020204030204" pitchFamily="49" charset="0"/>
+                <a:ea typeface="+mn-ea"/>
+                <a:cs typeface="Consolas" panose="020B0609020204030204" pitchFamily="49" charset="0"/>
+              </a:rPr>
+              <a:t>loop B loop</a:t>
+            </a:r>
+          </a:p>
+          <a:p>
+            <a:pPr marL="0" marR="0" lvl="0" indent="0" defTabSz="914400" eaLnBrk="1" fontAlgn="auto" latinLnBrk="0" hangingPunct="1">
+              <a:lnSpc>
+                <a:spcPct val="100000"/>
+              </a:lnSpc>
+              <a:spcBef>
+                <a:spcPts val="0"/>
+              </a:spcBef>
+              <a:spcAft>
+                <a:spcPts val="0"/>
+              </a:spcAft>
+              <a:buClrTx/>
+              <a:buSzTx/>
+              <a:buFontTx/>
+              <a:buNone/>
+              <a:tabLst/>
+              <a:defRPr/>
+            </a:pPr>
+            <a:r>
+              <a:rPr kumimoji="0" lang="pt-BR" b="0" i="0" u="none" strike="noStrike" kern="0" cap="none" spc="0" normalizeH="0" baseline="0" noProof="0" dirty="0">
+                <a:ln>
+                  <a:noFill/>
+                </a:ln>
+                <a:solidFill>
+                  <a:prstClr val="black"/>
+                </a:solidFill>
+                <a:effectLst/>
+                <a:uLnTx/>
+                <a:uFillTx/>
+                <a:latin typeface="Consolas" panose="020B0609020204030204" pitchFamily="49" charset="0"/>
+                <a:ea typeface="+mn-ea"/>
+                <a:cs typeface="Consolas" panose="020B0609020204030204" pitchFamily="49" charset="0"/>
+              </a:rPr>
+              <a:t>     ENDP</a:t>
+            </a:r>
+          </a:p>
+          <a:p>
+            <a:pPr marL="0" marR="0" lvl="0" indent="0" defTabSz="914400" eaLnBrk="1" fontAlgn="auto" latinLnBrk="0" hangingPunct="1">
+              <a:lnSpc>
+                <a:spcPct val="100000"/>
+              </a:lnSpc>
+              <a:spcBef>
+                <a:spcPts val="0"/>
+              </a:spcBef>
+              <a:spcAft>
+                <a:spcPts val="0"/>
+              </a:spcAft>
+              <a:buClrTx/>
+              <a:buSzTx/>
+              <a:buFontTx/>
+              <a:buNone/>
+              <a:tabLst/>
+              <a:defRPr/>
+            </a:pPr>
+            <a:endParaRPr kumimoji="0" lang="pt-BR" b="0" i="0" u="none" strike="noStrike" kern="0" cap="none" spc="0" normalizeH="0" baseline="0" noProof="0" dirty="0">
+              <a:ln>
+                <a:noFill/>
+              </a:ln>
+              <a:solidFill>
+                <a:prstClr val="black"/>
+              </a:solidFill>
+              <a:effectLst/>
+              <a:uLnTx/>
+              <a:uFillTx/>
+              <a:latin typeface="Consolas" panose="020B0609020204030204" pitchFamily="49" charset="0"/>
+              <a:ea typeface="+mn-ea"/>
+              <a:cs typeface="Consolas" panose="020B0609020204030204" pitchFamily="49" charset="0"/>
+            </a:endParaRPr>
+          </a:p>
+          <a:p>
+            <a:pPr marL="0" marR="0" lvl="0" indent="0" defTabSz="914400" eaLnBrk="1" fontAlgn="auto" latinLnBrk="0" hangingPunct="1">
+              <a:lnSpc>
+                <a:spcPct val="100000"/>
+              </a:lnSpc>
+              <a:spcBef>
+                <a:spcPts val="0"/>
+              </a:spcBef>
+              <a:spcAft>
+                <a:spcPts val="0"/>
+              </a:spcAft>
+              <a:buClrTx/>
+              <a:buSzTx/>
+              <a:buFontTx/>
+              <a:buNone/>
+              <a:tabLst/>
+              <a:defRPr/>
+            </a:pPr>
+            <a:r>
+              <a:rPr kumimoji="0" lang="pt-BR" b="0" i="0" u="none" strike="noStrike" kern="0" cap="none" spc="0" normalizeH="0" baseline="0" noProof="0" dirty="0">
+                <a:ln>
+                  <a:noFill/>
+                </a:ln>
+                <a:solidFill>
+                  <a:prstClr val="black"/>
+                </a:solidFill>
+                <a:effectLst/>
+                <a:uLnTx/>
+                <a:uFillTx/>
+                <a:latin typeface="Consolas" panose="020B0609020204030204" pitchFamily="49" charset="0"/>
+                <a:ea typeface="+mn-ea"/>
+                <a:cs typeface="Consolas" panose="020B0609020204030204" pitchFamily="49" charset="0"/>
+              </a:rPr>
+              <a:t>max PROC</a:t>
+            </a:r>
+          </a:p>
+          <a:p>
+            <a:pPr marL="0" marR="0" lvl="0" indent="0" defTabSz="914400" eaLnBrk="1" fontAlgn="auto" latinLnBrk="0" hangingPunct="1">
+              <a:lnSpc>
+                <a:spcPct val="100000"/>
+              </a:lnSpc>
+              <a:spcBef>
+                <a:spcPts val="0"/>
+              </a:spcBef>
+              <a:spcAft>
+                <a:spcPts val="0"/>
+              </a:spcAft>
+              <a:buClrTx/>
+              <a:buSzTx/>
+              <a:buFontTx/>
+              <a:buNone/>
+              <a:tabLst/>
+              <a:defRPr/>
+            </a:pPr>
+            <a:r>
+              <a:rPr kumimoji="0" lang="pt-BR" b="0" i="0" u="none" strike="noStrike" kern="0" cap="none" spc="0" normalizeH="0" baseline="0" noProof="0" dirty="0">
+                <a:ln>
+                  <a:noFill/>
+                </a:ln>
+                <a:solidFill>
+                  <a:prstClr val="black"/>
+                </a:solidFill>
+                <a:effectLst/>
+                <a:uLnTx/>
+                <a:uFillTx/>
+                <a:latin typeface="Consolas" panose="020B0609020204030204" pitchFamily="49" charset="0"/>
+                <a:ea typeface="+mn-ea"/>
+                <a:cs typeface="Consolas" panose="020B0609020204030204" pitchFamily="49" charset="0"/>
+              </a:rPr>
+              <a:t>     CMP R2, </a:t>
+            </a:r>
+            <a:r>
+              <a:rPr lang="pt-BR" b="0" kern="0" dirty="0">
+                <a:solidFill>
+                  <a:prstClr val="black"/>
+                </a:solidFill>
+                <a:latin typeface="Consolas" panose="020B0609020204030204" pitchFamily="49" charset="0"/>
+                <a:cs typeface="Consolas" panose="020B0609020204030204" pitchFamily="49" charset="0"/>
+              </a:rPr>
+              <a:t>R3      @NZCV </a:t>
+            </a:r>
+            <a:r>
+              <a:rPr kumimoji="0" lang="pt-BR" b="0" i="0" u="none" strike="noStrike" kern="0" cap="none" spc="0" normalizeH="0" baseline="0" noProof="0" dirty="0">
+                <a:ln>
+                  <a:noFill/>
+                </a:ln>
+                <a:solidFill>
+                  <a:prstClr val="black"/>
+                </a:solidFill>
+                <a:effectLst/>
+                <a:uLnTx/>
+                <a:uFillTx/>
+                <a:latin typeface="Consolas" panose="020B0609020204030204" pitchFamily="49" charset="0"/>
+                <a:ea typeface="+mn-ea"/>
+                <a:cs typeface="Consolas" panose="020B0609020204030204" pitchFamily="49" charset="0"/>
+              </a:rPr>
+              <a:t>= 0010</a:t>
+            </a:r>
+          </a:p>
+          <a:p>
+            <a:pPr marL="0" marR="0" lvl="0" indent="0" defTabSz="914400" eaLnBrk="1" fontAlgn="auto" latinLnBrk="0" hangingPunct="1">
+              <a:lnSpc>
+                <a:spcPct val="100000"/>
+              </a:lnSpc>
+              <a:spcBef>
+                <a:spcPts val="0"/>
+              </a:spcBef>
+              <a:spcAft>
+                <a:spcPts val="0"/>
+              </a:spcAft>
+              <a:buClrTx/>
+              <a:buSzTx/>
+              <a:buFontTx/>
+              <a:buNone/>
+              <a:tabLst/>
+              <a:defRPr/>
+            </a:pPr>
+            <a:r>
+              <a:rPr kumimoji="0" lang="pt-BR" b="0" i="0" u="none" strike="noStrike" kern="0" cap="none" spc="0" normalizeH="0" baseline="0" noProof="0" dirty="0">
+                <a:ln>
+                  <a:noFill/>
+                </a:ln>
+                <a:solidFill>
+                  <a:prstClr val="black"/>
+                </a:solidFill>
+                <a:effectLst/>
+                <a:uLnTx/>
+                <a:uFillTx/>
+                <a:latin typeface="Consolas" panose="020B0609020204030204" pitchFamily="49" charset="0"/>
+                <a:ea typeface="+mn-ea"/>
+                <a:cs typeface="Consolas" panose="020B0609020204030204" pitchFamily="49" charset="0"/>
+              </a:rPr>
+              <a:t>     BLT second</a:t>
+            </a:r>
+          </a:p>
+          <a:p>
+            <a:pPr marL="0" marR="0" lvl="0" indent="0" defTabSz="914400" eaLnBrk="1" fontAlgn="auto" latinLnBrk="0" hangingPunct="1">
+              <a:lnSpc>
+                <a:spcPct val="100000"/>
+              </a:lnSpc>
+              <a:spcBef>
+                <a:spcPts val="0"/>
+              </a:spcBef>
+              <a:spcAft>
+                <a:spcPts val="0"/>
+              </a:spcAft>
+              <a:buClrTx/>
+              <a:buSzTx/>
+              <a:buFontTx/>
+              <a:buNone/>
+              <a:tabLst/>
+              <a:defRPr/>
+            </a:pPr>
+            <a:r>
+              <a:rPr kumimoji="0" lang="pt-BR" b="0" i="0" u="none" strike="noStrike" kern="0" cap="none" spc="0" normalizeH="0" baseline="0" noProof="0" dirty="0">
+                <a:ln>
+                  <a:noFill/>
+                </a:ln>
+                <a:solidFill>
+                  <a:prstClr val="black"/>
+                </a:solidFill>
+                <a:effectLst/>
+                <a:uLnTx/>
+                <a:uFillTx/>
+                <a:latin typeface="Consolas" panose="020B0609020204030204" pitchFamily="49" charset="0"/>
+                <a:ea typeface="+mn-ea"/>
+                <a:cs typeface="Consolas" panose="020B0609020204030204" pitchFamily="49" charset="0"/>
+              </a:rPr>
+              <a:t>first MOV R0, R2</a:t>
+            </a:r>
+          </a:p>
+          <a:p>
+            <a:pPr marL="0" marR="0" lvl="0" indent="0" defTabSz="914400" eaLnBrk="1" fontAlgn="auto" latinLnBrk="0" hangingPunct="1">
+              <a:lnSpc>
+                <a:spcPct val="100000"/>
+              </a:lnSpc>
+              <a:spcBef>
+                <a:spcPts val="0"/>
+              </a:spcBef>
+              <a:spcAft>
+                <a:spcPts val="0"/>
+              </a:spcAft>
+              <a:buClrTx/>
+              <a:buSzTx/>
+              <a:buFontTx/>
+              <a:buNone/>
+              <a:tabLst/>
+              <a:defRPr/>
+            </a:pPr>
+            <a:r>
+              <a:rPr kumimoji="0" lang="pt-BR" b="0" i="0" u="none" strike="noStrike" kern="0" cap="none" spc="0" normalizeH="0" baseline="0" noProof="0" dirty="0">
+                <a:ln>
+                  <a:noFill/>
+                </a:ln>
+                <a:solidFill>
+                  <a:prstClr val="black"/>
+                </a:solidFill>
+                <a:effectLst/>
+                <a:uLnTx/>
+                <a:uFillTx/>
+                <a:latin typeface="Consolas" panose="020B0609020204030204" pitchFamily="49" charset="0"/>
+                <a:ea typeface="+mn-ea"/>
+                <a:cs typeface="Consolas" panose="020B0609020204030204" pitchFamily="49" charset="0"/>
+              </a:rPr>
+              <a:t>      B done</a:t>
+            </a:r>
+          </a:p>
+          <a:p>
+            <a:pPr marL="0" marR="0" lvl="0" indent="0" defTabSz="914400" eaLnBrk="1" fontAlgn="auto" latinLnBrk="0" hangingPunct="1">
+              <a:lnSpc>
+                <a:spcPct val="100000"/>
+              </a:lnSpc>
+              <a:spcBef>
+                <a:spcPts val="0"/>
+              </a:spcBef>
+              <a:spcAft>
+                <a:spcPts val="0"/>
+              </a:spcAft>
+              <a:buClrTx/>
+              <a:buSzTx/>
+              <a:buFontTx/>
+              <a:buNone/>
+              <a:tabLst/>
+              <a:defRPr/>
+            </a:pPr>
+            <a:r>
+              <a:rPr kumimoji="0" lang="pt-BR" b="0" i="0" u="none" strike="noStrike" kern="0" cap="none" spc="0" normalizeH="0" baseline="0" noProof="0" dirty="0">
+                <a:ln>
+                  <a:noFill/>
+                </a:ln>
+                <a:solidFill>
+                  <a:prstClr val="black"/>
+                </a:solidFill>
+                <a:effectLst/>
+                <a:uLnTx/>
+                <a:uFillTx/>
+                <a:latin typeface="Consolas" panose="020B0609020204030204" pitchFamily="49" charset="0"/>
+                <a:ea typeface="+mn-ea"/>
+                <a:cs typeface="Consolas" panose="020B0609020204030204" pitchFamily="49" charset="0"/>
+              </a:rPr>
+              <a:t>second MOV R0, R3</a:t>
+            </a:r>
+          </a:p>
+          <a:p>
+            <a:pPr marL="0" marR="0" lvl="0" indent="0" defTabSz="914400" eaLnBrk="1" fontAlgn="auto" latinLnBrk="0" hangingPunct="1">
+              <a:lnSpc>
+                <a:spcPct val="100000"/>
+              </a:lnSpc>
+              <a:spcBef>
+                <a:spcPts val="0"/>
+              </a:spcBef>
+              <a:spcAft>
+                <a:spcPts val="0"/>
+              </a:spcAft>
+              <a:buClrTx/>
+              <a:buSzTx/>
+              <a:buFontTx/>
+              <a:buNone/>
+              <a:tabLst/>
+              <a:defRPr/>
+            </a:pPr>
+            <a:r>
+              <a:rPr kumimoji="0" lang="pt-BR" b="0" i="0" u="none" strike="noStrike" kern="0" cap="none" spc="0" normalizeH="0" baseline="0" noProof="0" dirty="0">
+                <a:ln>
+                  <a:noFill/>
+                </a:ln>
+                <a:solidFill>
+                  <a:prstClr val="black"/>
+                </a:solidFill>
+                <a:effectLst/>
+                <a:uLnTx/>
+                <a:uFillTx/>
+                <a:latin typeface="Consolas" panose="020B0609020204030204" pitchFamily="49" charset="0"/>
+                <a:ea typeface="+mn-ea"/>
+                <a:cs typeface="Consolas" panose="020B0609020204030204" pitchFamily="49" charset="0"/>
+              </a:rPr>
+              <a:t>done   BX LR</a:t>
+            </a:r>
+          </a:p>
+          <a:p>
+            <a:pPr marL="0" marR="0" lvl="0" indent="0" defTabSz="914400" eaLnBrk="1" fontAlgn="auto" latinLnBrk="0" hangingPunct="1">
+              <a:lnSpc>
+                <a:spcPct val="100000"/>
+              </a:lnSpc>
+              <a:spcBef>
+                <a:spcPts val="0"/>
+              </a:spcBef>
+              <a:spcAft>
+                <a:spcPts val="0"/>
+              </a:spcAft>
+              <a:buClrTx/>
+              <a:buSzTx/>
+              <a:buFontTx/>
+              <a:buNone/>
+              <a:tabLst/>
+              <a:defRPr/>
+            </a:pPr>
+            <a:r>
+              <a:rPr kumimoji="0" lang="pt-BR" b="0" i="0" u="none" strike="noStrike" kern="0" cap="none" spc="0" normalizeH="0" baseline="0" noProof="0" dirty="0">
+                <a:ln>
+                  <a:noFill/>
+                </a:ln>
+                <a:solidFill>
+                  <a:prstClr val="black"/>
+                </a:solidFill>
+                <a:effectLst/>
+                <a:uLnTx/>
+                <a:uFillTx/>
+                <a:latin typeface="Consolas" panose="020B0609020204030204" pitchFamily="49" charset="0"/>
+                <a:ea typeface="+mn-ea"/>
+                <a:cs typeface="Consolas" panose="020B0609020204030204" pitchFamily="49" charset="0"/>
+              </a:rPr>
+              <a:t>     ENDP</a:t>
+            </a:r>
+          </a:p>
+        </p:txBody>
+      </p:sp>
+      <p:graphicFrame>
+        <p:nvGraphicFramePr>
+          <p:cNvPr id="6" name="Table 5">
+            <a:extLst>
+              <a:ext uri="{FF2B5EF4-FFF2-40B4-BE49-F238E27FC236}">
+                <a16:creationId xmlns:a16="http://schemas.microsoft.com/office/drawing/2014/main" id="{43586B0A-AAB6-1D2E-24D6-64E619D83AA5}"/>
+              </a:ext>
+            </a:extLst>
+          </p:cNvPr>
+          <p:cNvGraphicFramePr>
+            <a:graphicFrameLocks noGrp="1"/>
+          </p:cNvGraphicFramePr>
+          <p:nvPr/>
+        </p:nvGraphicFramePr>
+        <p:xfrm>
+          <a:off x="137322" y="4551113"/>
+          <a:ext cx="5155440" cy="1483360"/>
+        </p:xfrm>
+        <a:graphic>
+          <a:graphicData uri="http://schemas.openxmlformats.org/drawingml/2006/table">
+            <a:tbl>
+              <a:tblPr firstRow="1" bandRow="1">
+                <a:tableStyleId>{5940675A-B579-460E-94D1-54222C63F5DA}</a:tableStyleId>
+              </a:tblPr>
+              <a:tblGrid>
+                <a:gridCol w="644430">
+                  <a:extLst>
+                    <a:ext uri="{9D8B030D-6E8A-4147-A177-3AD203B41FA5}">
+                      <a16:colId xmlns:a16="http://schemas.microsoft.com/office/drawing/2014/main" val="2337985746"/>
+                    </a:ext>
+                  </a:extLst>
+                </a:gridCol>
+                <a:gridCol w="644430">
+                  <a:extLst>
+                    <a:ext uri="{9D8B030D-6E8A-4147-A177-3AD203B41FA5}">
+                      <a16:colId xmlns:a16="http://schemas.microsoft.com/office/drawing/2014/main" val="1802740170"/>
+                    </a:ext>
+                  </a:extLst>
+                </a:gridCol>
+                <a:gridCol w="644430">
+                  <a:extLst>
+                    <a:ext uri="{9D8B030D-6E8A-4147-A177-3AD203B41FA5}">
+                      <a16:colId xmlns:a16="http://schemas.microsoft.com/office/drawing/2014/main" val="2590131525"/>
+                    </a:ext>
+                  </a:extLst>
+                </a:gridCol>
+                <a:gridCol w="644430">
+                  <a:extLst>
+                    <a:ext uri="{9D8B030D-6E8A-4147-A177-3AD203B41FA5}">
+                      <a16:colId xmlns:a16="http://schemas.microsoft.com/office/drawing/2014/main" val="947827850"/>
+                    </a:ext>
+                  </a:extLst>
+                </a:gridCol>
+                <a:gridCol w="644430">
+                  <a:extLst>
+                    <a:ext uri="{9D8B030D-6E8A-4147-A177-3AD203B41FA5}">
+                      <a16:colId xmlns:a16="http://schemas.microsoft.com/office/drawing/2014/main" val="2189951492"/>
+                    </a:ext>
+                  </a:extLst>
+                </a:gridCol>
+                <a:gridCol w="644430">
+                  <a:extLst>
+                    <a:ext uri="{9D8B030D-6E8A-4147-A177-3AD203B41FA5}">
+                      <a16:colId xmlns:a16="http://schemas.microsoft.com/office/drawing/2014/main" val="2319925471"/>
+                    </a:ext>
+                  </a:extLst>
+                </a:gridCol>
+                <a:gridCol w="644430">
+                  <a:extLst>
+                    <a:ext uri="{9D8B030D-6E8A-4147-A177-3AD203B41FA5}">
+                      <a16:colId xmlns:a16="http://schemas.microsoft.com/office/drawing/2014/main" val="3873491110"/>
+                    </a:ext>
+                  </a:extLst>
+                </a:gridCol>
+                <a:gridCol w="644430">
+                  <a:extLst>
+                    <a:ext uri="{9D8B030D-6E8A-4147-A177-3AD203B41FA5}">
+                      <a16:colId xmlns:a16="http://schemas.microsoft.com/office/drawing/2014/main" val="2341457647"/>
+                    </a:ext>
+                  </a:extLst>
+                </a:gridCol>
+              </a:tblGrid>
+              <a:tr h="370840">
+                <a:tc>
+                  <a:txBody>
+                    <a:bodyPr/>
+                    <a:lstStyle/>
+                    <a:p>
+                      <a:r>
+                        <a:rPr lang="en-US" dirty="0"/>
+                        <a:t>R0</a:t>
+                      </a:r>
+                    </a:p>
+                  </a:txBody>
+                  <a:tcPr/>
+                </a:tc>
+                <a:tc>
+                  <a:txBody>
+                    <a:bodyPr/>
+                    <a:lstStyle/>
+                    <a:p>
+                      <a:endParaRPr lang="en-US"/>
+                    </a:p>
+                  </a:txBody>
+                  <a:tcPr/>
+                </a:tc>
+                <a:tc>
+                  <a:txBody>
+                    <a:bodyPr/>
+                    <a:lstStyle/>
+                    <a:p>
+                      <a:r>
+                        <a:rPr lang="en-US" dirty="0"/>
+                        <a:t>R4</a:t>
+                      </a:r>
+                    </a:p>
+                  </a:txBody>
+                  <a:tcPr/>
+                </a:tc>
+                <a:tc>
+                  <a:txBody>
+                    <a:bodyPr/>
+                    <a:lstStyle/>
+                    <a:p>
+                      <a:endParaRPr lang="en-US"/>
+                    </a:p>
+                  </a:txBody>
+                  <a:tcPr/>
+                </a:tc>
+                <a:tc>
+                  <a:txBody>
+                    <a:bodyPr/>
+                    <a:lstStyle/>
+                    <a:p>
+                      <a:r>
+                        <a:rPr lang="en-US" dirty="0"/>
+                        <a:t>R8</a:t>
+                      </a:r>
+                    </a:p>
+                  </a:txBody>
+                  <a:tcPr/>
+                </a:tc>
+                <a:tc>
+                  <a:txBody>
+                    <a:bodyPr/>
+                    <a:lstStyle/>
+                    <a:p>
+                      <a:endParaRPr lang="en-US"/>
+                    </a:p>
+                  </a:txBody>
+                  <a:tcPr/>
+                </a:tc>
+                <a:tc>
+                  <a:txBody>
+                    <a:bodyPr/>
+                    <a:lstStyle/>
+                    <a:p>
+                      <a:r>
+                        <a:rPr lang="en-US" dirty="0"/>
+                        <a:t>R12</a:t>
+                      </a:r>
+                    </a:p>
+                  </a:txBody>
+                  <a:tcPr/>
+                </a:tc>
+                <a:tc>
+                  <a:txBody>
+                    <a:bodyPr/>
+                    <a:lstStyle/>
+                    <a:p>
+                      <a:endParaRPr lang="en-US" dirty="0"/>
+                    </a:p>
+                  </a:txBody>
+                  <a:tcPr/>
+                </a:tc>
+                <a:extLst>
+                  <a:ext uri="{0D108BD9-81ED-4DB2-BD59-A6C34878D82A}">
+                    <a16:rowId xmlns:a16="http://schemas.microsoft.com/office/drawing/2014/main" val="100651221"/>
+                  </a:ext>
+                </a:extLst>
+              </a:tr>
+              <a:tr h="370840">
+                <a:tc>
+                  <a:txBody>
+                    <a:bodyPr/>
+                    <a:lstStyle/>
+                    <a:p>
+                      <a:r>
+                        <a:rPr lang="en-US" dirty="0"/>
+                        <a:t>R1</a:t>
+                      </a:r>
+                    </a:p>
+                  </a:txBody>
+                  <a:tcPr/>
+                </a:tc>
+                <a:tc>
+                  <a:txBody>
+                    <a:bodyPr/>
+                    <a:lstStyle/>
+                    <a:p>
+                      <a:endParaRPr lang="en-US"/>
+                    </a:p>
+                  </a:txBody>
+                  <a:tcPr/>
+                </a:tc>
+                <a:tc>
+                  <a:txBody>
+                    <a:bodyPr/>
+                    <a:lstStyle/>
+                    <a:p>
+                      <a:r>
+                        <a:rPr lang="en-US" dirty="0"/>
+                        <a:t>R5</a:t>
+                      </a:r>
+                    </a:p>
+                  </a:txBody>
+                  <a:tcPr/>
+                </a:tc>
+                <a:tc>
+                  <a:txBody>
+                    <a:bodyPr/>
+                    <a:lstStyle/>
+                    <a:p>
+                      <a:endParaRPr lang="en-US"/>
+                    </a:p>
+                  </a:txBody>
+                  <a:tcPr/>
+                </a:tc>
+                <a:tc>
+                  <a:txBody>
+                    <a:bodyPr/>
+                    <a:lstStyle/>
+                    <a:p>
+                      <a:r>
+                        <a:rPr lang="en-US" dirty="0"/>
+                        <a:t>R9</a:t>
+                      </a:r>
+                    </a:p>
+                  </a:txBody>
+                  <a:tcPr/>
+                </a:tc>
+                <a:tc>
+                  <a:txBody>
+                    <a:bodyPr/>
+                    <a:lstStyle/>
+                    <a:p>
+                      <a:endParaRPr lang="en-US"/>
+                    </a:p>
+                  </a:txBody>
+                  <a:tcPr/>
+                </a:tc>
+                <a:tc>
+                  <a:txBody>
+                    <a:bodyPr/>
+                    <a:lstStyle/>
+                    <a:p>
+                      <a:r>
+                        <a:rPr lang="en-US" dirty="0"/>
+                        <a:t>R13</a:t>
+                      </a:r>
+                    </a:p>
+                  </a:txBody>
+                  <a:tcPr/>
+                </a:tc>
+                <a:tc>
+                  <a:txBody>
+                    <a:bodyPr/>
+                    <a:lstStyle/>
+                    <a:p>
+                      <a:endParaRPr lang="en-US" dirty="0"/>
+                    </a:p>
+                  </a:txBody>
+                  <a:tcPr/>
+                </a:tc>
+                <a:extLst>
+                  <a:ext uri="{0D108BD9-81ED-4DB2-BD59-A6C34878D82A}">
+                    <a16:rowId xmlns:a16="http://schemas.microsoft.com/office/drawing/2014/main" val="146351233"/>
+                  </a:ext>
+                </a:extLst>
+              </a:tr>
+              <a:tr h="370840">
+                <a:tc>
+                  <a:txBody>
+                    <a:bodyPr/>
+                    <a:lstStyle/>
+                    <a:p>
+                      <a:r>
+                        <a:rPr lang="en-US" dirty="0"/>
+                        <a:t>R2</a:t>
+                      </a:r>
+                    </a:p>
+                  </a:txBody>
+                  <a:tcPr/>
+                </a:tc>
+                <a:tc>
+                  <a:txBody>
+                    <a:bodyPr/>
+                    <a:lstStyle/>
+                    <a:p>
+                      <a:endParaRPr lang="en-US"/>
+                    </a:p>
+                  </a:txBody>
+                  <a:tcPr/>
+                </a:tc>
+                <a:tc>
+                  <a:txBody>
+                    <a:bodyPr/>
+                    <a:lstStyle/>
+                    <a:p>
+                      <a:r>
+                        <a:rPr lang="en-US" dirty="0"/>
+                        <a:t>R6</a:t>
+                      </a:r>
+                    </a:p>
+                  </a:txBody>
+                  <a:tcPr/>
+                </a:tc>
+                <a:tc>
+                  <a:txBody>
+                    <a:bodyPr/>
+                    <a:lstStyle/>
+                    <a:p>
+                      <a:endParaRPr lang="en-US"/>
+                    </a:p>
+                  </a:txBody>
+                  <a:tcPr/>
+                </a:tc>
+                <a:tc>
+                  <a:txBody>
+                    <a:bodyPr/>
+                    <a:lstStyle/>
+                    <a:p>
+                      <a:r>
+                        <a:rPr lang="en-US" dirty="0"/>
+                        <a:t>R10</a:t>
+                      </a:r>
+                    </a:p>
+                  </a:txBody>
+                  <a:tcPr/>
+                </a:tc>
+                <a:tc>
+                  <a:txBody>
+                    <a:bodyPr/>
+                    <a:lstStyle/>
+                    <a:p>
+                      <a:endParaRPr lang="en-US"/>
+                    </a:p>
+                  </a:txBody>
+                  <a:tcPr/>
+                </a:tc>
+                <a:tc>
+                  <a:txBody>
+                    <a:bodyPr/>
+                    <a:lstStyle/>
+                    <a:p>
+                      <a:r>
+                        <a:rPr lang="en-US" dirty="0"/>
+                        <a:t>R14</a:t>
+                      </a:r>
+                    </a:p>
+                  </a:txBody>
+                  <a:tcPr/>
+                </a:tc>
+                <a:tc>
+                  <a:txBody>
+                    <a:bodyPr/>
+                    <a:lstStyle/>
+                    <a:p>
+                      <a:endParaRPr lang="en-US" dirty="0"/>
+                    </a:p>
+                  </a:txBody>
+                  <a:tcPr/>
+                </a:tc>
+                <a:extLst>
+                  <a:ext uri="{0D108BD9-81ED-4DB2-BD59-A6C34878D82A}">
+                    <a16:rowId xmlns:a16="http://schemas.microsoft.com/office/drawing/2014/main" val="1775583618"/>
+                  </a:ext>
+                </a:extLst>
+              </a:tr>
+              <a:tr h="370840">
+                <a:tc>
+                  <a:txBody>
+                    <a:bodyPr/>
+                    <a:lstStyle/>
+                    <a:p>
+                      <a:r>
+                        <a:rPr lang="en-US" dirty="0"/>
+                        <a:t>R3</a:t>
+                      </a:r>
+                    </a:p>
+                  </a:txBody>
+                  <a:tcPr/>
+                </a:tc>
+                <a:tc>
+                  <a:txBody>
+                    <a:bodyPr/>
+                    <a:lstStyle/>
+                    <a:p>
+                      <a:endParaRPr lang="en-US"/>
+                    </a:p>
+                  </a:txBody>
+                  <a:tcPr/>
+                </a:tc>
+                <a:tc>
+                  <a:txBody>
+                    <a:bodyPr/>
+                    <a:lstStyle/>
+                    <a:p>
+                      <a:r>
+                        <a:rPr lang="en-US" dirty="0"/>
+                        <a:t>R7</a:t>
+                      </a:r>
+                    </a:p>
+                  </a:txBody>
+                  <a:tcPr/>
+                </a:tc>
+                <a:tc>
+                  <a:txBody>
+                    <a:bodyPr/>
+                    <a:lstStyle/>
+                    <a:p>
+                      <a:endParaRPr lang="en-US"/>
+                    </a:p>
+                  </a:txBody>
+                  <a:tcPr/>
+                </a:tc>
+                <a:tc>
+                  <a:txBody>
+                    <a:bodyPr/>
+                    <a:lstStyle/>
+                    <a:p>
+                      <a:r>
+                        <a:rPr lang="en-US" dirty="0"/>
+                        <a:t>R11</a:t>
+                      </a:r>
+                    </a:p>
+                  </a:txBody>
+                  <a:tcPr/>
+                </a:tc>
+                <a:tc>
+                  <a:txBody>
+                    <a:bodyPr/>
+                    <a:lstStyle/>
+                    <a:p>
+                      <a:endParaRPr lang="en-US"/>
+                    </a:p>
+                  </a:txBody>
+                  <a:tcPr/>
+                </a:tc>
+                <a:tc>
+                  <a:txBody>
+                    <a:bodyPr/>
+                    <a:lstStyle/>
+                    <a:p>
+                      <a:r>
+                        <a:rPr lang="en-US" dirty="0"/>
+                        <a:t>R15</a:t>
+                      </a:r>
+                    </a:p>
+                  </a:txBody>
+                  <a:tcPr/>
+                </a:tc>
+                <a:tc>
+                  <a:txBody>
+                    <a:bodyPr/>
+                    <a:lstStyle/>
+                    <a:p>
+                      <a:endParaRPr lang="en-US" dirty="0"/>
+                    </a:p>
+                  </a:txBody>
+                  <a:tcPr/>
+                </a:tc>
+                <a:extLst>
+                  <a:ext uri="{0D108BD9-81ED-4DB2-BD59-A6C34878D82A}">
+                    <a16:rowId xmlns:a16="http://schemas.microsoft.com/office/drawing/2014/main" val="3562356508"/>
+                  </a:ext>
+                </a:extLst>
+              </a:tr>
+            </a:tbl>
+          </a:graphicData>
+        </a:graphic>
+      </p:graphicFrame>
+      <p:graphicFrame>
+        <p:nvGraphicFramePr>
+          <p:cNvPr id="8" name="Content Placeholder 6">
+            <a:extLst>
+              <a:ext uri="{FF2B5EF4-FFF2-40B4-BE49-F238E27FC236}">
+                <a16:creationId xmlns:a16="http://schemas.microsoft.com/office/drawing/2014/main" id="{C7C14E0C-8BA7-B240-2E5F-B804E09539CB}"/>
+              </a:ext>
+            </a:extLst>
+          </p:cNvPr>
+          <p:cNvGraphicFramePr>
+            <a:graphicFrameLocks/>
+          </p:cNvGraphicFramePr>
+          <p:nvPr/>
+        </p:nvGraphicFramePr>
+        <p:xfrm>
+          <a:off x="457200" y="6282234"/>
+          <a:ext cx="8423243" cy="370840"/>
+        </p:xfrm>
+        <a:graphic>
+          <a:graphicData uri="http://schemas.openxmlformats.org/drawingml/2006/table">
+            <a:tbl>
+              <a:tblPr firstRow="1" bandRow="1">
+                <a:tableStyleId>{5940675A-B579-460E-94D1-54222C63F5DA}</a:tableStyleId>
+              </a:tblPr>
+              <a:tblGrid>
+                <a:gridCol w="1820338">
+                  <a:extLst>
+                    <a:ext uri="{9D8B030D-6E8A-4147-A177-3AD203B41FA5}">
+                      <a16:colId xmlns:a16="http://schemas.microsoft.com/office/drawing/2014/main" val="4041087470"/>
+                    </a:ext>
+                  </a:extLst>
+                </a:gridCol>
+                <a:gridCol w="549956">
+                  <a:extLst>
+                    <a:ext uri="{9D8B030D-6E8A-4147-A177-3AD203B41FA5}">
+                      <a16:colId xmlns:a16="http://schemas.microsoft.com/office/drawing/2014/main" val="475833553"/>
+                    </a:ext>
+                  </a:extLst>
+                </a:gridCol>
+                <a:gridCol w="549956">
+                  <a:extLst>
+                    <a:ext uri="{9D8B030D-6E8A-4147-A177-3AD203B41FA5}">
+                      <a16:colId xmlns:a16="http://schemas.microsoft.com/office/drawing/2014/main" val="3440583969"/>
+                    </a:ext>
+                  </a:extLst>
+                </a:gridCol>
+                <a:gridCol w="549956">
+                  <a:extLst>
+                    <a:ext uri="{9D8B030D-6E8A-4147-A177-3AD203B41FA5}">
+                      <a16:colId xmlns:a16="http://schemas.microsoft.com/office/drawing/2014/main" val="3973726920"/>
+                    </a:ext>
+                  </a:extLst>
+                </a:gridCol>
+                <a:gridCol w="549956">
+                  <a:extLst>
+                    <a:ext uri="{9D8B030D-6E8A-4147-A177-3AD203B41FA5}">
+                      <a16:colId xmlns:a16="http://schemas.microsoft.com/office/drawing/2014/main" val="1099364392"/>
+                    </a:ext>
+                  </a:extLst>
+                </a:gridCol>
+                <a:gridCol w="549956">
+                  <a:extLst>
+                    <a:ext uri="{9D8B030D-6E8A-4147-A177-3AD203B41FA5}">
+                      <a16:colId xmlns:a16="http://schemas.microsoft.com/office/drawing/2014/main" val="598594491"/>
+                    </a:ext>
+                  </a:extLst>
+                </a:gridCol>
+                <a:gridCol w="549956">
+                  <a:extLst>
+                    <a:ext uri="{9D8B030D-6E8A-4147-A177-3AD203B41FA5}">
+                      <a16:colId xmlns:a16="http://schemas.microsoft.com/office/drawing/2014/main" val="3299168853"/>
+                    </a:ext>
+                  </a:extLst>
+                </a:gridCol>
+                <a:gridCol w="549956">
+                  <a:extLst>
+                    <a:ext uri="{9D8B030D-6E8A-4147-A177-3AD203B41FA5}">
+                      <a16:colId xmlns:a16="http://schemas.microsoft.com/office/drawing/2014/main" val="3639377261"/>
+                    </a:ext>
+                  </a:extLst>
+                </a:gridCol>
+                <a:gridCol w="549956">
+                  <a:extLst>
+                    <a:ext uri="{9D8B030D-6E8A-4147-A177-3AD203B41FA5}">
+                      <a16:colId xmlns:a16="http://schemas.microsoft.com/office/drawing/2014/main" val="2095656865"/>
+                    </a:ext>
+                  </a:extLst>
+                </a:gridCol>
+                <a:gridCol w="553389">
+                  <a:extLst>
+                    <a:ext uri="{9D8B030D-6E8A-4147-A177-3AD203B41FA5}">
+                      <a16:colId xmlns:a16="http://schemas.microsoft.com/office/drawing/2014/main" val="2172498307"/>
+                    </a:ext>
+                  </a:extLst>
+                </a:gridCol>
+                <a:gridCol w="549956">
+                  <a:extLst>
+                    <a:ext uri="{9D8B030D-6E8A-4147-A177-3AD203B41FA5}">
+                      <a16:colId xmlns:a16="http://schemas.microsoft.com/office/drawing/2014/main" val="3928751653"/>
+                    </a:ext>
+                  </a:extLst>
+                </a:gridCol>
+                <a:gridCol w="549956">
+                  <a:extLst>
+                    <a:ext uri="{9D8B030D-6E8A-4147-A177-3AD203B41FA5}">
+                      <a16:colId xmlns:a16="http://schemas.microsoft.com/office/drawing/2014/main" val="1178522413"/>
+                    </a:ext>
+                  </a:extLst>
+                </a:gridCol>
+                <a:gridCol w="549956">
+                  <a:extLst>
+                    <a:ext uri="{9D8B030D-6E8A-4147-A177-3AD203B41FA5}">
+                      <a16:colId xmlns:a16="http://schemas.microsoft.com/office/drawing/2014/main" val="4096721898"/>
+                    </a:ext>
+                  </a:extLst>
+                </a:gridCol>
+              </a:tblGrid>
+              <a:tr h="370840">
+                <a:tc>
+                  <a:txBody>
+                    <a:bodyPr/>
+                    <a:lstStyle/>
+                    <a:p>
+                      <a:pPr marL="0" marR="0" lvl="0" indent="0" algn="ctr" defTabSz="914400" rtl="0" eaLnBrk="1" fontAlgn="auto" latinLnBrk="0" hangingPunct="1">
+                        <a:lnSpc>
+                          <a:spcPct val="100000"/>
+                        </a:lnSpc>
+                        <a:spcBef>
+                          <a:spcPts val="0"/>
+                        </a:spcBef>
+                        <a:spcAft>
+                          <a:spcPts val="0"/>
+                        </a:spcAft>
+                        <a:buClrTx/>
+                        <a:buSzTx/>
+                        <a:buFontTx/>
+                        <a:buNone/>
+                        <a:tabLst/>
+                        <a:defRPr/>
+                      </a:pPr>
+                      <a:r>
+                        <a:rPr lang="de-DE" sz="1800" b="0" i="0" kern="1200" dirty="0">
+                          <a:solidFill>
+                            <a:schemeClr val="tx1"/>
+                          </a:solidFill>
+                          <a:effectLst/>
+                          <a:latin typeface="Times New Roman" pitchFamily="18" charset="0"/>
+                          <a:ea typeface="+mn-ea"/>
+                          <a:cs typeface="+mn-cs"/>
+                        </a:rPr>
+                        <a:t>0x10000010</a:t>
+                      </a:r>
+                      <a:endParaRPr lang="en-US" sz="1800" b="0" dirty="0">
+                        <a:latin typeface="Consolas" panose="020B0609020204030204" pitchFamily="49" charset="0"/>
+                        <a:cs typeface="Consolas" panose="020B0609020204030204" pitchFamily="49" charset="0"/>
+                      </a:endParaRPr>
+                    </a:p>
+                  </a:txBody>
+                  <a:tcPr>
+                    <a:solidFill>
+                      <a:schemeClr val="bg1"/>
+                    </a:solidFill>
+                  </a:tcPr>
+                </a:tc>
+                <a:tc>
+                  <a:txBody>
+                    <a:bodyPr/>
+                    <a:lstStyle/>
+                    <a:p>
+                      <a:pPr algn="ctr"/>
+                      <a:r>
+                        <a:rPr lang="en-US" dirty="0"/>
+                        <a:t>FF</a:t>
+                      </a:r>
+                    </a:p>
+                  </a:txBody>
+                  <a:tcPr>
+                    <a:solidFill>
+                      <a:schemeClr val="bg1"/>
+                    </a:solidFill>
+                  </a:tcPr>
+                </a:tc>
+                <a:tc>
+                  <a:txBody>
+                    <a:bodyPr/>
+                    <a:lstStyle/>
+                    <a:p>
+                      <a:pPr marL="0" algn="ctr" rtl="0" eaLnBrk="1" latinLnBrk="0" hangingPunct="1"/>
+                      <a:r>
+                        <a:rPr kumimoji="0" lang="en-US" kern="1200" dirty="0">
+                          <a:solidFill>
+                            <a:schemeClr val="tx1"/>
+                          </a:solidFill>
+                          <a:latin typeface="+mn-lt"/>
+                          <a:ea typeface="+mn-ea"/>
+                          <a:cs typeface="+mn-cs"/>
+                        </a:rPr>
+                        <a:t>EF</a:t>
+                      </a:r>
+                    </a:p>
+                  </a:txBody>
+                  <a:tcPr>
+                    <a:solidFill>
+                      <a:schemeClr val="bg1"/>
+                    </a:solidFill>
+                  </a:tcPr>
+                </a:tc>
+                <a:tc>
+                  <a:txBody>
+                    <a:bodyPr/>
+                    <a:lstStyle/>
+                    <a:p>
+                      <a:pPr marL="0" algn="ctr" rtl="0" eaLnBrk="1" latinLnBrk="0" hangingPunct="1"/>
+                      <a:r>
+                        <a:rPr kumimoji="0" lang="en-US" kern="1200" dirty="0">
+                          <a:solidFill>
+                            <a:schemeClr val="tx1"/>
+                          </a:solidFill>
+                          <a:latin typeface="+mn-lt"/>
+                          <a:ea typeface="+mn-ea"/>
+                          <a:cs typeface="+mn-cs"/>
+                        </a:rPr>
+                        <a:t>CD</a:t>
+                      </a:r>
+                    </a:p>
+                  </a:txBody>
+                  <a:tcPr>
+                    <a:solidFill>
+                      <a:schemeClr val="bg1"/>
+                    </a:solidFill>
+                  </a:tcPr>
+                </a:tc>
+                <a:tc>
+                  <a:txBody>
+                    <a:bodyPr/>
+                    <a:lstStyle/>
+                    <a:p>
+                      <a:pPr marL="0" algn="ctr" rtl="0" eaLnBrk="1" latinLnBrk="0" hangingPunct="1"/>
+                      <a:r>
+                        <a:rPr kumimoji="0" lang="en-US" kern="1200" dirty="0">
+                          <a:solidFill>
+                            <a:schemeClr val="tx1"/>
+                          </a:solidFill>
+                          <a:latin typeface="+mn-lt"/>
+                          <a:ea typeface="+mn-ea"/>
+                          <a:cs typeface="+mn-cs"/>
+                        </a:rPr>
+                        <a:t>AB</a:t>
+                      </a:r>
+                    </a:p>
+                  </a:txBody>
+                  <a:tcPr>
+                    <a:solidFill>
+                      <a:schemeClr val="bg1"/>
+                    </a:solidFill>
+                  </a:tcPr>
+                </a:tc>
+                <a:tc>
+                  <a:txBody>
+                    <a:bodyPr/>
+                    <a:lstStyle/>
+                    <a:p>
+                      <a:pPr marL="0" algn="ctr" rtl="0" eaLnBrk="1" latinLnBrk="0" hangingPunct="1"/>
+                      <a:r>
+                        <a:rPr kumimoji="0" lang="en-US" kern="1200" dirty="0">
+                          <a:solidFill>
+                            <a:schemeClr val="tx1"/>
+                          </a:solidFill>
+                          <a:latin typeface="+mn-lt"/>
+                          <a:ea typeface="+mn-ea"/>
+                          <a:cs typeface="+mn-cs"/>
+                        </a:rPr>
+                        <a:t>00</a:t>
+                      </a:r>
+                    </a:p>
+                  </a:txBody>
+                  <a:tcPr>
+                    <a:solidFill>
+                      <a:schemeClr val="bg1"/>
+                    </a:solidFill>
+                  </a:tcPr>
+                </a:tc>
+                <a:tc>
+                  <a:txBody>
+                    <a:bodyPr/>
+                    <a:lstStyle/>
+                    <a:p>
+                      <a:pPr marL="0" algn="ctr" rtl="0" eaLnBrk="1" latinLnBrk="0" hangingPunct="1"/>
+                      <a:r>
+                        <a:rPr kumimoji="0" lang="en-US" kern="1200" dirty="0">
+                          <a:solidFill>
+                            <a:schemeClr val="tx1"/>
+                          </a:solidFill>
+                          <a:latin typeface="+mn-lt"/>
+                          <a:ea typeface="+mn-ea"/>
+                          <a:cs typeface="+mn-cs"/>
+                        </a:rPr>
+                        <a:t>00</a:t>
+                      </a:r>
+                    </a:p>
+                  </a:txBody>
+                  <a:tcPr>
+                    <a:solidFill>
+                      <a:schemeClr val="bg1"/>
+                    </a:solidFill>
+                  </a:tcPr>
+                </a:tc>
+                <a:tc>
+                  <a:txBody>
+                    <a:bodyPr/>
+                    <a:lstStyle/>
+                    <a:p>
+                      <a:pPr marL="0" algn="ctr" rtl="0" eaLnBrk="1" latinLnBrk="0" hangingPunct="1"/>
+                      <a:r>
+                        <a:rPr kumimoji="0" lang="en-US" kern="1200" dirty="0">
+                          <a:solidFill>
+                            <a:schemeClr val="tx1"/>
+                          </a:solidFill>
+                          <a:latin typeface="+mn-lt"/>
+                          <a:ea typeface="+mn-ea"/>
+                          <a:cs typeface="+mn-cs"/>
+                        </a:rPr>
+                        <a:t>CD</a:t>
+                      </a:r>
+                    </a:p>
+                  </a:txBody>
+                  <a:tcPr>
+                    <a:solidFill>
+                      <a:schemeClr val="bg1"/>
+                    </a:solidFill>
+                  </a:tcPr>
+                </a:tc>
+                <a:tc>
+                  <a:txBody>
+                    <a:bodyPr/>
+                    <a:lstStyle/>
+                    <a:p>
+                      <a:pPr marL="0" algn="ctr" rtl="0" eaLnBrk="1" latinLnBrk="0" hangingPunct="1"/>
+                      <a:r>
+                        <a:rPr kumimoji="0" lang="en-US" kern="1200" dirty="0">
+                          <a:solidFill>
+                            <a:schemeClr val="tx1"/>
+                          </a:solidFill>
+                          <a:latin typeface="+mn-lt"/>
+                          <a:ea typeface="+mn-ea"/>
+                          <a:cs typeface="+mn-cs"/>
+                        </a:rPr>
+                        <a:t>AB</a:t>
+                      </a:r>
+                    </a:p>
+                  </a:txBody>
+                  <a:tcPr>
+                    <a:solidFill>
+                      <a:schemeClr val="bg1"/>
+                    </a:solidFill>
+                  </a:tcPr>
+                </a:tc>
+                <a:tc>
+                  <a:txBody>
+                    <a:bodyPr/>
+                    <a:lstStyle/>
+                    <a:p>
+                      <a:pPr marL="0" algn="ctr" rtl="0" eaLnBrk="1" latinLnBrk="0" hangingPunct="1"/>
+                      <a:r>
+                        <a:rPr kumimoji="0" lang="en-US" kern="1200" dirty="0">
+                          <a:solidFill>
+                            <a:schemeClr val="tx1"/>
+                          </a:solidFill>
+                          <a:latin typeface="+mn-lt"/>
+                          <a:ea typeface="+mn-ea"/>
+                          <a:cs typeface="+mn-cs"/>
+                        </a:rPr>
+                        <a:t>D0</a:t>
+                      </a:r>
+                    </a:p>
+                  </a:txBody>
+                  <a:tcPr>
+                    <a:solidFill>
+                      <a:schemeClr val="bg1"/>
+                    </a:solidFill>
+                  </a:tcPr>
+                </a:tc>
+                <a:tc>
+                  <a:txBody>
+                    <a:bodyPr/>
+                    <a:lstStyle/>
+                    <a:p>
+                      <a:pPr marL="0" algn="ctr" rtl="0" eaLnBrk="1" latinLnBrk="0" hangingPunct="1"/>
+                      <a:r>
+                        <a:rPr kumimoji="0" lang="en-US" kern="1200" dirty="0">
+                          <a:solidFill>
+                            <a:schemeClr val="tx1"/>
+                          </a:solidFill>
+                          <a:latin typeface="+mn-lt"/>
+                          <a:ea typeface="+mn-ea"/>
+                          <a:cs typeface="+mn-cs"/>
+                        </a:rPr>
+                        <a:t>BC</a:t>
+                      </a:r>
+                    </a:p>
+                  </a:txBody>
+                  <a:tcPr>
+                    <a:solidFill>
+                      <a:schemeClr val="bg1"/>
+                    </a:solidFill>
+                  </a:tcPr>
+                </a:tc>
+                <a:tc>
+                  <a:txBody>
+                    <a:bodyPr/>
+                    <a:lstStyle/>
+                    <a:p>
+                      <a:pPr marL="0" algn="ctr" rtl="0" eaLnBrk="1" latinLnBrk="0" hangingPunct="1"/>
+                      <a:r>
+                        <a:rPr kumimoji="0" lang="en-US" kern="1200" dirty="0">
+                          <a:solidFill>
+                            <a:schemeClr val="tx1"/>
+                          </a:solidFill>
+                          <a:latin typeface="+mn-lt"/>
+                          <a:ea typeface="+mn-ea"/>
+                          <a:cs typeface="+mn-cs"/>
+                        </a:rPr>
+                        <a:t>D8</a:t>
+                      </a:r>
+                    </a:p>
+                  </a:txBody>
+                  <a:tcPr>
+                    <a:solidFill>
+                      <a:schemeClr val="bg1"/>
+                    </a:solidFill>
+                  </a:tcPr>
+                </a:tc>
+                <a:tc>
+                  <a:txBody>
+                    <a:bodyPr/>
+                    <a:lstStyle/>
+                    <a:p>
+                      <a:pPr marL="0" algn="ctr" rtl="0" eaLnBrk="1" latinLnBrk="0" hangingPunct="1"/>
+                      <a:r>
+                        <a:rPr kumimoji="0" lang="en-US" kern="1200" dirty="0">
+                          <a:solidFill>
+                            <a:schemeClr val="tx1"/>
+                          </a:solidFill>
+                          <a:latin typeface="+mn-lt"/>
+                          <a:ea typeface="+mn-ea"/>
+                          <a:cs typeface="+mn-cs"/>
+                        </a:rPr>
+                        <a:t>A8</a:t>
+                      </a:r>
+                    </a:p>
+                  </a:txBody>
+                  <a:tcPr>
+                    <a:solidFill>
+                      <a:schemeClr val="bg1"/>
+                    </a:solidFill>
+                  </a:tcPr>
+                </a:tc>
+                <a:extLst>
+                  <a:ext uri="{0D108BD9-81ED-4DB2-BD59-A6C34878D82A}">
+                    <a16:rowId xmlns:a16="http://schemas.microsoft.com/office/drawing/2014/main" val="3396541759"/>
+                  </a:ext>
+                </a:extLst>
+              </a:tr>
+            </a:tbl>
+          </a:graphicData>
+        </a:graphic>
+      </p:graphicFrame>
+    </p:spTree>
+    <p:extLst>
+      <p:ext uri="{BB962C8B-B14F-4D97-AF65-F5344CB8AC3E}">
+        <p14:creationId xmlns:p14="http://schemas.microsoft.com/office/powerpoint/2010/main" val="3488595267"/>
       </p:ext>
     </p:extLst>
   </p:cSld>

--- a/PPTs/Ch5_ARM_Load_Store_Exercises.pptx
+++ b/PPTs/Ch5_ARM_Load_Store_Exercises.pptx
@@ -24,8 +24,8 @@
     <p:sldId id="365" r:id="rId12"/>
     <p:sldId id="801" r:id="rId13"/>
     <p:sldId id="804" r:id="rId14"/>
-    <p:sldId id="816" r:id="rId15"/>
-    <p:sldId id="818" r:id="rId16"/>
+    <p:sldId id="819" r:id="rId15"/>
+    <p:sldId id="820" r:id="rId16"/>
   </p:sldIdLst>
   <p:sldSz cx="9144000" cy="6858000" type="screen4x3"/>
   <p:notesSz cx="9601200" cy="7315200"/>
@@ -210,7 +210,7 @@
 <file path=ppt/revisionInfo.xml><?xml version="1.0" encoding="utf-8"?>
 <p1510:revInfo xmlns:a="http://schemas.openxmlformats.org/drawingml/2006/main" xmlns:r="http://schemas.openxmlformats.org/officeDocument/2006/relationships" xmlns:p1510="http://schemas.microsoft.com/office/powerpoint/2015/10/main">
   <p1510:revLst>
-    <p1510:client id="{93E05C3B-B728-42D2-90B4-B4A194916ABF}" v="5" dt="2025-10-21T23:17:32.972"/>
+    <p1510:client id="{93E05C3B-B728-42D2-90B4-B4A194916ABF}" v="6" dt="2025-10-21T23:48:56.730"/>
   </p1510:revLst>
 </p1510:revInfo>
 </file>
@@ -220,7 +220,7 @@
   <pc:docChgLst>
     <pc:chgData name="Zonghua Gu" userId="9a7e1853e1951ef5" providerId="LiveId" clId="{CF1FAA12-072C-4ED5-BA76-0FFFAEFDB88A}"/>
     <pc:docChg chg="undo custSel addSld delSld modSld sldOrd">
-      <pc:chgData name="Zonghua Gu" userId="9a7e1853e1951ef5" providerId="LiveId" clId="{CF1FAA12-072C-4ED5-BA76-0FFFAEFDB88A}" dt="2025-10-21T23:17:32.957" v="690"/>
+      <pc:chgData name="Zonghua Gu" userId="9a7e1853e1951ef5" providerId="LiveId" clId="{CF1FAA12-072C-4ED5-BA76-0FFFAEFDB88A}" dt="2025-10-21T23:48:59.480" v="692" actId="47"/>
       <pc:docMkLst>
         <pc:docMk/>
       </pc:docMkLst>
@@ -260,18 +260,32 @@
           <pc:sldMk cId="754608230" sldId="815"/>
         </pc:sldMkLst>
       </pc:sldChg>
-      <pc:sldChg chg="add">
-        <pc:chgData name="Zonghua Gu" userId="9a7e1853e1951ef5" providerId="LiveId" clId="{CF1FAA12-072C-4ED5-BA76-0FFFAEFDB88A}" dt="2025-10-21T23:17:32.957" v="690"/>
+      <pc:sldChg chg="add del">
+        <pc:chgData name="Zonghua Gu" userId="9a7e1853e1951ef5" providerId="LiveId" clId="{CF1FAA12-072C-4ED5-BA76-0FFFAEFDB88A}" dt="2025-10-21T23:48:59.480" v="692" actId="47"/>
         <pc:sldMkLst>
           <pc:docMk/>
           <pc:sldMk cId="811401925" sldId="816"/>
         </pc:sldMkLst>
       </pc:sldChg>
-      <pc:sldChg chg="add">
-        <pc:chgData name="Zonghua Gu" userId="9a7e1853e1951ef5" providerId="LiveId" clId="{CF1FAA12-072C-4ED5-BA76-0FFFAEFDB88A}" dt="2025-10-21T23:17:32.957" v="690"/>
+      <pc:sldChg chg="add del">
+        <pc:chgData name="Zonghua Gu" userId="9a7e1853e1951ef5" providerId="LiveId" clId="{CF1FAA12-072C-4ED5-BA76-0FFFAEFDB88A}" dt="2025-10-21T23:48:59.480" v="692" actId="47"/>
         <pc:sldMkLst>
           <pc:docMk/>
           <pc:sldMk cId="3488595267" sldId="818"/>
+        </pc:sldMkLst>
+      </pc:sldChg>
+      <pc:sldChg chg="add">
+        <pc:chgData name="Zonghua Gu" userId="9a7e1853e1951ef5" providerId="LiveId" clId="{CF1FAA12-072C-4ED5-BA76-0FFFAEFDB88A}" dt="2025-10-21T23:48:56.724" v="691"/>
+        <pc:sldMkLst>
+          <pc:docMk/>
+          <pc:sldMk cId="2547497624" sldId="819"/>
+        </pc:sldMkLst>
+      </pc:sldChg>
+      <pc:sldChg chg="add">
+        <pc:chgData name="Zonghua Gu" userId="9a7e1853e1951ef5" providerId="LiveId" clId="{CF1FAA12-072C-4ED5-BA76-0FFFAEFDB88A}" dt="2025-10-21T23:48:56.724" v="691"/>
+        <pc:sldMkLst>
+          <pc:docMk/>
+          <pc:sldMk cId="3176157734" sldId="820"/>
         </pc:sldMkLst>
       </pc:sldChg>
     </pc:docChg>
@@ -1727,6 +1741,13 @@
           </p:nvPr>
         </p:nvSpPr>
         <p:spPr/>
+        <p:txBody>
+          <a:bodyPr/>
+          <a:lstStyle/>
+          <a:p>
+            <a:endParaRPr lang="en-US"/>
+          </a:p>
+        </p:txBody>
       </p:sp>
       <p:sp>
         <p:nvSpPr>
@@ -10310,7 +10331,7 @@
             </a:pPr>
             <a:r>
               <a:rPr lang="en-US" sz="2000" b="0" dirty="0"/>
-              <a:t>Compute register and memory values at each step of this program, given initial register values and memory contents</a:t>
+              <a:t>Compute register and memory values at each step of this program, given initial register values and memory contents, assuming little endian memory ordering.</a:t>
             </a:r>
           </a:p>
         </p:txBody>
@@ -10392,7 +10413,7 @@
     </p:spTree>
     <p:extLst>
       <p:ext uri="{BB962C8B-B14F-4D97-AF65-F5344CB8AC3E}">
-        <p14:creationId xmlns:p14="http://schemas.microsoft.com/office/powerpoint/2010/main" val="811401925"/>
+        <p14:creationId xmlns:p14="http://schemas.microsoft.com/office/powerpoint/2010/main" val="2547497624"/>
       </p:ext>
     </p:extLst>
   </p:cSld>
@@ -10510,7 +10531,15 @@
           <a:p>
             <a:r>
               <a:rPr lang="en-US" dirty="0"/>
-              <a:t> Show all updates to registers as the assembly code shown below runs. Show the NZCV flags next to the instruction if they change. Do not update PC each time. You can assume that each instruction is 32 bits.</a:t>
+              <a:t>Show all updates to registers as the assembly code shown below runs, </a:t>
+            </a:r>
+            <a:r>
+              <a:rPr lang="en-US" sz="2800" dirty="0"/>
+              <a:t>assuming little endian memory ordering.</a:t>
+            </a:r>
+            <a:r>
+              <a:rPr lang="en-US" dirty="0"/>
+              <a:t> Show the NZCV flags next to the instruction if they change. Each instruction is 32 bits.</a:t>
             </a:r>
           </a:p>
         </p:txBody>
@@ -12526,7 +12555,7 @@
     </p:spTree>
     <p:extLst>
       <p:ext uri="{BB962C8B-B14F-4D97-AF65-F5344CB8AC3E}">
-        <p14:creationId xmlns:p14="http://schemas.microsoft.com/office/powerpoint/2010/main" val="3488595267"/>
+        <p14:creationId xmlns:p14="http://schemas.microsoft.com/office/powerpoint/2010/main" val="3176157734"/>
       </p:ext>
     </p:extLst>
   </p:cSld>

--- a/PPTs/Ch5_ARM_Load_Store_Exercises.pptx
+++ b/PPTs/Ch5_ARM_Load_Store_Exercises.pptx
@@ -5,27 +5,26 @@
     <p:sldMasterId id="2147483686" r:id="rId1"/>
   </p:sldMasterIdLst>
   <p:notesMasterIdLst>
-    <p:notesMasterId r:id="rId17"/>
+    <p:notesMasterId r:id="rId16"/>
   </p:notesMasterIdLst>
   <p:handoutMasterIdLst>
-    <p:handoutMasterId r:id="rId18"/>
+    <p:handoutMasterId r:id="rId17"/>
   </p:handoutMasterIdLst>
   <p:sldIdLst>
     <p:sldId id="385" r:id="rId2"/>
-    <p:sldId id="356" r:id="rId3"/>
-    <p:sldId id="363" r:id="rId4"/>
-    <p:sldId id="358" r:id="rId5"/>
-    <p:sldId id="417" r:id="rId6"/>
-    <p:sldId id="810" r:id="rId7"/>
-    <p:sldId id="774" r:id="rId8"/>
-    <p:sldId id="345" r:id="rId9"/>
-    <p:sldId id="369" r:id="rId10"/>
-    <p:sldId id="367" r:id="rId11"/>
-    <p:sldId id="365" r:id="rId12"/>
-    <p:sldId id="801" r:id="rId13"/>
-    <p:sldId id="804" r:id="rId14"/>
-    <p:sldId id="819" r:id="rId15"/>
-    <p:sldId id="820" r:id="rId16"/>
+    <p:sldId id="821" r:id="rId3"/>
+    <p:sldId id="822" r:id="rId4"/>
+    <p:sldId id="823" r:id="rId5"/>
+    <p:sldId id="824" r:id="rId6"/>
+    <p:sldId id="813" r:id="rId7"/>
+    <p:sldId id="825" r:id="rId8"/>
+    <p:sldId id="826" r:id="rId9"/>
+    <p:sldId id="827" r:id="rId10"/>
+    <p:sldId id="828" r:id="rId11"/>
+    <p:sldId id="829" r:id="rId12"/>
+    <p:sldId id="830" r:id="rId13"/>
+    <p:sldId id="816" r:id="rId14"/>
+    <p:sldId id="818" r:id="rId15"/>
   </p:sldIdLst>
   <p:sldSz cx="9144000" cy="6858000" type="screen4x3"/>
   <p:notesSz cx="9601200" cy="7315200"/>
@@ -210,7 +209,7 @@
 <file path=ppt/revisionInfo.xml><?xml version="1.0" encoding="utf-8"?>
 <p1510:revInfo xmlns:a="http://schemas.openxmlformats.org/drawingml/2006/main" xmlns:r="http://schemas.openxmlformats.org/officeDocument/2006/relationships" xmlns:p1510="http://schemas.microsoft.com/office/powerpoint/2015/10/main">
   <p1510:revLst>
-    <p1510:client id="{93E05C3B-B728-42D2-90B4-B4A194916ABF}" v="6" dt="2025-10-21T23:48:56.730"/>
+    <p1510:client id="{93E05C3B-B728-42D2-90B4-B4A194916ABF}" v="9" dt="2025-10-22T01:08:14.506"/>
   </p1510:revLst>
 </p1510:revInfo>
 </file>
@@ -220,26 +219,89 @@
   <pc:docChgLst>
     <pc:chgData name="Zonghua Gu" userId="9a7e1853e1951ef5" providerId="LiveId" clId="{CF1FAA12-072C-4ED5-BA76-0FFFAEFDB88A}"/>
     <pc:docChg chg="undo custSel addSld delSld modSld sldOrd">
-      <pc:chgData name="Zonghua Gu" userId="9a7e1853e1951ef5" providerId="LiveId" clId="{CF1FAA12-072C-4ED5-BA76-0FFFAEFDB88A}" dt="2025-10-21T23:48:59.480" v="692" actId="47"/>
+      <pc:chgData name="Zonghua Gu" userId="9a7e1853e1951ef5" providerId="LiveId" clId="{CF1FAA12-072C-4ED5-BA76-0FFFAEFDB88A}" dt="2025-10-22T01:08:25.509" v="698" actId="47"/>
       <pc:docMkLst>
         <pc:docMk/>
       </pc:docMkLst>
-      <pc:sldChg chg="add">
-        <pc:chgData name="Zonghua Gu" userId="9a7e1853e1951ef5" providerId="LiveId" clId="{CF1FAA12-072C-4ED5-BA76-0FFFAEFDB88A}" dt="2025-09-24T22:03:01.373" v="624"/>
+      <pc:sldChg chg="add del">
+        <pc:chgData name="Zonghua Gu" userId="9a7e1853e1951ef5" providerId="LiveId" clId="{CF1FAA12-072C-4ED5-BA76-0FFFAEFDB88A}" dt="2025-10-22T01:08:25.509" v="698" actId="47"/>
+        <pc:sldMkLst>
+          <pc:docMk/>
+          <pc:sldMk cId="936686548" sldId="345"/>
+        </pc:sldMkLst>
+      </pc:sldChg>
+      <pc:sldChg chg="add del">
+        <pc:chgData name="Zonghua Gu" userId="9a7e1853e1951ef5" providerId="LiveId" clId="{CF1FAA12-072C-4ED5-BA76-0FFFAEFDB88A}" dt="2025-10-22T01:08:25.509" v="698" actId="47"/>
+        <pc:sldMkLst>
+          <pc:docMk/>
+          <pc:sldMk cId="3359075723" sldId="356"/>
+        </pc:sldMkLst>
+      </pc:sldChg>
+      <pc:sldChg chg="add del">
+        <pc:chgData name="Zonghua Gu" userId="9a7e1853e1951ef5" providerId="LiveId" clId="{CF1FAA12-072C-4ED5-BA76-0FFFAEFDB88A}" dt="2025-10-22T01:08:25.509" v="698" actId="47"/>
+        <pc:sldMkLst>
+          <pc:docMk/>
+          <pc:sldMk cId="1502810167" sldId="358"/>
+        </pc:sldMkLst>
+      </pc:sldChg>
+      <pc:sldChg chg="add del">
+        <pc:chgData name="Zonghua Gu" userId="9a7e1853e1951ef5" providerId="LiveId" clId="{CF1FAA12-072C-4ED5-BA76-0FFFAEFDB88A}" dt="2025-10-22T01:08:25.509" v="698" actId="47"/>
+        <pc:sldMkLst>
+          <pc:docMk/>
+          <pc:sldMk cId="3486040908" sldId="363"/>
+        </pc:sldMkLst>
+      </pc:sldChg>
+      <pc:sldChg chg="add del">
+        <pc:chgData name="Zonghua Gu" userId="9a7e1853e1951ef5" providerId="LiveId" clId="{CF1FAA12-072C-4ED5-BA76-0FFFAEFDB88A}" dt="2025-10-22T01:08:25.509" v="698" actId="47"/>
+        <pc:sldMkLst>
+          <pc:docMk/>
+          <pc:sldMk cId="802972020" sldId="365"/>
+        </pc:sldMkLst>
+      </pc:sldChg>
+      <pc:sldChg chg="add del">
+        <pc:chgData name="Zonghua Gu" userId="9a7e1853e1951ef5" providerId="LiveId" clId="{CF1FAA12-072C-4ED5-BA76-0FFFAEFDB88A}" dt="2025-10-22T01:08:25.509" v="698" actId="47"/>
+        <pc:sldMkLst>
+          <pc:docMk/>
+          <pc:sldMk cId="1910717593" sldId="367"/>
+        </pc:sldMkLst>
+      </pc:sldChg>
+      <pc:sldChg chg="add del">
+        <pc:chgData name="Zonghua Gu" userId="9a7e1853e1951ef5" providerId="LiveId" clId="{CF1FAA12-072C-4ED5-BA76-0FFFAEFDB88A}" dt="2025-10-22T01:08:25.509" v="698" actId="47"/>
+        <pc:sldMkLst>
+          <pc:docMk/>
+          <pc:sldMk cId="1545068738" sldId="369"/>
+        </pc:sldMkLst>
+      </pc:sldChg>
+      <pc:sldChg chg="add del">
+        <pc:chgData name="Zonghua Gu" userId="9a7e1853e1951ef5" providerId="LiveId" clId="{CF1FAA12-072C-4ED5-BA76-0FFFAEFDB88A}" dt="2025-10-22T01:08:25.509" v="698" actId="47"/>
+        <pc:sldMkLst>
+          <pc:docMk/>
+          <pc:sldMk cId="0" sldId="417"/>
+        </pc:sldMkLst>
+      </pc:sldChg>
+      <pc:sldChg chg="add del">
+        <pc:chgData name="Zonghua Gu" userId="9a7e1853e1951ef5" providerId="LiveId" clId="{CF1FAA12-072C-4ED5-BA76-0FFFAEFDB88A}" dt="2025-10-22T01:08:25.509" v="698" actId="47"/>
+        <pc:sldMkLst>
+          <pc:docMk/>
+          <pc:sldMk cId="1864663475" sldId="774"/>
+        </pc:sldMkLst>
+      </pc:sldChg>
+      <pc:sldChg chg="add del">
+        <pc:chgData name="Zonghua Gu" userId="9a7e1853e1951ef5" providerId="LiveId" clId="{CF1FAA12-072C-4ED5-BA76-0FFFAEFDB88A}" dt="2025-10-22T01:08:25.509" v="698" actId="47"/>
         <pc:sldMkLst>
           <pc:docMk/>
           <pc:sldMk cId="3968162788" sldId="801"/>
         </pc:sldMkLst>
       </pc:sldChg>
-      <pc:sldChg chg="add">
-        <pc:chgData name="Zonghua Gu" userId="9a7e1853e1951ef5" providerId="LiveId" clId="{CF1FAA12-072C-4ED5-BA76-0FFFAEFDB88A}" dt="2025-09-25T21:59:20.329" v="625"/>
+      <pc:sldChg chg="add del">
+        <pc:chgData name="Zonghua Gu" userId="9a7e1853e1951ef5" providerId="LiveId" clId="{CF1FAA12-072C-4ED5-BA76-0FFFAEFDB88A}" dt="2025-10-22T01:08:25.509" v="698" actId="47"/>
         <pc:sldMkLst>
           <pc:docMk/>
           <pc:sldMk cId="2882502133" sldId="804"/>
         </pc:sldMkLst>
       </pc:sldChg>
-      <pc:sldChg chg="modSp add mod">
-        <pc:chgData name="Zonghua Gu" userId="9a7e1853e1951ef5" providerId="LiveId" clId="{CF1FAA12-072C-4ED5-BA76-0FFFAEFDB88A}" dt="2025-10-08T02:00:59.295" v="631" actId="14100"/>
+      <pc:sldChg chg="modSp add del mod">
+        <pc:chgData name="Zonghua Gu" userId="9a7e1853e1951ef5" providerId="LiveId" clId="{CF1FAA12-072C-4ED5-BA76-0FFFAEFDB88A}" dt="2025-10-22T01:08:25.509" v="698" actId="47"/>
         <pc:sldMkLst>
           <pc:docMk/>
           <pc:sldMk cId="2952063245" sldId="810"/>
@@ -253,6 +315,13 @@
           </ac:spMkLst>
         </pc:spChg>
       </pc:sldChg>
+      <pc:sldChg chg="add del">
+        <pc:chgData name="Zonghua Gu" userId="9a7e1853e1951ef5" providerId="LiveId" clId="{CF1FAA12-072C-4ED5-BA76-0FFFAEFDB88A}" dt="2025-10-22T01:08:14.485" v="697"/>
+        <pc:sldMkLst>
+          <pc:docMk/>
+          <pc:sldMk cId="1716263769" sldId="813"/>
+        </pc:sldMkLst>
+      </pc:sldChg>
       <pc:sldChg chg="addSp delSp modSp add del mod">
         <pc:chgData name="Zonghua Gu" userId="9a7e1853e1951ef5" providerId="LiveId" clId="{CF1FAA12-072C-4ED5-BA76-0FFFAEFDB88A}" dt="2025-10-21T23:17:31.496" v="689" actId="47"/>
         <pc:sldMkLst>
@@ -261,31 +330,101 @@
         </pc:sldMkLst>
       </pc:sldChg>
       <pc:sldChg chg="add del">
-        <pc:chgData name="Zonghua Gu" userId="9a7e1853e1951ef5" providerId="LiveId" clId="{CF1FAA12-072C-4ED5-BA76-0FFFAEFDB88A}" dt="2025-10-21T23:48:59.480" v="692" actId="47"/>
+        <pc:chgData name="Zonghua Gu" userId="9a7e1853e1951ef5" providerId="LiveId" clId="{CF1FAA12-072C-4ED5-BA76-0FFFAEFDB88A}" dt="2025-10-22T01:08:14.485" v="697"/>
         <pc:sldMkLst>
           <pc:docMk/>
           <pc:sldMk cId="811401925" sldId="816"/>
         </pc:sldMkLst>
       </pc:sldChg>
       <pc:sldChg chg="add del">
-        <pc:chgData name="Zonghua Gu" userId="9a7e1853e1951ef5" providerId="LiveId" clId="{CF1FAA12-072C-4ED5-BA76-0FFFAEFDB88A}" dt="2025-10-21T23:48:59.480" v="692" actId="47"/>
+        <pc:chgData name="Zonghua Gu" userId="9a7e1853e1951ef5" providerId="LiveId" clId="{CF1FAA12-072C-4ED5-BA76-0FFFAEFDB88A}" dt="2025-10-22T01:08:14.485" v="697"/>
         <pc:sldMkLst>
           <pc:docMk/>
           <pc:sldMk cId="3488595267" sldId="818"/>
         </pc:sldMkLst>
       </pc:sldChg>
-      <pc:sldChg chg="add">
-        <pc:chgData name="Zonghua Gu" userId="9a7e1853e1951ef5" providerId="LiveId" clId="{CF1FAA12-072C-4ED5-BA76-0FFFAEFDB88A}" dt="2025-10-21T23:48:56.724" v="691"/>
+      <pc:sldChg chg="add del">
+        <pc:chgData name="Zonghua Gu" userId="9a7e1853e1951ef5" providerId="LiveId" clId="{CF1FAA12-072C-4ED5-BA76-0FFFAEFDB88A}" dt="2025-10-22T01:08:25.509" v="698" actId="47"/>
         <pc:sldMkLst>
           <pc:docMk/>
           <pc:sldMk cId="2547497624" sldId="819"/>
         </pc:sldMkLst>
       </pc:sldChg>
-      <pc:sldChg chg="add">
-        <pc:chgData name="Zonghua Gu" userId="9a7e1853e1951ef5" providerId="LiveId" clId="{CF1FAA12-072C-4ED5-BA76-0FFFAEFDB88A}" dt="2025-10-21T23:48:56.724" v="691"/>
+      <pc:sldChg chg="add del">
+        <pc:chgData name="Zonghua Gu" userId="9a7e1853e1951ef5" providerId="LiveId" clId="{CF1FAA12-072C-4ED5-BA76-0FFFAEFDB88A}" dt="2025-10-22T01:08:25.509" v="698" actId="47"/>
         <pc:sldMkLst>
           <pc:docMk/>
           <pc:sldMk cId="3176157734" sldId="820"/>
+        </pc:sldMkLst>
+      </pc:sldChg>
+      <pc:sldChg chg="add">
+        <pc:chgData name="Zonghua Gu" userId="9a7e1853e1951ef5" providerId="LiveId" clId="{CF1FAA12-072C-4ED5-BA76-0FFFAEFDB88A}" dt="2025-10-22T01:08:14.485" v="697"/>
+        <pc:sldMkLst>
+          <pc:docMk/>
+          <pc:sldMk cId="3582727275" sldId="821"/>
+        </pc:sldMkLst>
+      </pc:sldChg>
+      <pc:sldChg chg="add">
+        <pc:chgData name="Zonghua Gu" userId="9a7e1853e1951ef5" providerId="LiveId" clId="{CF1FAA12-072C-4ED5-BA76-0FFFAEFDB88A}" dt="2025-10-22T01:08:14.485" v="697"/>
+        <pc:sldMkLst>
+          <pc:docMk/>
+          <pc:sldMk cId="4063912812" sldId="822"/>
+        </pc:sldMkLst>
+      </pc:sldChg>
+      <pc:sldChg chg="add">
+        <pc:chgData name="Zonghua Gu" userId="9a7e1853e1951ef5" providerId="LiveId" clId="{CF1FAA12-072C-4ED5-BA76-0FFFAEFDB88A}" dt="2025-10-22T01:08:14.485" v="697"/>
+        <pc:sldMkLst>
+          <pc:docMk/>
+          <pc:sldMk cId="3885410331" sldId="823"/>
+        </pc:sldMkLst>
+      </pc:sldChg>
+      <pc:sldChg chg="add">
+        <pc:chgData name="Zonghua Gu" userId="9a7e1853e1951ef5" providerId="LiveId" clId="{CF1FAA12-072C-4ED5-BA76-0FFFAEFDB88A}" dt="2025-10-22T01:08:14.485" v="697"/>
+        <pc:sldMkLst>
+          <pc:docMk/>
+          <pc:sldMk cId="0" sldId="824"/>
+        </pc:sldMkLst>
+      </pc:sldChg>
+      <pc:sldChg chg="add">
+        <pc:chgData name="Zonghua Gu" userId="9a7e1853e1951ef5" providerId="LiveId" clId="{CF1FAA12-072C-4ED5-BA76-0FFFAEFDB88A}" dt="2025-10-22T01:08:14.485" v="697"/>
+        <pc:sldMkLst>
+          <pc:docMk/>
+          <pc:sldMk cId="1966266804" sldId="825"/>
+        </pc:sldMkLst>
+      </pc:sldChg>
+      <pc:sldChg chg="add">
+        <pc:chgData name="Zonghua Gu" userId="9a7e1853e1951ef5" providerId="LiveId" clId="{CF1FAA12-072C-4ED5-BA76-0FFFAEFDB88A}" dt="2025-10-22T01:08:14.485" v="697"/>
+        <pc:sldMkLst>
+          <pc:docMk/>
+          <pc:sldMk cId="3196280469" sldId="826"/>
+        </pc:sldMkLst>
+      </pc:sldChg>
+      <pc:sldChg chg="add">
+        <pc:chgData name="Zonghua Gu" userId="9a7e1853e1951ef5" providerId="LiveId" clId="{CF1FAA12-072C-4ED5-BA76-0FFFAEFDB88A}" dt="2025-10-22T01:08:14.485" v="697"/>
+        <pc:sldMkLst>
+          <pc:docMk/>
+          <pc:sldMk cId="200176859" sldId="827"/>
+        </pc:sldMkLst>
+      </pc:sldChg>
+      <pc:sldChg chg="add">
+        <pc:chgData name="Zonghua Gu" userId="9a7e1853e1951ef5" providerId="LiveId" clId="{CF1FAA12-072C-4ED5-BA76-0FFFAEFDB88A}" dt="2025-10-22T01:08:14.485" v="697"/>
+        <pc:sldMkLst>
+          <pc:docMk/>
+          <pc:sldMk cId="3122295692" sldId="828"/>
+        </pc:sldMkLst>
+      </pc:sldChg>
+      <pc:sldChg chg="add">
+        <pc:chgData name="Zonghua Gu" userId="9a7e1853e1951ef5" providerId="LiveId" clId="{CF1FAA12-072C-4ED5-BA76-0FFFAEFDB88A}" dt="2025-10-22T01:08:14.485" v="697"/>
+        <pc:sldMkLst>
+          <pc:docMk/>
+          <pc:sldMk cId="1544697831" sldId="829"/>
+        </pc:sldMkLst>
+      </pc:sldChg>
+      <pc:sldChg chg="add">
+        <pc:chgData name="Zonghua Gu" userId="9a7e1853e1951ef5" providerId="LiveId" clId="{CF1FAA12-072C-4ED5-BA76-0FFFAEFDB88A}" dt="2025-10-22T01:08:14.485" v="697"/>
+        <pc:sldMkLst>
+          <pc:docMk/>
+          <pc:sldMk cId="264205630" sldId="830"/>
         </pc:sldMkLst>
       </pc:sldChg>
     </pc:docChg>
@@ -909,6 +1048,13 @@
           </p:nvPr>
         </p:nvSpPr>
         <p:spPr/>
+        <p:txBody>
+          <a:bodyPr/>
+          <a:lstStyle/>
+          <a:p>
+            <a:endParaRPr lang="en-US"/>
+          </a:p>
+        </p:txBody>
       </p:sp>
       <p:sp>
         <p:nvSpPr>
@@ -971,11 +1117,18 @@
         </p:nvSpPr>
         <p:spPr>
           <a:xfrm>
-            <a:off x="3063875" y="684213"/>
-            <a:ext cx="3487738" cy="2616200"/>
+            <a:off x="2984500" y="655638"/>
+            <a:ext cx="3341688" cy="2506662"/>
           </a:xfrm>
           <a:ln/>
         </p:spPr>
+        <p:txBody>
+          <a:bodyPr/>
+          <a:lstStyle/>
+          <a:p>
+            <a:endParaRPr lang="en-US"/>
+          </a:p>
+        </p:txBody>
       </p:sp>
       <p:sp>
         <p:nvSpPr>
@@ -989,8 +1142,8 @@
         </p:nvSpPr>
         <p:spPr>
           <a:xfrm>
-            <a:off x="1277580" y="3488352"/>
-            <a:ext cx="7046042" cy="3303199"/>
+            <a:off x="1237022" y="3343004"/>
+            <a:ext cx="6822358" cy="3165566"/>
           </a:xfrm>
           <a:solidFill>
             <a:srgbClr val="FFFFFF"/>
@@ -1002,7 +1155,7 @@
           </a:ln>
         </p:spPr>
         <p:txBody>
-          <a:bodyPr lIns="91303" tIns="45651" rIns="91303" bIns="45651"/>
+          <a:bodyPr lIns="88007" tIns="44003" rIns="88007" bIns="44003"/>
           <a:lstStyle/>
           <a:p>
             <a:r>
@@ -1063,11 +1216,18 @@
         </p:nvSpPr>
         <p:spPr>
           <a:xfrm>
-            <a:off x="2984500" y="655638"/>
-            <a:ext cx="3341688" cy="2506662"/>
+            <a:off x="2905125" y="628650"/>
+            <a:ext cx="3203575" cy="2401888"/>
           </a:xfrm>
           <a:ln/>
         </p:spPr>
+        <p:txBody>
+          <a:bodyPr/>
+          <a:lstStyle/>
+          <a:p>
+            <a:endParaRPr lang="en-US"/>
+          </a:p>
+        </p:txBody>
       </p:sp>
       <p:sp>
         <p:nvSpPr>
@@ -1081,8 +1241,8 @@
         </p:nvSpPr>
         <p:spPr>
           <a:xfrm>
-            <a:off x="1237021" y="3343003"/>
-            <a:ext cx="6822358" cy="3165566"/>
+            <a:off x="1197751" y="3203711"/>
+            <a:ext cx="6605775" cy="3033667"/>
           </a:xfrm>
           <a:solidFill>
             <a:srgbClr val="FFFFFF"/>
@@ -1094,7 +1254,7 @@
           </a:ln>
         </p:spPr>
         <p:txBody>
-          <a:bodyPr lIns="88007" tIns="44003" rIns="88007" bIns="44003"/>
+          <a:bodyPr lIns="84830" tIns="42414" rIns="84830" bIns="42414"/>
           <a:lstStyle/>
           <a:p>
             <a:r>
@@ -1127,91 +1287,6 @@
 </file>
 
 <file path=ppt/notesSlides/notesSlide5.xml><?xml version="1.0" encoding="utf-8"?>
-<p:notes xmlns:a="http://schemas.openxmlformats.org/drawingml/2006/main" xmlns:r="http://schemas.openxmlformats.org/officeDocument/2006/relationships" xmlns:p="http://schemas.openxmlformats.org/presentationml/2006/main">
-  <p:cSld>
-    <p:spTree>
-      <p:nvGrpSpPr>
-        <p:cNvPr id="1" name=""/>
-        <p:cNvGrpSpPr/>
-        <p:nvPr/>
-      </p:nvGrpSpPr>
-      <p:grpSpPr>
-        <a:xfrm>
-          <a:off x="0" y="0"/>
-          <a:ext cx="0" cy="0"/>
-          <a:chOff x="0" y="0"/>
-          <a:chExt cx="0" cy="0"/>
-        </a:xfrm>
-      </p:grpSpPr>
-      <p:sp>
-        <p:nvSpPr>
-          <p:cNvPr id="2" name="Slide Image Placeholder 1"/>
-          <p:cNvSpPr>
-            <a:spLocks noGrp="1" noRot="1" noChangeAspect="1"/>
-          </p:cNvSpPr>
-          <p:nvPr>
-            <p:ph type="sldImg"/>
-          </p:nvPr>
-        </p:nvSpPr>
-        <p:spPr/>
-      </p:sp>
-      <p:sp>
-        <p:nvSpPr>
-          <p:cNvPr id="3" name="Notes Placeholder 2"/>
-          <p:cNvSpPr>
-            <a:spLocks noGrp="1"/>
-          </p:cNvSpPr>
-          <p:nvPr>
-            <p:ph type="body" idx="1"/>
-          </p:nvPr>
-        </p:nvSpPr>
-        <p:spPr/>
-        <p:txBody>
-          <a:bodyPr/>
-          <a:lstStyle/>
-          <a:p>
-            <a:endParaRPr lang="en-US" dirty="0"/>
-          </a:p>
-        </p:txBody>
-      </p:sp>
-      <p:sp>
-        <p:nvSpPr>
-          <p:cNvPr id="4" name="Slide Number Placeholder 3"/>
-          <p:cNvSpPr>
-            <a:spLocks noGrp="1"/>
-          </p:cNvSpPr>
-          <p:nvPr>
-            <p:ph type="sldNum" sz="quarter" idx="10"/>
-          </p:nvPr>
-        </p:nvSpPr>
-        <p:spPr/>
-        <p:txBody>
-          <a:bodyPr/>
-          <a:lstStyle/>
-          <a:p>
-            <a:fld id="{EF97FDFF-7B9F-7D4D-BFC0-AAD1F3D3D3CB}" type="slidenum">
-              <a:rPr lang="en-US" smtClean="0"/>
-              <a:pPr/>
-              <a:t>7</a:t>
-            </a:fld>
-            <a:endParaRPr lang="en-US" dirty="0"/>
-          </a:p>
-        </p:txBody>
-      </p:sp>
-    </p:spTree>
-    <p:extLst>
-      <p:ext uri="{BB962C8B-B14F-4D97-AF65-F5344CB8AC3E}">
-        <p14:creationId xmlns:p14="http://schemas.microsoft.com/office/powerpoint/2010/main" val="906969298"/>
-      </p:ext>
-    </p:extLst>
-  </p:cSld>
-  <p:clrMapOvr>
-    <a:masterClrMapping/>
-  </p:clrMapOvr>
-</p:notes>
-</file>
-
-<file path=ppt/notesSlides/notesSlide6.xml><?xml version="1.0" encoding="utf-8"?>
 <p:notes xmlns:a="http://schemas.openxmlformats.org/drawingml/2006/main" xmlns:r="http://schemas.openxmlformats.org/officeDocument/2006/relationships" xmlns:p="http://schemas.openxmlformats.org/presentationml/2006/main">
   <p:cSld>
     <p:spTree>
@@ -1251,6 +1326,13 @@
           </p:nvPr>
         </p:nvSpPr>
         <p:spPr/>
+        <p:txBody>
+          <a:bodyPr/>
+          <a:lstStyle/>
+          <a:p>
+            <a:endParaRPr lang="en-US"/>
+          </a:p>
+        </p:txBody>
       </p:sp>
       <p:sp>
         <p:nvSpPr>
@@ -1523,7 +1605,7 @@
 </p:notes>
 </file>
 
-<file path=ppt/notesSlides/notesSlide7.xml><?xml version="1.0" encoding="utf-8"?>
+<file path=ppt/notesSlides/notesSlide6.xml><?xml version="1.0" encoding="utf-8"?>
 <p:notes xmlns:a="http://schemas.openxmlformats.org/drawingml/2006/main" xmlns:r="http://schemas.openxmlformats.org/officeDocument/2006/relationships" xmlns:p="http://schemas.openxmlformats.org/presentationml/2006/main">
   <p:cSld>
     <p:spTree>
@@ -1563,6 +1645,13 @@
           </p:nvPr>
         </p:nvSpPr>
         <p:spPr/>
+        <p:txBody>
+          <a:bodyPr/>
+          <a:lstStyle/>
+          <a:p>
+            <a:endParaRPr lang="en-US"/>
+          </a:p>
+        </p:txBody>
       </p:sp>
       <p:sp>
         <p:nvSpPr>
@@ -1695,8 +1784,13 @@
           <a:p>
             <a:r>
               <a:rPr lang="en-US" dirty="0"/>
-              <a:t>I was wrong earlier - in little-endian, the halfword at offset +2 consists of bytes 0x45 (at address 10) and 0x23 (at address 11), which reconstructs to 0x2345, not 0x4523.</a:t>
-            </a:r>
+              <a:t>I was wrong earlier - in little-endian, the halfword at offset +2 consists of bytes 0x45 (at address 10) and 0x23 (at address 11), which reconstructs to 0x2345, not </a:t>
+            </a:r>
+            <a:r>
+              <a:rPr lang="en-US"/>
+              <a:t>0x4523.</a:t>
+            </a:r>
+            <a:endParaRPr lang="en-US" dirty="0"/>
           </a:p>
         </p:txBody>
       </p:sp>
@@ -1713,7 +1807,7 @@
 </p:notes>
 </file>
 
-<file path=ppt/notesSlides/notesSlide8.xml><?xml version="1.0" encoding="utf-8"?>
+<file path=ppt/notesSlides/notesSlide7.xml><?xml version="1.0" encoding="utf-8"?>
 <p:notes xmlns:a="http://schemas.openxmlformats.org/drawingml/2006/main" xmlns:r="http://schemas.openxmlformats.org/officeDocument/2006/relationships" xmlns:p="http://schemas.openxmlformats.org/presentationml/2006/main">
   <p:cSld>
     <p:spTree>
@@ -6028,6 +6122,28 @@
       </p:grpSpPr>
       <p:sp>
         <p:nvSpPr>
+          <p:cNvPr id="2" name="Title 1"/>
+          <p:cNvSpPr>
+            <a:spLocks noGrp="1"/>
+          </p:cNvSpPr>
+          <p:nvPr>
+            <p:ph type="title"/>
+          </p:nvPr>
+        </p:nvSpPr>
+        <p:spPr/>
+        <p:txBody>
+          <a:bodyPr/>
+          <a:lstStyle/>
+          <a:p>
+            <a:r>
+              <a:rPr lang="en-US" dirty="0"/>
+              <a:t>Arrays</a:t>
+            </a:r>
+          </a:p>
+        </p:txBody>
+      </p:sp>
+      <p:sp>
+        <p:nvSpPr>
           <p:cNvPr id="3" name="Slide Number Placeholder 2"/>
           <p:cNvSpPr>
             <a:spLocks noGrp="1"/>
@@ -6060,8 +6176,8 @@
         </p:nvSpPr>
         <p:spPr>
           <a:xfrm>
-            <a:off x="267393" y="1447800"/>
-            <a:ext cx="8182841" cy="3581400"/>
+            <a:off x="271346" y="1299117"/>
+            <a:ext cx="8182841" cy="3339290"/>
           </a:xfrm>
           <a:prstGeom prst="rect">
             <a:avLst/>
@@ -6214,53 +6330,82 @@
                   <a:prstClr val="black"/>
                 </a:solidFill>
               </a:rPr>
-              <a:t>Q:  Assume a byte-addressable memory with a data bus that is 32 bits (4 bytes) wide. </a:t>
+              <a:t>Q:  If the first element of a one-dimensional array x[] is stored at memory address 0</a:t>
+            </a:r>
+            <a:r>
+              <a:rPr lang="en-US" altLang="zh-CN" sz="2400" b="0" dirty="0">
+                <a:solidFill>
+                  <a:prstClr val="black"/>
+                </a:solidFill>
+              </a:rPr>
+              <a:t>x</a:t>
+            </a:r>
+            <a:r>
+              <a:rPr lang="en-US" sz="2400" b="0" dirty="0">
+                <a:solidFill>
+                  <a:prstClr val="black"/>
+                </a:solidFill>
+              </a:rPr>
+              <a:t>12345678, what is address of the second element if the array x[] contains</a:t>
             </a:r>
           </a:p>
           <a:p>
             <a:pPr marL="657225" lvl="1" indent="-257175" defTabSz="342900"/>
             <a:r>
-              <a:rPr lang="en-US" altLang="zh-CN" sz="2000" b="0" dirty="0">
+              <a:rPr lang="en-US" sz="1800" b="0" dirty="0">
                 <a:solidFill>
                   <a:prstClr val="black"/>
                 </a:solidFill>
               </a:rPr>
-              <a:t>It takes ____ memory cycle(s) to read a Byte from memory</a:t>
+              <a:t>(a) chars </a:t>
             </a:r>
           </a:p>
           <a:p>
             <a:pPr marL="657225" lvl="1" indent="-257175" defTabSz="342900"/>
             <a:r>
-              <a:rPr lang="en-US" altLang="zh-CN" sz="2000" b="0" dirty="0">
+              <a:rPr lang="en-US" sz="1800" b="0" dirty="0">
                 <a:solidFill>
                   <a:prstClr val="black"/>
                 </a:solidFill>
               </a:rPr>
-              <a:t>It takes ____ memory cycle(s) to read a half-word from memory</a:t>
+              <a:t>(b) shorts</a:t>
             </a:r>
           </a:p>
           <a:p>
             <a:pPr marL="657225" lvl="1" indent="-257175" defTabSz="342900"/>
             <a:r>
-              <a:rPr lang="en-US" altLang="zh-CN" sz="2000" b="0" dirty="0">
+              <a:rPr lang="en-US" altLang="zh-CN" sz="1800" b="0" dirty="0">
                 <a:solidFill>
                   <a:prstClr val="black"/>
                 </a:solidFill>
               </a:rPr>
-              <a:t>It takes ____ memory cycle(s) to read a word from memory</a:t>
-            </a:r>
+              <a:t>(c) </a:t>
+            </a:r>
+            <a:r>
+              <a:rPr lang="en-US" altLang="zh-CN" sz="1800" b="0" dirty="0" err="1">
+                <a:solidFill>
+                  <a:prstClr val="black"/>
+                </a:solidFill>
+              </a:rPr>
+              <a:t>ints</a:t>
+            </a:r>
+            <a:endParaRPr lang="en-US" sz="1800" b="0" dirty="0">
+              <a:solidFill>
+                <a:prstClr val="black"/>
+              </a:solidFill>
+            </a:endParaRPr>
           </a:p>
           <a:p>
             <a:pPr marL="657225" lvl="1" indent="-257175" defTabSz="342900"/>
             <a:r>
-              <a:rPr lang="en-US" altLang="zh-CN" sz="2000" b="0" dirty="0">
+              <a:rPr lang="en-US" sz="1800" b="0" dirty="0">
                 <a:solidFill>
                   <a:prstClr val="black"/>
                 </a:solidFill>
               </a:rPr>
-              <a:t>It takes ____ memory cycle(s) to read a double word from memory</a:t>
-            </a:r>
-            <a:endParaRPr lang="en-US" sz="2400" b="0" dirty="0">
+              <a:t>(d) longs</a:t>
+            </a:r>
+            <a:endParaRPr lang="en-US" sz="1800" b="0" dirty="0">
               <a:solidFill>
                 <a:prstClr val="black"/>
               </a:solidFill>
@@ -6269,67 +6414,10 @@
           </a:p>
         </p:txBody>
       </p:sp>
-      <p:pic>
-        <p:nvPicPr>
-          <p:cNvPr id="5" name="Picture 4"/>
-          <p:cNvPicPr>
-            <a:picLocks noChangeAspect="1"/>
-          </p:cNvPicPr>
-          <p:nvPr/>
-        </p:nvPicPr>
-        <p:blipFill>
-          <a:blip r:embed="rId2"/>
-          <a:stretch>
-            <a:fillRect/>
-          </a:stretch>
-        </p:blipFill>
-        <p:spPr>
-          <a:xfrm>
-            <a:off x="5029200" y="-6804"/>
-            <a:ext cx="4067187" cy="1560642"/>
-          </a:xfrm>
-          <a:prstGeom prst="rect">
-            <a:avLst/>
-          </a:prstGeom>
-        </p:spPr>
-      </p:pic>
-      <p:sp>
-        <p:nvSpPr>
-          <p:cNvPr id="9" name="Title 1">
-            <a:extLst>
-              <a:ext uri="{FF2B5EF4-FFF2-40B4-BE49-F238E27FC236}">
-                <a16:creationId xmlns:a16="http://schemas.microsoft.com/office/drawing/2014/main" id="{78DA596E-85CA-C0C6-85A8-74A98C3DFFDB}"/>
-              </a:ext>
-            </a:extLst>
-          </p:cNvPr>
-          <p:cNvSpPr>
-            <a:spLocks noGrp="1"/>
-          </p:cNvSpPr>
-          <p:nvPr>
-            <p:ph type="title"/>
-          </p:nvPr>
-        </p:nvSpPr>
-        <p:spPr>
-          <a:xfrm>
-            <a:off x="0" y="22225"/>
-            <a:ext cx="8229600" cy="1143000"/>
-          </a:xfrm>
-        </p:spPr>
-        <p:txBody>
-          <a:bodyPr/>
-          <a:lstStyle/>
-          <a:p>
-            <a:r>
-              <a:rPr lang="en-US" dirty="0"/>
-              <a:t>Answer: Memory Cycles</a:t>
-            </a:r>
-          </a:p>
-        </p:txBody>
-      </p:sp>
     </p:spTree>
     <p:extLst>
       <p:ext uri="{BB962C8B-B14F-4D97-AF65-F5344CB8AC3E}">
-        <p14:creationId xmlns:p14="http://schemas.microsoft.com/office/powerpoint/2010/main" val="1910717593"/>
+        <p14:creationId xmlns:p14="http://schemas.microsoft.com/office/powerpoint/2010/main" val="3122295692"/>
       </p:ext>
     </p:extLst>
   </p:cSld>
@@ -6553,539 +6641,6 @@
   <p:cSld>
     <p:spTree>
       <p:nvGrpSpPr>
-        <p:cNvPr id="1" name=""/>
-        <p:cNvGrpSpPr/>
-        <p:nvPr/>
-      </p:nvGrpSpPr>
-      <p:grpSpPr>
-        <a:xfrm>
-          <a:off x="0" y="0"/>
-          <a:ext cx="0" cy="0"/>
-          <a:chOff x="0" y="0"/>
-          <a:chExt cx="0" cy="0"/>
-        </a:xfrm>
-      </p:grpSpPr>
-      <p:sp>
-        <p:nvSpPr>
-          <p:cNvPr id="2" name="Title 1"/>
-          <p:cNvSpPr>
-            <a:spLocks noGrp="1"/>
-          </p:cNvSpPr>
-          <p:nvPr>
-            <p:ph type="title"/>
-          </p:nvPr>
-        </p:nvSpPr>
-        <p:spPr/>
-        <p:txBody>
-          <a:bodyPr/>
-          <a:lstStyle/>
-          <a:p>
-            <a:r>
-              <a:rPr lang="en-US" dirty="0"/>
-              <a:t>Question: Arrays</a:t>
-            </a:r>
-          </a:p>
-        </p:txBody>
-      </p:sp>
-      <p:sp>
-        <p:nvSpPr>
-          <p:cNvPr id="3" name="Slide Number Placeholder 2"/>
-          <p:cNvSpPr>
-            <a:spLocks noGrp="1"/>
-          </p:cNvSpPr>
-          <p:nvPr>
-            <p:ph type="sldNum" sz="quarter" idx="12"/>
-          </p:nvPr>
-        </p:nvSpPr>
-        <p:spPr/>
-        <p:txBody>
-          <a:bodyPr/>
-          <a:lstStyle/>
-          <a:p>
-            <a:fld id="{3CC63E4C-4642-794D-A2FD-70F6B81535F5}" type="slidenum">
-              <a:rPr lang="en-US" smtClean="0"/>
-              <a:pPr/>
-              <a:t>11</a:t>
-            </a:fld>
-            <a:endParaRPr lang="en-US" dirty="0"/>
-          </a:p>
-        </p:txBody>
-      </p:sp>
-      <p:sp>
-        <p:nvSpPr>
-          <p:cNvPr id="4" name="Rectangle 3"/>
-          <p:cNvSpPr txBox="1">
-            <a:spLocks noChangeArrowheads="1"/>
-          </p:cNvSpPr>
-          <p:nvPr/>
-        </p:nvSpPr>
-        <p:spPr>
-          <a:xfrm>
-            <a:off x="271346" y="1299117"/>
-            <a:ext cx="8182841" cy="3339290"/>
-          </a:xfrm>
-          <a:prstGeom prst="rect">
-            <a:avLst/>
-          </a:prstGeom>
-        </p:spPr>
-        <p:txBody>
-          <a:bodyPr/>
-          <a:lstStyle>
-            <a:lvl1pPr marL="342900" indent="-342900" algn="l" defTabSz="457200" rtl="0" eaLnBrk="1" latinLnBrk="0" hangingPunct="1">
-              <a:spcBef>
-                <a:spcPct val="20000"/>
-              </a:spcBef>
-              <a:buFont typeface="Arial"/>
-              <a:buChar char="•"/>
-              <a:defRPr sz="3200" kern="1200">
-                <a:solidFill>
-                  <a:schemeClr val="tx1"/>
-                </a:solidFill>
-                <a:latin typeface="+mn-lt"/>
-                <a:ea typeface="+mn-ea"/>
-                <a:cs typeface="+mn-cs"/>
-              </a:defRPr>
-            </a:lvl1pPr>
-            <a:lvl2pPr marL="742950" indent="-285750" algn="l" defTabSz="457200" rtl="0" eaLnBrk="1" latinLnBrk="0" hangingPunct="1">
-              <a:spcBef>
-                <a:spcPct val="20000"/>
-              </a:spcBef>
-              <a:buFont typeface="Arial"/>
-              <a:buChar char="–"/>
-              <a:defRPr sz="2800" kern="1200">
-                <a:solidFill>
-                  <a:schemeClr val="tx1"/>
-                </a:solidFill>
-                <a:latin typeface="+mn-lt"/>
-                <a:ea typeface="+mn-ea"/>
-                <a:cs typeface="+mn-cs"/>
-              </a:defRPr>
-            </a:lvl2pPr>
-            <a:lvl3pPr marL="1143000" indent="-228600" algn="l" defTabSz="457200" rtl="0" eaLnBrk="1" latinLnBrk="0" hangingPunct="1">
-              <a:spcBef>
-                <a:spcPct val="20000"/>
-              </a:spcBef>
-              <a:buFont typeface="Arial"/>
-              <a:buChar char="•"/>
-              <a:defRPr sz="2400" kern="1200">
-                <a:solidFill>
-                  <a:schemeClr val="tx1"/>
-                </a:solidFill>
-                <a:latin typeface="+mn-lt"/>
-                <a:ea typeface="+mn-ea"/>
-                <a:cs typeface="+mn-cs"/>
-              </a:defRPr>
-            </a:lvl3pPr>
-            <a:lvl4pPr marL="1600200" indent="-228600" algn="l" defTabSz="457200" rtl="0" eaLnBrk="1" latinLnBrk="0" hangingPunct="1">
-              <a:spcBef>
-                <a:spcPct val="20000"/>
-              </a:spcBef>
-              <a:buFont typeface="Arial"/>
-              <a:buChar char="–"/>
-              <a:defRPr sz="2000" kern="1200">
-                <a:solidFill>
-                  <a:schemeClr val="tx1"/>
-                </a:solidFill>
-                <a:latin typeface="+mn-lt"/>
-                <a:ea typeface="+mn-ea"/>
-                <a:cs typeface="+mn-cs"/>
-              </a:defRPr>
-            </a:lvl4pPr>
-            <a:lvl5pPr marL="2057400" indent="-228600" algn="l" defTabSz="457200" rtl="0" eaLnBrk="1" latinLnBrk="0" hangingPunct="1">
-              <a:spcBef>
-                <a:spcPct val="20000"/>
-              </a:spcBef>
-              <a:buFont typeface="Arial"/>
-              <a:buChar char="»"/>
-              <a:defRPr sz="2000" kern="1200">
-                <a:solidFill>
-                  <a:schemeClr val="tx1"/>
-                </a:solidFill>
-                <a:latin typeface="+mn-lt"/>
-                <a:ea typeface="+mn-ea"/>
-                <a:cs typeface="+mn-cs"/>
-              </a:defRPr>
-            </a:lvl5pPr>
-            <a:lvl6pPr marL="2514600" indent="-228600" algn="l" defTabSz="457200" rtl="0" eaLnBrk="1" latinLnBrk="0" hangingPunct="1">
-              <a:spcBef>
-                <a:spcPct val="20000"/>
-              </a:spcBef>
-              <a:buFont typeface="Arial"/>
-              <a:buChar char="•"/>
-              <a:defRPr sz="2000" kern="1200">
-                <a:solidFill>
-                  <a:schemeClr val="tx1"/>
-                </a:solidFill>
-                <a:latin typeface="+mn-lt"/>
-                <a:ea typeface="+mn-ea"/>
-                <a:cs typeface="+mn-cs"/>
-              </a:defRPr>
-            </a:lvl6pPr>
-            <a:lvl7pPr marL="2971800" indent="-228600" algn="l" defTabSz="457200" rtl="0" eaLnBrk="1" latinLnBrk="0" hangingPunct="1">
-              <a:spcBef>
-                <a:spcPct val="20000"/>
-              </a:spcBef>
-              <a:buFont typeface="Arial"/>
-              <a:buChar char="•"/>
-              <a:defRPr sz="2000" kern="1200">
-                <a:solidFill>
-                  <a:schemeClr val="tx1"/>
-                </a:solidFill>
-                <a:latin typeface="+mn-lt"/>
-                <a:ea typeface="+mn-ea"/>
-                <a:cs typeface="+mn-cs"/>
-              </a:defRPr>
-            </a:lvl7pPr>
-            <a:lvl8pPr marL="3429000" indent="-228600" algn="l" defTabSz="457200" rtl="0" eaLnBrk="1" latinLnBrk="0" hangingPunct="1">
-              <a:spcBef>
-                <a:spcPct val="20000"/>
-              </a:spcBef>
-              <a:buFont typeface="Arial"/>
-              <a:buChar char="•"/>
-              <a:defRPr sz="2000" kern="1200">
-                <a:solidFill>
-                  <a:schemeClr val="tx1"/>
-                </a:solidFill>
-                <a:latin typeface="+mn-lt"/>
-                <a:ea typeface="+mn-ea"/>
-                <a:cs typeface="+mn-cs"/>
-              </a:defRPr>
-            </a:lvl8pPr>
-            <a:lvl9pPr marL="3886200" indent="-228600" algn="l" defTabSz="457200" rtl="0" eaLnBrk="1" latinLnBrk="0" hangingPunct="1">
-              <a:spcBef>
-                <a:spcPct val="20000"/>
-              </a:spcBef>
-              <a:buFont typeface="Arial"/>
-              <a:buChar char="•"/>
-              <a:defRPr sz="2000" kern="1200">
-                <a:solidFill>
-                  <a:schemeClr val="tx1"/>
-                </a:solidFill>
-                <a:latin typeface="+mn-lt"/>
-                <a:ea typeface="+mn-ea"/>
-                <a:cs typeface="+mn-cs"/>
-              </a:defRPr>
-            </a:lvl9pPr>
-          </a:lstStyle>
-          <a:p>
-            <a:pPr marL="257175" indent="-257175" defTabSz="342900"/>
-            <a:r>
-              <a:rPr lang="en-US" sz="2400" b="0" dirty="0">
-                <a:solidFill>
-                  <a:prstClr val="black"/>
-                </a:solidFill>
-              </a:rPr>
-              <a:t>Q:  If the first element of a one-dimensional array x[] is stored at memory address 0</a:t>
-            </a:r>
-            <a:r>
-              <a:rPr lang="en-US" altLang="zh-CN" sz="2400" b="0" dirty="0">
-                <a:solidFill>
-                  <a:prstClr val="black"/>
-                </a:solidFill>
-              </a:rPr>
-              <a:t>x</a:t>
-            </a:r>
-            <a:r>
-              <a:rPr lang="en-US" sz="2400" b="0" dirty="0">
-                <a:solidFill>
-                  <a:prstClr val="black"/>
-                </a:solidFill>
-              </a:rPr>
-              <a:t>12345678, what is address of the second element if the array x[] contains</a:t>
-            </a:r>
-          </a:p>
-          <a:p>
-            <a:pPr marL="657225" lvl="1" indent="-257175" defTabSz="342900"/>
-            <a:r>
-              <a:rPr lang="en-US" sz="1800" b="0" dirty="0">
-                <a:solidFill>
-                  <a:prstClr val="black"/>
-                </a:solidFill>
-              </a:rPr>
-              <a:t>(a) chars </a:t>
-            </a:r>
-          </a:p>
-          <a:p>
-            <a:pPr marL="657225" lvl="1" indent="-257175" defTabSz="342900"/>
-            <a:r>
-              <a:rPr lang="en-US" sz="1800" b="0" dirty="0">
-                <a:solidFill>
-                  <a:prstClr val="black"/>
-                </a:solidFill>
-              </a:rPr>
-              <a:t>(b) shorts</a:t>
-            </a:r>
-          </a:p>
-          <a:p>
-            <a:pPr marL="657225" lvl="1" indent="-257175" defTabSz="342900"/>
-            <a:r>
-              <a:rPr lang="en-US" altLang="zh-CN" sz="1800" b="0" dirty="0">
-                <a:solidFill>
-                  <a:prstClr val="black"/>
-                </a:solidFill>
-              </a:rPr>
-              <a:t>(c) </a:t>
-            </a:r>
-            <a:r>
-              <a:rPr lang="en-US" altLang="zh-CN" sz="1800" b="0" dirty="0" err="1">
-                <a:solidFill>
-                  <a:prstClr val="black"/>
-                </a:solidFill>
-              </a:rPr>
-              <a:t>ints</a:t>
-            </a:r>
-            <a:endParaRPr lang="en-US" sz="1800" b="0" dirty="0">
-              <a:solidFill>
-                <a:prstClr val="black"/>
-              </a:solidFill>
-            </a:endParaRPr>
-          </a:p>
-          <a:p>
-            <a:pPr marL="657225" lvl="1" indent="-257175" defTabSz="342900"/>
-            <a:r>
-              <a:rPr lang="en-US" sz="1800" b="0" dirty="0">
-                <a:solidFill>
-                  <a:prstClr val="black"/>
-                </a:solidFill>
-              </a:rPr>
-              <a:t>(c) longs</a:t>
-            </a:r>
-            <a:endParaRPr lang="en-US" sz="1800" b="0" dirty="0">
-              <a:solidFill>
-                <a:prstClr val="black"/>
-              </a:solidFill>
-              <a:latin typeface="Calibri"/>
-            </a:endParaRPr>
-          </a:p>
-        </p:txBody>
-      </p:sp>
-    </p:spTree>
-    <p:extLst>
-      <p:ext uri="{BB962C8B-B14F-4D97-AF65-F5344CB8AC3E}">
-        <p14:creationId xmlns:p14="http://schemas.microsoft.com/office/powerpoint/2010/main" val="802972020"/>
-      </p:ext>
-    </p:extLst>
-  </p:cSld>
-  <p:clrMapOvr>
-    <a:masterClrMapping/>
-  </p:clrMapOvr>
-  <p:transition>
-    <p:pull dir="ru"/>
-  </p:transition>
-  <p:timing>
-    <p:tnLst>
-      <p:par>
-        <p:cTn id="1" dur="indefinite" restart="never" nodeType="tmRoot">
-          <p:childTnLst>
-            <p:seq concurrent="1" nextAc="seek">
-              <p:cTn id="2" dur="indefinite" nodeType="mainSeq">
-                <p:childTnLst>
-                  <p:par>
-                    <p:cTn id="3" fill="hold">
-                      <p:stCondLst>
-                        <p:cond delay="indefinite"/>
-                      </p:stCondLst>
-                      <p:childTnLst>
-                        <p:par>
-                          <p:cTn id="4" fill="hold">
-                            <p:stCondLst>
-                              <p:cond delay="0"/>
-                            </p:stCondLst>
-                            <p:childTnLst>
-                              <p:par>
-                                <p:cTn id="5" presetID="1" presetClass="entr" presetSubtype="0" fill="hold" grpId="0" nodeType="clickEffect">
-                                  <p:stCondLst>
-                                    <p:cond delay="0"/>
-                                  </p:stCondLst>
-                                  <p:childTnLst>
-                                    <p:set>
-                                      <p:cBhvr>
-                                        <p:cTn id="6" dur="1" fill="hold">
-                                          <p:stCondLst>
-                                            <p:cond delay="0"/>
-                                          </p:stCondLst>
-                                        </p:cTn>
-                                        <p:tgtEl>
-                                          <p:spTgt spid="4">
-                                            <p:txEl>
-                                              <p:pRg st="0" end="0"/>
-                                            </p:txEl>
-                                          </p:spTgt>
-                                        </p:tgtEl>
-                                        <p:attrNameLst>
-                                          <p:attrName>style.visibility</p:attrName>
-                                        </p:attrNameLst>
-                                      </p:cBhvr>
-                                      <p:to>
-                                        <p:strVal val="visible"/>
-                                      </p:to>
-                                    </p:set>
-                                  </p:childTnLst>
-                                </p:cTn>
-                              </p:par>
-                              <p:par>
-                                <p:cTn id="7" presetID="1" presetClass="entr" presetSubtype="0" fill="hold" grpId="0" nodeType="withEffect">
-                                  <p:stCondLst>
-                                    <p:cond delay="0"/>
-                                  </p:stCondLst>
-                                  <p:childTnLst>
-                                    <p:set>
-                                      <p:cBhvr>
-                                        <p:cTn id="8" dur="1" fill="hold">
-                                          <p:stCondLst>
-                                            <p:cond delay="0"/>
-                                          </p:stCondLst>
-                                        </p:cTn>
-                                        <p:tgtEl>
-                                          <p:spTgt spid="4">
-                                            <p:txEl>
-                                              <p:pRg st="1" end="1"/>
-                                            </p:txEl>
-                                          </p:spTgt>
-                                        </p:tgtEl>
-                                        <p:attrNameLst>
-                                          <p:attrName>style.visibility</p:attrName>
-                                        </p:attrNameLst>
-                                      </p:cBhvr>
-                                      <p:to>
-                                        <p:strVal val="visible"/>
-                                      </p:to>
-                                    </p:set>
-                                  </p:childTnLst>
-                                </p:cTn>
-                              </p:par>
-                              <p:par>
-                                <p:cTn id="9" presetID="1" presetClass="entr" presetSubtype="0" fill="hold" grpId="0" nodeType="withEffect">
-                                  <p:stCondLst>
-                                    <p:cond delay="0"/>
-                                  </p:stCondLst>
-                                  <p:childTnLst>
-                                    <p:set>
-                                      <p:cBhvr>
-                                        <p:cTn id="10" dur="1" fill="hold">
-                                          <p:stCondLst>
-                                            <p:cond delay="0"/>
-                                          </p:stCondLst>
-                                        </p:cTn>
-                                        <p:tgtEl>
-                                          <p:spTgt spid="4">
-                                            <p:txEl>
-                                              <p:pRg st="2" end="2"/>
-                                            </p:txEl>
-                                          </p:spTgt>
-                                        </p:tgtEl>
-                                        <p:attrNameLst>
-                                          <p:attrName>style.visibility</p:attrName>
-                                        </p:attrNameLst>
-                                      </p:cBhvr>
-                                      <p:to>
-                                        <p:strVal val="visible"/>
-                                      </p:to>
-                                    </p:set>
-                                  </p:childTnLst>
-                                </p:cTn>
-                              </p:par>
-                              <p:par>
-                                <p:cTn id="11" presetID="1" presetClass="entr" presetSubtype="0" fill="hold" grpId="0" nodeType="withEffect">
-                                  <p:stCondLst>
-                                    <p:cond delay="0"/>
-                                  </p:stCondLst>
-                                  <p:childTnLst>
-                                    <p:set>
-                                      <p:cBhvr>
-                                        <p:cTn id="12" dur="1" fill="hold">
-                                          <p:stCondLst>
-                                            <p:cond delay="0"/>
-                                          </p:stCondLst>
-                                        </p:cTn>
-                                        <p:tgtEl>
-                                          <p:spTgt spid="4">
-                                            <p:txEl>
-                                              <p:pRg st="3" end="3"/>
-                                            </p:txEl>
-                                          </p:spTgt>
-                                        </p:tgtEl>
-                                        <p:attrNameLst>
-                                          <p:attrName>style.visibility</p:attrName>
-                                        </p:attrNameLst>
-                                      </p:cBhvr>
-                                      <p:to>
-                                        <p:strVal val="visible"/>
-                                      </p:to>
-                                    </p:set>
-                                  </p:childTnLst>
-                                </p:cTn>
-                              </p:par>
-                              <p:par>
-                                <p:cTn id="13" presetID="1" presetClass="entr" presetSubtype="0" fill="hold" grpId="0" nodeType="withEffect">
-                                  <p:stCondLst>
-                                    <p:cond delay="0"/>
-                                  </p:stCondLst>
-                                  <p:childTnLst>
-                                    <p:set>
-                                      <p:cBhvr>
-                                        <p:cTn id="14" dur="1" fill="hold">
-                                          <p:stCondLst>
-                                            <p:cond delay="0"/>
-                                          </p:stCondLst>
-                                        </p:cTn>
-                                        <p:tgtEl>
-                                          <p:spTgt spid="4">
-                                            <p:txEl>
-                                              <p:pRg st="4" end="4"/>
-                                            </p:txEl>
-                                          </p:spTgt>
-                                        </p:tgtEl>
-                                        <p:attrNameLst>
-                                          <p:attrName>style.visibility</p:attrName>
-                                        </p:attrNameLst>
-                                      </p:cBhvr>
-                                      <p:to>
-                                        <p:strVal val="visible"/>
-                                      </p:to>
-                                    </p:set>
-                                  </p:childTnLst>
-                                </p:cTn>
-                              </p:par>
-                            </p:childTnLst>
-                          </p:cTn>
-                        </p:par>
-                      </p:childTnLst>
-                    </p:cTn>
-                  </p:par>
-                </p:childTnLst>
-              </p:cTn>
-              <p:prevCondLst>
-                <p:cond evt="onPrev" delay="0">
-                  <p:tgtEl>
-                    <p:sldTgt/>
-                  </p:tgtEl>
-                </p:cond>
-              </p:prevCondLst>
-              <p:nextCondLst>
-                <p:cond evt="onNext" delay="0">
-                  <p:tgtEl>
-                    <p:sldTgt/>
-                  </p:tgtEl>
-                </p:cond>
-              </p:nextCondLst>
-            </p:seq>
-          </p:childTnLst>
-        </p:cTn>
-      </p:par>
-    </p:tnLst>
-    <p:bldLst>
-      <p:bldP spid="4" grpId="0" build="p"/>
-    </p:bldLst>
-  </p:timing>
-</p:sld>
-</file>
-
-<file path=ppt/slides/slide12.xml><?xml version="1.0" encoding="utf-8"?>
-<p:sld xmlns:a="http://schemas.openxmlformats.org/drawingml/2006/main" xmlns:r="http://schemas.openxmlformats.org/officeDocument/2006/relationships" xmlns:p="http://schemas.openxmlformats.org/presentationml/2006/main">
-  <p:cSld>
-    <p:spTree>
-      <p:nvGrpSpPr>
         <p:cNvPr id="1" name="">
           <a:extLst>
             <a:ext uri="{FF2B5EF4-FFF2-40B4-BE49-F238E27FC236}">
@@ -7156,7 +6711,7 @@
             <a:fld id="{AEE14D4A-FE32-40AF-B06D-E9622816B101}" type="slidenum">
               <a:rPr lang="en-US" smtClean="0"/>
               <a:pPr/>
-              <a:t>12</a:t>
+              <a:t>11</a:t>
             </a:fld>
             <a:endParaRPr lang="en-US"/>
           </a:p>
@@ -7572,7 +7127,7 @@
         </p:nvSpPr>
         <p:spPr>
           <a:xfrm>
-            <a:off x="5016500" y="4585950"/>
+            <a:off x="5016500" y="4560550"/>
             <a:ext cx="541606" cy="461665"/>
           </a:xfrm>
           <a:prstGeom prst="rect">
@@ -7610,7 +7165,7 @@
         </p:nvSpPr>
         <p:spPr>
           <a:xfrm>
-            <a:off x="5509075" y="4710111"/>
+            <a:off x="5509075" y="4684711"/>
             <a:ext cx="298611" cy="240892"/>
           </a:xfrm>
           <a:prstGeom prst="rightArrow">
@@ -7885,12 +7440,23 @@
               <a:t>Or LDMIB r3!, {r2, r1, r0}</a:t>
             </a:r>
           </a:p>
+          <a:p>
+            <a:pPr lvl="1" fontAlgn="auto">
+              <a:spcAft>
+                <a:spcPts val="0"/>
+              </a:spcAft>
+            </a:pPr>
+            <a:r>
+              <a:rPr lang="en-US" b="0" dirty="0"/>
+              <a:t>Or LDMIB r3!, {r1, r2, r0}</a:t>
+            </a:r>
+          </a:p>
         </p:txBody>
       </p:sp>
     </p:spTree>
     <p:extLst>
       <p:ext uri="{BB962C8B-B14F-4D97-AF65-F5344CB8AC3E}">
-        <p14:creationId xmlns:p14="http://schemas.microsoft.com/office/powerpoint/2010/main" val="3968162788"/>
+        <p14:creationId xmlns:p14="http://schemas.microsoft.com/office/powerpoint/2010/main" val="1544697831"/>
       </p:ext>
     </p:extLst>
   </p:cSld>
@@ -7903,7 +7469,7 @@
 </p:sld>
 </file>
 
-<file path=ppt/slides/slide13.xml><?xml version="1.0" encoding="utf-8"?>
+<file path=ppt/slides/slide12.xml><?xml version="1.0" encoding="utf-8"?>
 <p:sld xmlns:a="http://schemas.openxmlformats.org/drawingml/2006/main" xmlns:r="http://schemas.openxmlformats.org/officeDocument/2006/relationships" xmlns:p="http://schemas.openxmlformats.org/presentationml/2006/main">
   <p:cSld>
     <p:spTree>
@@ -7978,7 +7544,7 @@
             <a:fld id="{AEE14D4A-FE32-40AF-B06D-E9622816B101}" type="slidenum">
               <a:rPr lang="en-US" smtClean="0"/>
               <a:pPr/>
-              <a:t>13</a:t>
+              <a:t>12</a:t>
             </a:fld>
             <a:endParaRPr lang="en-US"/>
           </a:p>
@@ -8014,7 +7580,7 @@
           <a:p>
             <a:r>
               <a:rPr lang="en-US" dirty="0"/>
-              <a:t>Suppose R2 and R5 hold the values 8 and 0x23456789 After following code runs on a Big-Endian system, what value is in R7? How about in a little-endian system?</a:t>
+              <a:t>Suppose R2 and R5 hold the values 8 and 0x23456789 After following code runs with big-endian ordering, what value is in R7? How about with little-endian ordering?</a:t>
             </a:r>
           </a:p>
           <a:p>
@@ -8050,7 +7616,7 @@
     </p:spTree>
     <p:extLst>
       <p:ext uri="{BB962C8B-B14F-4D97-AF65-F5344CB8AC3E}">
-        <p14:creationId xmlns:p14="http://schemas.microsoft.com/office/powerpoint/2010/main" val="2882502133"/>
+        <p14:creationId xmlns:p14="http://schemas.microsoft.com/office/powerpoint/2010/main" val="264205630"/>
       </p:ext>
     </p:extLst>
   </p:cSld>
@@ -8063,7 +7629,7 @@
 </p:sld>
 </file>
 
-<file path=ppt/slides/slide14.xml><?xml version="1.0" encoding="utf-8"?>
+<file path=ppt/slides/slide13.xml><?xml version="1.0" encoding="utf-8"?>
 <p:sld xmlns:a="http://schemas.openxmlformats.org/drawingml/2006/main" xmlns:r="http://schemas.openxmlformats.org/officeDocument/2006/relationships" xmlns:p="http://schemas.openxmlformats.org/presentationml/2006/main">
   <p:cSld>
     <p:spTree>
@@ -8103,7 +7669,7 @@
           <a:p>
             <a:r>
               <a:rPr lang="en-US" dirty="0"/>
-              <a:t>Program Understanding</a:t>
+              <a:t>Program Understanding 1</a:t>
             </a:r>
           </a:p>
         </p:txBody>
@@ -8132,7 +7698,7 @@
             <a:fld id="{AEE14D4A-FE32-40AF-B06D-E9622816B101}" type="slidenum">
               <a:rPr lang="en-US" smtClean="0"/>
               <a:pPr/>
-              <a:t>14</a:t>
+              <a:t>13</a:t>
             </a:fld>
             <a:endParaRPr lang="en-US"/>
           </a:p>
@@ -10108,8 +9674,59 @@
                 <a:ea typeface="+mn-ea"/>
                 <a:cs typeface="Consolas" panose="020B0609020204030204" pitchFamily="49" charset="0"/>
               </a:rPr>
-              <a:t>LDRSH R4, (R1, #0xC)</a:t>
-            </a:r>
+              <a:t>LDRSH R4, </a:t>
+            </a:r>
+            <a:r>
+              <a:rPr lang="pt-BR" sz="2000" b="0" kern="0" dirty="0">
+                <a:solidFill>
+                  <a:prstClr val="black"/>
+                </a:solidFill>
+                <a:latin typeface="Consolas" panose="020B0609020204030204" pitchFamily="49" charset="0"/>
+                <a:cs typeface="Consolas" panose="020B0609020204030204" pitchFamily="49" charset="0"/>
+              </a:rPr>
+              <a:t>[</a:t>
+            </a:r>
+            <a:r>
+              <a:rPr kumimoji="0" lang="pt-BR" sz="2000" b="0" i="0" u="none" strike="noStrike" kern="0" cap="none" spc="0" normalizeH="0" baseline="0" noProof="0" dirty="0">
+                <a:ln>
+                  <a:noFill/>
+                </a:ln>
+                <a:solidFill>
+                  <a:prstClr val="black"/>
+                </a:solidFill>
+                <a:effectLst/>
+                <a:uLnTx/>
+                <a:uFillTx/>
+                <a:latin typeface="Consolas" panose="020B0609020204030204" pitchFamily="49" charset="0"/>
+                <a:ea typeface="+mn-ea"/>
+                <a:cs typeface="Consolas" panose="020B0609020204030204" pitchFamily="49" charset="0"/>
+              </a:rPr>
+              <a:t>R1, #0xC</a:t>
+            </a:r>
+            <a:r>
+              <a:rPr lang="pt-BR" sz="2000" b="0" kern="0" dirty="0">
+                <a:solidFill>
+                  <a:prstClr val="black"/>
+                </a:solidFill>
+                <a:latin typeface="Consolas" panose="020B0609020204030204" pitchFamily="49" charset="0"/>
+                <a:cs typeface="Consolas" panose="020B0609020204030204" pitchFamily="49" charset="0"/>
+              </a:rPr>
+              <a:t>]</a:t>
+            </a:r>
+            <a:endParaRPr kumimoji="0" lang="pt-BR" sz="2000" b="0" i="0" u="none" strike="noStrike" kern="0" cap="none" spc="0" normalizeH="0" baseline="0" noProof="0" dirty="0">
+              <a:ln>
+                <a:noFill/>
+              </a:ln>
+              <a:solidFill>
+                <a:prstClr val="black"/>
+              </a:solidFill>
+              <a:effectLst/>
+              <a:uLnTx/>
+              <a:uFillTx/>
+              <a:latin typeface="Consolas" panose="020B0609020204030204" pitchFamily="49" charset="0"/>
+              <a:ea typeface="+mn-ea"/>
+              <a:cs typeface="Consolas" panose="020B0609020204030204" pitchFamily="49" charset="0"/>
+            </a:endParaRPr>
           </a:p>
         </p:txBody>
       </p:sp>
@@ -10129,8 +9746,8 @@
         </p:nvSpPr>
         <p:spPr>
           <a:xfrm>
-            <a:off x="457200" y="1219200"/>
-            <a:ext cx="8229600" cy="4937760"/>
+            <a:off x="216677" y="1116957"/>
+            <a:ext cx="8913875" cy="828683"/>
           </a:xfrm>
           <a:prstGeom prst="rect">
             <a:avLst/>
@@ -10138,7 +9755,7 @@
         </p:spPr>
         <p:txBody>
           <a:bodyPr vert="horz">
-            <a:normAutofit/>
+            <a:normAutofit fontScale="92500" lnSpcReduction="20000"/>
           </a:bodyPr>
           <a:lstStyle>
             <a:lvl1pPr marL="274320" indent="-274320" algn="l" rtl="0" eaLnBrk="1" latinLnBrk="0" hangingPunct="1">
@@ -10331,7 +9948,7 @@
             </a:pPr>
             <a:r>
               <a:rPr lang="en-US" sz="2000" b="0" dirty="0"/>
-              <a:t>Compute register and memory values at each step of this program, given initial register values and memory contents, assuming little endian memory ordering.</a:t>
+              <a:t>Compute register and memory values at each step of this program, given initial register values and memory contents, assuming little-endian ordering. (Memory addresses increase from top to bottom, and from left to right in the table.)</a:t>
             </a:r>
           </a:p>
         </p:txBody>
@@ -10413,7 +10030,7 @@
     </p:spTree>
     <p:extLst>
       <p:ext uri="{BB962C8B-B14F-4D97-AF65-F5344CB8AC3E}">
-        <p14:creationId xmlns:p14="http://schemas.microsoft.com/office/powerpoint/2010/main" val="2547497624"/>
+        <p14:creationId xmlns:p14="http://schemas.microsoft.com/office/powerpoint/2010/main" val="811401925"/>
       </p:ext>
     </p:extLst>
   </p:cSld>
@@ -10426,7 +10043,7 @@
 </p:sld>
 </file>
 
-<file path=ppt/slides/slide15.xml><?xml version="1.0" encoding="utf-8"?>
+<file path=ppt/slides/slide14.xml><?xml version="1.0" encoding="utf-8"?>
 <p:sld xmlns:a="http://schemas.openxmlformats.org/drawingml/2006/main" xmlns:r="http://schemas.openxmlformats.org/officeDocument/2006/relationships" xmlns:p="http://schemas.openxmlformats.org/presentationml/2006/main">
   <p:cSld>
     <p:spTree>
@@ -10468,7 +10085,7 @@
           <a:p>
             <a:r>
               <a:rPr lang="en-US" sz="2400" dirty="0"/>
-              <a:t>Program Understanding</a:t>
+              <a:t>Program Understanding 2</a:t>
             </a:r>
           </a:p>
         </p:txBody>
@@ -10497,7 +10114,7 @@
             <a:fld id="{AEE14D4A-FE32-40AF-B06D-E9622816B101}" type="slidenum">
               <a:rPr lang="en-US" smtClean="0"/>
               <a:pPr/>
-              <a:t>15</a:t>
+              <a:t>14</a:t>
             </a:fld>
             <a:endParaRPr lang="en-US"/>
           </a:p>
@@ -10522,24 +10139,39 @@
         <p:spPr>
           <a:xfrm>
             <a:off x="137322" y="1219200"/>
-            <a:ext cx="4821952" cy="4937760"/>
+            <a:ext cx="5305560" cy="3262877"/>
           </a:xfrm>
         </p:spPr>
         <p:txBody>
-          <a:bodyPr/>
+          <a:bodyPr>
+            <a:normAutofit fontScale="92500"/>
+          </a:bodyPr>
           <a:lstStyle/>
           <a:p>
+            <a:pPr fontAlgn="auto">
+              <a:spcAft>
+                <a:spcPts val="0"/>
+              </a:spcAft>
+            </a:pPr>
             <a:r>
               <a:rPr lang="en-US" dirty="0"/>
               <a:t>Show all updates to registers as the assembly code shown below runs, </a:t>
             </a:r>
             <a:r>
               <a:rPr lang="en-US" sz="2800" dirty="0"/>
-              <a:t>assuming little endian memory ordering.</a:t>
+              <a:t>assuming little-endian ordering.</a:t>
             </a:r>
             <a:r>
               <a:rPr lang="en-US" dirty="0"/>
-              <a:t> Show the NZCV flags next to the instruction if they change. Each instruction is 32 bits.</a:t>
+              <a:t> </a:t>
+            </a:r>
+            <a:r>
+              <a:rPr lang="en-US" sz="2800" dirty="0"/>
+              <a:t>(Memory addresses increase from top to bottom, and from left to right in the table.) </a:t>
+            </a:r>
+            <a:r>
+              <a:rPr lang="en-US" dirty="0"/>
+              <a:t>Show the NZCV flags next to the instruction if they change. Each instruction is 32 bits.</a:t>
             </a:r>
           </a:p>
         </p:txBody>
@@ -10559,7 +10191,7 @@
         <p:spPr>
           <a:xfrm>
             <a:off x="5442882" y="463094"/>
-            <a:ext cx="3563796" cy="5693866"/>
+            <a:ext cx="2967479" cy="5693866"/>
           </a:xfrm>
           <a:prstGeom prst="rect">
             <a:avLst/>
@@ -10767,7 +10399,7 @@
                 <a:ea typeface="+mn-ea"/>
                 <a:cs typeface="Consolas" panose="020B0609020204030204" pitchFamily="49" charset="0"/>
               </a:rPr>
-              <a:t>    SUBS R4, R2, R0  @NZCV = 0110</a:t>
+              <a:t>    SUBS R4, R2, R0  @NZCV =</a:t>
             </a:r>
           </a:p>
           <a:p>
@@ -10875,7 +10507,7 @@
                 <a:ea typeface="+mn-ea"/>
                 <a:cs typeface="Consolas" panose="020B0609020204030204" pitchFamily="49" charset="0"/>
               </a:rPr>
-              <a:t>    BIC R7, R2, R4</a:t>
+              <a:t>    BIC R7, R2, R6</a:t>
             </a:r>
           </a:p>
           <a:p>
@@ -10938,7 +10570,7 @@
                 <a:ea typeface="+mn-ea"/>
                 <a:cs typeface="Consolas" panose="020B0609020204030204" pitchFamily="49" charset="0"/>
               </a:rPr>
-              <a:t>= 0110</a:t>
+              <a:t>=</a:t>
             </a:r>
           </a:p>
           <a:p>
@@ -11109,7 +10741,7 @@
                 <a:ea typeface="+mn-ea"/>
                 <a:cs typeface="Consolas" panose="020B0609020204030204" pitchFamily="49" charset="0"/>
               </a:rPr>
-              <a:t>= 1000</a:t>
+              <a:t>=</a:t>
             </a:r>
           </a:p>
           <a:p>
@@ -11382,7 +11014,7 @@
                 <a:ea typeface="+mn-ea"/>
                 <a:cs typeface="Consolas" panose="020B0609020204030204" pitchFamily="49" charset="0"/>
               </a:rPr>
-              <a:t>= 0010</a:t>
+              <a:t>=</a:t>
             </a:r>
           </a:p>
           <a:p>
@@ -12457,7 +12089,7 @@
                           <a:ea typeface="+mn-ea"/>
                           <a:cs typeface="+mn-cs"/>
                         </a:rPr>
-                        <a:t>D0</a:t>
+                        <a:t>00</a:t>
                       </a:r>
                     </a:p>
                   </a:txBody>
@@ -12482,7 +12114,7 @@
                           <a:ea typeface="+mn-ea"/>
                           <a:cs typeface="+mn-cs"/>
                         </a:rPr>
-                        <a:t>BC</a:t>
+                        <a:t>00</a:t>
                       </a:r>
                     </a:p>
                   </a:txBody>
@@ -12507,7 +12139,7 @@
                           <a:ea typeface="+mn-ea"/>
                           <a:cs typeface="+mn-cs"/>
                         </a:rPr>
-                        <a:t>D8</a:t>
+                        <a:t>00</a:t>
                       </a:r>
                     </a:p>
                   </a:txBody>
@@ -12532,7 +12164,7 @@
                           <a:ea typeface="+mn-ea"/>
                           <a:cs typeface="+mn-cs"/>
                         </a:rPr>
-                        <a:t>A8</a:t>
+                        <a:t>00</a:t>
                       </a:r>
                     </a:p>
                   </a:txBody>
@@ -12555,7 +12187,7 @@
     </p:spTree>
     <p:extLst>
       <p:ext uri="{BB962C8B-B14F-4D97-AF65-F5344CB8AC3E}">
-        <p14:creationId xmlns:p14="http://schemas.microsoft.com/office/powerpoint/2010/main" val="3176157734"/>
+        <p14:creationId xmlns:p14="http://schemas.microsoft.com/office/powerpoint/2010/main" val="3488595267"/>
       </p:ext>
     </p:extLst>
   </p:cSld>
@@ -12603,7 +12235,7 @@
             <a:pPr marL="119063" indent="-119063"/>
             <a:r>
               <a:rPr lang="en-US" altLang="zh-CN" dirty="0"/>
-              <a:t>Question: Endianness</a:t>
+              <a:t>Endianness</a:t>
             </a:r>
             <a:endParaRPr lang="en-US" dirty="0"/>
           </a:p>
@@ -16789,7 +16421,7 @@
     </p:spTree>
     <p:extLst>
       <p:ext uri="{BB962C8B-B14F-4D97-AF65-F5344CB8AC3E}">
-        <p14:creationId xmlns:p14="http://schemas.microsoft.com/office/powerpoint/2010/main" val="3359075723"/>
+        <p14:creationId xmlns:p14="http://schemas.microsoft.com/office/powerpoint/2010/main" val="3582727275"/>
       </p:ext>
     </p:extLst>
   </p:cSld>
@@ -16839,10 +16471,6 @@
           <a:bodyPr/>
           <a:lstStyle/>
           <a:p>
-            <a:r>
-              <a:rPr lang="en-US" dirty="0"/>
-              <a:t>Question: </a:t>
-            </a:r>
             <a:r>
               <a:rPr lang="en-US" altLang="zh-CN" dirty="0"/>
               <a:t>Endianness</a:t>
@@ -18277,7 +17905,7 @@
     </p:spTree>
     <p:extLst>
       <p:ext uri="{BB962C8B-B14F-4D97-AF65-F5344CB8AC3E}">
-        <p14:creationId xmlns:p14="http://schemas.microsoft.com/office/powerpoint/2010/main" val="3486040908"/>
+        <p14:creationId xmlns:p14="http://schemas.microsoft.com/office/powerpoint/2010/main" val="4063912812"/>
       </p:ext>
     </p:extLst>
   </p:cSld>
@@ -18768,7 +18396,7 @@
             <a:pPr defTabSz="938213"/>
             <a:r>
               <a:rPr lang="en-US" altLang="zh-CN" dirty="0"/>
-              <a:t>Question: Endianness</a:t>
+              <a:t>Endianness</a:t>
             </a:r>
             <a:endParaRPr lang="en-US" dirty="0"/>
           </a:p>
@@ -19736,7 +19364,7 @@
     </p:spTree>
     <p:extLst>
       <p:ext uri="{BB962C8B-B14F-4D97-AF65-F5344CB8AC3E}">
-        <p14:creationId xmlns:p14="http://schemas.microsoft.com/office/powerpoint/2010/main" val="1502810167"/>
+        <p14:creationId xmlns:p14="http://schemas.microsoft.com/office/powerpoint/2010/main" val="3885410331"/>
       </p:ext>
     </p:extLst>
   </p:cSld>
@@ -20114,13 +19742,7 @@
           <p:cNvGraphicFramePr>
             <a:graphicFrameLocks noGrp="1"/>
           </p:cNvGraphicFramePr>
-          <p:nvPr>
-            <p:extLst>
-              <p:ext uri="{D42A27DB-BD31-4B8C-83A1-F6EECF244321}">
-                <p14:modId xmlns:p14="http://schemas.microsoft.com/office/powerpoint/2010/main" val="2177192664"/>
-              </p:ext>
-            </p:extLst>
-          </p:nvPr>
+          <p:nvPr/>
         </p:nvGraphicFramePr>
         <p:xfrm>
           <a:off x="4167267" y="2716135"/>
@@ -20922,7 +20544,7 @@
             <a:pPr lvl="1"/>
             <a:r>
               <a:rPr lang="en-US" dirty="0"/>
-              <a:t>r0 after load:</a:t>
+              <a:t>r0 after store:</a:t>
             </a:r>
           </a:p>
           <a:p>
@@ -20951,7 +20573,7 @@
             <a:pPr lvl="1"/>
             <a:r>
               <a:rPr lang="en-US" dirty="0"/>
-              <a:t>r0 after load:</a:t>
+              <a:t>r0 after store:</a:t>
             </a:r>
           </a:p>
           <a:p>
@@ -21321,7 +20943,7 @@
     </p:spTree>
     <p:extLst>
       <p:ext uri="{BB962C8B-B14F-4D97-AF65-F5344CB8AC3E}">
-        <p14:creationId xmlns:p14="http://schemas.microsoft.com/office/powerpoint/2010/main" val="2952063245"/>
+        <p14:creationId xmlns:p14="http://schemas.microsoft.com/office/powerpoint/2010/main" val="1716263769"/>
       </p:ext>
     </p:extLst>
   </p:cSld>
@@ -21407,8 +21029,8 @@
         </p:nvSpPr>
         <p:spPr>
           <a:xfrm>
-            <a:off x="612648" y="1673752"/>
-            <a:ext cx="8182841" cy="1755248"/>
+            <a:off x="311998" y="1307051"/>
+            <a:ext cx="8182841" cy="3476822"/>
           </a:xfrm>
           <a:prstGeom prst="rect">
             <a:avLst/>
@@ -21554,421 +21176,88 @@
             </a:lvl9pPr>
           </a:lstStyle>
           <a:p>
-            <a:r>
-              <a:rPr lang="en-US" sz="1500" dirty="0"/>
-              <a:t>Assume a byte-addressable memory with a data bus that is 32 bits (4 bytes) wide</a:t>
-            </a:r>
-          </a:p>
-          <a:p>
-            <a:r>
-              <a:rPr lang="en-US" sz="1500" dirty="0"/>
-              <a:t>Consider 16 bytes of memory (addresses 0 to 15) arranged as four 32-bit words (4 bytes each)</a:t>
-            </a:r>
-          </a:p>
-        </p:txBody>
-      </p:sp>
-      <p:sp>
-        <p:nvSpPr>
-          <p:cNvPr id="7" name="TextBox 6"/>
-          <p:cNvSpPr txBox="1"/>
-          <p:nvPr/>
-        </p:nvSpPr>
-        <p:spPr>
-          <a:xfrm>
-            <a:off x="542078" y="3412912"/>
-            <a:ext cx="3581400" cy="715581"/>
-          </a:xfrm>
-          <a:prstGeom prst="rect">
-            <a:avLst/>
-          </a:prstGeom>
-          <a:noFill/>
-        </p:spPr>
-        <p:txBody>
-          <a:bodyPr wrap="square" rtlCol="0">
-            <a:spAutoFit/>
-          </a:bodyPr>
-          <a:lstStyle/>
-          <a:p>
-            <a:r>
-              <a:rPr lang="en-US" sz="1350" dirty="0">
-                <a:solidFill>
-                  <a:srgbClr val="FF0000"/>
+            <a:pPr marL="257175" indent="-257175" defTabSz="342900"/>
+            <a:r>
+              <a:rPr lang="en-US" sz="2000" b="0" dirty="0">
+                <a:solidFill>
+                  <a:prstClr val="black"/>
                 </a:solidFill>
               </a:rPr>
-              <a:t>Well-aligned</a:t>
-            </a:r>
-            <a:r>
-              <a:rPr lang="en-US" sz="1350" dirty="0"/>
-              <a:t>: each word begins on a mod-4 address, which can be read in a single memory cycle</a:t>
-            </a:r>
-          </a:p>
-        </p:txBody>
-      </p:sp>
-      <p:pic>
-        <p:nvPicPr>
-          <p:cNvPr id="9" name="Picture 8"/>
-          <p:cNvPicPr>
-            <a:picLocks noChangeAspect="1"/>
-          </p:cNvPicPr>
-          <p:nvPr/>
-        </p:nvPicPr>
-        <p:blipFill>
-          <a:blip r:embed="rId3"/>
-          <a:stretch>
-            <a:fillRect/>
-          </a:stretch>
-        </p:blipFill>
-        <p:spPr>
-          <a:xfrm>
-            <a:off x="4543965" y="2307838"/>
-            <a:ext cx="3785316" cy="1121162"/>
-          </a:xfrm>
-          <a:prstGeom prst="rect">
-            <a:avLst/>
-          </a:prstGeom>
-        </p:spPr>
-      </p:pic>
-      <p:pic>
-        <p:nvPicPr>
-          <p:cNvPr id="10" name="Picture 9"/>
-          <p:cNvPicPr>
-            <a:picLocks noChangeAspect="1"/>
-          </p:cNvPicPr>
-          <p:nvPr/>
-        </p:nvPicPr>
-        <p:blipFill>
-          <a:blip r:embed="rId4"/>
-          <a:stretch>
-            <a:fillRect/>
-          </a:stretch>
-        </p:blipFill>
-        <p:spPr>
-          <a:xfrm>
-            <a:off x="542078" y="2283024"/>
-            <a:ext cx="3802444" cy="1129888"/>
-          </a:xfrm>
-          <a:prstGeom prst="rect">
-            <a:avLst/>
-          </a:prstGeom>
-        </p:spPr>
-      </p:pic>
-      <p:sp>
-        <p:nvSpPr>
-          <p:cNvPr id="11" name="TextBox 10"/>
-          <p:cNvSpPr txBox="1"/>
-          <p:nvPr/>
-        </p:nvSpPr>
-        <p:spPr>
-          <a:xfrm>
-            <a:off x="4543965" y="3412912"/>
-            <a:ext cx="3581400" cy="715581"/>
-          </a:xfrm>
-          <a:prstGeom prst="rect">
-            <a:avLst/>
-          </a:prstGeom>
-          <a:noFill/>
-        </p:spPr>
-        <p:txBody>
-          <a:bodyPr wrap="square" rtlCol="0">
-            <a:spAutoFit/>
-          </a:bodyPr>
-          <a:lstStyle/>
-          <a:p>
-            <a:r>
-              <a:rPr lang="en-US" sz="1350" dirty="0">
-                <a:solidFill>
-                  <a:srgbClr val="FF0000"/>
+              <a:t>Q:  Assume a byte-addressable memory with a data bus that is 32 bits (4 bytes) wide. Consider 16 bytes of memory (addresses 0 to 15) arranged as four 32-bit words (4 bytes each). </a:t>
+            </a:r>
+            <a:r>
+              <a:rPr lang="en-US" altLang="zh-CN" sz="2000" b="0" dirty="0">
+                <a:solidFill>
+                  <a:prstClr val="black"/>
                 </a:solidFill>
               </a:rPr>
-              <a:t>Ill-aligned</a:t>
-            </a:r>
-            <a:r>
-              <a:rPr lang="en-US" sz="1350" dirty="0"/>
-              <a:t>: a word begins on address 6, not a mod-4 address, which can be read in 2 memory cycles</a:t>
-            </a:r>
-          </a:p>
-        </p:txBody>
-      </p:sp>
-      <p:pic>
-        <p:nvPicPr>
-          <p:cNvPr id="12" name="Picture 11"/>
-          <p:cNvPicPr>
-            <a:picLocks noChangeAspect="1"/>
-          </p:cNvPicPr>
-          <p:nvPr/>
-        </p:nvPicPr>
-        <p:blipFill>
-          <a:blip r:embed="rId5"/>
-          <a:stretch>
-            <a:fillRect/>
-          </a:stretch>
-        </p:blipFill>
-        <p:spPr>
-          <a:xfrm>
-            <a:off x="4701867" y="4223976"/>
-            <a:ext cx="4059366" cy="305375"/>
-          </a:xfrm>
-          <a:prstGeom prst="rect">
-            <a:avLst/>
-          </a:prstGeom>
-        </p:spPr>
-      </p:pic>
-      <p:pic>
-        <p:nvPicPr>
-          <p:cNvPr id="13" name="Picture 12"/>
-          <p:cNvPicPr>
-            <a:picLocks noChangeAspect="1"/>
-          </p:cNvPicPr>
-          <p:nvPr/>
-        </p:nvPicPr>
-        <p:blipFill>
-          <a:blip r:embed="rId6"/>
-          <a:stretch>
-            <a:fillRect/>
-          </a:stretch>
-        </p:blipFill>
-        <p:spPr>
-          <a:xfrm>
-            <a:off x="4667611" y="4777320"/>
-            <a:ext cx="4127879" cy="327188"/>
-          </a:xfrm>
-          <a:prstGeom prst="rect">
-            <a:avLst/>
-          </a:prstGeom>
-        </p:spPr>
-      </p:pic>
-      <p:pic>
-        <p:nvPicPr>
-          <p:cNvPr id="14" name="Picture 13"/>
-          <p:cNvPicPr>
-            <a:picLocks noChangeAspect="1"/>
-          </p:cNvPicPr>
-          <p:nvPr/>
-        </p:nvPicPr>
-        <p:blipFill>
-          <a:blip r:embed="rId7"/>
-          <a:stretch>
-            <a:fillRect/>
-          </a:stretch>
-        </p:blipFill>
-        <p:spPr>
-          <a:xfrm>
-            <a:off x="4701867" y="5317344"/>
-            <a:ext cx="3665419" cy="335912"/>
-          </a:xfrm>
-          <a:prstGeom prst="rect">
-            <a:avLst/>
-          </a:prstGeom>
-        </p:spPr>
-      </p:pic>
-      <p:sp>
-        <p:nvSpPr>
-          <p:cNvPr id="16" name="TextBox 15"/>
-          <p:cNvSpPr txBox="1"/>
-          <p:nvPr/>
-        </p:nvSpPr>
-        <p:spPr>
-          <a:xfrm>
-            <a:off x="109436" y="4128493"/>
-            <a:ext cx="4268981" cy="1754326"/>
-          </a:xfrm>
-          <a:prstGeom prst="rect">
-            <a:avLst/>
-          </a:prstGeom>
-          <a:noFill/>
-          <a:ln>
-            <a:solidFill>
-              <a:schemeClr val="tx1"/>
-            </a:solidFill>
-          </a:ln>
-        </p:spPr>
-        <p:txBody>
-          <a:bodyPr wrap="square" rtlCol="0">
-            <a:spAutoFit/>
-          </a:bodyPr>
-          <a:lstStyle/>
-          <a:p>
-            <a:r>
-              <a:rPr lang="en-US" sz="1200" dirty="0"/>
-              <a:t>The first read cycle would retrieve 4 bytes from addresses 4 through 7; of these, the bytes from addresses 4 and 5</a:t>
-            </a:r>
-          </a:p>
-          <a:p>
-            <a:r>
-              <a:rPr lang="en-US" sz="1200" dirty="0"/>
-              <a:t>are discarded, and those from addresses 6 and 7 are moved to the far right;</a:t>
-            </a:r>
-          </a:p>
-          <a:p>
-            <a:r>
-              <a:rPr lang="en-US" sz="1200" dirty="0"/>
-              <a:t>The second read cycle retrieves 4 bytes from addresses 8 through 11; the bytes from addresses 10 and 11 are  discarded, and those from addresses 8 and 9 are moved to the far left;</a:t>
-            </a:r>
-          </a:p>
-          <a:p>
-            <a:r>
-              <a:rPr lang="en-US" sz="1200" dirty="0"/>
-              <a:t>Finally, the two halves are combined to form the desired 32-bit operand:</a:t>
-            </a:r>
-          </a:p>
-        </p:txBody>
-      </p:sp>
-      <p:sp>
-        <p:nvSpPr>
-          <p:cNvPr id="5" name="Arrow: Right 4">
-            <a:extLst>
-              <a:ext uri="{FF2B5EF4-FFF2-40B4-BE49-F238E27FC236}">
-                <a16:creationId xmlns:a16="http://schemas.microsoft.com/office/drawing/2014/main" id="{403B0BD2-2931-BDC5-E683-51FBAB7B8593}"/>
-              </a:ext>
-            </a:extLst>
-          </p:cNvPr>
-          <p:cNvSpPr/>
-          <p:nvPr/>
-        </p:nvSpPr>
-        <p:spPr>
-          <a:xfrm>
-            <a:off x="4413347" y="4630642"/>
-            <a:ext cx="285830" cy="363474"/>
-          </a:xfrm>
-          <a:prstGeom prst="rightArrow">
-            <a:avLst/>
-          </a:prstGeom>
-          <a:solidFill>
-            <a:schemeClr val="bg1">
-              <a:lumMod val="75000"/>
-            </a:schemeClr>
-          </a:solidFill>
-        </p:spPr>
-        <p:style>
-          <a:lnRef idx="2">
-            <a:schemeClr val="accent1">
-              <a:shade val="15000"/>
-            </a:schemeClr>
-          </a:lnRef>
-          <a:fillRef idx="1">
-            <a:schemeClr val="accent1"/>
-          </a:fillRef>
-          <a:effectRef idx="0">
-            <a:schemeClr val="accent1"/>
-          </a:effectRef>
-          <a:fontRef idx="minor">
-            <a:schemeClr val="lt1"/>
-          </a:fontRef>
-        </p:style>
-        <p:txBody>
-          <a:bodyPr rtlCol="0" anchor="ctr"/>
-          <a:lstStyle/>
-          <a:p>
-            <a:pPr algn="ctr"/>
-            <a:endParaRPr lang="en-US" sz="1350"/>
-          </a:p>
-        </p:txBody>
-      </p:sp>
-      <p:sp>
-        <p:nvSpPr>
-          <p:cNvPr id="6" name="Horizontal Scroll 14">
-            <a:extLst>
-              <a:ext uri="{FF2B5EF4-FFF2-40B4-BE49-F238E27FC236}">
-                <a16:creationId xmlns:a16="http://schemas.microsoft.com/office/drawing/2014/main" id="{9847AA0A-7964-4433-C181-1EB7B5E48F3F}"/>
-              </a:ext>
-            </a:extLst>
-          </p:cNvPr>
-          <p:cNvSpPr/>
-          <p:nvPr/>
-        </p:nvSpPr>
-        <p:spPr>
-          <a:xfrm>
-            <a:off x="294068" y="178297"/>
-            <a:ext cx="1265712" cy="762000"/>
-          </a:xfrm>
-          <a:prstGeom prst="horizontalScroll">
-            <a:avLst/>
-          </a:prstGeom>
-          <a:gradFill rotWithShape="1">
-            <a:gsLst>
-              <a:gs pos="0">
-                <a:srgbClr val="4F81BD">
-                  <a:tint val="50000"/>
-                  <a:satMod val="300000"/>
-                </a:srgbClr>
-              </a:gs>
-              <a:gs pos="35000">
-                <a:srgbClr val="4F81BD">
-                  <a:tint val="37000"/>
-                  <a:satMod val="300000"/>
-                </a:srgbClr>
-              </a:gs>
-              <a:gs pos="100000">
-                <a:srgbClr val="4F81BD">
-                  <a:tint val="15000"/>
-                  <a:satMod val="350000"/>
-                </a:srgbClr>
-              </a:gs>
-            </a:gsLst>
-            <a:lin ang="16200000" scaled="1"/>
-          </a:gradFill>
-          <a:ln w="9525" cap="flat" cmpd="sng" algn="ctr">
-            <a:solidFill>
-              <a:srgbClr val="4F81BD">
-                <a:shade val="95000"/>
-                <a:satMod val="105000"/>
-              </a:srgbClr>
-            </a:solidFill>
-            <a:prstDash val="solid"/>
-          </a:ln>
-          <a:effectLst>
-            <a:outerShdw blurRad="40000" dist="20000" dir="5400000" rotWithShape="0">
-              <a:srgbClr val="000000">
-                <a:alpha val="38000"/>
-              </a:srgbClr>
-            </a:outerShdw>
-          </a:effectLst>
-        </p:spPr>
-        <p:txBody>
-          <a:bodyPr rtlCol="0" anchor="ctr"/>
-          <a:lstStyle/>
-          <a:p>
-            <a:pPr marL="0" marR="0" lvl="0" indent="0" algn="ctr" defTabSz="457200" eaLnBrk="1" fontAlgn="auto" latinLnBrk="0" hangingPunct="1">
-              <a:lnSpc>
-                <a:spcPct val="100000"/>
-              </a:lnSpc>
-              <a:spcBef>
-                <a:spcPts val="0"/>
-              </a:spcBef>
-              <a:spcAft>
-                <a:spcPts val="0"/>
-              </a:spcAft>
-              <a:buClrTx/>
-              <a:buSzTx/>
-              <a:buFontTx/>
-              <a:buNone/>
-              <a:tabLst/>
-              <a:defRPr/>
-            </a:pPr>
-            <a:r>
-              <a:rPr kumimoji="0" lang="en-US" sz="2400" b="0" i="0" u="none" strike="noStrike" kern="0" cap="none" spc="0" normalizeH="0" baseline="0" noProof="0" dirty="0">
-                <a:ln>
-                  <a:noFill/>
-                </a:ln>
+              <a:t>H</a:t>
+            </a:r>
+            <a:r>
+              <a:rPr lang="en-US" sz="2000" b="0" dirty="0">
                 <a:solidFill>
                   <a:prstClr val="black"/>
                 </a:solidFill>
-                <a:effectLst/>
-                <a:uLnTx/>
-                <a:uFillTx/>
-                <a:latin typeface="Calibri"/>
-                <a:ea typeface="+mn-ea"/>
-                <a:cs typeface="+mn-cs"/>
               </a:rPr>
-              <a:t>Review</a:t>
-            </a:r>
+              <a:t>ow many memory cycles are required to read each of the following from memory?</a:t>
+            </a:r>
+          </a:p>
+          <a:p>
+            <a:pPr marL="657225" lvl="1" indent="-257175" defTabSz="342900"/>
+            <a:r>
+              <a:rPr lang="en-US" sz="1600" b="0" dirty="0">
+                <a:solidFill>
+                  <a:prstClr val="black"/>
+                </a:solidFill>
+              </a:rPr>
+              <a:t>(a) A 2-Byte operand read from decimal address 5</a:t>
+            </a:r>
+          </a:p>
+          <a:p>
+            <a:pPr marL="657225" lvl="1" indent="-257175" defTabSz="342900"/>
+            <a:r>
+              <a:rPr lang="en-US" sz="1600" b="0" dirty="0">
+                <a:solidFill>
+                  <a:prstClr val="black"/>
+                </a:solidFill>
+              </a:rPr>
+              <a:t>(b) A 2-Byte operand read from decimal address 15</a:t>
+            </a:r>
+          </a:p>
+          <a:p>
+            <a:pPr marL="657225" lvl="1" indent="-257175" defTabSz="342900"/>
+            <a:r>
+              <a:rPr lang="en-US" sz="1600" b="0" dirty="0">
+                <a:solidFill>
+                  <a:prstClr val="black"/>
+                </a:solidFill>
+              </a:rPr>
+              <a:t>(c) A 4-Byte operand read from decimal address 10</a:t>
+            </a:r>
+          </a:p>
+          <a:p>
+            <a:pPr marL="657225" lvl="1" indent="-257175" defTabSz="342900"/>
+            <a:r>
+              <a:rPr lang="en-US" sz="1600" b="0" dirty="0">
+                <a:solidFill>
+                  <a:prstClr val="black"/>
+                </a:solidFill>
+              </a:rPr>
+              <a:t>(d) A 4-Byte operand read from decimal address 20</a:t>
+            </a:r>
+            <a:endParaRPr lang="en-US" sz="1600" b="0" dirty="0">
+              <a:solidFill>
+                <a:prstClr val="black"/>
+              </a:solidFill>
+              <a:latin typeface="Calibri"/>
+            </a:endParaRPr>
           </a:p>
         </p:txBody>
       </p:sp>
     </p:spTree>
     <p:extLst>
       <p:ext uri="{BB962C8B-B14F-4D97-AF65-F5344CB8AC3E}">
-        <p14:creationId xmlns:p14="http://schemas.microsoft.com/office/powerpoint/2010/main" val="1864663475"/>
+        <p14:creationId xmlns:p14="http://schemas.microsoft.com/office/powerpoint/2010/main" val="1966266804"/>
       </p:ext>
     </p:extLst>
   </p:cSld>
@@ -22008,14 +21297,19 @@
             <p:ph type="title"/>
           </p:nvPr>
         </p:nvSpPr>
-        <p:spPr/>
+        <p:spPr>
+          <a:xfrm>
+            <a:off x="0" y="0"/>
+            <a:ext cx="8229600" cy="1143000"/>
+          </a:xfrm>
+        </p:spPr>
         <p:txBody>
           <a:bodyPr/>
           <a:lstStyle/>
           <a:p>
             <a:r>
               <a:rPr lang="en-US" dirty="0"/>
-              <a:t>Question: Data Alignment</a:t>
+              <a:t>Data Alignment</a:t>
             </a:r>
           </a:p>
         </p:txBody>
@@ -22054,8 +21348,8 @@
         </p:nvSpPr>
         <p:spPr>
           <a:xfrm>
-            <a:off x="311998" y="1307051"/>
-            <a:ext cx="8182841" cy="3476822"/>
+            <a:off x="267393" y="1842309"/>
+            <a:ext cx="8182841" cy="3510275"/>
           </a:xfrm>
           <a:prstGeom prst="rect">
             <a:avLst/>
@@ -22210,21 +21504,27 @@
               </a:rPr>
               <a:t>Q:  Assume a byte-addressable memory with a data bus that is 32 bits (4 bytes) wide. Consider 16 bytes of memory (addresses 0 to 15) arranged as four 32-bit words (4 bytes each). </a:t>
             </a:r>
-            <a:r>
-              <a:rPr lang="en-US" altLang="zh-CN" sz="2000" b="0" dirty="0">
+          </a:p>
+          <a:p>
+            <a:pPr marL="657225" lvl="1" indent="-257175" defTabSz="342900"/>
+            <a:r>
+              <a:rPr lang="en-US" sz="1600" b="0" dirty="0">
                 <a:solidFill>
                   <a:prstClr val="black"/>
                 </a:solidFill>
               </a:rPr>
-              <a:t>H</a:t>
-            </a:r>
-            <a:r>
-              <a:rPr lang="en-US" sz="2000" b="0" dirty="0">
+              <a:t>(a) What is the address of MSB of the word at address 102, assuming Little-Endian ordering?</a:t>
+            </a:r>
+          </a:p>
+          <a:p>
+            <a:pPr marL="657225" lvl="1" indent="-257175" defTabSz="342900"/>
+            <a:r>
+              <a:rPr lang="en-US" sz="1600" b="0" dirty="0">
                 <a:solidFill>
                   <a:prstClr val="black"/>
                 </a:solidFill>
               </a:rPr>
-              <a:t>ow many memory cycles are required to read each of the following from memory?</a:t>
+              <a:t>(b) What is the address of LSB of the word at address 102, assuming Little-Endian ordering?</a:t>
             </a:r>
           </a:p>
           <a:p>
@@ -22235,7 +21535,7 @@
                   <a:prstClr val="black"/>
                 </a:solidFill>
               </a:rPr>
-              <a:t>(a) A 2-Byte operand read from decimal address 5</a:t>
+              <a:t>(b) How many memory cycles are required to read the word at address 102?</a:t>
             </a:r>
           </a:p>
           <a:p>
@@ -22246,31 +21546,9 @@
                   <a:prstClr val="black"/>
                 </a:solidFill>
               </a:rPr>
-              <a:t>(b) A 2-Byte operand read from decimal address 15</a:t>
-            </a:r>
-          </a:p>
-          <a:p>
-            <a:pPr marL="657225" lvl="1" indent="-257175" defTabSz="342900"/>
-            <a:r>
-              <a:rPr lang="en-US" sz="1600" b="0" dirty="0">
-                <a:solidFill>
-                  <a:prstClr val="black"/>
-                </a:solidFill>
-              </a:rPr>
-              <a:t>(c) A 4-Byte operand read from decimal address 10</a:t>
-            </a:r>
-          </a:p>
-          <a:p>
-            <a:pPr marL="657225" lvl="1" indent="-257175" defTabSz="342900"/>
-            <a:r>
-              <a:rPr lang="en-US" sz="1600" b="0" dirty="0">
-                <a:solidFill>
-                  <a:prstClr val="black"/>
-                </a:solidFill>
-              </a:rPr>
-              <a:t>(d) A 4-Byte operand read from decimal address 20</a:t>
-            </a:r>
-            <a:endParaRPr lang="en-US" sz="1600" b="0" dirty="0">
+              <a:t>(c) How many memory cycles are required to read the half word at address 102?</a:t>
+            </a:r>
+            <a:endParaRPr lang="en-US" sz="1000" b="0" dirty="0">
               <a:solidFill>
                 <a:prstClr val="black"/>
               </a:solidFill>
@@ -22279,10 +21557,34 @@
           </a:p>
         </p:txBody>
       </p:sp>
+      <p:pic>
+        <p:nvPicPr>
+          <p:cNvPr id="5" name="Picture 4"/>
+          <p:cNvPicPr>
+            <a:picLocks noChangeAspect="1"/>
+          </p:cNvPicPr>
+          <p:nvPr/>
+        </p:nvPicPr>
+        <p:blipFill>
+          <a:blip r:embed="rId2"/>
+          <a:stretch>
+            <a:fillRect/>
+          </a:stretch>
+        </p:blipFill>
+        <p:spPr>
+          <a:xfrm>
+            <a:off x="4345363" y="76200"/>
+            <a:ext cx="4779587" cy="1729193"/>
+          </a:xfrm>
+          <a:prstGeom prst="rect">
+            <a:avLst/>
+          </a:prstGeom>
+        </p:spPr>
+      </p:pic>
     </p:spTree>
     <p:extLst>
       <p:ext uri="{BB962C8B-B14F-4D97-AF65-F5344CB8AC3E}">
-        <p14:creationId xmlns:p14="http://schemas.microsoft.com/office/powerpoint/2010/main" val="936686548"/>
+        <p14:creationId xmlns:p14="http://schemas.microsoft.com/office/powerpoint/2010/main" val="3196280469"/>
       </p:ext>
     </p:extLst>
   </p:cSld>
@@ -22314,33 +21616,6 @@
       </p:grpSpPr>
       <p:sp>
         <p:nvSpPr>
-          <p:cNvPr id="2" name="Title 1"/>
-          <p:cNvSpPr>
-            <a:spLocks noGrp="1"/>
-          </p:cNvSpPr>
-          <p:nvPr>
-            <p:ph type="title"/>
-          </p:nvPr>
-        </p:nvSpPr>
-        <p:spPr>
-          <a:xfrm>
-            <a:off x="0" y="0"/>
-            <a:ext cx="8229600" cy="1143000"/>
-          </a:xfrm>
-        </p:spPr>
-        <p:txBody>
-          <a:bodyPr/>
-          <a:lstStyle/>
-          <a:p>
-            <a:r>
-              <a:rPr lang="en-US" dirty="0"/>
-              <a:t>Question: Data Align</a:t>
-            </a:r>
-          </a:p>
-        </p:txBody>
-      </p:sp>
-      <p:sp>
-        <p:nvSpPr>
           <p:cNvPr id="3" name="Slide Number Placeholder 2"/>
           <p:cNvSpPr>
             <a:spLocks noGrp="1"/>
@@ -22373,8 +21648,8 @@
         </p:nvSpPr>
         <p:spPr>
           <a:xfrm>
-            <a:off x="267393" y="1842309"/>
-            <a:ext cx="8182841" cy="3510275"/>
+            <a:off x="267393" y="1447800"/>
+            <a:ext cx="8182841" cy="3581400"/>
           </a:xfrm>
           <a:prstGeom prst="rect">
             <a:avLst/>
@@ -22522,58 +21797,58 @@
           <a:p>
             <a:pPr marL="257175" indent="-257175" defTabSz="342900"/>
             <a:r>
-              <a:rPr lang="en-US" sz="2000" b="0" dirty="0">
+              <a:rPr lang="en-US" sz="2400" b="0" dirty="0">
                 <a:solidFill>
                   <a:prstClr val="black"/>
                 </a:solidFill>
               </a:rPr>
-              <a:t>Q:  Assume a byte-addressable memory with a data bus that is 32 bits (4 bytes) wide. Consider 16 bytes of memory (addresses 0 to 15) arranged as four 32-bit words (4 bytes each). </a:t>
+              <a:t>Q:  Assume a byte-addressable memory with a data bus that is 32 bits (4 bytes) wide. </a:t>
             </a:r>
           </a:p>
           <a:p>
             <a:pPr marL="657225" lvl="1" indent="-257175" defTabSz="342900"/>
             <a:r>
-              <a:rPr lang="en-US" sz="1600" b="0" dirty="0">
+              <a:rPr lang="en-US" altLang="zh-CN" sz="2000" b="0" dirty="0">
                 <a:solidFill>
                   <a:prstClr val="black"/>
                 </a:solidFill>
               </a:rPr>
-              <a:t>(a) What is the address of MSB of the word at address 102, , assuming Little-Endian ordering?</a:t>
+              <a:t>It takes ____ memory cycle(s) to read a Byte from memory</a:t>
             </a:r>
           </a:p>
           <a:p>
             <a:pPr marL="657225" lvl="1" indent="-257175" defTabSz="342900"/>
             <a:r>
-              <a:rPr lang="en-US" sz="1600" b="0" dirty="0">
+              <a:rPr lang="en-US" altLang="zh-CN" sz="2000" b="0" dirty="0">
                 <a:solidFill>
                   <a:prstClr val="black"/>
                 </a:solidFill>
               </a:rPr>
-              <a:t>(b) What is the address of LSB of the word at address 102, , assuming Little-Endian ordering?</a:t>
+              <a:t>It takes ____ memory cycle(s) to read a half-word from memory</a:t>
             </a:r>
           </a:p>
           <a:p>
             <a:pPr marL="657225" lvl="1" indent="-257175" defTabSz="342900"/>
             <a:r>
-              <a:rPr lang="en-US" sz="1600" b="0" dirty="0">
+              <a:rPr lang="en-US" altLang="zh-CN" sz="2000" b="0" dirty="0">
                 <a:solidFill>
                   <a:prstClr val="black"/>
                 </a:solidFill>
               </a:rPr>
-              <a:t>(b) How many memory cycles are required to read the word at address 102?</a:t>
+              <a:t>It takes ____ memory cycle(s) to read a word from memory</a:t>
             </a:r>
           </a:p>
           <a:p>
             <a:pPr marL="657225" lvl="1" indent="-257175" defTabSz="342900"/>
             <a:r>
-              <a:rPr lang="en-US" sz="1600" b="0" dirty="0">
+              <a:rPr lang="en-US" altLang="zh-CN" sz="2000" b="0" dirty="0">
                 <a:solidFill>
                   <a:prstClr val="black"/>
                 </a:solidFill>
               </a:rPr>
-              <a:t>(c) How many memory cycles are required to read the half word at address 102?</a:t>
-            </a:r>
-            <a:endParaRPr lang="en-US" sz="1000" b="0" dirty="0">
+              <a:t>It takes ____ memory cycle(s) to read a double word from memory</a:t>
+            </a:r>
+            <a:endParaRPr lang="en-US" sz="2400" b="0" dirty="0">
               <a:solidFill>
                 <a:prstClr val="black"/>
               </a:solidFill>
@@ -22598,18 +21873,51 @@
         </p:blipFill>
         <p:spPr>
           <a:xfrm>
-            <a:off x="4345363" y="76200"/>
-            <a:ext cx="4779587" cy="1729193"/>
+            <a:off x="5029200" y="-6804"/>
+            <a:ext cx="4067187" cy="1560642"/>
           </a:xfrm>
           <a:prstGeom prst="rect">
             <a:avLst/>
           </a:prstGeom>
         </p:spPr>
       </p:pic>
+      <p:sp>
+        <p:nvSpPr>
+          <p:cNvPr id="9" name="Title 1">
+            <a:extLst>
+              <a:ext uri="{FF2B5EF4-FFF2-40B4-BE49-F238E27FC236}">
+                <a16:creationId xmlns:a16="http://schemas.microsoft.com/office/drawing/2014/main" id="{78DA596E-85CA-C0C6-85A8-74A98C3DFFDB}"/>
+              </a:ext>
+            </a:extLst>
+          </p:cNvPr>
+          <p:cNvSpPr>
+            <a:spLocks noGrp="1"/>
+          </p:cNvSpPr>
+          <p:nvPr>
+            <p:ph type="title"/>
+          </p:nvPr>
+        </p:nvSpPr>
+        <p:spPr>
+          <a:xfrm>
+            <a:off x="0" y="22225"/>
+            <a:ext cx="8229600" cy="1143000"/>
+          </a:xfrm>
+        </p:spPr>
+        <p:txBody>
+          <a:bodyPr/>
+          <a:lstStyle/>
+          <a:p>
+            <a:r>
+              <a:rPr lang="en-US" dirty="0"/>
+              <a:t>Memory Cycles</a:t>
+            </a:r>
+          </a:p>
+        </p:txBody>
+      </p:sp>
     </p:spTree>
     <p:extLst>
       <p:ext uri="{BB962C8B-B14F-4D97-AF65-F5344CB8AC3E}">
-        <p14:creationId xmlns:p14="http://schemas.microsoft.com/office/powerpoint/2010/main" val="1545068738"/>
+        <p14:creationId xmlns:p14="http://schemas.microsoft.com/office/powerpoint/2010/main" val="200176859"/>
       </p:ext>
     </p:extLst>
   </p:cSld>
@@ -22619,6 +21927,212 @@
   <p:transition>
     <p:pull dir="ru"/>
   </p:transition>
+  <p:timing>
+    <p:tnLst>
+      <p:par>
+        <p:cTn id="1" dur="indefinite" restart="never" nodeType="tmRoot">
+          <p:childTnLst>
+            <p:seq concurrent="1" nextAc="seek">
+              <p:cTn id="2" dur="indefinite" nodeType="mainSeq">
+                <p:childTnLst>
+                  <p:par>
+                    <p:cTn id="3" fill="hold">
+                      <p:stCondLst>
+                        <p:cond delay="indefinite"/>
+                      </p:stCondLst>
+                      <p:childTnLst>
+                        <p:par>
+                          <p:cTn id="4" fill="hold">
+                            <p:stCondLst>
+                              <p:cond delay="0"/>
+                            </p:stCondLst>
+                            <p:childTnLst>
+                              <p:par>
+                                <p:cTn id="5" presetID="1" presetClass="entr" presetSubtype="0" fill="hold" grpId="0" nodeType="clickEffect">
+                                  <p:stCondLst>
+                                    <p:cond delay="0"/>
+                                  </p:stCondLst>
+                                  <p:childTnLst>
+                                    <p:set>
+                                      <p:cBhvr>
+                                        <p:cTn id="6" dur="1" fill="hold">
+                                          <p:stCondLst>
+                                            <p:cond delay="0"/>
+                                          </p:stCondLst>
+                                        </p:cTn>
+                                        <p:tgtEl>
+                                          <p:spTgt spid="4">
+                                            <p:txEl>
+                                              <p:pRg st="0" end="0"/>
+                                            </p:txEl>
+                                          </p:spTgt>
+                                        </p:tgtEl>
+                                        <p:attrNameLst>
+                                          <p:attrName>style.visibility</p:attrName>
+                                        </p:attrNameLst>
+                                      </p:cBhvr>
+                                      <p:to>
+                                        <p:strVal val="visible"/>
+                                      </p:to>
+                                    </p:set>
+                                  </p:childTnLst>
+                                </p:cTn>
+                              </p:par>
+                              <p:par>
+                                <p:cTn id="7" presetID="1" presetClass="entr" presetSubtype="0" fill="hold" grpId="0" nodeType="withEffect">
+                                  <p:stCondLst>
+                                    <p:cond delay="0"/>
+                                  </p:stCondLst>
+                                  <p:childTnLst>
+                                    <p:set>
+                                      <p:cBhvr>
+                                        <p:cTn id="8" dur="1" fill="hold">
+                                          <p:stCondLst>
+                                            <p:cond delay="0"/>
+                                          </p:stCondLst>
+                                        </p:cTn>
+                                        <p:tgtEl>
+                                          <p:spTgt spid="4">
+                                            <p:txEl>
+                                              <p:pRg st="1" end="1"/>
+                                            </p:txEl>
+                                          </p:spTgt>
+                                        </p:tgtEl>
+                                        <p:attrNameLst>
+                                          <p:attrName>style.visibility</p:attrName>
+                                        </p:attrNameLst>
+                                      </p:cBhvr>
+                                      <p:to>
+                                        <p:strVal val="visible"/>
+                                      </p:to>
+                                    </p:set>
+                                  </p:childTnLst>
+                                </p:cTn>
+                              </p:par>
+                              <p:par>
+                                <p:cTn id="9" presetID="1" presetClass="entr" presetSubtype="0" fill="hold" grpId="0" nodeType="withEffect">
+                                  <p:stCondLst>
+                                    <p:cond delay="0"/>
+                                  </p:stCondLst>
+                                  <p:childTnLst>
+                                    <p:set>
+                                      <p:cBhvr>
+                                        <p:cTn id="10" dur="1" fill="hold">
+                                          <p:stCondLst>
+                                            <p:cond delay="0"/>
+                                          </p:stCondLst>
+                                        </p:cTn>
+                                        <p:tgtEl>
+                                          <p:spTgt spid="4">
+                                            <p:txEl>
+                                              <p:pRg st="2" end="2"/>
+                                            </p:txEl>
+                                          </p:spTgt>
+                                        </p:tgtEl>
+                                        <p:attrNameLst>
+                                          <p:attrName>style.visibility</p:attrName>
+                                        </p:attrNameLst>
+                                      </p:cBhvr>
+                                      <p:to>
+                                        <p:strVal val="visible"/>
+                                      </p:to>
+                                    </p:set>
+                                  </p:childTnLst>
+                                </p:cTn>
+                              </p:par>
+                              <p:par>
+                                <p:cTn id="11" presetID="1" presetClass="entr" presetSubtype="0" fill="hold" grpId="0" nodeType="withEffect">
+                                  <p:stCondLst>
+                                    <p:cond delay="0"/>
+                                  </p:stCondLst>
+                                  <p:childTnLst>
+                                    <p:set>
+                                      <p:cBhvr>
+                                        <p:cTn id="12" dur="1" fill="hold">
+                                          <p:stCondLst>
+                                            <p:cond delay="0"/>
+                                          </p:stCondLst>
+                                        </p:cTn>
+                                        <p:tgtEl>
+                                          <p:spTgt spid="4">
+                                            <p:txEl>
+                                              <p:pRg st="3" end="3"/>
+                                            </p:txEl>
+                                          </p:spTgt>
+                                        </p:tgtEl>
+                                        <p:attrNameLst>
+                                          <p:attrName>style.visibility</p:attrName>
+                                        </p:attrNameLst>
+                                      </p:cBhvr>
+                                      <p:to>
+                                        <p:strVal val="visible"/>
+                                      </p:to>
+                                    </p:set>
+                                  </p:childTnLst>
+                                </p:cTn>
+                              </p:par>
+                              <p:par>
+                                <p:cTn id="13" presetID="1" presetClass="entr" presetSubtype="0" fill="hold" grpId="0" nodeType="withEffect">
+                                  <p:stCondLst>
+                                    <p:cond delay="0"/>
+                                  </p:stCondLst>
+                                  <p:childTnLst>
+                                    <p:set>
+                                      <p:cBhvr>
+                                        <p:cTn id="14" dur="1" fill="hold">
+                                          <p:stCondLst>
+                                            <p:cond delay="0"/>
+                                          </p:stCondLst>
+                                        </p:cTn>
+                                        <p:tgtEl>
+                                          <p:spTgt spid="4">
+                                            <p:txEl>
+                                              <p:pRg st="4" end="4"/>
+                                            </p:txEl>
+                                          </p:spTgt>
+                                        </p:tgtEl>
+                                        <p:attrNameLst>
+                                          <p:attrName>style.visibility</p:attrName>
+                                        </p:attrNameLst>
+                                      </p:cBhvr>
+                                      <p:to>
+                                        <p:strVal val="visible"/>
+                                      </p:to>
+                                    </p:set>
+                                  </p:childTnLst>
+                                </p:cTn>
+                              </p:par>
+                            </p:childTnLst>
+                          </p:cTn>
+                        </p:par>
+                      </p:childTnLst>
+                    </p:cTn>
+                  </p:par>
+                </p:childTnLst>
+              </p:cTn>
+              <p:prevCondLst>
+                <p:cond evt="onPrev" delay="0">
+                  <p:tgtEl>
+                    <p:sldTgt/>
+                  </p:tgtEl>
+                </p:cond>
+              </p:prevCondLst>
+              <p:nextCondLst>
+                <p:cond evt="onNext" delay="0">
+                  <p:tgtEl>
+                    <p:sldTgt/>
+                  </p:tgtEl>
+                </p:cond>
+              </p:nextCondLst>
+            </p:seq>
+          </p:childTnLst>
+        </p:cTn>
+      </p:par>
+    </p:tnLst>
+    <p:bldLst>
+      <p:bldP spid="4" grpId="0" build="p"/>
+    </p:bldLst>
+  </p:timing>
 </p:sld>
 </file>
 
